--- a/site/showcase/exports/presentation.pptx
+++ b/site/showcase/exports/presentation.pptx
@@ -26,7 +26,6 @@
     <p:sldId id="274" r:id="rId26"/>
     <p:sldId id="275" r:id="rId27"/>
     <p:sldId id="276" r:id="rId28"/>
-    <p:sldId id="277" r:id="rId29"/>
   </p:sldIdLst>
   <p:sldSz cx="9144000" cy="6858000" type="screen4x3"/>
   <p:notesSz cx="6858000" cy="9144000"/>
@@ -638,12 +637,12 @@
           </a:p>
           <a:p>
             <a:r>
-              <a:t>Provider summary | Worst of 4 frames (slide 5): synthetic likelihood 28/100; tells: sharp vector-style typography, clean standard digital design elements, absence of generative diffusion artifacts, structured geometric layout</a:t>
-            </a:r>
-          </a:p>
-          <a:p>
-            <a:r>
-              <a:t>Evidence 1 | Frame slide 1: 25/100</a:t>
+              <a:t>Provider summary | Worst of 4 frames (slide 1): synthetic likelihood 28/100; tells: clean vector geometry, standard digital typography, consistent presentation graphic layout, absence of generative diffusion artifacts</a:t>
+            </a:r>
+          </a:p>
+          <a:p>
+            <a:r>
+              <a:t>Evidence 1 | Frame slide 1: 28/100</a:t>
             </a:r>
           </a:p>
           <a:p>
@@ -658,32 +657,32 @@
           </a:p>
           <a:p>
             <a:r>
-              <a:t>Evidence 4 | Frame slide 14: 25/100</a:t>
-            </a:r>
-          </a:p>
-          <a:p>
-            <a:r>
-              <a:t>Evidence 5 | Sharp vector-style typography</a:t>
-            </a:r>
-          </a:p>
-          <a:p>
-            <a:r>
-              <a:t>Evidence 6 | Clean standard digital design elements</a:t>
-            </a:r>
-          </a:p>
-          <a:p>
-            <a:r>
-              <a:t>Evidence 7 | Absence of generative diffusion artifacts</a:t>
-            </a:r>
-          </a:p>
-          <a:p>
-            <a:r>
-              <a:t>Evidence 8 | Structured geometric layout</a:t>
-            </a:r>
-          </a:p>
-          <a:p>
-            <a:r>
-              <a:t>Evidence 9 | Caveat: Standard presentation slide graphics can be synthesized or edited via modern automated design tools.</a:t>
+              <a:t>Evidence 4 | Frame slide 14: 28/100</a:t>
+            </a:r>
+          </a:p>
+          <a:p>
+            <a:r>
+              <a:t>Evidence 5 | Clean vector geometry</a:t>
+            </a:r>
+          </a:p>
+          <a:p>
+            <a:r>
+              <a:t>Evidence 6 | Standard digital typography</a:t>
+            </a:r>
+          </a:p>
+          <a:p>
+            <a:r>
+              <a:t>Evidence 7 | Consistent presentation graphic layout</a:t>
+            </a:r>
+          </a:p>
+          <a:p>
+            <a:r>
+              <a:t>Evidence 8 | Absence of generative diffusion artifacts</a:t>
+            </a:r>
+          </a:p>
+          <a:p>
+            <a:r>
+              <a:t>Evidence 9 | Caveat: Digital vector graphics and layout elements can mimic procedural generation tools.</a:t>
             </a:r>
           </a:p>
         </p:txBody>
@@ -1323,7 +1322,7 @@
           </a:p>
           <a:p>
             <a:r>
-              <a:t>slide 1 | inconclusive | 25</a:t>
+              <a:t>slide 1 | inconclusive | 28</a:t>
             </a:r>
           </a:p>
           <a:p>
@@ -1333,12 +1332,12 @@
           </a:p>
           <a:p>
             <a:r>
-              <a:t>slide 10 | authentic likely | 25</a:t>
-            </a:r>
-          </a:p>
-          <a:p>
-            <a:r>
-              <a:t>slide 14 | inconclusive | 25</a:t>
+              <a:t>slide 10 | inconclusive | 25</a:t>
+            </a:r>
+          </a:p>
+          <a:p>
+            <a:r>
+              <a:t>slide 14 | inconclusive | 28</a:t>
             </a:r>
           </a:p>
         </p:txBody>
@@ -1498,17 +1497,17 @@
           </a:p>
           <a:p>
             <a:r>
-              <a:t>Claude Vision | Worst of 4 frames (slide 1): synthetic likelihood 58/100; tells: network diagram geometry is approximately but not mathematically regular: uneven node spacing and edge endpoints that do not always terminate cleanly on nodes, some edges appear semi-transparent or softly blurred in an inconsistent way, unlike typical crisp vector rendering, teal-to-orange colour transition across nodes is painterly rather than rule-based, faint background polygon mesh with irregular, fading line segments</a:t>
-            </a:r>
-          </a:p>
-          <a:p>
-            <a:r>
-              <a:t>OpenAI Vision | Worst of 4 frames (slide 1): synthetic likelihood 15/100; tells: Presentation-slide layout rather than a camera photograph, Legible typography with consistent letterforms and alignment, Network illustration uses clean straight edges and regularly placed circular nodes, No obvious generative distortions; conventional vector graphics could explain the design</a:t>
-            </a:r>
-          </a:p>
-          <a:p>
-            <a:r>
-              <a:t>Gemini Vision | Worst of 4 frames (slide 5): synthetic likelihood 28/100; tells: sharp vector-style typography, clean standard digital design elements, absence of generative diffusion artifacts, structured geometric layout</a:t>
+              <a:t>Claude Vision | Worst of 4 frames (slide 1): synthetic likelihood 60/100; tells: network diagram is decorative and roughly symmetric rather than a data-driven force-directed layout, inconsistent node sizes and some edges ending without clear nodes, semi-transparent, softly blurred overlapping edge layers with painterly anti-aliasing, smooth teal-to-orange color gradient across the graph unrelated to any legend</a:t>
+            </a:r>
+          </a:p>
+          <a:p>
+            <a:r>
+              <a:t>OpenAI Vision | Worst of 4 frames (slide 5): synthetic likelihood 20/100; tells: Consistently legible text with coherent letterforms and regular spacing, Four circular nodes with uniform glow effects and thin connecting lines, Aligned text blocks and repeated geometric network decorations typical of presentation graphics, No photographic subjects or camera texture available for assessment</a:t>
+            </a:r>
+          </a:p>
+          <a:p>
+            <a:r>
+              <a:t>Gemini Vision | Worst of 4 frames (slide 1): synthetic likelihood 28/100; tells: clean vector geometry, standard digital typography, consistent presentation graphic layout, absence of generative diffusion artifacts</a:t>
             </a:r>
           </a:p>
           <a:p>
@@ -1593,32 +1592,12 @@
           </a:p>
           <a:p>
             <a:r>
-              <a:t>Additional findings</a:t>
-            </a:r>
-          </a:p>
-          <a:p>
-            <a:r>
-              <a:t>Claude Vision | Worst of 4 frames (slide 1): synthetic likelihood 58/100; tells: network diagram geometry is approximately but not mathematically regular: uneven node spacing and edge endpoints that do not always terminate cleanly on nodes, some edges appear semi-transparent or softly blurred in an inconsistent way, unlike typical crisp vector rendering, teal-to-orange colour transition across nodes is painterly rather than rule-based, faint background polygon mesh with irregular, fading line segments</a:t>
-            </a:r>
-          </a:p>
-          <a:p>
-            <a:r>
-              <a:t>OpenAI Vision | Worst of 4 frames (slide 1): synthetic likelihood 15/100; tells: Presentation-slide layout rather than a camera photograph, Legible typography with consistent letterforms and alignment, Network illustration uses clean straight edges and regularly placed circular nodes, No obvious generative distortions; conventional vector graphics could explain the design</a:t>
-            </a:r>
-          </a:p>
-          <a:p>
-            <a:r>
-              <a:t>Gemini Vision | Worst of 4 frames (slide 5): synthetic likelihood 28/100; tells: sharp vector-style typography, clean standard digital design elements, absence of generative diffusion artifacts, structured geometric layout</a:t>
-            </a:r>
-          </a:p>
-          <a:p>
-            <a:r>
-              <a:t>Local forensic cues | Supporting observation; considered alongside the model assessments.</a:t>
-            </a:r>
-          </a:p>
-          <a:p>
-            <a:r>
-              <a:t>C2PA Content Credentials | Embedded credentials: none found. Origin remains unresolved by this check.</a:t>
+              <a:t>Extracted text</a:t>
+            </a:r>
+          </a:p>
+          <a:p>
+            <a:r>
+              <a:t>Recorded text | Catalyst 2: The Conspiracy Ecosystem | 1 The Threat Hoax: Minimising the virus itself. “It’s just the flu,” preferring natural immunity over interventions. | #Plandemic | #Scamdemic | 2 The Control Mechanism: Belief that mandates test public compliance, equating health rules to authoritarian mouth-gags. | #COVID1984 | #MaskTyranny | 3 The Micro-Constituent Fear: Targeting vaccines specifically: fears of mRNA DNA-alteration, microchips, infertility, and Bill Gates narratives. | Once a citizen accepted the ‘Control Mechanism’ premise for masks, transitioning to the ‘Micro-Constituent Fear’ for vaccines required almost no psychological leap.</a:t>
             </a:r>
           </a:p>
         </p:txBody>
@@ -1693,12 +1672,17 @@
           </a:p>
           <a:p>
             <a:r>
-              <a:t>Extracted text</a:t>
-            </a:r>
-          </a:p>
-          <a:p>
-            <a:r>
-              <a:t>Recorded text | Catalyst 2: The Conspiracy Ecosystem | 1 | #Plandemic | The Threat Hoax | Minimising the virus itself. “It’s just the flu,” preferring natural immunity over interventions. | #Scamdemic | 2 | #COVID1984 | The Control Mechanism | Belief that mandates test public compliance, equating health rules to authoritarian mouth-gags. | #MaskTyranny | 3 | The Micro-Constituent Fear | Targeting vaccines specifically: fears of mRNA DNA-alteration, microchips, infertility, and Bill Gates narratives. | Once a citizen accepted the ‘Control Mechanism’ premise for masks, transitioning to the ‘Micro-Constituent Fear’ for vaccines required almost no psychological leap.</a:t>
+              <a:t>How this assessment was reached</a:t>
+            </a:r>
+          </a:p>
+          <a:p>
+            <a:r>
+              <a:t>1. frame_agreement | frames=4; synthetic_frames=0; authentic_frames=0; rating_spread=3</a:t>
+            </a:r>
+          </a:p>
+          <a:p>
+            <a:r>
+              <a:t>2. verdict | value=inconclusive; confidence=low; reason=The sampled frames leave the assessment inconclusive. Review the frame results and source context.</a:t>
             </a:r>
           </a:p>
         </p:txBody>
@@ -1793,7 +1777,7 @@
           </a:p>
           <a:p>
             <a:r>
-              <a:t>Indicative rating | 26/100</a:t>
+              <a:t>Indicative rating | 27/100</a:t>
             </a:r>
           </a:p>
           <a:p>
@@ -1888,17 +1872,62 @@
           </a:p>
           <a:p>
             <a:r>
-              <a:t>How this assessment was reached</a:t>
-            </a:r>
-          </a:p>
-          <a:p>
-            <a:r>
-              <a:t>1. frame_agreement | frames=4; synthetic_frames=0; authentic_frames=1; rating_spread=3</a:t>
-            </a:r>
-          </a:p>
-          <a:p>
-            <a:r>
-              <a:t>2. verdict | value=inconclusive; confidence=low; reason=The sampled frames leave the assessment inconclusive. Review the frame results and source context.</a:t>
+              <a:t>File and analysis record</a:t>
+            </a:r>
+          </a:p>
+          <a:p>
+            <a:r>
+              <a:t>File | presentation.pptx</a:t>
+            </a:r>
+          </a:p>
+          <a:p>
+            <a:r>
+              <a:t>Analysis ID | 250bad8f-c5c8-49fb-8c8c-10a2b68368b0</a:t>
+            </a:r>
+          </a:p>
+          <a:p>
+            <a:r>
+              <a:t>Generated | 2026-09-26T22:31:28+00:00</a:t>
+            </a:r>
+          </a:p>
+          <a:p>
+            <a:r>
+              <a:t>Tool | SDA Vision 0.1.0</a:t>
+            </a:r>
+          </a:p>
+          <a:p>
+            <a:r>
+              <a:t>Models | claude-opus-5-5, gemini-3.8-flash, gpt-6-astra</a:t>
+            </a:r>
+          </a:p>
+          <a:p>
+            <a:r>
+              <a:t>Method version | pdf-preparation-2026-09-26.1</a:t>
+            </a:r>
+          </a:p>
+          <a:p>
+            <a:r>
+              <a:t>Analysis lens | general</a:t>
+            </a:r>
+          </a:p>
+          <a:p>
+            <a:r>
+              <a:t>Original SHA-256 | d0ec89da564078611922195fca82364f2f8e63d253d02a6d9bb672a8265c5f15</a:t>
+            </a:r>
+          </a:p>
+          <a:p>
+            <a:r>
+              <a:t>Ingestion note 1 | 14 slides; sampled 4 of 14 embedded slide image(s).</a:t>
+            </a:r>
+          </a:p>
+          <a:p>
+            <a:r>
+              <a:t>Ingestion note 2 | Fresh provider replies acquired for eleven-examples-refresh-20260926-r1; report assembled locally from the saved responses without further API calls.</a:t>
+            </a:r>
+          </a:p>
+          <a:p>
+            <a:r>
+              <a:t>Ingestion note 3 | Provider latency values are restored from the acquisition receipts (maximum sampled-frame latency per provider); raw replies and assessment results are unchanged by this bookkeeping step.</a:t>
             </a:r>
           </a:p>
         </p:txBody>
@@ -1983,12 +2012,12 @@
           </a:p>
           <a:p>
             <a:r>
-              <a:t>Analysis ID | 07b8225b-30ca-47ee-8808-13e21f17ca4b</a:t>
-            </a:r>
-          </a:p>
-          <a:p>
-            <a:r>
-              <a:t>Generated | 2026-09-26T17:54:46+00:00</a:t>
+              <a:t>Analysis ID | 250bad8f-c5c8-49fb-8c8c-10a2b68368b0</a:t>
+            </a:r>
+          </a:p>
+          <a:p>
+            <a:r>
+              <a:t>Generated | 2026-09-26T22:31:28+00:00</a:t>
             </a:r>
           </a:p>
           <a:p>
@@ -2003,7 +2032,7 @@
           </a:p>
           <a:p>
             <a:r>
-              <a:t>Method version | verdict-consistency-2026-09-26.1</a:t>
+              <a:t>Method version | pdf-preparation-2026-09-26.1</a:t>
             </a:r>
           </a:p>
           <a:p>
@@ -2023,152 +2052,12 @@
           </a:p>
           <a:p>
             <a:r>
-              <a:t>Ingestion note 2 | Recomputed locally from the same saved provider replies acquired under run five-examples-20260926-r1. No new provider requests. Original report f08956d6-23e1-4043-972d-6af6e3cd2603 was generated at 2026-09-26T17:38:39+00:00 under method publication-repair-2026-09-24.3; that report is preserved.</a:t>
-            </a:r>
-          </a:p>
-          <a:p>
-            <a:r>
-              <a:t>Ingestion note 3 | Method verdict-consistency-2026-09-26.1: directional model votes require matching explicit verdicts and rating thresholds. Inconclusive replies retain their ratings and remain undecided observations.</a:t>
-            </a:r>
-          </a:p>
-          <a:p>
-            <a:r>
-              <a:t>Ingestion note 4 | Presentation copy of saved report d5854304-5dab-4b76-945b-d844e5fe7c44. The descriptive filename replaces the earlier example ID for navigation. Original analysis dates, provider replies, scores and acquisition context are retained; no new model analysis.</a:t>
-            </a:r>
-          </a:p>
-        </p:txBody>
-      </p:sp>
-      <p:sp>
-        <p:nvSpPr>
-          <p:cNvPr id="4" name="Slide Number Placeholder 3"/>
-          <p:cNvSpPr>
-            <a:spLocks noGrp="1"/>
-          </p:cNvSpPr>
-          <p:nvPr>
-            <p:ph type="sldNum" idx="5" sz="quarter"/>
-          </p:nvPr>
-        </p:nvSpPr>
-        <p:spPr/>
-      </p:sp>
-    </p:spTree>
-  </p:cSld>
-  <p:clrMapOvr>
-    <a:masterClrMapping/>
-  </p:clrMapOvr>
-</p:notes>
-</file>
-
-<file path=ppt/notesSlides/notesSlide22.xml><?xml version="1.0" encoding="utf-8"?>
-<p:notes xmlns:a="http://schemas.openxmlformats.org/drawingml/2006/main" xmlns:p="http://schemas.openxmlformats.org/presentationml/2006/main" xmlns:r="http://schemas.openxmlformats.org/officeDocument/2006/relationships">
-  <p:cSld>
-    <p:spTree>
-      <p:nvGrpSpPr>
-        <p:cNvPr id="1" name=""/>
-        <p:cNvGrpSpPr/>
-        <p:nvPr/>
-      </p:nvGrpSpPr>
-      <p:grpSpPr>
-        <a:xfrm>
-          <a:off x="0" y="0"/>
-          <a:ext cx="0" cy="0"/>
-          <a:chOff x="0" y="0"/>
-          <a:chExt cx="0" cy="0"/>
-        </a:xfrm>
-      </p:grpSpPr>
-      <p:sp>
-        <p:nvSpPr>
-          <p:cNvPr id="2" name="Slide Image Placeholder 1"/>
-          <p:cNvSpPr>
-            <a:spLocks noGrp="1"/>
-          </p:cNvSpPr>
-          <p:nvPr>
-            <p:ph type="sldImg" idx="2"/>
-          </p:nvPr>
-        </p:nvSpPr>
-        <p:spPr/>
-      </p:sp>
-      <p:sp>
-        <p:nvSpPr>
-          <p:cNvPr id="3" name="Notes Placeholder 2"/>
-          <p:cNvSpPr>
-            <a:spLocks noGrp="1"/>
-          </p:cNvSpPr>
-          <p:nvPr>
-            <p:ph type="body" idx="3" sz="quarter"/>
-          </p:nvPr>
-        </p:nvSpPr>
-        <p:spPr/>
-        <p:txBody>
-          <a:bodyPr/>
-          <a:lstStyle/>
-          <a:p>
-            <a:r>
-              <a:t>presentation.pptx</a:t>
-            </a:r>
-          </a:p>
-          <a:p>
-            <a:r>
-              <a:t>File and analysis record</a:t>
-            </a:r>
-          </a:p>
-          <a:p>
-            <a:r>
-              <a:t>File | presentation.pptx</a:t>
-            </a:r>
-          </a:p>
-          <a:p>
-            <a:r>
-              <a:t>Analysis ID | 07b8225b-30ca-47ee-8808-13e21f17ca4b</a:t>
-            </a:r>
-          </a:p>
-          <a:p>
-            <a:r>
-              <a:t>Generated | 2026-09-26T17:54:46+00:00</a:t>
-            </a:r>
-          </a:p>
-          <a:p>
-            <a:r>
-              <a:t>Tool | SDA Vision 0.1.0</a:t>
-            </a:r>
-          </a:p>
-          <a:p>
-            <a:r>
-              <a:t>Models | claude-opus-5-5, gemini-3.8-flash, gpt-6-astra</a:t>
-            </a:r>
-          </a:p>
-          <a:p>
-            <a:r>
-              <a:t>Method version | verdict-consistency-2026-09-26.1</a:t>
-            </a:r>
-          </a:p>
-          <a:p>
-            <a:r>
-              <a:t>Analysis lens | general</a:t>
-            </a:r>
-          </a:p>
-          <a:p>
-            <a:r>
-              <a:t>Original SHA-256 | d0ec89da564078611922195fca82364f2f8e63d253d02a6d9bb672a8265c5f15</a:t>
-            </a:r>
-          </a:p>
-          <a:p>
-            <a:r>
-              <a:t>Ingestion note 1 | 14 slides; sampled 4 of 14 embedded slide image(s).</a:t>
-            </a:r>
-          </a:p>
-          <a:p>
-            <a:r>
-              <a:t>Ingestion note 2 | Recomputed locally from the same saved provider replies acquired under run five-examples-20260926-r1. No new provider requests. Original report f08956d6-23e1-4043-972d-6af6e3cd2603 was generated at 2026-09-26T17:38:39+00:00 under method publication-repair-2026-09-24.3; that report is preserved.</a:t>
-            </a:r>
-          </a:p>
-          <a:p>
-            <a:r>
-              <a:t>Ingestion note 3 | Method verdict-consistency-2026-09-26.1: directional model votes require matching explicit verdicts and rating thresholds. Inconclusive replies retain their ratings and remain undecided observations.</a:t>
-            </a:r>
-          </a:p>
-          <a:p>
-            <a:r>
-              <a:t>Ingestion note 4 | Presentation copy of saved report d5854304-5dab-4b76-945b-d844e5fe7c44. The descriptive filename replaces the earlier example ID for navigation. Original analysis dates, provider replies, scores and acquisition context are retained; no new model analysis.</a:t>
+              <a:t>Ingestion note 2 | Fresh provider replies acquired for eleven-examples-refresh-20260926-r1; report assembled locally from the saved responses without further API calls.</a:t>
+            </a:r>
+          </a:p>
+          <a:p>
+            <a:r>
+              <a:t>Ingestion note 3 | Provider latency values are restored from the acquisition receipts (maximum sampled-frame latency per provider); raw replies and assessment results are unchanged by this bookkeeping step.</a:t>
             </a:r>
           </a:p>
         </p:txBody>
@@ -2248,12 +2137,12 @@
           </a:p>
           <a:p>
             <a:r>
-              <a:t>Claude Vision | vision / ok | inconclusive | 58/100</a:t>
-            </a:r>
-          </a:p>
-          <a:p>
-            <a:r>
-              <a:t>OpenAI Vision | vision / ok | inconclusive | 15/100</a:t>
+              <a:t>Claude Vision | vision / ok | synthetic likely | 60/100</a:t>
+            </a:r>
+          </a:p>
+          <a:p>
+            <a:r>
+              <a:t>OpenAI Vision | vision / ok | inconclusive | 20/100</a:t>
             </a:r>
           </a:p>
           <a:p>
@@ -2363,7 +2252,7 @@
           </a:p>
           <a:p>
             <a:r>
-              <a:t>Assessment | inconclusive</a:t>
+              <a:t>Assessment | synthetic likely</a:t>
             </a:r>
           </a:p>
           <a:p>
@@ -2378,67 +2267,67 @@
           </a:p>
           <a:p>
             <a:r>
-              <a:t>Provider summary | Worst of 4 frames (slide 1): synthetic likelihood 58/100; tells: network diagram geometry is approximately but not mathematically regular: uneven node spacing and edge endpoints that do not always terminate cleanly on nodes, some edges appear semi-transparent or softly blurred in an inconsistent way, unlike typical crisp vector rendering, teal-to-orange colour transition across nodes is painterly rather than rule-based, faint background polygon mesh with irregular, fading line segments</a:t>
-            </a:r>
-          </a:p>
-          <a:p>
-            <a:r>
-              <a:t>Evidence 1 | Frame slide 1: 58/100</a:t>
-            </a:r>
-          </a:p>
-          <a:p>
-            <a:r>
-              <a:t>Evidence 2 | Frame slide 5: 58/100</a:t>
-            </a:r>
-          </a:p>
-          <a:p>
-            <a:r>
-              <a:t>Evidence 3 | Frame slide 10: 55/100</a:t>
-            </a:r>
-          </a:p>
-          <a:p>
-            <a:r>
-              <a:t>Evidence 4 | Frame slide 14: 55/100</a:t>
-            </a:r>
-          </a:p>
-          <a:p>
-            <a:r>
-              <a:t>Evidence 5 | Network diagram geometry is approximately but not mathematically regular: uneven node spacing and edge endpoints that do not always terminate cleanly on nodes</a:t>
-            </a:r>
-          </a:p>
-          <a:p>
-            <a:r>
-              <a:t>Evidence 6 | Some edges appear semi-transparent or softly blurred in an inconsistent way, unlike typical crisp vector rendering</a:t>
-            </a:r>
-          </a:p>
-          <a:p>
-            <a:r>
-              <a:t>Evidence 7 | Teal-to-orange colour transition across nodes is painterly rather than rule-based</a:t>
-            </a:r>
-          </a:p>
-          <a:p>
-            <a:r>
-              <a:t>Evidence 8 | Faint background polygon mesh with irregular, fading line segments</a:t>
-            </a:r>
-          </a:p>
-          <a:p>
-            <a:r>
-              <a:t>Evidence 9 | Typography is clean, correctly spelled and consistently kerned, which fits either conventional slide software or a modern text-capable image generator</a:t>
-            </a:r>
-          </a:p>
-          <a:p>
-            <a:r>
-              <a:t>Evidence 10 | No camera signals (no sensor noise, lens blur or perspective) because this is a flat digital graphic, so photographic forensics do not apply</a:t>
-            </a:r>
-          </a:p>
-          <a:p>
-            <a:r>
-              <a:t>Evidence 11 | Filename indicates a PowerPoint slide export, a plausible conventional design origin</a:t>
-            </a:r>
-          </a:p>
-          <a:p>
-            <a:r>
-              <a:t>Evidence 12 | Caveat: This is a flat designed graphic, so camera-based forensic cues are absent. The irregular network rendering suggests an AI image generator but could also come from design or graph-visualisation software. Checking the source .pptx file, its metadata and the authoring tool history would be more decisive than visual inspection.</a:t>
+              <a:t>Provider summary | Worst of 4 frames (slide 1): synthetic likelihood 60/100; tells: network diagram is decorative and roughly symmetric rather than a data-driven force-directed layout, inconsistent node sizes and some edges ending without clear nodes, semi-transparent, softly blurred overlapping edge layers with painterly anti-aliasing, smooth teal-to-orange color gradient across the graph unrelated to any legend</a:t>
+            </a:r>
+          </a:p>
+          <a:p>
+            <a:r>
+              <a:t>Evidence 1 | Frame slide 1: 60/100</a:t>
+            </a:r>
+          </a:p>
+          <a:p>
+            <a:r>
+              <a:t>Evidence 2 | Frame slide 5: 55/100</a:t>
+            </a:r>
+          </a:p>
+          <a:p>
+            <a:r>
+              <a:t>Evidence 3 | Frame slide 10: 58/100</a:t>
+            </a:r>
+          </a:p>
+          <a:p>
+            <a:r>
+              <a:t>Evidence 4 | Frame slide 14: 40/100</a:t>
+            </a:r>
+          </a:p>
+          <a:p>
+            <a:r>
+              <a:t>Evidence 5 | Network diagram is decorative and roughly symmetric rather than a data-driven force-directed layout</a:t>
+            </a:r>
+          </a:p>
+          <a:p>
+            <a:r>
+              <a:t>Evidence 6 | Inconsistent node sizes and some edges ending without clear nodes</a:t>
+            </a:r>
+          </a:p>
+          <a:p>
+            <a:r>
+              <a:t>Evidence 7 | Semi-transparent, softly blurred overlapping edge layers with painterly anti-aliasing</a:t>
+            </a:r>
+          </a:p>
+          <a:p>
+            <a:r>
+              <a:t>Evidence 8 | Smooth teal-to-orange color gradient across the graph unrelated to any legend</a:t>
+            </a:r>
+          </a:p>
+          <a:p>
+            <a:r>
+              <a:t>Evidence 9 | Faint low-poly mesh background typical of generated slide art</a:t>
+            </a:r>
+          </a:p>
+          <a:p>
+            <a:r>
+              <a:t>Evidence 10 | Text is crisply and correctly rendered, consistent with either a design tool or a modern text-capable generator</a:t>
+            </a:r>
+          </a:p>
+          <a:p>
+            <a:r>
+              <a:t>Evidence 11 | No camera-origin signals (vector-style graphic, no sensor noise or lens characteristics)</a:t>
+            </a:r>
+          </a:p>
+          <a:p>
+            <a:r>
+              <a:t>Evidence 12 | Caveat: This is a graphic, not a photo, so camera-authenticity cues do not apply. The slide could equally come from ordinary slide or data-visualization software (the filename suggests a PowerPoint export). Checking the source file, the author and the claimed study would resolve its origin better than visual inspection.</a:t>
             </a:r>
           </a:p>
         </p:txBody>
@@ -2533,7 +2422,7 @@
           </a:p>
           <a:p>
             <a:r>
-              <a:t>Assessment | inconclusive</a:t>
+              <a:t>Assessment | synthetic likely</a:t>
             </a:r>
           </a:p>
           <a:p>
@@ -2548,67 +2437,67 @@
           </a:p>
           <a:p>
             <a:r>
-              <a:t>Provider summary | Worst of 4 frames (slide 1): synthetic likelihood 58/100; tells: network diagram geometry is approximately but not mathematically regular: uneven node spacing and edge endpoints that do not always terminate cleanly on nodes, some edges appear semi-transparent or softly blurred in an inconsistent way, unlike typical crisp vector rendering, teal-to-orange colour transition across nodes is painterly rather than rule-based, faint background polygon mesh with irregular, fading line segments</a:t>
-            </a:r>
-          </a:p>
-          <a:p>
-            <a:r>
-              <a:t>Evidence 1 | Frame slide 1: 58/100</a:t>
-            </a:r>
-          </a:p>
-          <a:p>
-            <a:r>
-              <a:t>Evidence 2 | Frame slide 5: 58/100</a:t>
-            </a:r>
-          </a:p>
-          <a:p>
-            <a:r>
-              <a:t>Evidence 3 | Frame slide 10: 55/100</a:t>
-            </a:r>
-          </a:p>
-          <a:p>
-            <a:r>
-              <a:t>Evidence 4 | Frame slide 14: 55/100</a:t>
-            </a:r>
-          </a:p>
-          <a:p>
-            <a:r>
-              <a:t>Evidence 5 | Network diagram geometry is approximately but not mathematically regular: uneven node spacing and edge endpoints that do not always terminate cleanly on nodes</a:t>
-            </a:r>
-          </a:p>
-          <a:p>
-            <a:r>
-              <a:t>Evidence 6 | Some edges appear semi-transparent or softly blurred in an inconsistent way, unlike typical crisp vector rendering</a:t>
-            </a:r>
-          </a:p>
-          <a:p>
-            <a:r>
-              <a:t>Evidence 7 | Teal-to-orange colour transition across nodes is painterly rather than rule-based</a:t>
-            </a:r>
-          </a:p>
-          <a:p>
-            <a:r>
-              <a:t>Evidence 8 | Faint background polygon mesh with irregular, fading line segments</a:t>
-            </a:r>
-          </a:p>
-          <a:p>
-            <a:r>
-              <a:t>Evidence 9 | Typography is clean, correctly spelled and consistently kerned, which fits either conventional slide software or a modern text-capable image generator</a:t>
-            </a:r>
-          </a:p>
-          <a:p>
-            <a:r>
-              <a:t>Evidence 10 | No camera signals (no sensor noise, lens blur or perspective) because this is a flat digital graphic, so photographic forensics do not apply</a:t>
-            </a:r>
-          </a:p>
-          <a:p>
-            <a:r>
-              <a:t>Evidence 11 | Filename indicates a PowerPoint slide export, a plausible conventional design origin</a:t>
-            </a:r>
-          </a:p>
-          <a:p>
-            <a:r>
-              <a:t>Evidence 12 | Caveat: This is a flat designed graphic, so camera-based forensic cues are absent. The irregular network rendering suggests an AI image generator but could also come from design or graph-visualisation software. Checking the source .pptx file, its metadata and the authoring tool history would be more decisive than visual inspection.</a:t>
+              <a:t>Provider summary | Worst of 4 frames (slide 1): synthetic likelihood 60/100; tells: network diagram is decorative and roughly symmetric rather than a data-driven force-directed layout, inconsistent node sizes and some edges ending without clear nodes, semi-transparent, softly blurred overlapping edge layers with painterly anti-aliasing, smooth teal-to-orange color gradient across the graph unrelated to any legend</a:t>
+            </a:r>
+          </a:p>
+          <a:p>
+            <a:r>
+              <a:t>Evidence 1 | Frame slide 1: 60/100</a:t>
+            </a:r>
+          </a:p>
+          <a:p>
+            <a:r>
+              <a:t>Evidence 2 | Frame slide 5: 55/100</a:t>
+            </a:r>
+          </a:p>
+          <a:p>
+            <a:r>
+              <a:t>Evidence 3 | Frame slide 10: 58/100</a:t>
+            </a:r>
+          </a:p>
+          <a:p>
+            <a:r>
+              <a:t>Evidence 4 | Frame slide 14: 40/100</a:t>
+            </a:r>
+          </a:p>
+          <a:p>
+            <a:r>
+              <a:t>Evidence 5 | Network diagram is decorative and roughly symmetric rather than a data-driven force-directed layout</a:t>
+            </a:r>
+          </a:p>
+          <a:p>
+            <a:r>
+              <a:t>Evidence 6 | Inconsistent node sizes and some edges ending without clear nodes</a:t>
+            </a:r>
+          </a:p>
+          <a:p>
+            <a:r>
+              <a:t>Evidence 7 | Semi-transparent, softly blurred overlapping edge layers with painterly anti-aliasing</a:t>
+            </a:r>
+          </a:p>
+          <a:p>
+            <a:r>
+              <a:t>Evidence 8 | Smooth teal-to-orange color gradient across the graph unrelated to any legend</a:t>
+            </a:r>
+          </a:p>
+          <a:p>
+            <a:r>
+              <a:t>Evidence 9 | Faint low-poly mesh background typical of generated slide art</a:t>
+            </a:r>
+          </a:p>
+          <a:p>
+            <a:r>
+              <a:t>Evidence 10 | Text is crisply and correctly rendered, consistent with either a design tool or a modern text-capable generator</a:t>
+            </a:r>
+          </a:p>
+          <a:p>
+            <a:r>
+              <a:t>Evidence 11 | No camera-origin signals (vector-style graphic, no sensor noise or lens characteristics)</a:t>
+            </a:r>
+          </a:p>
+          <a:p>
+            <a:r>
+              <a:t>Evidence 12 | Caveat: This is a graphic, not a photo, so camera-authenticity cues do not apply. The slide could equally come from ordinary slide or data-visualization software (the filename suggests a PowerPoint export). Checking the source file, the author and the claimed study would resolve its origin better than visual inspection.</a:t>
             </a:r>
           </a:p>
         </p:txBody>
@@ -2703,7 +2592,7 @@
           </a:p>
           <a:p>
             <a:r>
-              <a:t>Assessment | inconclusive</a:t>
+              <a:t>Assessment | synthetic likely</a:t>
             </a:r>
           </a:p>
           <a:p>
@@ -2718,67 +2607,67 @@
           </a:p>
           <a:p>
             <a:r>
-              <a:t>Provider summary | Worst of 4 frames (slide 1): synthetic likelihood 58/100; tells: network diagram geometry is approximately but not mathematically regular: uneven node spacing and edge endpoints that do not always terminate cleanly on nodes, some edges appear semi-transparent or softly blurred in an inconsistent way, unlike typical crisp vector rendering, teal-to-orange colour transition across nodes is painterly rather than rule-based, faint background polygon mesh with irregular, fading line segments</a:t>
-            </a:r>
-          </a:p>
-          <a:p>
-            <a:r>
-              <a:t>Evidence 1 | Frame slide 1: 58/100</a:t>
-            </a:r>
-          </a:p>
-          <a:p>
-            <a:r>
-              <a:t>Evidence 2 | Frame slide 5: 58/100</a:t>
-            </a:r>
-          </a:p>
-          <a:p>
-            <a:r>
-              <a:t>Evidence 3 | Frame slide 10: 55/100</a:t>
-            </a:r>
-          </a:p>
-          <a:p>
-            <a:r>
-              <a:t>Evidence 4 | Frame slide 14: 55/100</a:t>
-            </a:r>
-          </a:p>
-          <a:p>
-            <a:r>
-              <a:t>Evidence 5 | Network diagram geometry is approximately but not mathematically regular: uneven node spacing and edge endpoints that do not always terminate cleanly on nodes</a:t>
-            </a:r>
-          </a:p>
-          <a:p>
-            <a:r>
-              <a:t>Evidence 6 | Some edges appear semi-transparent or softly blurred in an inconsistent way, unlike typical crisp vector rendering</a:t>
-            </a:r>
-          </a:p>
-          <a:p>
-            <a:r>
-              <a:t>Evidence 7 | Teal-to-orange colour transition across nodes is painterly rather than rule-based</a:t>
-            </a:r>
-          </a:p>
-          <a:p>
-            <a:r>
-              <a:t>Evidence 8 | Faint background polygon mesh with irregular, fading line segments</a:t>
-            </a:r>
-          </a:p>
-          <a:p>
-            <a:r>
-              <a:t>Evidence 9 | Typography is clean, correctly spelled and consistently kerned, which fits either conventional slide software or a modern text-capable image generator</a:t>
-            </a:r>
-          </a:p>
-          <a:p>
-            <a:r>
-              <a:t>Evidence 10 | No camera signals (no sensor noise, lens blur or perspective) because this is a flat digital graphic, so photographic forensics do not apply</a:t>
-            </a:r>
-          </a:p>
-          <a:p>
-            <a:r>
-              <a:t>Evidence 11 | Filename indicates a PowerPoint slide export, a plausible conventional design origin</a:t>
-            </a:r>
-          </a:p>
-          <a:p>
-            <a:r>
-              <a:t>Evidence 12 | Caveat: This is a flat designed graphic, so camera-based forensic cues are absent. The irregular network rendering suggests an AI image generator but could also come from design or graph-visualisation software. Checking the source .pptx file, its metadata and the authoring tool history would be more decisive than visual inspection.</a:t>
+              <a:t>Provider summary | Worst of 4 frames (slide 1): synthetic likelihood 60/100; tells: network diagram is decorative and roughly symmetric rather than a data-driven force-directed layout, inconsistent node sizes and some edges ending without clear nodes, semi-transparent, softly blurred overlapping edge layers with painterly anti-aliasing, smooth teal-to-orange color gradient across the graph unrelated to any legend</a:t>
+            </a:r>
+          </a:p>
+          <a:p>
+            <a:r>
+              <a:t>Evidence 1 | Frame slide 1: 60/100</a:t>
+            </a:r>
+          </a:p>
+          <a:p>
+            <a:r>
+              <a:t>Evidence 2 | Frame slide 5: 55/100</a:t>
+            </a:r>
+          </a:p>
+          <a:p>
+            <a:r>
+              <a:t>Evidence 3 | Frame slide 10: 58/100</a:t>
+            </a:r>
+          </a:p>
+          <a:p>
+            <a:r>
+              <a:t>Evidence 4 | Frame slide 14: 40/100</a:t>
+            </a:r>
+          </a:p>
+          <a:p>
+            <a:r>
+              <a:t>Evidence 5 | Network diagram is decorative and roughly symmetric rather than a data-driven force-directed layout</a:t>
+            </a:r>
+          </a:p>
+          <a:p>
+            <a:r>
+              <a:t>Evidence 6 | Inconsistent node sizes and some edges ending without clear nodes</a:t>
+            </a:r>
+          </a:p>
+          <a:p>
+            <a:r>
+              <a:t>Evidence 7 | Semi-transparent, softly blurred overlapping edge layers with painterly anti-aliasing</a:t>
+            </a:r>
+          </a:p>
+          <a:p>
+            <a:r>
+              <a:t>Evidence 8 | Smooth teal-to-orange color gradient across the graph unrelated to any legend</a:t>
+            </a:r>
+          </a:p>
+          <a:p>
+            <a:r>
+              <a:t>Evidence 9 | Faint low-poly mesh background typical of generated slide art</a:t>
+            </a:r>
+          </a:p>
+          <a:p>
+            <a:r>
+              <a:t>Evidence 10 | Text is crisply and correctly rendered, consistent with either a design tool or a modern text-capable generator</a:t>
+            </a:r>
+          </a:p>
+          <a:p>
+            <a:r>
+              <a:t>Evidence 11 | No camera-origin signals (vector-style graphic, no sensor noise or lens characteristics)</a:t>
+            </a:r>
+          </a:p>
+          <a:p>
+            <a:r>
+              <a:t>Evidence 12 | Caveat: This is a graphic, not a photo, so camera-authenticity cues do not apply. The slide could equally come from ordinary slide or data-visualization software (the filename suggests a PowerPoint export). Checking the source file, the author and the claimed study would resolve its origin better than visual inspection.</a:t>
             </a:r>
           </a:p>
         </p:txBody>
@@ -2878,7 +2767,7 @@
           </a:p>
           <a:p>
             <a:r>
-              <a:t>Confidence | medium</a:t>
+              <a:t>Confidence | low</a:t>
             </a:r>
           </a:p>
           <a:p>
@@ -2888,7 +2777,7 @@
           </a:p>
           <a:p>
             <a:r>
-              <a:t>Provider summary | Worst of 4 frames (slide 1): synthetic likelihood 15/100; tells: Presentation-slide layout rather than a camera photograph, Legible typography with consistent letterforms and alignment, Network illustration uses clean straight edges and regularly placed circular nodes, No obvious generative distortions; conventional vector graphics could explain the design</a:t>
+              <a:t>Provider summary | Worst of 4 frames (slide 5): synthetic likelihood 20/100; tells: Consistently legible text with coherent letterforms and regular spacing, Four circular nodes with uniform glow effects and thin connecting lines, Aligned text blocks and repeated geometric network decorations typical of presentation graphics, No photographic subjects or camera texture available for assessment</a:t>
             </a:r>
           </a:p>
           <a:p>
@@ -2898,42 +2787,42 @@
           </a:p>
           <a:p>
             <a:r>
-              <a:t>Evidence 2 | Frame slide 5: 15/100</a:t>
-            </a:r>
-          </a:p>
-          <a:p>
-            <a:r>
-              <a:t>Evidence 3 | Frame slide 10: 12/100</a:t>
-            </a:r>
-          </a:p>
-          <a:p>
-            <a:r>
-              <a:t>Evidence 4 | Frame slide 14: 10/100</a:t>
-            </a:r>
-          </a:p>
-          <a:p>
-            <a:r>
-              <a:t>Evidence 5 | Presentation-slide layout rather than a camera photograph</a:t>
-            </a:r>
-          </a:p>
-          <a:p>
-            <a:r>
-              <a:t>Evidence 6 | Legible typography with consistent letterforms and alignment</a:t>
-            </a:r>
-          </a:p>
-          <a:p>
-            <a:r>
-              <a:t>Evidence 7 | Network illustration uses clean straight edges and regularly placed circular nodes</a:t>
-            </a:r>
-          </a:p>
-          <a:p>
-            <a:r>
-              <a:t>Evidence 8 | No obvious generative distortions; conventional vector graphics could explain the design</a:t>
-            </a:r>
-          </a:p>
-          <a:p>
-            <a:r>
-              <a:t>Evidence 9 | Caveat: A digitally designed slide is not itself evidence of AI generation; source files or provenance records are needed to distinguish conventional design from AI assistance.</a:t>
+              <a:t>Evidence 2 | Frame slide 5: 20/100</a:t>
+            </a:r>
+          </a:p>
+          <a:p>
+            <a:r>
+              <a:t>Evidence 3 | Frame slide 10: 15/100</a:t>
+            </a:r>
+          </a:p>
+          <a:p>
+            <a:r>
+              <a:t>Evidence 4 | Frame slide 14: 15/100</a:t>
+            </a:r>
+          </a:p>
+          <a:p>
+            <a:r>
+              <a:t>Evidence 5 | Consistently legible text with coherent letterforms and regular spacing</a:t>
+            </a:r>
+          </a:p>
+          <a:p>
+            <a:r>
+              <a:t>Evidence 6 | Four circular nodes with uniform glow effects and thin connecting lines</a:t>
+            </a:r>
+          </a:p>
+          <a:p>
+            <a:r>
+              <a:t>Evidence 7 | Aligned text blocks and repeated geometric network decorations typical of presentation graphics</a:t>
+            </a:r>
+          </a:p>
+          <a:p>
+            <a:r>
+              <a:t>Evidence 8 | No photographic subjects or camera texture available for assessment</a:t>
+            </a:r>
+          </a:p>
+          <a:p>
+            <a:r>
+              <a:t>Evidence 9 | Caveat: This is a presentation graphic, not a camera photo; appearance alone cannot distinguish conventional slide design from AI-assisted production.</a:t>
             </a:r>
           </a:p>
         </p:txBody>
@@ -3033,7 +2922,7 @@
           </a:p>
           <a:p>
             <a:r>
-              <a:t>Confidence | medium</a:t>
+              <a:t>Confidence | low</a:t>
             </a:r>
           </a:p>
           <a:p>
@@ -3043,7 +2932,7 @@
           </a:p>
           <a:p>
             <a:r>
-              <a:t>Provider summary | Worst of 4 frames (slide 1): synthetic likelihood 15/100; tells: Presentation-slide layout rather than a camera photograph, Legible typography with consistent letterforms and alignment, Network illustration uses clean straight edges and regularly placed circular nodes, No obvious generative distortions; conventional vector graphics could explain the design</a:t>
+              <a:t>Provider summary | Worst of 4 frames (slide 5): synthetic likelihood 20/100; tells: Consistently legible text with coherent letterforms and regular spacing, Four circular nodes with uniform glow effects and thin connecting lines, Aligned text blocks and repeated geometric network decorations typical of presentation graphics, No photographic subjects or camera texture available for assessment</a:t>
             </a:r>
           </a:p>
           <a:p>
@@ -3053,42 +2942,42 @@
           </a:p>
           <a:p>
             <a:r>
-              <a:t>Evidence 2 | Frame slide 5: 15/100</a:t>
-            </a:r>
-          </a:p>
-          <a:p>
-            <a:r>
-              <a:t>Evidence 3 | Frame slide 10: 12/100</a:t>
-            </a:r>
-          </a:p>
-          <a:p>
-            <a:r>
-              <a:t>Evidence 4 | Frame slide 14: 10/100</a:t>
-            </a:r>
-          </a:p>
-          <a:p>
-            <a:r>
-              <a:t>Evidence 5 | Presentation-slide layout rather than a camera photograph</a:t>
-            </a:r>
-          </a:p>
-          <a:p>
-            <a:r>
-              <a:t>Evidence 6 | Legible typography with consistent letterforms and alignment</a:t>
-            </a:r>
-          </a:p>
-          <a:p>
-            <a:r>
-              <a:t>Evidence 7 | Network illustration uses clean straight edges and regularly placed circular nodes</a:t>
-            </a:r>
-          </a:p>
-          <a:p>
-            <a:r>
-              <a:t>Evidence 8 | No obvious generative distortions; conventional vector graphics could explain the design</a:t>
-            </a:r>
-          </a:p>
-          <a:p>
-            <a:r>
-              <a:t>Evidence 9 | Caveat: A digitally designed slide is not itself evidence of AI generation; source files or provenance records are needed to distinguish conventional design from AI assistance.</a:t>
+              <a:t>Evidence 2 | Frame slide 5: 20/100</a:t>
+            </a:r>
+          </a:p>
+          <a:p>
+            <a:r>
+              <a:t>Evidence 3 | Frame slide 10: 15/100</a:t>
+            </a:r>
+          </a:p>
+          <a:p>
+            <a:r>
+              <a:t>Evidence 4 | Frame slide 14: 15/100</a:t>
+            </a:r>
+          </a:p>
+          <a:p>
+            <a:r>
+              <a:t>Evidence 5 | Consistently legible text with coherent letterforms and regular spacing</a:t>
+            </a:r>
+          </a:p>
+          <a:p>
+            <a:r>
+              <a:t>Evidence 6 | Four circular nodes with uniform glow effects and thin connecting lines</a:t>
+            </a:r>
+          </a:p>
+          <a:p>
+            <a:r>
+              <a:t>Evidence 7 | Aligned text blocks and repeated geometric network decorations typical of presentation graphics</a:t>
+            </a:r>
+          </a:p>
+          <a:p>
+            <a:r>
+              <a:t>Evidence 8 | No photographic subjects or camera texture available for assessment</a:t>
+            </a:r>
+          </a:p>
+          <a:p>
+            <a:r>
+              <a:t>Evidence 9 | Caveat: This is a presentation graphic, not a camera photo; appearance alone cannot distinguish conventional slide design from AI-assisted production.</a:t>
             </a:r>
           </a:p>
         </p:txBody>
@@ -3198,12 +3087,12 @@
           </a:p>
           <a:p>
             <a:r>
-              <a:t>Provider summary | Worst of 4 frames (slide 5): synthetic likelihood 28/100; tells: sharp vector-style typography, clean standard digital design elements, absence of generative diffusion artifacts, structured geometric layout</a:t>
-            </a:r>
-          </a:p>
-          <a:p>
-            <a:r>
-              <a:t>Evidence 1 | Frame slide 1: 25/100</a:t>
+              <a:t>Provider summary | Worst of 4 frames (slide 1): synthetic likelihood 28/100; tells: clean vector geometry, standard digital typography, consistent presentation graphic layout, absence of generative diffusion artifacts</a:t>
+            </a:r>
+          </a:p>
+          <a:p>
+            <a:r>
+              <a:t>Evidence 1 | Frame slide 1: 28/100</a:t>
             </a:r>
           </a:p>
           <a:p>
@@ -3218,32 +3107,32 @@
           </a:p>
           <a:p>
             <a:r>
-              <a:t>Evidence 4 | Frame slide 14: 25/100</a:t>
-            </a:r>
-          </a:p>
-          <a:p>
-            <a:r>
-              <a:t>Evidence 5 | Sharp vector-style typography</a:t>
-            </a:r>
-          </a:p>
-          <a:p>
-            <a:r>
-              <a:t>Evidence 6 | Clean standard digital design elements</a:t>
-            </a:r>
-          </a:p>
-          <a:p>
-            <a:r>
-              <a:t>Evidence 7 | Absence of generative diffusion artifacts</a:t>
-            </a:r>
-          </a:p>
-          <a:p>
-            <a:r>
-              <a:t>Evidence 8 | Structured geometric layout</a:t>
-            </a:r>
-          </a:p>
-          <a:p>
-            <a:r>
-              <a:t>Evidence 9 | Caveat: Standard presentation slide graphics can be synthesized or edited via modern automated design tools.</a:t>
+              <a:t>Evidence 4 | Frame slide 14: 28/100</a:t>
+            </a:r>
+          </a:p>
+          <a:p>
+            <a:r>
+              <a:t>Evidence 5 | Clean vector geometry</a:t>
+            </a:r>
+          </a:p>
+          <a:p>
+            <a:r>
+              <a:t>Evidence 6 | Standard digital typography</a:t>
+            </a:r>
+          </a:p>
+          <a:p>
+            <a:r>
+              <a:t>Evidence 7 | Consistent presentation graphic layout</a:t>
+            </a:r>
+          </a:p>
+          <a:p>
+            <a:r>
+              <a:t>Evidence 8 | Absence of generative diffusion artifacts</a:t>
+            </a:r>
+          </a:p>
+          <a:p>
+            <a:r>
+              <a:t>Evidence 9 | Caveat: Digital vector graphics and layout elements can mimic procedural generation tools.</a:t>
             </a:r>
           </a:p>
         </p:txBody>
@@ -6830,7 +6719,7 @@
                         </a:defRPr>
                       </a:pPr>
                       <a:r>
-                        <a:t>Frame slide 14: 25/100</a:t>
+                        <a:t>Frame slide 14: 28/100</a:t>
                       </a:r>
                     </a:p>
                   </a:txBody>
@@ -6918,7 +6807,7 @@
                         </a:defRPr>
                       </a:pPr>
                       <a:r>
-                        <a:t>Sharp vector-style typography</a:t>
+                        <a:t>Clean vector geometry</a:t>
                       </a:r>
                     </a:p>
                   </a:txBody>
@@ -7006,7 +6895,7 @@
                         </a:defRPr>
                       </a:pPr>
                       <a:r>
-                        <a:t>Clean standard digital design elements</a:t>
+                        <a:t>Standard digital typography</a:t>
                       </a:r>
                     </a:p>
                   </a:txBody>
@@ -7094,7 +6983,7 @@
                         </a:defRPr>
                       </a:pPr>
                       <a:r>
-                        <a:t>Absence of generative diffusion artifacts</a:t>
+                        <a:t>Consistent presentation graphic layout</a:t>
                       </a:r>
                     </a:p>
                   </a:txBody>
@@ -7182,7 +7071,7 @@
                         </a:defRPr>
                       </a:pPr>
                       <a:r>
-                        <a:t>Structured geometric layout</a:t>
+                        <a:t>Absence of generative diffusion artifacts</a:t>
                       </a:r>
                     </a:p>
                   </a:txBody>
@@ -7270,26 +7159,26 @@
                         </a:defRPr>
                       </a:pPr>
                       <a:r>
-                        <a:t>Caveat: Standard presentation slide graphics can be synthesized or edited via</a:t>
-                      </a:r>
-                    </a:p>
-                    <a:p>
-                      <a:pPr>
-                        <a:lnSpc>
-                          <a:spcPts val="1600"/>
-                        </a:lnSpc>
-                        <a:spcAft>
-                          <a:spcPts val="0"/>
-                        </a:spcAft>
-                        <a:defRPr sz="1200" b="0">
-                          <a:solidFill>
-                            <a:srgbClr val="21243A"/>
-                          </a:solidFill>
-                          <a:latin typeface="Arial"/>
-                        </a:defRPr>
-                      </a:pPr>
-                      <a:r>
-                        <a:t>modern automated design tools.</a:t>
+                        <a:t>Caveat: Digital vector graphics and layout elements can mimic procedural</a:t>
+                      </a:r>
+                    </a:p>
+                    <a:p>
+                      <a:pPr>
+                        <a:lnSpc>
+                          <a:spcPts val="1600"/>
+                        </a:lnSpc>
+                        <a:spcAft>
+                          <a:spcPts val="0"/>
+                        </a:spcAft>
+                        <a:defRPr sz="1200" b="0">
+                          <a:solidFill>
+                            <a:srgbClr val="21243A"/>
+                          </a:solidFill>
+                          <a:latin typeface="Arial"/>
+                        </a:defRPr>
+                      </a:pPr>
+                      <a:r>
+                        <a:t>generation tools.</a:t>
                       </a:r>
                     </a:p>
                   </a:txBody>
@@ -11192,7 +11081,7 @@
                         </a:defRPr>
                       </a:pPr>
                       <a:r>
-                        <a:t>25</a:t>
+                        <a:t>28</a:t>
                       </a:r>
                     </a:p>
                   </a:txBody>
@@ -11400,7 +11289,7 @@
                         </a:defRPr>
                       </a:pPr>
                       <a:r>
-                        <a:t>authentic likely</a:t>
+                        <a:t>inconclusive</a:t>
                       </a:r>
                     </a:p>
                   </a:txBody>
@@ -11549,7 +11438,7 @@
                         </a:defRPr>
                       </a:pPr>
                       <a:r>
-                        <a:t>25</a:t>
+                        <a:t>28</a:t>
                       </a:r>
                     </a:p>
                   </a:txBody>
@@ -12210,7 +12099,7 @@
         </p:nvGraphicFramePr>
         <p:xfrm>
           <a:off x="365760" y="1700784"/>
-          <a:ext cx="8412479" cy="1568704"/>
+          <a:ext cx="8412479" cy="1365503"/>
         </p:xfrm>
         <a:graphic>
           <a:graphicData uri="http://schemas.openxmlformats.org/drawingml/2006/table">
@@ -12222,7 +12111,7 @@
                 <a:gridCol w="2271369"/>
                 <a:gridCol w="6141110"/>
               </a:tblGrid>
-              <a:tr h="1568704">
+              <a:tr h="1365503">
                 <a:tc>
                   <a:txBody>
                     <a:bodyPr wrap="none"/>
@@ -12273,121 +12162,102 @@
                         </a:defRPr>
                       </a:pPr>
                       <a:r>
-                        <a:t>Worst of 4 frames (slide 1): synthetic likelihood 58/100; tells: network diagram</a:t>
-                      </a:r>
-                    </a:p>
-                    <a:p>
-                      <a:pPr>
-                        <a:lnSpc>
-                          <a:spcPts val="1600"/>
-                        </a:lnSpc>
-                        <a:spcAft>
-                          <a:spcPts val="0"/>
-                        </a:spcAft>
-                        <a:defRPr sz="1200" b="0">
-                          <a:solidFill>
-                            <a:srgbClr val="21243A"/>
-                          </a:solidFill>
-                          <a:latin typeface="Arial"/>
-                        </a:defRPr>
-                      </a:pPr>
-                      <a:r>
-                        <a:t>geometry is approximately but not mathematically regular: uneven node spacing</a:t>
-                      </a:r>
-                    </a:p>
-                    <a:p>
-                      <a:pPr>
-                        <a:lnSpc>
-                          <a:spcPts val="1600"/>
-                        </a:lnSpc>
-                        <a:spcAft>
-                          <a:spcPts val="0"/>
-                        </a:spcAft>
-                        <a:defRPr sz="1200" b="0">
-                          <a:solidFill>
-                            <a:srgbClr val="21243A"/>
-                          </a:solidFill>
-                          <a:latin typeface="Arial"/>
-                        </a:defRPr>
-                      </a:pPr>
-                      <a:r>
-                        <a:t>and edge endpoints that do not always terminate cleanly on nodes, some edges</a:t>
-                      </a:r>
-                    </a:p>
-                    <a:p>
-                      <a:pPr>
-                        <a:lnSpc>
-                          <a:spcPts val="1600"/>
-                        </a:lnSpc>
-                        <a:spcAft>
-                          <a:spcPts val="0"/>
-                        </a:spcAft>
-                        <a:defRPr sz="1200" b="0">
-                          <a:solidFill>
-                            <a:srgbClr val="21243A"/>
-                          </a:solidFill>
-                          <a:latin typeface="Arial"/>
-                        </a:defRPr>
-                      </a:pPr>
-                      <a:r>
-                        <a:t>appear semi-transparent or softly blurred in an inconsistent way, unlike typical</a:t>
-                      </a:r>
-                    </a:p>
-                    <a:p>
-                      <a:pPr>
-                        <a:lnSpc>
-                          <a:spcPts val="1600"/>
-                        </a:lnSpc>
-                        <a:spcAft>
-                          <a:spcPts val="0"/>
-                        </a:spcAft>
-                        <a:defRPr sz="1200" b="0">
-                          <a:solidFill>
-                            <a:srgbClr val="21243A"/>
-                          </a:solidFill>
-                          <a:latin typeface="Arial"/>
-                        </a:defRPr>
-                      </a:pPr>
-                      <a:r>
-                        <a:t>crisp vector rendering, teal-to-orange colour transition across nodes is painterly</a:t>
-                      </a:r>
-                    </a:p>
-                    <a:p>
-                      <a:pPr>
-                        <a:lnSpc>
-                          <a:spcPts val="1600"/>
-                        </a:lnSpc>
-                        <a:spcAft>
-                          <a:spcPts val="0"/>
-                        </a:spcAft>
-                        <a:defRPr sz="1200" b="0">
-                          <a:solidFill>
-                            <a:srgbClr val="21243A"/>
-                          </a:solidFill>
-                          <a:latin typeface="Arial"/>
-                        </a:defRPr>
-                      </a:pPr>
-                      <a:r>
-                        <a:t>rather than rule-based, faint background polygon mesh with irregular, fading line</a:t>
-                      </a:r>
-                    </a:p>
-                    <a:p>
-                      <a:pPr>
-                        <a:lnSpc>
-                          <a:spcPts val="1600"/>
-                        </a:lnSpc>
-                        <a:spcAft>
-                          <a:spcPts val="0"/>
-                        </a:spcAft>
-                        <a:defRPr sz="1200" b="0">
-                          <a:solidFill>
-                            <a:srgbClr val="21243A"/>
-                          </a:solidFill>
-                          <a:latin typeface="Arial"/>
-                        </a:defRPr>
-                      </a:pPr>
-                      <a:r>
-                        <a:t>segments</a:t>
+                        <a:t>Worst of 4 frames (slide 1): synthetic likelihood 60/100; tells: network diagram is</a:t>
+                      </a:r>
+                    </a:p>
+                    <a:p>
+                      <a:pPr>
+                        <a:lnSpc>
+                          <a:spcPts val="1600"/>
+                        </a:lnSpc>
+                        <a:spcAft>
+                          <a:spcPts val="0"/>
+                        </a:spcAft>
+                        <a:defRPr sz="1200" b="0">
+                          <a:solidFill>
+                            <a:srgbClr val="21243A"/>
+                          </a:solidFill>
+                          <a:latin typeface="Arial"/>
+                        </a:defRPr>
+                      </a:pPr>
+                      <a:r>
+                        <a:t>decorative and roughly symmetric rather than a data-driven force-directed layout,</a:t>
+                      </a:r>
+                    </a:p>
+                    <a:p>
+                      <a:pPr>
+                        <a:lnSpc>
+                          <a:spcPts val="1600"/>
+                        </a:lnSpc>
+                        <a:spcAft>
+                          <a:spcPts val="0"/>
+                        </a:spcAft>
+                        <a:defRPr sz="1200" b="0">
+                          <a:solidFill>
+                            <a:srgbClr val="21243A"/>
+                          </a:solidFill>
+                          <a:latin typeface="Arial"/>
+                        </a:defRPr>
+                      </a:pPr>
+                      <a:r>
+                        <a:t>inconsistent node sizes and some edges ending without clear nodes,</a:t>
+                      </a:r>
+                    </a:p>
+                    <a:p>
+                      <a:pPr>
+                        <a:lnSpc>
+                          <a:spcPts val="1600"/>
+                        </a:lnSpc>
+                        <a:spcAft>
+                          <a:spcPts val="0"/>
+                        </a:spcAft>
+                        <a:defRPr sz="1200" b="0">
+                          <a:solidFill>
+                            <a:srgbClr val="21243A"/>
+                          </a:solidFill>
+                          <a:latin typeface="Arial"/>
+                        </a:defRPr>
+                      </a:pPr>
+                      <a:r>
+                        <a:t>semi-transparent, softly blurred overlapping edge layers with painterly</a:t>
+                      </a:r>
+                    </a:p>
+                    <a:p>
+                      <a:pPr>
+                        <a:lnSpc>
+                          <a:spcPts val="1600"/>
+                        </a:lnSpc>
+                        <a:spcAft>
+                          <a:spcPts val="0"/>
+                        </a:spcAft>
+                        <a:defRPr sz="1200" b="0">
+                          <a:solidFill>
+                            <a:srgbClr val="21243A"/>
+                          </a:solidFill>
+                          <a:latin typeface="Arial"/>
+                        </a:defRPr>
+                      </a:pPr>
+                      <a:r>
+                        <a:t>anti-aliasing, smooth teal-to-orange color gradient across the graph unrelated to</a:t>
+                      </a:r>
+                    </a:p>
+                    <a:p>
+                      <a:pPr>
+                        <a:lnSpc>
+                          <a:spcPts val="1600"/>
+                        </a:lnSpc>
+                        <a:spcAft>
+                          <a:spcPts val="0"/>
+                        </a:spcAft>
+                        <a:defRPr sz="1200" b="0">
+                          <a:solidFill>
+                            <a:srgbClr val="21243A"/>
+                          </a:solidFill>
+                          <a:latin typeface="Arial"/>
+                        </a:defRPr>
+                      </a:pPr>
+                      <a:r>
+                        <a:t>any legend</a:t>
                       </a:r>
                     </a:p>
                   </a:txBody>
@@ -12411,7 +12281,7 @@
           <p:nvPr/>
         </p:nvGraphicFramePr>
         <p:xfrm>
-          <a:off x="365760" y="3269488"/>
+          <a:off x="365760" y="3066288"/>
           <a:ext cx="8412479" cy="1162304"/>
         </p:xfrm>
         <a:graphic>
@@ -12475,83 +12345,83 @@
                         </a:defRPr>
                       </a:pPr>
                       <a:r>
-                        <a:t>Worst of 4 frames (slide 1): synthetic likelihood 15/100; tells: Presentation-slide</a:t>
-                      </a:r>
-                    </a:p>
-                    <a:p>
-                      <a:pPr>
-                        <a:lnSpc>
-                          <a:spcPts val="1600"/>
-                        </a:lnSpc>
-                        <a:spcAft>
-                          <a:spcPts val="0"/>
-                        </a:spcAft>
-                        <a:defRPr sz="1200" b="0">
-                          <a:solidFill>
-                            <a:srgbClr val="21243A"/>
-                          </a:solidFill>
-                          <a:latin typeface="Arial"/>
-                        </a:defRPr>
-                      </a:pPr>
-                      <a:r>
-                        <a:t>layout rather than a camera photograph, Legible typography with consistent</a:t>
-                      </a:r>
-                    </a:p>
-                    <a:p>
-                      <a:pPr>
-                        <a:lnSpc>
-                          <a:spcPts val="1600"/>
-                        </a:lnSpc>
-                        <a:spcAft>
-                          <a:spcPts val="0"/>
-                        </a:spcAft>
-                        <a:defRPr sz="1200" b="0">
-                          <a:solidFill>
-                            <a:srgbClr val="21243A"/>
-                          </a:solidFill>
-                          <a:latin typeface="Arial"/>
-                        </a:defRPr>
-                      </a:pPr>
-                      <a:r>
-                        <a:t>letterforms and alignment, Network illustration uses clean straight edges and</a:t>
-                      </a:r>
-                    </a:p>
-                    <a:p>
-                      <a:pPr>
-                        <a:lnSpc>
-                          <a:spcPts val="1600"/>
-                        </a:lnSpc>
-                        <a:spcAft>
-                          <a:spcPts val="0"/>
-                        </a:spcAft>
-                        <a:defRPr sz="1200" b="0">
-                          <a:solidFill>
-                            <a:srgbClr val="21243A"/>
-                          </a:solidFill>
-                          <a:latin typeface="Arial"/>
-                        </a:defRPr>
-                      </a:pPr>
-                      <a:r>
-                        <a:t>regularly placed circular nodes, No obvious generative distortions; conventional</a:t>
-                      </a:r>
-                    </a:p>
-                    <a:p>
-                      <a:pPr>
-                        <a:lnSpc>
-                          <a:spcPts val="1600"/>
-                        </a:lnSpc>
-                        <a:spcAft>
-                          <a:spcPts val="0"/>
-                        </a:spcAft>
-                        <a:defRPr sz="1200" b="0">
-                          <a:solidFill>
-                            <a:srgbClr val="21243A"/>
-                          </a:solidFill>
-                          <a:latin typeface="Arial"/>
-                        </a:defRPr>
-                      </a:pPr>
-                      <a:r>
-                        <a:t>vector graphics could explain the design</a:t>
+                        <a:t>Worst of 4 frames (slide 5): synthetic likelihood 20/100; tells: Consistently legible</a:t>
+                      </a:r>
+                    </a:p>
+                    <a:p>
+                      <a:pPr>
+                        <a:lnSpc>
+                          <a:spcPts val="1600"/>
+                        </a:lnSpc>
+                        <a:spcAft>
+                          <a:spcPts val="0"/>
+                        </a:spcAft>
+                        <a:defRPr sz="1200" b="0">
+                          <a:solidFill>
+                            <a:srgbClr val="21243A"/>
+                          </a:solidFill>
+                          <a:latin typeface="Arial"/>
+                        </a:defRPr>
+                      </a:pPr>
+                      <a:r>
+                        <a:t>text with coherent letterforms and regular spacing, Four circular nodes with</a:t>
+                      </a:r>
+                    </a:p>
+                    <a:p>
+                      <a:pPr>
+                        <a:lnSpc>
+                          <a:spcPts val="1600"/>
+                        </a:lnSpc>
+                        <a:spcAft>
+                          <a:spcPts val="0"/>
+                        </a:spcAft>
+                        <a:defRPr sz="1200" b="0">
+                          <a:solidFill>
+                            <a:srgbClr val="21243A"/>
+                          </a:solidFill>
+                          <a:latin typeface="Arial"/>
+                        </a:defRPr>
+                      </a:pPr>
+                      <a:r>
+                        <a:t>uniform glow effects and thin connecting lines, Aligned text blocks and repeated</a:t>
+                      </a:r>
+                    </a:p>
+                    <a:p>
+                      <a:pPr>
+                        <a:lnSpc>
+                          <a:spcPts val="1600"/>
+                        </a:lnSpc>
+                        <a:spcAft>
+                          <a:spcPts val="0"/>
+                        </a:spcAft>
+                        <a:defRPr sz="1200" b="0">
+                          <a:solidFill>
+                            <a:srgbClr val="21243A"/>
+                          </a:solidFill>
+                          <a:latin typeface="Arial"/>
+                        </a:defRPr>
+                      </a:pPr>
+                      <a:r>
+                        <a:t>geometric network decorations typical of presentation graphics, No photographic</a:t>
+                      </a:r>
+                    </a:p>
+                    <a:p>
+                      <a:pPr>
+                        <a:lnSpc>
+                          <a:spcPts val="1600"/>
+                        </a:lnSpc>
+                        <a:spcAft>
+                          <a:spcPts val="0"/>
+                        </a:spcAft>
+                        <a:defRPr sz="1200" b="0">
+                          <a:solidFill>
+                            <a:srgbClr val="21243A"/>
+                          </a:solidFill>
+                          <a:latin typeface="Arial"/>
+                        </a:defRPr>
+                      </a:pPr>
+                      <a:r>
+                        <a:t>subjects or camera texture available for assessment</a:t>
                       </a:r>
                     </a:p>
                   </a:txBody>
@@ -12575,7 +12445,7 @@
           <p:nvPr/>
         </p:nvGraphicFramePr>
         <p:xfrm>
-          <a:off x="365760" y="4431792"/>
+          <a:off x="365760" y="4228592"/>
           <a:ext cx="8412479" cy="755904"/>
         </p:xfrm>
         <a:graphic>
@@ -12639,45 +12509,45 @@
                         </a:defRPr>
                       </a:pPr>
                       <a:r>
-                        <a:t>Worst of 4 frames (slide 5): synthetic likelihood 28/100; tells: sharp vector-style</a:t>
-                      </a:r>
-                    </a:p>
-                    <a:p>
-                      <a:pPr>
-                        <a:lnSpc>
-                          <a:spcPts val="1600"/>
-                        </a:lnSpc>
-                        <a:spcAft>
-                          <a:spcPts val="0"/>
-                        </a:spcAft>
-                        <a:defRPr sz="1200" b="0">
-                          <a:solidFill>
-                            <a:srgbClr val="21243A"/>
-                          </a:solidFill>
-                          <a:latin typeface="Arial"/>
-                        </a:defRPr>
-                      </a:pPr>
-                      <a:r>
-                        <a:t>typography, clean standard digital design elements, absence of generative</a:t>
-                      </a:r>
-                    </a:p>
-                    <a:p>
-                      <a:pPr>
-                        <a:lnSpc>
-                          <a:spcPts val="1600"/>
-                        </a:lnSpc>
-                        <a:spcAft>
-                          <a:spcPts val="0"/>
-                        </a:spcAft>
-                        <a:defRPr sz="1200" b="0">
-                          <a:solidFill>
-                            <a:srgbClr val="21243A"/>
-                          </a:solidFill>
-                          <a:latin typeface="Arial"/>
-                        </a:defRPr>
-                      </a:pPr>
-                      <a:r>
-                        <a:t>diffusion artifacts, structured geometric layout</a:t>
+                        <a:t>Worst of 4 frames (slide 1): synthetic likelihood 28/100; tells: clean vector</a:t>
+                      </a:r>
+                    </a:p>
+                    <a:p>
+                      <a:pPr>
+                        <a:lnSpc>
+                          <a:spcPts val="1600"/>
+                        </a:lnSpc>
+                        <a:spcAft>
+                          <a:spcPts val="0"/>
+                        </a:spcAft>
+                        <a:defRPr sz="1200" b="0">
+                          <a:solidFill>
+                            <a:srgbClr val="21243A"/>
+                          </a:solidFill>
+                          <a:latin typeface="Arial"/>
+                        </a:defRPr>
+                      </a:pPr>
+                      <a:r>
+                        <a:t>geometry, standard digital typography, consistent presentation graphic layout,</a:t>
+                      </a:r>
+                    </a:p>
+                    <a:p>
+                      <a:pPr>
+                        <a:lnSpc>
+                          <a:spcPts val="1600"/>
+                        </a:lnSpc>
+                        <a:spcAft>
+                          <a:spcPts val="0"/>
+                        </a:spcAft>
+                        <a:defRPr sz="1200" b="0">
+                          <a:solidFill>
+                            <a:srgbClr val="21243A"/>
+                          </a:solidFill>
+                          <a:latin typeface="Arial"/>
+                        </a:defRPr>
+                      </a:pPr>
+                      <a:r>
+                        <a:t>absence of generative diffusion artifacts</a:t>
                       </a:r>
                     </a:p>
                   </a:txBody>
@@ -12701,7 +12571,7 @@
           <p:nvPr/>
         </p:nvGraphicFramePr>
         <p:xfrm>
-          <a:off x="365760" y="5187696"/>
+          <a:off x="365760" y="4984495"/>
           <a:ext cx="8412479" cy="349504"/>
         </p:xfrm>
         <a:graphic>
@@ -12772,6 +12642,94 @@
                   <a:tcPr marL="82296" marR="82296" marT="64008" marB="64008">
                     <a:solidFill>
                       <a:srgbClr val="FFFFFF"/>
+                    </a:solidFill>
+                  </a:tcPr>
+                </a:tc>
+              </a:tr>
+            </a:tbl>
+          </a:graphicData>
+        </a:graphic>
+      </p:graphicFrame>
+      <p:graphicFrame>
+        <p:nvGraphicFramePr>
+          <p:cNvPr id="11" name="Table 10"/>
+          <p:cNvGraphicFramePr>
+            <a:graphicFrameLocks noGrp="1"/>
+          </p:cNvGraphicFramePr>
+          <p:nvPr/>
+        </p:nvGraphicFramePr>
+        <p:xfrm>
+          <a:off x="365760" y="5334000"/>
+          <a:ext cx="8412479" cy="349504"/>
+        </p:xfrm>
+        <a:graphic>
+          <a:graphicData uri="http://schemas.openxmlformats.org/drawingml/2006/table">
+            <a:tbl>
+              <a:tblPr firstRow="1" bandRow="1">
+                <a:tableStyleId>{5C22544A-7EE6-4342-B048-85BDC9FD1C3A}</a:tableStyleId>
+              </a:tblPr>
+              <a:tblGrid>
+                <a:gridCol w="2271369"/>
+                <a:gridCol w="6141110"/>
+              </a:tblGrid>
+              <a:tr h="349504">
+                <a:tc>
+                  <a:txBody>
+                    <a:bodyPr wrap="none"/>
+                    <a:lstStyle/>
+                    <a:p>
+                      <a:pPr>
+                        <a:lnSpc>
+                          <a:spcPts val="1600"/>
+                        </a:lnSpc>
+                        <a:spcAft>
+                          <a:spcPts val="0"/>
+                        </a:spcAft>
+                        <a:defRPr sz="1200" b="0">
+                          <a:solidFill>
+                            <a:srgbClr val="21243A"/>
+                          </a:solidFill>
+                          <a:latin typeface="Arial"/>
+                        </a:defRPr>
+                      </a:pPr>
+                      <a:r>
+                        <a:t>C2PA Content Credentials</a:t>
+                      </a:r>
+                    </a:p>
+                  </a:txBody>
+                  <a:tcPr marL="82296" marR="82296" marT="64008" marB="64008">
+                    <a:solidFill>
+                      <a:srgbClr val="F1F7F7"/>
+                    </a:solidFill>
+                  </a:tcPr>
+                </a:tc>
+                <a:tc>
+                  <a:txBody>
+                    <a:bodyPr wrap="none"/>
+                    <a:lstStyle/>
+                    <a:p>
+                      <a:pPr>
+                        <a:lnSpc>
+                          <a:spcPts val="1600"/>
+                        </a:lnSpc>
+                        <a:spcAft>
+                          <a:spcPts val="0"/>
+                        </a:spcAft>
+                        <a:defRPr sz="1200" b="0">
+                          <a:solidFill>
+                            <a:srgbClr val="21243A"/>
+                          </a:solidFill>
+                          <a:latin typeface="Arial"/>
+                        </a:defRPr>
+                      </a:pPr>
+                      <a:r>
+                        <a:t>Embedded credentials: none found. Origin remains unresolved by this check.</a:t>
+                      </a:r>
+                    </a:p>
+                  </a:txBody>
+                  <a:tcPr marL="82296" marR="82296" marT="64008" marB="64008">
+                    <a:solidFill>
+                      <a:srgbClr val="F1F7F7"/>
                     </a:solidFill>
                   </a:tcPr>
                 </a:tc>
@@ -12877,7 +12835,7 @@
               </a:defRPr>
             </a:pPr>
             <a:r>
-              <a:t>Additional findings (continued)</a:t>
+              <a:t>Extracted text</a:t>
             </a:r>
           </a:p>
         </p:txBody>
@@ -13064,7 +13022,7 @@
         </p:nvGraphicFramePr>
         <p:xfrm>
           <a:off x="365760" y="1700784"/>
-          <a:ext cx="8412479" cy="349504"/>
+          <a:ext cx="8412479" cy="1975104"/>
         </p:xfrm>
         <a:graphic>
           <a:graphicData uri="http://schemas.openxmlformats.org/drawingml/2006/table">
@@ -13076,28 +13034,28 @@
                 <a:gridCol w="2271369"/>
                 <a:gridCol w="6141110"/>
               </a:tblGrid>
-              <a:tr h="349504">
-                <a:tc>
-                  <a:txBody>
-                    <a:bodyPr wrap="none"/>
-                    <a:lstStyle/>
-                    <a:p>
-                      <a:pPr>
-                        <a:lnSpc>
-                          <a:spcPts val="1600"/>
-                        </a:lnSpc>
-                        <a:spcAft>
-                          <a:spcPts val="0"/>
-                        </a:spcAft>
-                        <a:defRPr sz="1200" b="0">
-                          <a:solidFill>
-                            <a:srgbClr val="21243A"/>
-                          </a:solidFill>
-                          <a:latin typeface="Arial"/>
-                        </a:defRPr>
-                      </a:pPr>
-                      <a:r>
-                        <a:t>C2PA Content Credentials</a:t>
+              <a:tr h="1975104">
+                <a:tc>
+                  <a:txBody>
+                    <a:bodyPr wrap="none"/>
+                    <a:lstStyle/>
+                    <a:p>
+                      <a:pPr>
+                        <a:lnSpc>
+                          <a:spcPts val="1600"/>
+                        </a:lnSpc>
+                        <a:spcAft>
+                          <a:spcPts val="0"/>
+                        </a:spcAft>
+                        <a:defRPr sz="1200" b="0">
+                          <a:solidFill>
+                            <a:srgbClr val="21243A"/>
+                          </a:solidFill>
+                          <a:latin typeface="Arial"/>
+                        </a:defRPr>
+                      </a:pPr>
+                      <a:r>
+                        <a:t>Recorded text</a:t>
                       </a:r>
                     </a:p>
                   </a:txBody>
@@ -13127,7 +13085,159 @@
                         </a:defRPr>
                       </a:pPr>
                       <a:r>
-                        <a:t>Embedded credentials: none found. Origin remains unresolved by this check.</a:t>
+                        <a:t>Catalyst 2: The Conspiracy Ecosystem | 1 The Threat Hoax: Minimising the virus</a:t>
+                      </a:r>
+                    </a:p>
+                    <a:p>
+                      <a:pPr>
+                        <a:lnSpc>
+                          <a:spcPts val="1600"/>
+                        </a:lnSpc>
+                        <a:spcAft>
+                          <a:spcPts val="0"/>
+                        </a:spcAft>
+                        <a:defRPr sz="1200" b="0">
+                          <a:solidFill>
+                            <a:srgbClr val="21243A"/>
+                          </a:solidFill>
+                          <a:latin typeface="Arial"/>
+                        </a:defRPr>
+                      </a:pPr>
+                      <a:r>
+                        <a:t>itself. “It’s just the flu,” preferring natural immunity over interventions. |</a:t>
+                      </a:r>
+                    </a:p>
+                    <a:p>
+                      <a:pPr>
+                        <a:lnSpc>
+                          <a:spcPts val="1600"/>
+                        </a:lnSpc>
+                        <a:spcAft>
+                          <a:spcPts val="0"/>
+                        </a:spcAft>
+                        <a:defRPr sz="1200" b="0">
+                          <a:solidFill>
+                            <a:srgbClr val="21243A"/>
+                          </a:solidFill>
+                          <a:latin typeface="Arial"/>
+                        </a:defRPr>
+                      </a:pPr>
+                      <a:r>
+                        <a:t>#Plandemic | #Scamdemic | 2 The Control Mechanism: Belief that mandates test</a:t>
+                      </a:r>
+                    </a:p>
+                    <a:p>
+                      <a:pPr>
+                        <a:lnSpc>
+                          <a:spcPts val="1600"/>
+                        </a:lnSpc>
+                        <a:spcAft>
+                          <a:spcPts val="0"/>
+                        </a:spcAft>
+                        <a:defRPr sz="1200" b="0">
+                          <a:solidFill>
+                            <a:srgbClr val="21243A"/>
+                          </a:solidFill>
+                          <a:latin typeface="Arial"/>
+                        </a:defRPr>
+                      </a:pPr>
+                      <a:r>
+                        <a:t>public compliance, equating health rules to authoritarian mouth-gags. |</a:t>
+                      </a:r>
+                    </a:p>
+                    <a:p>
+                      <a:pPr>
+                        <a:lnSpc>
+                          <a:spcPts val="1600"/>
+                        </a:lnSpc>
+                        <a:spcAft>
+                          <a:spcPts val="0"/>
+                        </a:spcAft>
+                        <a:defRPr sz="1200" b="0">
+                          <a:solidFill>
+                            <a:srgbClr val="21243A"/>
+                          </a:solidFill>
+                          <a:latin typeface="Arial"/>
+                        </a:defRPr>
+                      </a:pPr>
+                      <a:r>
+                        <a:t>#COVID1984 | #MaskTyranny | 3 The Micro-Constituent Fear: Targeting vaccines</a:t>
+                      </a:r>
+                    </a:p>
+                    <a:p>
+                      <a:pPr>
+                        <a:lnSpc>
+                          <a:spcPts val="1600"/>
+                        </a:lnSpc>
+                        <a:spcAft>
+                          <a:spcPts val="0"/>
+                        </a:spcAft>
+                        <a:defRPr sz="1200" b="0">
+                          <a:solidFill>
+                            <a:srgbClr val="21243A"/>
+                          </a:solidFill>
+                          <a:latin typeface="Arial"/>
+                        </a:defRPr>
+                      </a:pPr>
+                      <a:r>
+                        <a:t>specifically: fears of mRNA DNA-alteration, microchips, infertility, and Bill Gates</a:t>
+                      </a:r>
+                    </a:p>
+                    <a:p>
+                      <a:pPr>
+                        <a:lnSpc>
+                          <a:spcPts val="1600"/>
+                        </a:lnSpc>
+                        <a:spcAft>
+                          <a:spcPts val="0"/>
+                        </a:spcAft>
+                        <a:defRPr sz="1200" b="0">
+                          <a:solidFill>
+                            <a:srgbClr val="21243A"/>
+                          </a:solidFill>
+                          <a:latin typeface="Arial"/>
+                        </a:defRPr>
+                      </a:pPr>
+                      <a:r>
+                        <a:t>narratives. | Once a citizen accepted the ‘Control Mechanism’ premise for masks,</a:t>
+                      </a:r>
+                    </a:p>
+                    <a:p>
+                      <a:pPr>
+                        <a:lnSpc>
+                          <a:spcPts val="1600"/>
+                        </a:lnSpc>
+                        <a:spcAft>
+                          <a:spcPts val="0"/>
+                        </a:spcAft>
+                        <a:defRPr sz="1200" b="0">
+                          <a:solidFill>
+                            <a:srgbClr val="21243A"/>
+                          </a:solidFill>
+                          <a:latin typeface="Arial"/>
+                        </a:defRPr>
+                      </a:pPr>
+                      <a:r>
+                        <a:t>transitioning to the ‘Micro-Constituent Fear’ for vaccines required almost no</a:t>
+                      </a:r>
+                    </a:p>
+                    <a:p>
+                      <a:pPr>
+                        <a:lnSpc>
+                          <a:spcPts val="1600"/>
+                        </a:lnSpc>
+                        <a:spcAft>
+                          <a:spcPts val="0"/>
+                        </a:spcAft>
+                        <a:defRPr sz="1200" b="0">
+                          <a:solidFill>
+                            <a:srgbClr val="21243A"/>
+                          </a:solidFill>
+                          <a:latin typeface="Arial"/>
+                        </a:defRPr>
+                      </a:pPr>
+                      <a:r>
+                        <a:t>psychological leap.</a:t>
                       </a:r>
                     </a:p>
                   </a:txBody>
@@ -13239,7 +13349,7 @@
               </a:defRPr>
             </a:pPr>
             <a:r>
-              <a:t>Extracted text</a:t>
+              <a:t>How this assessment was reached</a:t>
             </a:r>
           </a:p>
         </p:txBody>
@@ -13426,7 +13536,7 @@
         </p:nvGraphicFramePr>
         <p:xfrm>
           <a:off x="365760" y="1700784"/>
-          <a:ext cx="8412479" cy="1975104"/>
+          <a:ext cx="8412479" cy="349504"/>
         </p:xfrm>
         <a:graphic>
           <a:graphicData uri="http://schemas.openxmlformats.org/drawingml/2006/table">
@@ -13438,28 +13548,28 @@
                 <a:gridCol w="2271369"/>
                 <a:gridCol w="6141110"/>
               </a:tblGrid>
-              <a:tr h="1975104">
-                <a:tc>
-                  <a:txBody>
-                    <a:bodyPr wrap="none"/>
-                    <a:lstStyle/>
-                    <a:p>
-                      <a:pPr>
-                        <a:lnSpc>
-                          <a:spcPts val="1600"/>
-                        </a:lnSpc>
-                        <a:spcAft>
-                          <a:spcPts val="0"/>
-                        </a:spcAft>
-                        <a:defRPr sz="1200" b="0">
-                          <a:solidFill>
-                            <a:srgbClr val="21243A"/>
-                          </a:solidFill>
-                          <a:latin typeface="Arial"/>
-                        </a:defRPr>
-                      </a:pPr>
-                      <a:r>
-                        <a:t>Recorded text</a:t>
+              <a:tr h="349504">
+                <a:tc>
+                  <a:txBody>
+                    <a:bodyPr wrap="none"/>
+                    <a:lstStyle/>
+                    <a:p>
+                      <a:pPr>
+                        <a:lnSpc>
+                          <a:spcPts val="1600"/>
+                        </a:lnSpc>
+                        <a:spcAft>
+                          <a:spcPts val="0"/>
+                        </a:spcAft>
+                        <a:defRPr sz="1200" b="0">
+                          <a:solidFill>
+                            <a:srgbClr val="21243A"/>
+                          </a:solidFill>
+                          <a:latin typeface="Arial"/>
+                        </a:defRPr>
+                      </a:pPr>
+                      <a:r>
+                        <a:t>1. frame_agreement</a:t>
                       </a:r>
                     </a:p>
                   </a:txBody>
@@ -13489,165 +13599,120 @@
                         </a:defRPr>
                       </a:pPr>
                       <a:r>
-                        <a:t>Catalyst 2: The Conspiracy Ecosystem | 1 | #Plandemic | The Threat Hoax |</a:t>
-                      </a:r>
-                    </a:p>
-                    <a:p>
-                      <a:pPr>
-                        <a:lnSpc>
-                          <a:spcPts val="1600"/>
-                        </a:lnSpc>
-                        <a:spcAft>
-                          <a:spcPts val="0"/>
-                        </a:spcAft>
-                        <a:defRPr sz="1200" b="0">
-                          <a:solidFill>
-                            <a:srgbClr val="21243A"/>
-                          </a:solidFill>
-                          <a:latin typeface="Arial"/>
-                        </a:defRPr>
-                      </a:pPr>
-                      <a:r>
-                        <a:t>Minimising the virus itself. “It’s just the flu,” preferring natural immunity over</a:t>
-                      </a:r>
-                    </a:p>
-                    <a:p>
-                      <a:pPr>
-                        <a:lnSpc>
-                          <a:spcPts val="1600"/>
-                        </a:lnSpc>
-                        <a:spcAft>
-                          <a:spcPts val="0"/>
-                        </a:spcAft>
-                        <a:defRPr sz="1200" b="0">
-                          <a:solidFill>
-                            <a:srgbClr val="21243A"/>
-                          </a:solidFill>
-                          <a:latin typeface="Arial"/>
-                        </a:defRPr>
-                      </a:pPr>
-                      <a:r>
-                        <a:t>interventions. | #Scamdemic | 2 | #COVID1984 | The Control Mechanism | Belief</a:t>
-                      </a:r>
-                    </a:p>
-                    <a:p>
-                      <a:pPr>
-                        <a:lnSpc>
-                          <a:spcPts val="1600"/>
-                        </a:lnSpc>
-                        <a:spcAft>
-                          <a:spcPts val="0"/>
-                        </a:spcAft>
-                        <a:defRPr sz="1200" b="0">
-                          <a:solidFill>
-                            <a:srgbClr val="21243A"/>
-                          </a:solidFill>
-                          <a:latin typeface="Arial"/>
-                        </a:defRPr>
-                      </a:pPr>
-                      <a:r>
-                        <a:t>that mandates test public compliance, equating health rules to authoritarian</a:t>
-                      </a:r>
-                    </a:p>
-                    <a:p>
-                      <a:pPr>
-                        <a:lnSpc>
-                          <a:spcPts val="1600"/>
-                        </a:lnSpc>
-                        <a:spcAft>
-                          <a:spcPts val="0"/>
-                        </a:spcAft>
-                        <a:defRPr sz="1200" b="0">
-                          <a:solidFill>
-                            <a:srgbClr val="21243A"/>
-                          </a:solidFill>
-                          <a:latin typeface="Arial"/>
-                        </a:defRPr>
-                      </a:pPr>
-                      <a:r>
-                        <a:t>mouth-gags. | #MaskTyranny | 3 | The Micro-Constituent Fear | Targeting</a:t>
-                      </a:r>
-                    </a:p>
-                    <a:p>
-                      <a:pPr>
-                        <a:lnSpc>
-                          <a:spcPts val="1600"/>
-                        </a:lnSpc>
-                        <a:spcAft>
-                          <a:spcPts val="0"/>
-                        </a:spcAft>
-                        <a:defRPr sz="1200" b="0">
-                          <a:solidFill>
-                            <a:srgbClr val="21243A"/>
-                          </a:solidFill>
-                          <a:latin typeface="Arial"/>
-                        </a:defRPr>
-                      </a:pPr>
-                      <a:r>
-                        <a:t>vaccines specifically: fears of mRNA DNA-alteration, microchips, infertility, and Bill</a:t>
-                      </a:r>
-                    </a:p>
-                    <a:p>
-                      <a:pPr>
-                        <a:lnSpc>
-                          <a:spcPts val="1600"/>
-                        </a:lnSpc>
-                        <a:spcAft>
-                          <a:spcPts val="0"/>
-                        </a:spcAft>
-                        <a:defRPr sz="1200" b="0">
-                          <a:solidFill>
-                            <a:srgbClr val="21243A"/>
-                          </a:solidFill>
-                          <a:latin typeface="Arial"/>
-                        </a:defRPr>
-                      </a:pPr>
-                      <a:r>
-                        <a:t>Gates narratives. | Once a citizen accepted the ‘Control Mechanism’ premise for</a:t>
-                      </a:r>
-                    </a:p>
-                    <a:p>
-                      <a:pPr>
-                        <a:lnSpc>
-                          <a:spcPts val="1600"/>
-                        </a:lnSpc>
-                        <a:spcAft>
-                          <a:spcPts val="0"/>
-                        </a:spcAft>
-                        <a:defRPr sz="1200" b="0">
-                          <a:solidFill>
-                            <a:srgbClr val="21243A"/>
-                          </a:solidFill>
-                          <a:latin typeface="Arial"/>
-                        </a:defRPr>
-                      </a:pPr>
-                      <a:r>
-                        <a:t>masks, transitioning to the ‘Micro-Constituent Fear’ for vaccines required almost</a:t>
-                      </a:r>
-                    </a:p>
-                    <a:p>
-                      <a:pPr>
-                        <a:lnSpc>
-                          <a:spcPts val="1600"/>
-                        </a:lnSpc>
-                        <a:spcAft>
-                          <a:spcPts val="0"/>
-                        </a:spcAft>
-                        <a:defRPr sz="1200" b="0">
-                          <a:solidFill>
-                            <a:srgbClr val="21243A"/>
-                          </a:solidFill>
-                          <a:latin typeface="Arial"/>
-                        </a:defRPr>
-                      </a:pPr>
-                      <a:r>
-                        <a:t>no psychological leap.</a:t>
+                        <a:t>frames=4; synthetic_frames=0; authentic_frames=0; rating_spread=3</a:t>
                       </a:r>
                     </a:p>
                   </a:txBody>
                   <a:tcPr marL="82296" marR="82296" marT="64008" marB="64008">
                     <a:solidFill>
                       <a:srgbClr val="F1F7F7"/>
+                    </a:solidFill>
+                  </a:tcPr>
+                </a:tc>
+              </a:tr>
+            </a:tbl>
+          </a:graphicData>
+        </a:graphic>
+      </p:graphicFrame>
+      <p:graphicFrame>
+        <p:nvGraphicFramePr>
+          <p:cNvPr id="8" name="Table 7"/>
+          <p:cNvGraphicFramePr>
+            <a:graphicFrameLocks noGrp="1"/>
+          </p:cNvGraphicFramePr>
+          <p:nvPr/>
+        </p:nvGraphicFramePr>
+        <p:xfrm>
+          <a:off x="365760" y="2050288"/>
+          <a:ext cx="8412479" cy="552704"/>
+        </p:xfrm>
+        <a:graphic>
+          <a:graphicData uri="http://schemas.openxmlformats.org/drawingml/2006/table">
+            <a:tbl>
+              <a:tblPr firstRow="1" bandRow="1">
+                <a:tableStyleId>{5C22544A-7EE6-4342-B048-85BDC9FD1C3A}</a:tableStyleId>
+              </a:tblPr>
+              <a:tblGrid>
+                <a:gridCol w="2271369"/>
+                <a:gridCol w="6141110"/>
+              </a:tblGrid>
+              <a:tr h="552704">
+                <a:tc>
+                  <a:txBody>
+                    <a:bodyPr wrap="none"/>
+                    <a:lstStyle/>
+                    <a:p>
+                      <a:pPr>
+                        <a:lnSpc>
+                          <a:spcPts val="1600"/>
+                        </a:lnSpc>
+                        <a:spcAft>
+                          <a:spcPts val="0"/>
+                        </a:spcAft>
+                        <a:defRPr sz="1200" b="0">
+                          <a:solidFill>
+                            <a:srgbClr val="21243A"/>
+                          </a:solidFill>
+                          <a:latin typeface="Arial"/>
+                        </a:defRPr>
+                      </a:pPr>
+                      <a:r>
+                        <a:t>2. verdict</a:t>
+                      </a:r>
+                    </a:p>
+                  </a:txBody>
+                  <a:tcPr marL="82296" marR="82296" marT="64008" marB="64008">
+                    <a:solidFill>
+                      <a:srgbClr val="FFFFFF"/>
+                    </a:solidFill>
+                  </a:tcPr>
+                </a:tc>
+                <a:tc>
+                  <a:txBody>
+                    <a:bodyPr wrap="none"/>
+                    <a:lstStyle/>
+                    <a:p>
+                      <a:pPr>
+                        <a:lnSpc>
+                          <a:spcPts val="1600"/>
+                        </a:lnSpc>
+                        <a:spcAft>
+                          <a:spcPts val="0"/>
+                        </a:spcAft>
+                        <a:defRPr sz="1200" b="0">
+                          <a:solidFill>
+                            <a:srgbClr val="21243A"/>
+                          </a:solidFill>
+                          <a:latin typeface="Arial"/>
+                        </a:defRPr>
+                      </a:pPr>
+                      <a:r>
+                        <a:t>value=inconclusive; confidence=low; reason=The sampled frames leave the</a:t>
+                      </a:r>
+                    </a:p>
+                    <a:p>
+                      <a:pPr>
+                        <a:lnSpc>
+                          <a:spcPts val="1600"/>
+                        </a:lnSpc>
+                        <a:spcAft>
+                          <a:spcPts val="0"/>
+                        </a:spcAft>
+                        <a:defRPr sz="1200" b="0">
+                          <a:solidFill>
+                            <a:srgbClr val="21243A"/>
+                          </a:solidFill>
+                          <a:latin typeface="Arial"/>
+                        </a:defRPr>
+                      </a:pPr>
+                      <a:r>
+                        <a:t>assessment inconclusive. Review the frame results and source context.</a:t>
+                      </a:r>
+                    </a:p>
+                  </a:txBody>
+                  <a:tcPr marL="82296" marR="82296" marT="64008" marB="64008">
+                    <a:solidFill>
+                      <a:srgbClr val="FFFFFF"/>
                     </a:solidFill>
                   </a:tcPr>
                 </a:tc>
@@ -14267,7 +14332,7 @@
                         </a:defRPr>
                       </a:pPr>
                       <a:r>
-                        <a:t>26/100</a:t>
+                        <a:t>27/100</a:t>
                       </a:r>
                     </a:p>
                   </a:txBody>
@@ -14788,7 +14853,7 @@
               </a:defRPr>
             </a:pPr>
             <a:r>
-              <a:t>How this assessment was reached</a:t>
+              <a:t>File and analysis record</a:t>
             </a:r>
           </a:p>
         </p:txBody>
@@ -15008,7 +15073,7 @@
                         </a:defRPr>
                       </a:pPr>
                       <a:r>
-                        <a:t>1. frame_agreement</a:t>
+                        <a:t>File</a:t>
                       </a:r>
                     </a:p>
                   </a:txBody>
@@ -15038,7 +15103,7 @@
                         </a:defRPr>
                       </a:pPr>
                       <a:r>
-                        <a:t>frames=4; synthetic_frames=0; authentic_frames=1; rating_spread=3</a:t>
+                        <a:t>presentation.pptx</a:t>
                       </a:r>
                     </a:p>
                   </a:txBody>
@@ -15063,6 +15128,710 @@
         </p:nvGraphicFramePr>
         <p:xfrm>
           <a:off x="365760" y="2050288"/>
+          <a:ext cx="8412479" cy="349504"/>
+        </p:xfrm>
+        <a:graphic>
+          <a:graphicData uri="http://schemas.openxmlformats.org/drawingml/2006/table">
+            <a:tbl>
+              <a:tblPr firstRow="1" bandRow="1">
+                <a:tableStyleId>{5C22544A-7EE6-4342-B048-85BDC9FD1C3A}</a:tableStyleId>
+              </a:tblPr>
+              <a:tblGrid>
+                <a:gridCol w="2271369"/>
+                <a:gridCol w="6141110"/>
+              </a:tblGrid>
+              <a:tr h="349504">
+                <a:tc>
+                  <a:txBody>
+                    <a:bodyPr wrap="none"/>
+                    <a:lstStyle/>
+                    <a:p>
+                      <a:pPr>
+                        <a:lnSpc>
+                          <a:spcPts val="1600"/>
+                        </a:lnSpc>
+                        <a:spcAft>
+                          <a:spcPts val="0"/>
+                        </a:spcAft>
+                        <a:defRPr sz="1200" b="0">
+                          <a:solidFill>
+                            <a:srgbClr val="21243A"/>
+                          </a:solidFill>
+                          <a:latin typeface="Arial"/>
+                        </a:defRPr>
+                      </a:pPr>
+                      <a:r>
+                        <a:t>Analysis ID</a:t>
+                      </a:r>
+                    </a:p>
+                  </a:txBody>
+                  <a:tcPr marL="82296" marR="82296" marT="64008" marB="64008">
+                    <a:solidFill>
+                      <a:srgbClr val="FFFFFF"/>
+                    </a:solidFill>
+                  </a:tcPr>
+                </a:tc>
+                <a:tc>
+                  <a:txBody>
+                    <a:bodyPr wrap="none"/>
+                    <a:lstStyle/>
+                    <a:p>
+                      <a:pPr>
+                        <a:lnSpc>
+                          <a:spcPts val="1600"/>
+                        </a:lnSpc>
+                        <a:spcAft>
+                          <a:spcPts val="0"/>
+                        </a:spcAft>
+                        <a:defRPr sz="1200" b="0">
+                          <a:solidFill>
+                            <a:srgbClr val="21243A"/>
+                          </a:solidFill>
+                          <a:latin typeface="Arial"/>
+                        </a:defRPr>
+                      </a:pPr>
+                      <a:r>
+                        <a:t>250bad8f-c5c8-49fb-8c8c-10a2b68368b0</a:t>
+                      </a:r>
+                    </a:p>
+                  </a:txBody>
+                  <a:tcPr marL="82296" marR="82296" marT="64008" marB="64008">
+                    <a:solidFill>
+                      <a:srgbClr val="FFFFFF"/>
+                    </a:solidFill>
+                  </a:tcPr>
+                </a:tc>
+              </a:tr>
+            </a:tbl>
+          </a:graphicData>
+        </a:graphic>
+      </p:graphicFrame>
+      <p:graphicFrame>
+        <p:nvGraphicFramePr>
+          <p:cNvPr id="9" name="Table 8"/>
+          <p:cNvGraphicFramePr>
+            <a:graphicFrameLocks noGrp="1"/>
+          </p:cNvGraphicFramePr>
+          <p:nvPr/>
+        </p:nvGraphicFramePr>
+        <p:xfrm>
+          <a:off x="365760" y="2399792"/>
+          <a:ext cx="8412479" cy="349504"/>
+        </p:xfrm>
+        <a:graphic>
+          <a:graphicData uri="http://schemas.openxmlformats.org/drawingml/2006/table">
+            <a:tbl>
+              <a:tblPr firstRow="1" bandRow="1">
+                <a:tableStyleId>{5C22544A-7EE6-4342-B048-85BDC9FD1C3A}</a:tableStyleId>
+              </a:tblPr>
+              <a:tblGrid>
+                <a:gridCol w="2271369"/>
+                <a:gridCol w="6141110"/>
+              </a:tblGrid>
+              <a:tr h="349504">
+                <a:tc>
+                  <a:txBody>
+                    <a:bodyPr wrap="none"/>
+                    <a:lstStyle/>
+                    <a:p>
+                      <a:pPr>
+                        <a:lnSpc>
+                          <a:spcPts val="1600"/>
+                        </a:lnSpc>
+                        <a:spcAft>
+                          <a:spcPts val="0"/>
+                        </a:spcAft>
+                        <a:defRPr sz="1200" b="0">
+                          <a:solidFill>
+                            <a:srgbClr val="21243A"/>
+                          </a:solidFill>
+                          <a:latin typeface="Arial"/>
+                        </a:defRPr>
+                      </a:pPr>
+                      <a:r>
+                        <a:t>Generated</a:t>
+                      </a:r>
+                    </a:p>
+                  </a:txBody>
+                  <a:tcPr marL="82296" marR="82296" marT="64008" marB="64008">
+                    <a:solidFill>
+                      <a:srgbClr val="F1F7F7"/>
+                    </a:solidFill>
+                  </a:tcPr>
+                </a:tc>
+                <a:tc>
+                  <a:txBody>
+                    <a:bodyPr wrap="none"/>
+                    <a:lstStyle/>
+                    <a:p>
+                      <a:pPr>
+                        <a:lnSpc>
+                          <a:spcPts val="1600"/>
+                        </a:lnSpc>
+                        <a:spcAft>
+                          <a:spcPts val="0"/>
+                        </a:spcAft>
+                        <a:defRPr sz="1200" b="0">
+                          <a:solidFill>
+                            <a:srgbClr val="21243A"/>
+                          </a:solidFill>
+                          <a:latin typeface="Arial"/>
+                        </a:defRPr>
+                      </a:pPr>
+                      <a:r>
+                        <a:t>2026-09-26T22:31:28+00:00</a:t>
+                      </a:r>
+                    </a:p>
+                  </a:txBody>
+                  <a:tcPr marL="82296" marR="82296" marT="64008" marB="64008">
+                    <a:solidFill>
+                      <a:srgbClr val="F1F7F7"/>
+                    </a:solidFill>
+                  </a:tcPr>
+                </a:tc>
+              </a:tr>
+            </a:tbl>
+          </a:graphicData>
+        </a:graphic>
+      </p:graphicFrame>
+      <p:graphicFrame>
+        <p:nvGraphicFramePr>
+          <p:cNvPr id="10" name="Table 9"/>
+          <p:cNvGraphicFramePr>
+            <a:graphicFrameLocks noGrp="1"/>
+          </p:cNvGraphicFramePr>
+          <p:nvPr/>
+        </p:nvGraphicFramePr>
+        <p:xfrm>
+          <a:off x="365760" y="2749296"/>
+          <a:ext cx="8412479" cy="349504"/>
+        </p:xfrm>
+        <a:graphic>
+          <a:graphicData uri="http://schemas.openxmlformats.org/drawingml/2006/table">
+            <a:tbl>
+              <a:tblPr firstRow="1" bandRow="1">
+                <a:tableStyleId>{5C22544A-7EE6-4342-B048-85BDC9FD1C3A}</a:tableStyleId>
+              </a:tblPr>
+              <a:tblGrid>
+                <a:gridCol w="2271369"/>
+                <a:gridCol w="6141110"/>
+              </a:tblGrid>
+              <a:tr h="349504">
+                <a:tc>
+                  <a:txBody>
+                    <a:bodyPr wrap="none"/>
+                    <a:lstStyle/>
+                    <a:p>
+                      <a:pPr>
+                        <a:lnSpc>
+                          <a:spcPts val="1600"/>
+                        </a:lnSpc>
+                        <a:spcAft>
+                          <a:spcPts val="0"/>
+                        </a:spcAft>
+                        <a:defRPr sz="1200" b="0">
+                          <a:solidFill>
+                            <a:srgbClr val="21243A"/>
+                          </a:solidFill>
+                          <a:latin typeface="Arial"/>
+                        </a:defRPr>
+                      </a:pPr>
+                      <a:r>
+                        <a:t>Tool</a:t>
+                      </a:r>
+                    </a:p>
+                  </a:txBody>
+                  <a:tcPr marL="82296" marR="82296" marT="64008" marB="64008">
+                    <a:solidFill>
+                      <a:srgbClr val="FFFFFF"/>
+                    </a:solidFill>
+                  </a:tcPr>
+                </a:tc>
+                <a:tc>
+                  <a:txBody>
+                    <a:bodyPr wrap="none"/>
+                    <a:lstStyle/>
+                    <a:p>
+                      <a:pPr>
+                        <a:lnSpc>
+                          <a:spcPts val="1600"/>
+                        </a:lnSpc>
+                        <a:spcAft>
+                          <a:spcPts val="0"/>
+                        </a:spcAft>
+                        <a:defRPr sz="1200" b="0">
+                          <a:solidFill>
+                            <a:srgbClr val="21243A"/>
+                          </a:solidFill>
+                          <a:latin typeface="Arial"/>
+                        </a:defRPr>
+                      </a:pPr>
+                      <a:r>
+                        <a:t>SDA Vision 0.1.0</a:t>
+                      </a:r>
+                    </a:p>
+                  </a:txBody>
+                  <a:tcPr marL="82296" marR="82296" marT="64008" marB="64008">
+                    <a:solidFill>
+                      <a:srgbClr val="FFFFFF"/>
+                    </a:solidFill>
+                  </a:tcPr>
+                </a:tc>
+              </a:tr>
+            </a:tbl>
+          </a:graphicData>
+        </a:graphic>
+      </p:graphicFrame>
+      <p:graphicFrame>
+        <p:nvGraphicFramePr>
+          <p:cNvPr id="11" name="Table 10"/>
+          <p:cNvGraphicFramePr>
+            <a:graphicFrameLocks noGrp="1"/>
+          </p:cNvGraphicFramePr>
+          <p:nvPr/>
+        </p:nvGraphicFramePr>
+        <p:xfrm>
+          <a:off x="365760" y="3098800"/>
+          <a:ext cx="8412479" cy="349504"/>
+        </p:xfrm>
+        <a:graphic>
+          <a:graphicData uri="http://schemas.openxmlformats.org/drawingml/2006/table">
+            <a:tbl>
+              <a:tblPr firstRow="1" bandRow="1">
+                <a:tableStyleId>{5C22544A-7EE6-4342-B048-85BDC9FD1C3A}</a:tableStyleId>
+              </a:tblPr>
+              <a:tblGrid>
+                <a:gridCol w="2271369"/>
+                <a:gridCol w="6141110"/>
+              </a:tblGrid>
+              <a:tr h="349504">
+                <a:tc>
+                  <a:txBody>
+                    <a:bodyPr wrap="none"/>
+                    <a:lstStyle/>
+                    <a:p>
+                      <a:pPr>
+                        <a:lnSpc>
+                          <a:spcPts val="1600"/>
+                        </a:lnSpc>
+                        <a:spcAft>
+                          <a:spcPts val="0"/>
+                        </a:spcAft>
+                        <a:defRPr sz="1200" b="0">
+                          <a:solidFill>
+                            <a:srgbClr val="21243A"/>
+                          </a:solidFill>
+                          <a:latin typeface="Arial"/>
+                        </a:defRPr>
+                      </a:pPr>
+                      <a:r>
+                        <a:t>Models</a:t>
+                      </a:r>
+                    </a:p>
+                  </a:txBody>
+                  <a:tcPr marL="82296" marR="82296" marT="64008" marB="64008">
+                    <a:solidFill>
+                      <a:srgbClr val="F1F7F7"/>
+                    </a:solidFill>
+                  </a:tcPr>
+                </a:tc>
+                <a:tc>
+                  <a:txBody>
+                    <a:bodyPr wrap="none"/>
+                    <a:lstStyle/>
+                    <a:p>
+                      <a:pPr>
+                        <a:lnSpc>
+                          <a:spcPts val="1600"/>
+                        </a:lnSpc>
+                        <a:spcAft>
+                          <a:spcPts val="0"/>
+                        </a:spcAft>
+                        <a:defRPr sz="1200" b="0">
+                          <a:solidFill>
+                            <a:srgbClr val="21243A"/>
+                          </a:solidFill>
+                          <a:latin typeface="Arial"/>
+                        </a:defRPr>
+                      </a:pPr>
+                      <a:r>
+                        <a:t>claude-opus-5-5, gemini-3.8-flash, gpt-6-astra</a:t>
+                      </a:r>
+                    </a:p>
+                  </a:txBody>
+                  <a:tcPr marL="82296" marR="82296" marT="64008" marB="64008">
+                    <a:solidFill>
+                      <a:srgbClr val="F1F7F7"/>
+                    </a:solidFill>
+                  </a:tcPr>
+                </a:tc>
+              </a:tr>
+            </a:tbl>
+          </a:graphicData>
+        </a:graphic>
+      </p:graphicFrame>
+      <p:graphicFrame>
+        <p:nvGraphicFramePr>
+          <p:cNvPr id="12" name="Table 11"/>
+          <p:cNvGraphicFramePr>
+            <a:graphicFrameLocks noGrp="1"/>
+          </p:cNvGraphicFramePr>
+          <p:nvPr/>
+        </p:nvGraphicFramePr>
+        <p:xfrm>
+          <a:off x="365760" y="3448304"/>
+          <a:ext cx="8412479" cy="349504"/>
+        </p:xfrm>
+        <a:graphic>
+          <a:graphicData uri="http://schemas.openxmlformats.org/drawingml/2006/table">
+            <a:tbl>
+              <a:tblPr firstRow="1" bandRow="1">
+                <a:tableStyleId>{5C22544A-7EE6-4342-B048-85BDC9FD1C3A}</a:tableStyleId>
+              </a:tblPr>
+              <a:tblGrid>
+                <a:gridCol w="2271369"/>
+                <a:gridCol w="6141110"/>
+              </a:tblGrid>
+              <a:tr h="349504">
+                <a:tc>
+                  <a:txBody>
+                    <a:bodyPr wrap="none"/>
+                    <a:lstStyle/>
+                    <a:p>
+                      <a:pPr>
+                        <a:lnSpc>
+                          <a:spcPts val="1600"/>
+                        </a:lnSpc>
+                        <a:spcAft>
+                          <a:spcPts val="0"/>
+                        </a:spcAft>
+                        <a:defRPr sz="1200" b="0">
+                          <a:solidFill>
+                            <a:srgbClr val="21243A"/>
+                          </a:solidFill>
+                          <a:latin typeface="Arial"/>
+                        </a:defRPr>
+                      </a:pPr>
+                      <a:r>
+                        <a:t>Method version</a:t>
+                      </a:r>
+                    </a:p>
+                  </a:txBody>
+                  <a:tcPr marL="82296" marR="82296" marT="64008" marB="64008">
+                    <a:solidFill>
+                      <a:srgbClr val="FFFFFF"/>
+                    </a:solidFill>
+                  </a:tcPr>
+                </a:tc>
+                <a:tc>
+                  <a:txBody>
+                    <a:bodyPr wrap="none"/>
+                    <a:lstStyle/>
+                    <a:p>
+                      <a:pPr>
+                        <a:lnSpc>
+                          <a:spcPts val="1600"/>
+                        </a:lnSpc>
+                        <a:spcAft>
+                          <a:spcPts val="0"/>
+                        </a:spcAft>
+                        <a:defRPr sz="1200" b="0">
+                          <a:solidFill>
+                            <a:srgbClr val="21243A"/>
+                          </a:solidFill>
+                          <a:latin typeface="Arial"/>
+                        </a:defRPr>
+                      </a:pPr>
+                      <a:r>
+                        <a:t>pdf-preparation-2026-09-26.1</a:t>
+                      </a:r>
+                    </a:p>
+                  </a:txBody>
+                  <a:tcPr marL="82296" marR="82296" marT="64008" marB="64008">
+                    <a:solidFill>
+                      <a:srgbClr val="FFFFFF"/>
+                    </a:solidFill>
+                  </a:tcPr>
+                </a:tc>
+              </a:tr>
+            </a:tbl>
+          </a:graphicData>
+        </a:graphic>
+      </p:graphicFrame>
+      <p:graphicFrame>
+        <p:nvGraphicFramePr>
+          <p:cNvPr id="13" name="Table 12"/>
+          <p:cNvGraphicFramePr>
+            <a:graphicFrameLocks noGrp="1"/>
+          </p:cNvGraphicFramePr>
+          <p:nvPr/>
+        </p:nvGraphicFramePr>
+        <p:xfrm>
+          <a:off x="365760" y="3797808"/>
+          <a:ext cx="8412479" cy="349504"/>
+        </p:xfrm>
+        <a:graphic>
+          <a:graphicData uri="http://schemas.openxmlformats.org/drawingml/2006/table">
+            <a:tbl>
+              <a:tblPr firstRow="1" bandRow="1">
+                <a:tableStyleId>{5C22544A-7EE6-4342-B048-85BDC9FD1C3A}</a:tableStyleId>
+              </a:tblPr>
+              <a:tblGrid>
+                <a:gridCol w="2271369"/>
+                <a:gridCol w="6141110"/>
+              </a:tblGrid>
+              <a:tr h="349504">
+                <a:tc>
+                  <a:txBody>
+                    <a:bodyPr wrap="none"/>
+                    <a:lstStyle/>
+                    <a:p>
+                      <a:pPr>
+                        <a:lnSpc>
+                          <a:spcPts val="1600"/>
+                        </a:lnSpc>
+                        <a:spcAft>
+                          <a:spcPts val="0"/>
+                        </a:spcAft>
+                        <a:defRPr sz="1200" b="0">
+                          <a:solidFill>
+                            <a:srgbClr val="21243A"/>
+                          </a:solidFill>
+                          <a:latin typeface="Arial"/>
+                        </a:defRPr>
+                      </a:pPr>
+                      <a:r>
+                        <a:t>Analysis lens</a:t>
+                      </a:r>
+                    </a:p>
+                  </a:txBody>
+                  <a:tcPr marL="82296" marR="82296" marT="64008" marB="64008">
+                    <a:solidFill>
+                      <a:srgbClr val="F1F7F7"/>
+                    </a:solidFill>
+                  </a:tcPr>
+                </a:tc>
+                <a:tc>
+                  <a:txBody>
+                    <a:bodyPr wrap="none"/>
+                    <a:lstStyle/>
+                    <a:p>
+                      <a:pPr>
+                        <a:lnSpc>
+                          <a:spcPts val="1600"/>
+                        </a:lnSpc>
+                        <a:spcAft>
+                          <a:spcPts val="0"/>
+                        </a:spcAft>
+                        <a:defRPr sz="1200" b="0">
+                          <a:solidFill>
+                            <a:srgbClr val="21243A"/>
+                          </a:solidFill>
+                          <a:latin typeface="Arial"/>
+                        </a:defRPr>
+                      </a:pPr>
+                      <a:r>
+                        <a:t>general</a:t>
+                      </a:r>
+                    </a:p>
+                  </a:txBody>
+                  <a:tcPr marL="82296" marR="82296" marT="64008" marB="64008">
+                    <a:solidFill>
+                      <a:srgbClr val="F1F7F7"/>
+                    </a:solidFill>
+                  </a:tcPr>
+                </a:tc>
+              </a:tr>
+            </a:tbl>
+          </a:graphicData>
+        </a:graphic>
+      </p:graphicFrame>
+      <p:graphicFrame>
+        <p:nvGraphicFramePr>
+          <p:cNvPr id="14" name="Table 13"/>
+          <p:cNvGraphicFramePr>
+            <a:graphicFrameLocks noGrp="1"/>
+          </p:cNvGraphicFramePr>
+          <p:nvPr/>
+        </p:nvGraphicFramePr>
+        <p:xfrm>
+          <a:off x="365760" y="4147312"/>
+          <a:ext cx="8412479" cy="349504"/>
+        </p:xfrm>
+        <a:graphic>
+          <a:graphicData uri="http://schemas.openxmlformats.org/drawingml/2006/table">
+            <a:tbl>
+              <a:tblPr firstRow="1" bandRow="1">
+                <a:tableStyleId>{5C22544A-7EE6-4342-B048-85BDC9FD1C3A}</a:tableStyleId>
+              </a:tblPr>
+              <a:tblGrid>
+                <a:gridCol w="2271369"/>
+                <a:gridCol w="6141110"/>
+              </a:tblGrid>
+              <a:tr h="349504">
+                <a:tc>
+                  <a:txBody>
+                    <a:bodyPr wrap="none"/>
+                    <a:lstStyle/>
+                    <a:p>
+                      <a:pPr>
+                        <a:lnSpc>
+                          <a:spcPts val="1600"/>
+                        </a:lnSpc>
+                        <a:spcAft>
+                          <a:spcPts val="0"/>
+                        </a:spcAft>
+                        <a:defRPr sz="1200" b="0">
+                          <a:solidFill>
+                            <a:srgbClr val="21243A"/>
+                          </a:solidFill>
+                          <a:latin typeface="Arial"/>
+                        </a:defRPr>
+                      </a:pPr>
+                      <a:r>
+                        <a:t>Original SHA-256</a:t>
+                      </a:r>
+                    </a:p>
+                  </a:txBody>
+                  <a:tcPr marL="82296" marR="82296" marT="64008" marB="64008">
+                    <a:solidFill>
+                      <a:srgbClr val="FFFFFF"/>
+                    </a:solidFill>
+                  </a:tcPr>
+                </a:tc>
+                <a:tc>
+                  <a:txBody>
+                    <a:bodyPr wrap="none"/>
+                    <a:lstStyle/>
+                    <a:p>
+                      <a:pPr>
+                        <a:lnSpc>
+                          <a:spcPts val="1600"/>
+                        </a:lnSpc>
+                        <a:spcAft>
+                          <a:spcPts val="0"/>
+                        </a:spcAft>
+                        <a:defRPr sz="1200" b="0">
+                          <a:solidFill>
+                            <a:srgbClr val="21243A"/>
+                          </a:solidFill>
+                          <a:latin typeface="Arial"/>
+                        </a:defRPr>
+                      </a:pPr>
+                      <a:r>
+                        <a:t>d0ec89da564078611922195fca82364f2f8e63d253d02a6d9bb672a8265c5f15</a:t>
+                      </a:r>
+                    </a:p>
+                  </a:txBody>
+                  <a:tcPr marL="82296" marR="82296" marT="64008" marB="64008">
+                    <a:solidFill>
+                      <a:srgbClr val="FFFFFF"/>
+                    </a:solidFill>
+                  </a:tcPr>
+                </a:tc>
+              </a:tr>
+            </a:tbl>
+          </a:graphicData>
+        </a:graphic>
+      </p:graphicFrame>
+      <p:graphicFrame>
+        <p:nvGraphicFramePr>
+          <p:cNvPr id="15" name="Table 14"/>
+          <p:cNvGraphicFramePr>
+            <a:graphicFrameLocks noGrp="1"/>
+          </p:cNvGraphicFramePr>
+          <p:nvPr/>
+        </p:nvGraphicFramePr>
+        <p:xfrm>
+          <a:off x="365760" y="4496816"/>
+          <a:ext cx="8412479" cy="349504"/>
+        </p:xfrm>
+        <a:graphic>
+          <a:graphicData uri="http://schemas.openxmlformats.org/drawingml/2006/table">
+            <a:tbl>
+              <a:tblPr firstRow="1" bandRow="1">
+                <a:tableStyleId>{5C22544A-7EE6-4342-B048-85BDC9FD1C3A}</a:tableStyleId>
+              </a:tblPr>
+              <a:tblGrid>
+                <a:gridCol w="2271369"/>
+                <a:gridCol w="6141110"/>
+              </a:tblGrid>
+              <a:tr h="349504">
+                <a:tc>
+                  <a:txBody>
+                    <a:bodyPr wrap="none"/>
+                    <a:lstStyle/>
+                    <a:p>
+                      <a:pPr>
+                        <a:lnSpc>
+                          <a:spcPts val="1600"/>
+                        </a:lnSpc>
+                        <a:spcAft>
+                          <a:spcPts val="0"/>
+                        </a:spcAft>
+                        <a:defRPr sz="1200" b="0">
+                          <a:solidFill>
+                            <a:srgbClr val="21243A"/>
+                          </a:solidFill>
+                          <a:latin typeface="Arial"/>
+                        </a:defRPr>
+                      </a:pPr>
+                      <a:r>
+                        <a:t>Ingestion note 1</a:t>
+                      </a:r>
+                    </a:p>
+                  </a:txBody>
+                  <a:tcPr marL="82296" marR="82296" marT="64008" marB="64008">
+                    <a:solidFill>
+                      <a:srgbClr val="F1F7F7"/>
+                    </a:solidFill>
+                  </a:tcPr>
+                </a:tc>
+                <a:tc>
+                  <a:txBody>
+                    <a:bodyPr wrap="none"/>
+                    <a:lstStyle/>
+                    <a:p>
+                      <a:pPr>
+                        <a:lnSpc>
+                          <a:spcPts val="1600"/>
+                        </a:lnSpc>
+                        <a:spcAft>
+                          <a:spcPts val="0"/>
+                        </a:spcAft>
+                        <a:defRPr sz="1200" b="0">
+                          <a:solidFill>
+                            <a:srgbClr val="21243A"/>
+                          </a:solidFill>
+                          <a:latin typeface="Arial"/>
+                        </a:defRPr>
+                      </a:pPr>
+                      <a:r>
+                        <a:t>14 slides; sampled 4 of 14 embedded slide image(s).</a:t>
+                      </a:r>
+                    </a:p>
+                  </a:txBody>
+                  <a:tcPr marL="82296" marR="82296" marT="64008" marB="64008">
+                    <a:solidFill>
+                      <a:srgbClr val="F1F7F7"/>
+                    </a:solidFill>
+                  </a:tcPr>
+                </a:tc>
+              </a:tr>
+            </a:tbl>
+          </a:graphicData>
+        </a:graphic>
+      </p:graphicFrame>
+      <p:graphicFrame>
+        <p:nvGraphicFramePr>
+          <p:cNvPr id="16" name="Table 15"/>
+          <p:cNvGraphicFramePr>
+            <a:graphicFrameLocks noGrp="1"/>
+          </p:cNvGraphicFramePr>
+          <p:nvPr/>
+        </p:nvGraphicFramePr>
+        <p:xfrm>
+          <a:off x="365760" y="4846320"/>
           <a:ext cx="8412479" cy="552704"/>
         </p:xfrm>
         <a:graphic>
@@ -15096,7 +15865,7 @@
                         </a:defRPr>
                       </a:pPr>
                       <a:r>
-                        <a:t>2. verdict</a:t>
+                        <a:t>Ingestion note 2</a:t>
                       </a:r>
                     </a:p>
                   </a:txBody>
@@ -15126,32 +15895,139 @@
                         </a:defRPr>
                       </a:pPr>
                       <a:r>
-                        <a:t>value=inconclusive; confidence=low; reason=The sampled frames leave the</a:t>
-                      </a:r>
-                    </a:p>
-                    <a:p>
-                      <a:pPr>
-                        <a:lnSpc>
-                          <a:spcPts val="1600"/>
-                        </a:lnSpc>
-                        <a:spcAft>
-                          <a:spcPts val="0"/>
-                        </a:spcAft>
-                        <a:defRPr sz="1200" b="0">
-                          <a:solidFill>
-                            <a:srgbClr val="21243A"/>
-                          </a:solidFill>
-                          <a:latin typeface="Arial"/>
-                        </a:defRPr>
-                      </a:pPr>
-                      <a:r>
-                        <a:t>assessment inconclusive. Review the frame results and source context.</a:t>
+                        <a:t>Fresh provider replies acquired for eleven-examples-refresh-20260926-r1; report</a:t>
+                      </a:r>
+                    </a:p>
+                    <a:p>
+                      <a:pPr>
+                        <a:lnSpc>
+                          <a:spcPts val="1600"/>
+                        </a:lnSpc>
+                        <a:spcAft>
+                          <a:spcPts val="0"/>
+                        </a:spcAft>
+                        <a:defRPr sz="1200" b="0">
+                          <a:solidFill>
+                            <a:srgbClr val="21243A"/>
+                          </a:solidFill>
+                          <a:latin typeface="Arial"/>
+                        </a:defRPr>
+                      </a:pPr>
+                      <a:r>
+                        <a:t>assembled locally from the saved responses without further API calls.</a:t>
                       </a:r>
                     </a:p>
                   </a:txBody>
                   <a:tcPr marL="82296" marR="82296" marT="64008" marB="64008">
                     <a:solidFill>
                       <a:srgbClr val="FFFFFF"/>
+                    </a:solidFill>
+                  </a:tcPr>
+                </a:tc>
+              </a:tr>
+            </a:tbl>
+          </a:graphicData>
+        </a:graphic>
+      </p:graphicFrame>
+      <p:graphicFrame>
+        <p:nvGraphicFramePr>
+          <p:cNvPr id="17" name="Table 16"/>
+          <p:cNvGraphicFramePr>
+            <a:graphicFrameLocks noGrp="1"/>
+          </p:cNvGraphicFramePr>
+          <p:nvPr/>
+        </p:nvGraphicFramePr>
+        <p:xfrm>
+          <a:off x="365760" y="5399024"/>
+          <a:ext cx="8412479" cy="552704"/>
+        </p:xfrm>
+        <a:graphic>
+          <a:graphicData uri="http://schemas.openxmlformats.org/drawingml/2006/table">
+            <a:tbl>
+              <a:tblPr firstRow="1" bandRow="1">
+                <a:tableStyleId>{5C22544A-7EE6-4342-B048-85BDC9FD1C3A}</a:tableStyleId>
+              </a:tblPr>
+              <a:tblGrid>
+                <a:gridCol w="2271369"/>
+                <a:gridCol w="6141110"/>
+              </a:tblGrid>
+              <a:tr h="552704">
+                <a:tc>
+                  <a:txBody>
+                    <a:bodyPr wrap="none"/>
+                    <a:lstStyle/>
+                    <a:p>
+                      <a:pPr>
+                        <a:lnSpc>
+                          <a:spcPts val="1600"/>
+                        </a:lnSpc>
+                        <a:spcAft>
+                          <a:spcPts val="0"/>
+                        </a:spcAft>
+                        <a:defRPr sz="1200" b="0">
+                          <a:solidFill>
+                            <a:srgbClr val="21243A"/>
+                          </a:solidFill>
+                          <a:latin typeface="Arial"/>
+                        </a:defRPr>
+                      </a:pPr>
+                      <a:r>
+                        <a:t>Ingestion note 3</a:t>
+                      </a:r>
+                    </a:p>
+                  </a:txBody>
+                  <a:tcPr marL="82296" marR="82296" marT="64008" marB="64008">
+                    <a:solidFill>
+                      <a:srgbClr val="F1F7F7"/>
+                    </a:solidFill>
+                  </a:tcPr>
+                </a:tc>
+                <a:tc>
+                  <a:txBody>
+                    <a:bodyPr wrap="none"/>
+                    <a:lstStyle/>
+                    <a:p>
+                      <a:pPr>
+                        <a:lnSpc>
+                          <a:spcPts val="1600"/>
+                        </a:lnSpc>
+                        <a:spcAft>
+                          <a:spcPts val="0"/>
+                        </a:spcAft>
+                        <a:defRPr sz="1200" b="0">
+                          <a:solidFill>
+                            <a:srgbClr val="21243A"/>
+                          </a:solidFill>
+                          <a:latin typeface="Arial"/>
+                        </a:defRPr>
+                      </a:pPr>
+                      <a:r>
+                        <a:t>Provider latency values are restored from the acquisition receipts (maximum</a:t>
+                      </a:r>
+                    </a:p>
+                    <a:p>
+                      <a:pPr>
+                        <a:lnSpc>
+                          <a:spcPts val="1600"/>
+                        </a:lnSpc>
+                        <a:spcAft>
+                          <a:spcPts val="0"/>
+                        </a:spcAft>
+                        <a:defRPr sz="1200" b="0">
+                          <a:solidFill>
+                            <a:srgbClr val="21243A"/>
+                          </a:solidFill>
+                          <a:latin typeface="Arial"/>
+                        </a:defRPr>
+                      </a:pPr>
+                      <a:r>
+                        <a:t>sampled-frame latency per provider); raw replies and assessment results are</a:t>
+                      </a:r>
+                    </a:p>
+                  </a:txBody>
+                  <a:tcPr marL="82296" marR="82296" marT="64008" marB="64008">
+                    <a:solidFill>
+                      <a:srgbClr val="F1F7F7"/>
                     </a:solidFill>
                   </a:tcPr>
                 </a:tc>
@@ -15257,7 +16133,7 @@
               </a:defRPr>
             </a:pPr>
             <a:r>
-              <a:t>File and analysis record</a:t>
+              <a:t>File and analysis record (continued)</a:t>
             </a:r>
           </a:p>
         </p:txBody>
@@ -15477,7 +16353,7 @@
                         </a:defRPr>
                       </a:pPr>
                       <a:r>
-                        <a:t>File</a:t>
+                        <a:t>Continued</a:t>
                       </a:r>
                     </a:p>
                   </a:txBody>
@@ -15507,1426 +16383,13 @@
                         </a:defRPr>
                       </a:pPr>
                       <a:r>
-                        <a:t>presentation.pptx</a:t>
+                        <a:t>unchanged by this bookkeeping step.</a:t>
                       </a:r>
                     </a:p>
                   </a:txBody>
                   <a:tcPr marL="82296" marR="82296" marT="64008" marB="64008">
                     <a:solidFill>
                       <a:srgbClr val="F1F7F7"/>
-                    </a:solidFill>
-                  </a:tcPr>
-                </a:tc>
-              </a:tr>
-            </a:tbl>
-          </a:graphicData>
-        </a:graphic>
-      </p:graphicFrame>
-      <p:graphicFrame>
-        <p:nvGraphicFramePr>
-          <p:cNvPr id="8" name="Table 7"/>
-          <p:cNvGraphicFramePr>
-            <a:graphicFrameLocks noGrp="1"/>
-          </p:cNvGraphicFramePr>
-          <p:nvPr/>
-        </p:nvGraphicFramePr>
-        <p:xfrm>
-          <a:off x="365760" y="2050288"/>
-          <a:ext cx="8412479" cy="349504"/>
-        </p:xfrm>
-        <a:graphic>
-          <a:graphicData uri="http://schemas.openxmlformats.org/drawingml/2006/table">
-            <a:tbl>
-              <a:tblPr firstRow="1" bandRow="1">
-                <a:tableStyleId>{5C22544A-7EE6-4342-B048-85BDC9FD1C3A}</a:tableStyleId>
-              </a:tblPr>
-              <a:tblGrid>
-                <a:gridCol w="2271369"/>
-                <a:gridCol w="6141110"/>
-              </a:tblGrid>
-              <a:tr h="349504">
-                <a:tc>
-                  <a:txBody>
-                    <a:bodyPr wrap="none"/>
-                    <a:lstStyle/>
-                    <a:p>
-                      <a:pPr>
-                        <a:lnSpc>
-                          <a:spcPts val="1600"/>
-                        </a:lnSpc>
-                        <a:spcAft>
-                          <a:spcPts val="0"/>
-                        </a:spcAft>
-                        <a:defRPr sz="1200" b="0">
-                          <a:solidFill>
-                            <a:srgbClr val="21243A"/>
-                          </a:solidFill>
-                          <a:latin typeface="Arial"/>
-                        </a:defRPr>
-                      </a:pPr>
-                      <a:r>
-                        <a:t>Analysis ID</a:t>
-                      </a:r>
-                    </a:p>
-                  </a:txBody>
-                  <a:tcPr marL="82296" marR="82296" marT="64008" marB="64008">
-                    <a:solidFill>
-                      <a:srgbClr val="FFFFFF"/>
-                    </a:solidFill>
-                  </a:tcPr>
-                </a:tc>
-                <a:tc>
-                  <a:txBody>
-                    <a:bodyPr wrap="none"/>
-                    <a:lstStyle/>
-                    <a:p>
-                      <a:pPr>
-                        <a:lnSpc>
-                          <a:spcPts val="1600"/>
-                        </a:lnSpc>
-                        <a:spcAft>
-                          <a:spcPts val="0"/>
-                        </a:spcAft>
-                        <a:defRPr sz="1200" b="0">
-                          <a:solidFill>
-                            <a:srgbClr val="21243A"/>
-                          </a:solidFill>
-                          <a:latin typeface="Arial"/>
-                        </a:defRPr>
-                      </a:pPr>
-                      <a:r>
-                        <a:t>07b8225b-30ca-47ee-8808-13e21f17ca4b</a:t>
-                      </a:r>
-                    </a:p>
-                  </a:txBody>
-                  <a:tcPr marL="82296" marR="82296" marT="64008" marB="64008">
-                    <a:solidFill>
-                      <a:srgbClr val="FFFFFF"/>
-                    </a:solidFill>
-                  </a:tcPr>
-                </a:tc>
-              </a:tr>
-            </a:tbl>
-          </a:graphicData>
-        </a:graphic>
-      </p:graphicFrame>
-      <p:graphicFrame>
-        <p:nvGraphicFramePr>
-          <p:cNvPr id="9" name="Table 8"/>
-          <p:cNvGraphicFramePr>
-            <a:graphicFrameLocks noGrp="1"/>
-          </p:cNvGraphicFramePr>
-          <p:nvPr/>
-        </p:nvGraphicFramePr>
-        <p:xfrm>
-          <a:off x="365760" y="2399792"/>
-          <a:ext cx="8412479" cy="349504"/>
-        </p:xfrm>
-        <a:graphic>
-          <a:graphicData uri="http://schemas.openxmlformats.org/drawingml/2006/table">
-            <a:tbl>
-              <a:tblPr firstRow="1" bandRow="1">
-                <a:tableStyleId>{5C22544A-7EE6-4342-B048-85BDC9FD1C3A}</a:tableStyleId>
-              </a:tblPr>
-              <a:tblGrid>
-                <a:gridCol w="2271369"/>
-                <a:gridCol w="6141110"/>
-              </a:tblGrid>
-              <a:tr h="349504">
-                <a:tc>
-                  <a:txBody>
-                    <a:bodyPr wrap="none"/>
-                    <a:lstStyle/>
-                    <a:p>
-                      <a:pPr>
-                        <a:lnSpc>
-                          <a:spcPts val="1600"/>
-                        </a:lnSpc>
-                        <a:spcAft>
-                          <a:spcPts val="0"/>
-                        </a:spcAft>
-                        <a:defRPr sz="1200" b="0">
-                          <a:solidFill>
-                            <a:srgbClr val="21243A"/>
-                          </a:solidFill>
-                          <a:latin typeface="Arial"/>
-                        </a:defRPr>
-                      </a:pPr>
-                      <a:r>
-                        <a:t>Generated</a:t>
-                      </a:r>
-                    </a:p>
-                  </a:txBody>
-                  <a:tcPr marL="82296" marR="82296" marT="64008" marB="64008">
-                    <a:solidFill>
-                      <a:srgbClr val="F1F7F7"/>
-                    </a:solidFill>
-                  </a:tcPr>
-                </a:tc>
-                <a:tc>
-                  <a:txBody>
-                    <a:bodyPr wrap="none"/>
-                    <a:lstStyle/>
-                    <a:p>
-                      <a:pPr>
-                        <a:lnSpc>
-                          <a:spcPts val="1600"/>
-                        </a:lnSpc>
-                        <a:spcAft>
-                          <a:spcPts val="0"/>
-                        </a:spcAft>
-                        <a:defRPr sz="1200" b="0">
-                          <a:solidFill>
-                            <a:srgbClr val="21243A"/>
-                          </a:solidFill>
-                          <a:latin typeface="Arial"/>
-                        </a:defRPr>
-                      </a:pPr>
-                      <a:r>
-                        <a:t>2026-09-26T17:54:46+00:00</a:t>
-                      </a:r>
-                    </a:p>
-                  </a:txBody>
-                  <a:tcPr marL="82296" marR="82296" marT="64008" marB="64008">
-                    <a:solidFill>
-                      <a:srgbClr val="F1F7F7"/>
-                    </a:solidFill>
-                  </a:tcPr>
-                </a:tc>
-              </a:tr>
-            </a:tbl>
-          </a:graphicData>
-        </a:graphic>
-      </p:graphicFrame>
-      <p:graphicFrame>
-        <p:nvGraphicFramePr>
-          <p:cNvPr id="10" name="Table 9"/>
-          <p:cNvGraphicFramePr>
-            <a:graphicFrameLocks noGrp="1"/>
-          </p:cNvGraphicFramePr>
-          <p:nvPr/>
-        </p:nvGraphicFramePr>
-        <p:xfrm>
-          <a:off x="365760" y="2749296"/>
-          <a:ext cx="8412479" cy="349504"/>
-        </p:xfrm>
-        <a:graphic>
-          <a:graphicData uri="http://schemas.openxmlformats.org/drawingml/2006/table">
-            <a:tbl>
-              <a:tblPr firstRow="1" bandRow="1">
-                <a:tableStyleId>{5C22544A-7EE6-4342-B048-85BDC9FD1C3A}</a:tableStyleId>
-              </a:tblPr>
-              <a:tblGrid>
-                <a:gridCol w="2271369"/>
-                <a:gridCol w="6141110"/>
-              </a:tblGrid>
-              <a:tr h="349504">
-                <a:tc>
-                  <a:txBody>
-                    <a:bodyPr wrap="none"/>
-                    <a:lstStyle/>
-                    <a:p>
-                      <a:pPr>
-                        <a:lnSpc>
-                          <a:spcPts val="1600"/>
-                        </a:lnSpc>
-                        <a:spcAft>
-                          <a:spcPts val="0"/>
-                        </a:spcAft>
-                        <a:defRPr sz="1200" b="0">
-                          <a:solidFill>
-                            <a:srgbClr val="21243A"/>
-                          </a:solidFill>
-                          <a:latin typeface="Arial"/>
-                        </a:defRPr>
-                      </a:pPr>
-                      <a:r>
-                        <a:t>Tool</a:t>
-                      </a:r>
-                    </a:p>
-                  </a:txBody>
-                  <a:tcPr marL="82296" marR="82296" marT="64008" marB="64008">
-                    <a:solidFill>
-                      <a:srgbClr val="FFFFFF"/>
-                    </a:solidFill>
-                  </a:tcPr>
-                </a:tc>
-                <a:tc>
-                  <a:txBody>
-                    <a:bodyPr wrap="none"/>
-                    <a:lstStyle/>
-                    <a:p>
-                      <a:pPr>
-                        <a:lnSpc>
-                          <a:spcPts val="1600"/>
-                        </a:lnSpc>
-                        <a:spcAft>
-                          <a:spcPts val="0"/>
-                        </a:spcAft>
-                        <a:defRPr sz="1200" b="0">
-                          <a:solidFill>
-                            <a:srgbClr val="21243A"/>
-                          </a:solidFill>
-                          <a:latin typeface="Arial"/>
-                        </a:defRPr>
-                      </a:pPr>
-                      <a:r>
-                        <a:t>SDA Vision 0.1.0</a:t>
-                      </a:r>
-                    </a:p>
-                  </a:txBody>
-                  <a:tcPr marL="82296" marR="82296" marT="64008" marB="64008">
-                    <a:solidFill>
-                      <a:srgbClr val="FFFFFF"/>
-                    </a:solidFill>
-                  </a:tcPr>
-                </a:tc>
-              </a:tr>
-            </a:tbl>
-          </a:graphicData>
-        </a:graphic>
-      </p:graphicFrame>
-      <p:graphicFrame>
-        <p:nvGraphicFramePr>
-          <p:cNvPr id="11" name="Table 10"/>
-          <p:cNvGraphicFramePr>
-            <a:graphicFrameLocks noGrp="1"/>
-          </p:cNvGraphicFramePr>
-          <p:nvPr/>
-        </p:nvGraphicFramePr>
-        <p:xfrm>
-          <a:off x="365760" y="3098800"/>
-          <a:ext cx="8412479" cy="349504"/>
-        </p:xfrm>
-        <a:graphic>
-          <a:graphicData uri="http://schemas.openxmlformats.org/drawingml/2006/table">
-            <a:tbl>
-              <a:tblPr firstRow="1" bandRow="1">
-                <a:tableStyleId>{5C22544A-7EE6-4342-B048-85BDC9FD1C3A}</a:tableStyleId>
-              </a:tblPr>
-              <a:tblGrid>
-                <a:gridCol w="2271369"/>
-                <a:gridCol w="6141110"/>
-              </a:tblGrid>
-              <a:tr h="349504">
-                <a:tc>
-                  <a:txBody>
-                    <a:bodyPr wrap="none"/>
-                    <a:lstStyle/>
-                    <a:p>
-                      <a:pPr>
-                        <a:lnSpc>
-                          <a:spcPts val="1600"/>
-                        </a:lnSpc>
-                        <a:spcAft>
-                          <a:spcPts val="0"/>
-                        </a:spcAft>
-                        <a:defRPr sz="1200" b="0">
-                          <a:solidFill>
-                            <a:srgbClr val="21243A"/>
-                          </a:solidFill>
-                          <a:latin typeface="Arial"/>
-                        </a:defRPr>
-                      </a:pPr>
-                      <a:r>
-                        <a:t>Models</a:t>
-                      </a:r>
-                    </a:p>
-                  </a:txBody>
-                  <a:tcPr marL="82296" marR="82296" marT="64008" marB="64008">
-                    <a:solidFill>
-                      <a:srgbClr val="F1F7F7"/>
-                    </a:solidFill>
-                  </a:tcPr>
-                </a:tc>
-                <a:tc>
-                  <a:txBody>
-                    <a:bodyPr wrap="none"/>
-                    <a:lstStyle/>
-                    <a:p>
-                      <a:pPr>
-                        <a:lnSpc>
-                          <a:spcPts val="1600"/>
-                        </a:lnSpc>
-                        <a:spcAft>
-                          <a:spcPts val="0"/>
-                        </a:spcAft>
-                        <a:defRPr sz="1200" b="0">
-                          <a:solidFill>
-                            <a:srgbClr val="21243A"/>
-                          </a:solidFill>
-                          <a:latin typeface="Arial"/>
-                        </a:defRPr>
-                      </a:pPr>
-                      <a:r>
-                        <a:t>claude-opus-5-5, gemini-3.8-flash, gpt-6-astra</a:t>
-                      </a:r>
-                    </a:p>
-                  </a:txBody>
-                  <a:tcPr marL="82296" marR="82296" marT="64008" marB="64008">
-                    <a:solidFill>
-                      <a:srgbClr val="F1F7F7"/>
-                    </a:solidFill>
-                  </a:tcPr>
-                </a:tc>
-              </a:tr>
-            </a:tbl>
-          </a:graphicData>
-        </a:graphic>
-      </p:graphicFrame>
-      <p:graphicFrame>
-        <p:nvGraphicFramePr>
-          <p:cNvPr id="12" name="Table 11"/>
-          <p:cNvGraphicFramePr>
-            <a:graphicFrameLocks noGrp="1"/>
-          </p:cNvGraphicFramePr>
-          <p:nvPr/>
-        </p:nvGraphicFramePr>
-        <p:xfrm>
-          <a:off x="365760" y="3448304"/>
-          <a:ext cx="8412479" cy="349504"/>
-        </p:xfrm>
-        <a:graphic>
-          <a:graphicData uri="http://schemas.openxmlformats.org/drawingml/2006/table">
-            <a:tbl>
-              <a:tblPr firstRow="1" bandRow="1">
-                <a:tableStyleId>{5C22544A-7EE6-4342-B048-85BDC9FD1C3A}</a:tableStyleId>
-              </a:tblPr>
-              <a:tblGrid>
-                <a:gridCol w="2271369"/>
-                <a:gridCol w="6141110"/>
-              </a:tblGrid>
-              <a:tr h="349504">
-                <a:tc>
-                  <a:txBody>
-                    <a:bodyPr wrap="none"/>
-                    <a:lstStyle/>
-                    <a:p>
-                      <a:pPr>
-                        <a:lnSpc>
-                          <a:spcPts val="1600"/>
-                        </a:lnSpc>
-                        <a:spcAft>
-                          <a:spcPts val="0"/>
-                        </a:spcAft>
-                        <a:defRPr sz="1200" b="0">
-                          <a:solidFill>
-                            <a:srgbClr val="21243A"/>
-                          </a:solidFill>
-                          <a:latin typeface="Arial"/>
-                        </a:defRPr>
-                      </a:pPr>
-                      <a:r>
-                        <a:t>Method version</a:t>
-                      </a:r>
-                    </a:p>
-                  </a:txBody>
-                  <a:tcPr marL="82296" marR="82296" marT="64008" marB="64008">
-                    <a:solidFill>
-                      <a:srgbClr val="FFFFFF"/>
-                    </a:solidFill>
-                  </a:tcPr>
-                </a:tc>
-                <a:tc>
-                  <a:txBody>
-                    <a:bodyPr wrap="none"/>
-                    <a:lstStyle/>
-                    <a:p>
-                      <a:pPr>
-                        <a:lnSpc>
-                          <a:spcPts val="1600"/>
-                        </a:lnSpc>
-                        <a:spcAft>
-                          <a:spcPts val="0"/>
-                        </a:spcAft>
-                        <a:defRPr sz="1200" b="0">
-                          <a:solidFill>
-                            <a:srgbClr val="21243A"/>
-                          </a:solidFill>
-                          <a:latin typeface="Arial"/>
-                        </a:defRPr>
-                      </a:pPr>
-                      <a:r>
-                        <a:t>verdict-consistency-2026-09-26.1</a:t>
-                      </a:r>
-                    </a:p>
-                  </a:txBody>
-                  <a:tcPr marL="82296" marR="82296" marT="64008" marB="64008">
-                    <a:solidFill>
-                      <a:srgbClr val="FFFFFF"/>
-                    </a:solidFill>
-                  </a:tcPr>
-                </a:tc>
-              </a:tr>
-            </a:tbl>
-          </a:graphicData>
-        </a:graphic>
-      </p:graphicFrame>
-      <p:graphicFrame>
-        <p:nvGraphicFramePr>
-          <p:cNvPr id="13" name="Table 12"/>
-          <p:cNvGraphicFramePr>
-            <a:graphicFrameLocks noGrp="1"/>
-          </p:cNvGraphicFramePr>
-          <p:nvPr/>
-        </p:nvGraphicFramePr>
-        <p:xfrm>
-          <a:off x="365760" y="3797808"/>
-          <a:ext cx="8412479" cy="349504"/>
-        </p:xfrm>
-        <a:graphic>
-          <a:graphicData uri="http://schemas.openxmlformats.org/drawingml/2006/table">
-            <a:tbl>
-              <a:tblPr firstRow="1" bandRow="1">
-                <a:tableStyleId>{5C22544A-7EE6-4342-B048-85BDC9FD1C3A}</a:tableStyleId>
-              </a:tblPr>
-              <a:tblGrid>
-                <a:gridCol w="2271369"/>
-                <a:gridCol w="6141110"/>
-              </a:tblGrid>
-              <a:tr h="349504">
-                <a:tc>
-                  <a:txBody>
-                    <a:bodyPr wrap="none"/>
-                    <a:lstStyle/>
-                    <a:p>
-                      <a:pPr>
-                        <a:lnSpc>
-                          <a:spcPts val="1600"/>
-                        </a:lnSpc>
-                        <a:spcAft>
-                          <a:spcPts val="0"/>
-                        </a:spcAft>
-                        <a:defRPr sz="1200" b="0">
-                          <a:solidFill>
-                            <a:srgbClr val="21243A"/>
-                          </a:solidFill>
-                          <a:latin typeface="Arial"/>
-                        </a:defRPr>
-                      </a:pPr>
-                      <a:r>
-                        <a:t>Analysis lens</a:t>
-                      </a:r>
-                    </a:p>
-                  </a:txBody>
-                  <a:tcPr marL="82296" marR="82296" marT="64008" marB="64008">
-                    <a:solidFill>
-                      <a:srgbClr val="F1F7F7"/>
-                    </a:solidFill>
-                  </a:tcPr>
-                </a:tc>
-                <a:tc>
-                  <a:txBody>
-                    <a:bodyPr wrap="none"/>
-                    <a:lstStyle/>
-                    <a:p>
-                      <a:pPr>
-                        <a:lnSpc>
-                          <a:spcPts val="1600"/>
-                        </a:lnSpc>
-                        <a:spcAft>
-                          <a:spcPts val="0"/>
-                        </a:spcAft>
-                        <a:defRPr sz="1200" b="0">
-                          <a:solidFill>
-                            <a:srgbClr val="21243A"/>
-                          </a:solidFill>
-                          <a:latin typeface="Arial"/>
-                        </a:defRPr>
-                      </a:pPr>
-                      <a:r>
-                        <a:t>general</a:t>
-                      </a:r>
-                    </a:p>
-                  </a:txBody>
-                  <a:tcPr marL="82296" marR="82296" marT="64008" marB="64008">
-                    <a:solidFill>
-                      <a:srgbClr val="F1F7F7"/>
-                    </a:solidFill>
-                  </a:tcPr>
-                </a:tc>
-              </a:tr>
-            </a:tbl>
-          </a:graphicData>
-        </a:graphic>
-      </p:graphicFrame>
-      <p:graphicFrame>
-        <p:nvGraphicFramePr>
-          <p:cNvPr id="14" name="Table 13"/>
-          <p:cNvGraphicFramePr>
-            <a:graphicFrameLocks noGrp="1"/>
-          </p:cNvGraphicFramePr>
-          <p:nvPr/>
-        </p:nvGraphicFramePr>
-        <p:xfrm>
-          <a:off x="365760" y="4147312"/>
-          <a:ext cx="8412479" cy="349504"/>
-        </p:xfrm>
-        <a:graphic>
-          <a:graphicData uri="http://schemas.openxmlformats.org/drawingml/2006/table">
-            <a:tbl>
-              <a:tblPr firstRow="1" bandRow="1">
-                <a:tableStyleId>{5C22544A-7EE6-4342-B048-85BDC9FD1C3A}</a:tableStyleId>
-              </a:tblPr>
-              <a:tblGrid>
-                <a:gridCol w="2271369"/>
-                <a:gridCol w="6141110"/>
-              </a:tblGrid>
-              <a:tr h="349504">
-                <a:tc>
-                  <a:txBody>
-                    <a:bodyPr wrap="none"/>
-                    <a:lstStyle/>
-                    <a:p>
-                      <a:pPr>
-                        <a:lnSpc>
-                          <a:spcPts val="1600"/>
-                        </a:lnSpc>
-                        <a:spcAft>
-                          <a:spcPts val="0"/>
-                        </a:spcAft>
-                        <a:defRPr sz="1200" b="0">
-                          <a:solidFill>
-                            <a:srgbClr val="21243A"/>
-                          </a:solidFill>
-                          <a:latin typeface="Arial"/>
-                        </a:defRPr>
-                      </a:pPr>
-                      <a:r>
-                        <a:t>Original SHA-256</a:t>
-                      </a:r>
-                    </a:p>
-                  </a:txBody>
-                  <a:tcPr marL="82296" marR="82296" marT="64008" marB="64008">
-                    <a:solidFill>
-                      <a:srgbClr val="FFFFFF"/>
-                    </a:solidFill>
-                  </a:tcPr>
-                </a:tc>
-                <a:tc>
-                  <a:txBody>
-                    <a:bodyPr wrap="none"/>
-                    <a:lstStyle/>
-                    <a:p>
-                      <a:pPr>
-                        <a:lnSpc>
-                          <a:spcPts val="1600"/>
-                        </a:lnSpc>
-                        <a:spcAft>
-                          <a:spcPts val="0"/>
-                        </a:spcAft>
-                        <a:defRPr sz="1200" b="0">
-                          <a:solidFill>
-                            <a:srgbClr val="21243A"/>
-                          </a:solidFill>
-                          <a:latin typeface="Arial"/>
-                        </a:defRPr>
-                      </a:pPr>
-                      <a:r>
-                        <a:t>d0ec89da564078611922195fca82364f2f8e63d253d02a6d9bb672a8265c5f15</a:t>
-                      </a:r>
-                    </a:p>
-                  </a:txBody>
-                  <a:tcPr marL="82296" marR="82296" marT="64008" marB="64008">
-                    <a:solidFill>
-                      <a:srgbClr val="FFFFFF"/>
-                    </a:solidFill>
-                  </a:tcPr>
-                </a:tc>
-              </a:tr>
-            </a:tbl>
-          </a:graphicData>
-        </a:graphic>
-      </p:graphicFrame>
-      <p:graphicFrame>
-        <p:nvGraphicFramePr>
-          <p:cNvPr id="15" name="Table 14"/>
-          <p:cNvGraphicFramePr>
-            <a:graphicFrameLocks noGrp="1"/>
-          </p:cNvGraphicFramePr>
-          <p:nvPr/>
-        </p:nvGraphicFramePr>
-        <p:xfrm>
-          <a:off x="365760" y="4496816"/>
-          <a:ext cx="8412479" cy="349504"/>
-        </p:xfrm>
-        <a:graphic>
-          <a:graphicData uri="http://schemas.openxmlformats.org/drawingml/2006/table">
-            <a:tbl>
-              <a:tblPr firstRow="1" bandRow="1">
-                <a:tableStyleId>{5C22544A-7EE6-4342-B048-85BDC9FD1C3A}</a:tableStyleId>
-              </a:tblPr>
-              <a:tblGrid>
-                <a:gridCol w="2271369"/>
-                <a:gridCol w="6141110"/>
-              </a:tblGrid>
-              <a:tr h="349504">
-                <a:tc>
-                  <a:txBody>
-                    <a:bodyPr wrap="none"/>
-                    <a:lstStyle/>
-                    <a:p>
-                      <a:pPr>
-                        <a:lnSpc>
-                          <a:spcPts val="1600"/>
-                        </a:lnSpc>
-                        <a:spcAft>
-                          <a:spcPts val="0"/>
-                        </a:spcAft>
-                        <a:defRPr sz="1200" b="0">
-                          <a:solidFill>
-                            <a:srgbClr val="21243A"/>
-                          </a:solidFill>
-                          <a:latin typeface="Arial"/>
-                        </a:defRPr>
-                      </a:pPr>
-                      <a:r>
-                        <a:t>Ingestion note 1</a:t>
-                      </a:r>
-                    </a:p>
-                  </a:txBody>
-                  <a:tcPr marL="82296" marR="82296" marT="64008" marB="64008">
-                    <a:solidFill>
-                      <a:srgbClr val="F1F7F7"/>
-                    </a:solidFill>
-                  </a:tcPr>
-                </a:tc>
-                <a:tc>
-                  <a:txBody>
-                    <a:bodyPr wrap="none"/>
-                    <a:lstStyle/>
-                    <a:p>
-                      <a:pPr>
-                        <a:lnSpc>
-                          <a:spcPts val="1600"/>
-                        </a:lnSpc>
-                        <a:spcAft>
-                          <a:spcPts val="0"/>
-                        </a:spcAft>
-                        <a:defRPr sz="1200" b="0">
-                          <a:solidFill>
-                            <a:srgbClr val="21243A"/>
-                          </a:solidFill>
-                          <a:latin typeface="Arial"/>
-                        </a:defRPr>
-                      </a:pPr>
-                      <a:r>
-                        <a:t>14 slides; sampled 4 of 14 embedded slide image(s).</a:t>
-                      </a:r>
-                    </a:p>
-                  </a:txBody>
-                  <a:tcPr marL="82296" marR="82296" marT="64008" marB="64008">
-                    <a:solidFill>
-                      <a:srgbClr val="F1F7F7"/>
-                    </a:solidFill>
-                  </a:tcPr>
-                </a:tc>
-              </a:tr>
-            </a:tbl>
-          </a:graphicData>
-        </a:graphic>
-      </p:graphicFrame>
-      <p:graphicFrame>
-        <p:nvGraphicFramePr>
-          <p:cNvPr id="16" name="Table 15"/>
-          <p:cNvGraphicFramePr>
-            <a:graphicFrameLocks noGrp="1"/>
-          </p:cNvGraphicFramePr>
-          <p:nvPr/>
-        </p:nvGraphicFramePr>
-        <p:xfrm>
-          <a:off x="365760" y="4846320"/>
-          <a:ext cx="8412479" cy="1162304"/>
-        </p:xfrm>
-        <a:graphic>
-          <a:graphicData uri="http://schemas.openxmlformats.org/drawingml/2006/table">
-            <a:tbl>
-              <a:tblPr firstRow="1" bandRow="1">
-                <a:tableStyleId>{5C22544A-7EE6-4342-B048-85BDC9FD1C3A}</a:tableStyleId>
-              </a:tblPr>
-              <a:tblGrid>
-                <a:gridCol w="2271369"/>
-                <a:gridCol w="6141110"/>
-              </a:tblGrid>
-              <a:tr h="1162304">
-                <a:tc>
-                  <a:txBody>
-                    <a:bodyPr wrap="none"/>
-                    <a:lstStyle/>
-                    <a:p>
-                      <a:pPr>
-                        <a:lnSpc>
-                          <a:spcPts val="1600"/>
-                        </a:lnSpc>
-                        <a:spcAft>
-                          <a:spcPts val="0"/>
-                        </a:spcAft>
-                        <a:defRPr sz="1200" b="0">
-                          <a:solidFill>
-                            <a:srgbClr val="21243A"/>
-                          </a:solidFill>
-                          <a:latin typeface="Arial"/>
-                        </a:defRPr>
-                      </a:pPr>
-                      <a:r>
-                        <a:t>Ingestion note 2</a:t>
-                      </a:r>
-                    </a:p>
-                  </a:txBody>
-                  <a:tcPr marL="82296" marR="82296" marT="64008" marB="64008">
-                    <a:solidFill>
-                      <a:srgbClr val="FFFFFF"/>
-                    </a:solidFill>
-                  </a:tcPr>
-                </a:tc>
-                <a:tc>
-                  <a:txBody>
-                    <a:bodyPr wrap="none"/>
-                    <a:lstStyle/>
-                    <a:p>
-                      <a:pPr>
-                        <a:lnSpc>
-                          <a:spcPts val="1600"/>
-                        </a:lnSpc>
-                        <a:spcAft>
-                          <a:spcPts val="0"/>
-                        </a:spcAft>
-                        <a:defRPr sz="1200" b="0">
-                          <a:solidFill>
-                            <a:srgbClr val="21243A"/>
-                          </a:solidFill>
-                          <a:latin typeface="Arial"/>
-                        </a:defRPr>
-                      </a:pPr>
-                      <a:r>
-                        <a:t>Recomputed locally from the same saved provider replies acquired under run</a:t>
-                      </a:r>
-                    </a:p>
-                    <a:p>
-                      <a:pPr>
-                        <a:lnSpc>
-                          <a:spcPts val="1600"/>
-                        </a:lnSpc>
-                        <a:spcAft>
-                          <a:spcPts val="0"/>
-                        </a:spcAft>
-                        <a:defRPr sz="1200" b="0">
-                          <a:solidFill>
-                            <a:srgbClr val="21243A"/>
-                          </a:solidFill>
-                          <a:latin typeface="Arial"/>
-                        </a:defRPr>
-                      </a:pPr>
-                      <a:r>
-                        <a:t>five-examples-20260926-r1. No new provider requests. Original report</a:t>
-                      </a:r>
-                    </a:p>
-                    <a:p>
-                      <a:pPr>
-                        <a:lnSpc>
-                          <a:spcPts val="1600"/>
-                        </a:lnSpc>
-                        <a:spcAft>
-                          <a:spcPts val="0"/>
-                        </a:spcAft>
-                        <a:defRPr sz="1200" b="0">
-                          <a:solidFill>
-                            <a:srgbClr val="21243A"/>
-                          </a:solidFill>
-                          <a:latin typeface="Arial"/>
-                        </a:defRPr>
-                      </a:pPr>
-                      <a:r>
-                        <a:t>f08956d6-23e1-4043-972d-6af6e3cd2603 was generated at</a:t>
-                      </a:r>
-                    </a:p>
-                    <a:p>
-                      <a:pPr>
-                        <a:lnSpc>
-                          <a:spcPts val="1600"/>
-                        </a:lnSpc>
-                        <a:spcAft>
-                          <a:spcPts val="0"/>
-                        </a:spcAft>
-                        <a:defRPr sz="1200" b="0">
-                          <a:solidFill>
-                            <a:srgbClr val="21243A"/>
-                          </a:solidFill>
-                          <a:latin typeface="Arial"/>
-                        </a:defRPr>
-                      </a:pPr>
-                      <a:r>
-                        <a:t>2026-09-26T17:38:39+00:00 under method publication-repair-2026-09-24.3; that</a:t>
-                      </a:r>
-                    </a:p>
-                    <a:p>
-                      <a:pPr>
-                        <a:lnSpc>
-                          <a:spcPts val="1600"/>
-                        </a:lnSpc>
-                        <a:spcAft>
-                          <a:spcPts val="0"/>
-                        </a:spcAft>
-                        <a:defRPr sz="1200" b="0">
-                          <a:solidFill>
-                            <a:srgbClr val="21243A"/>
-                          </a:solidFill>
-                          <a:latin typeface="Arial"/>
-                        </a:defRPr>
-                      </a:pPr>
-                      <a:r>
-                        <a:t>report is preserved.</a:t>
-                      </a:r>
-                    </a:p>
-                  </a:txBody>
-                  <a:tcPr marL="82296" marR="82296" marT="64008" marB="64008">
-                    <a:solidFill>
-                      <a:srgbClr val="FFFFFF"/>
-                    </a:solidFill>
-                  </a:tcPr>
-                </a:tc>
-              </a:tr>
-            </a:tbl>
-          </a:graphicData>
-        </a:graphic>
-      </p:graphicFrame>
-    </p:spTree>
-  </p:cSld>
-  <p:clrMapOvr>
-    <a:masterClrMapping/>
-  </p:clrMapOvr>
-</p:sld>
-</file>
-
-<file path=ppt/slides/slide22.xml><?xml version="1.0" encoding="utf-8"?>
-<p:sld xmlns:a="http://schemas.openxmlformats.org/drawingml/2006/main" xmlns:p="http://schemas.openxmlformats.org/presentationml/2006/main" xmlns:r="http://schemas.openxmlformats.org/officeDocument/2006/relationships">
-  <p:cSld>
-    <p:spTree>
-      <p:nvGrpSpPr>
-        <p:cNvPr id="1" name=""/>
-        <p:cNvGrpSpPr/>
-        <p:nvPr/>
-      </p:nvGrpSpPr>
-      <p:grpSpPr/>
-      <p:sp>
-        <p:nvSpPr>
-          <p:cNvPr id="2" name="TextBox 1"/>
-          <p:cNvSpPr txBox="1"/>
-          <p:nvPr/>
-        </p:nvSpPr>
-        <p:spPr>
-          <a:xfrm>
-            <a:off x="365760" y="219456"/>
-            <a:ext cx="8412480" cy="228600"/>
-          </a:xfrm>
-          <a:prstGeom prst="rect">
-            <a:avLst/>
-          </a:prstGeom>
-          <a:noFill/>
-        </p:spPr>
-        <p:txBody>
-          <a:bodyPr wrap="square" lIns="0" rIns="0" tIns="0" bIns="0">
-            <a:spAutoFit/>
-          </a:bodyPr>
-          <a:lstStyle/>
-          <a:p>
-            <a:pPr>
-              <a:lnSpc>
-                <a:spcPct val="115000"/>
-              </a:lnSpc>
-              <a:spcAft>
-                <a:spcPts val="0"/>
-              </a:spcAft>
-              <a:defRPr sz="1100" b="1">
-                <a:solidFill>
-                  <a:srgbClr val="C5006A"/>
-                </a:solidFill>
-                <a:latin typeface="Arial"/>
-              </a:defRPr>
-            </a:pPr>
-            <a:r>
-              <a:t>SDA VISION / RESEARCH REPORT</a:t>
-            </a:r>
-          </a:p>
-        </p:txBody>
-      </p:sp>
-      <p:sp>
-        <p:nvSpPr>
-          <p:cNvPr id="3" name="TextBox 2"/>
-          <p:cNvSpPr txBox="1"/>
-          <p:nvPr/>
-        </p:nvSpPr>
-        <p:spPr>
-          <a:xfrm>
-            <a:off x="365760" y="658368"/>
-            <a:ext cx="8412480" cy="612648"/>
-          </a:xfrm>
-          <a:prstGeom prst="rect">
-            <a:avLst/>
-          </a:prstGeom>
-          <a:noFill/>
-        </p:spPr>
-        <p:txBody>
-          <a:bodyPr wrap="square" lIns="0" rIns="0" tIns="0" bIns="0">
-            <a:spAutoFit/>
-          </a:bodyPr>
-          <a:lstStyle/>
-          <a:p>
-            <a:pPr>
-              <a:lnSpc>
-                <a:spcPct val="115000"/>
-              </a:lnSpc>
-              <a:spcAft>
-                <a:spcPts val="0"/>
-              </a:spcAft>
-              <a:defRPr sz="2200" b="1">
-                <a:solidFill>
-                  <a:srgbClr val="21243A"/>
-                </a:solidFill>
-                <a:latin typeface="Arial"/>
-              </a:defRPr>
-            </a:pPr>
-            <a:r>
-              <a:t>File and analysis record (continued)</a:t>
-            </a:r>
-          </a:p>
-        </p:txBody>
-      </p:sp>
-      <p:sp>
-        <p:nvSpPr>
-          <p:cNvPr id="4" name="TextBox 3"/>
-          <p:cNvSpPr txBox="1"/>
-          <p:nvPr/>
-        </p:nvSpPr>
-        <p:spPr>
-          <a:xfrm>
-            <a:off x="365760" y="6291072"/>
-            <a:ext cx="8001000" cy="365760"/>
-          </a:xfrm>
-          <a:prstGeom prst="rect">
-            <a:avLst/>
-          </a:prstGeom>
-          <a:noFill/>
-        </p:spPr>
-        <p:txBody>
-          <a:bodyPr wrap="square" lIns="0" rIns="0" tIns="0" bIns="0">
-            <a:spAutoFit/>
-          </a:bodyPr>
-          <a:lstStyle/>
-          <a:p>
-            <a:pPr>
-              <a:lnSpc>
-                <a:spcPct val="115000"/>
-              </a:lnSpc>
-              <a:spcAft>
-                <a:spcPts val="0"/>
-              </a:spcAft>
-              <a:defRPr sz="800" b="0">
-                <a:solidFill>
-                  <a:srgbClr val="545B6D"/>
-                </a:solidFill>
-                <a:latin typeface="Arial"/>
-              </a:defRPr>
-            </a:pPr>
-            <a:r>
-              <a:t>Research assessment. Ratings are not calibrated probabilities.</a:t>
-            </a:r>
-          </a:p>
-        </p:txBody>
-      </p:sp>
-      <p:sp>
-        <p:nvSpPr>
-          <p:cNvPr id="5" name="TextBox 4"/>
-          <p:cNvSpPr txBox="1"/>
-          <p:nvPr/>
-        </p:nvSpPr>
-        <p:spPr>
-          <a:xfrm>
-            <a:off x="8394192" y="6318504"/>
-            <a:ext cx="365760" cy="228600"/>
-          </a:xfrm>
-          <a:prstGeom prst="rect">
-            <a:avLst/>
-          </a:prstGeom>
-          <a:noFill/>
-        </p:spPr>
-        <p:txBody>
-          <a:bodyPr wrap="square" lIns="0" rIns="0" tIns="0" bIns="0">
-            <a:spAutoFit/>
-          </a:bodyPr>
-          <a:lstStyle/>
-          <a:p>
-            <a:pPr>
-              <a:lnSpc>
-                <a:spcPct val="115000"/>
-              </a:lnSpc>
-              <a:spcAft>
-                <a:spcPts val="0"/>
-              </a:spcAft>
-              <a:defRPr sz="900" b="0">
-                <a:solidFill>
-                  <a:srgbClr val="545B6D"/>
-                </a:solidFill>
-                <a:latin typeface="Arial"/>
-              </a:defRPr>
-            </a:pPr>
-            <a:r>
-              <a:t>22</a:t>
-            </a:r>
-          </a:p>
-        </p:txBody>
-      </p:sp>
-      <p:graphicFrame>
-        <p:nvGraphicFramePr>
-          <p:cNvPr id="6" name="Table 5"/>
-          <p:cNvGraphicFramePr>
-            <a:graphicFrameLocks noGrp="1"/>
-          </p:cNvGraphicFramePr>
-          <p:nvPr/>
-        </p:nvGraphicFramePr>
-        <p:xfrm>
-          <a:off x="365760" y="1353312"/>
-          <a:ext cx="8412479" cy="347472"/>
-        </p:xfrm>
-        <a:graphic>
-          <a:graphicData uri="http://schemas.openxmlformats.org/drawingml/2006/table">
-            <a:tbl>
-              <a:tblPr firstRow="1" bandRow="1">
-                <a:tableStyleId>{5C22544A-7EE6-4342-B048-85BDC9FD1C3A}</a:tableStyleId>
-              </a:tblPr>
-              <a:tblGrid>
-                <a:gridCol w="2271369"/>
-                <a:gridCol w="6141110"/>
-              </a:tblGrid>
-              <a:tr h="347472">
-                <a:tc>
-                  <a:txBody>
-                    <a:bodyPr wrap="none"/>
-                    <a:lstStyle/>
-                    <a:p>
-                      <a:pPr>
-                        <a:lnSpc>
-                          <a:spcPts val="1600"/>
-                        </a:lnSpc>
-                        <a:spcAft>
-                          <a:spcPts val="0"/>
-                        </a:spcAft>
-                        <a:defRPr sz="1200" b="1">
-                          <a:solidFill>
-                            <a:srgbClr val="FFFFFF"/>
-                          </a:solidFill>
-                          <a:latin typeface="Arial"/>
-                        </a:defRPr>
-                      </a:pPr>
-                      <a:r>
-                        <a:t>Field</a:t>
-                      </a:r>
-                    </a:p>
-                  </a:txBody>
-                  <a:tcPr marL="82296" marR="82296" marT="64008" marB="64008">
-                    <a:solidFill>
-                      <a:srgbClr val="16787C"/>
-                    </a:solidFill>
-                  </a:tcPr>
-                </a:tc>
-                <a:tc>
-                  <a:txBody>
-                    <a:bodyPr wrap="none"/>
-                    <a:lstStyle/>
-                    <a:p>
-                      <a:pPr>
-                        <a:lnSpc>
-                          <a:spcPts val="1600"/>
-                        </a:lnSpc>
-                        <a:spcAft>
-                          <a:spcPts val="0"/>
-                        </a:spcAft>
-                        <a:defRPr sz="1200" b="1">
-                          <a:solidFill>
-                            <a:srgbClr val="FFFFFF"/>
-                          </a:solidFill>
-                          <a:latin typeface="Arial"/>
-                        </a:defRPr>
-                      </a:pPr>
-                      <a:r>
-                        <a:t>Recorded detail</a:t>
-                      </a:r>
-                    </a:p>
-                  </a:txBody>
-                  <a:tcPr marL="82296" marR="82296" marT="64008" marB="64008">
-                    <a:solidFill>
-                      <a:srgbClr val="16787C"/>
-                    </a:solidFill>
-                  </a:tcPr>
-                </a:tc>
-              </a:tr>
-            </a:tbl>
-          </a:graphicData>
-        </a:graphic>
-      </p:graphicFrame>
-      <p:graphicFrame>
-        <p:nvGraphicFramePr>
-          <p:cNvPr id="7" name="Table 6"/>
-          <p:cNvGraphicFramePr>
-            <a:graphicFrameLocks noGrp="1"/>
-          </p:cNvGraphicFramePr>
-          <p:nvPr/>
-        </p:nvGraphicFramePr>
-        <p:xfrm>
-          <a:off x="365760" y="1700784"/>
-          <a:ext cx="8412479" cy="755904"/>
-        </p:xfrm>
-        <a:graphic>
-          <a:graphicData uri="http://schemas.openxmlformats.org/drawingml/2006/table">
-            <a:tbl>
-              <a:tblPr firstRow="1" bandRow="1">
-                <a:tableStyleId>{5C22544A-7EE6-4342-B048-85BDC9FD1C3A}</a:tableStyleId>
-              </a:tblPr>
-              <a:tblGrid>
-                <a:gridCol w="2271369"/>
-                <a:gridCol w="6141110"/>
-              </a:tblGrid>
-              <a:tr h="755904">
-                <a:tc>
-                  <a:txBody>
-                    <a:bodyPr wrap="none"/>
-                    <a:lstStyle/>
-                    <a:p>
-                      <a:pPr>
-                        <a:lnSpc>
-                          <a:spcPts val="1600"/>
-                        </a:lnSpc>
-                        <a:spcAft>
-                          <a:spcPts val="0"/>
-                        </a:spcAft>
-                        <a:defRPr sz="1200" b="0">
-                          <a:solidFill>
-                            <a:srgbClr val="21243A"/>
-                          </a:solidFill>
-                          <a:latin typeface="Arial"/>
-                        </a:defRPr>
-                      </a:pPr>
-                      <a:r>
-                        <a:t>Ingestion note 3</a:t>
-                      </a:r>
-                    </a:p>
-                  </a:txBody>
-                  <a:tcPr marL="82296" marR="82296" marT="64008" marB="64008">
-                    <a:solidFill>
-                      <a:srgbClr val="F1F7F7"/>
-                    </a:solidFill>
-                  </a:tcPr>
-                </a:tc>
-                <a:tc>
-                  <a:txBody>
-                    <a:bodyPr wrap="none"/>
-                    <a:lstStyle/>
-                    <a:p>
-                      <a:pPr>
-                        <a:lnSpc>
-                          <a:spcPts val="1600"/>
-                        </a:lnSpc>
-                        <a:spcAft>
-                          <a:spcPts val="0"/>
-                        </a:spcAft>
-                        <a:defRPr sz="1200" b="0">
-                          <a:solidFill>
-                            <a:srgbClr val="21243A"/>
-                          </a:solidFill>
-                          <a:latin typeface="Arial"/>
-                        </a:defRPr>
-                      </a:pPr>
-                      <a:r>
-                        <a:t>Method verdict-consistency-2026-09-26.1: directional model votes require</a:t>
-                      </a:r>
-                    </a:p>
-                    <a:p>
-                      <a:pPr>
-                        <a:lnSpc>
-                          <a:spcPts val="1600"/>
-                        </a:lnSpc>
-                        <a:spcAft>
-                          <a:spcPts val="0"/>
-                        </a:spcAft>
-                        <a:defRPr sz="1200" b="0">
-                          <a:solidFill>
-                            <a:srgbClr val="21243A"/>
-                          </a:solidFill>
-                          <a:latin typeface="Arial"/>
-                        </a:defRPr>
-                      </a:pPr>
-                      <a:r>
-                        <a:t>matching explicit verdicts and rating thresholds. Inconclusive replies retain their</a:t>
-                      </a:r>
-                    </a:p>
-                    <a:p>
-                      <a:pPr>
-                        <a:lnSpc>
-                          <a:spcPts val="1600"/>
-                        </a:lnSpc>
-                        <a:spcAft>
-                          <a:spcPts val="0"/>
-                        </a:spcAft>
-                        <a:defRPr sz="1200" b="0">
-                          <a:solidFill>
-                            <a:srgbClr val="21243A"/>
-                          </a:solidFill>
-                          <a:latin typeface="Arial"/>
-                        </a:defRPr>
-                      </a:pPr>
-                      <a:r>
-                        <a:t>ratings and remain undecided observations.</a:t>
-                      </a:r>
-                    </a:p>
-                  </a:txBody>
-                  <a:tcPr marL="82296" marR="82296" marT="64008" marB="64008">
-                    <a:solidFill>
-                      <a:srgbClr val="F1F7F7"/>
-                    </a:solidFill>
-                  </a:tcPr>
-                </a:tc>
-              </a:tr>
-            </a:tbl>
-          </a:graphicData>
-        </a:graphic>
-      </p:graphicFrame>
-      <p:graphicFrame>
-        <p:nvGraphicFramePr>
-          <p:cNvPr id="8" name="Table 7"/>
-          <p:cNvGraphicFramePr>
-            <a:graphicFrameLocks noGrp="1"/>
-          </p:cNvGraphicFramePr>
-          <p:nvPr/>
-        </p:nvGraphicFramePr>
-        <p:xfrm>
-          <a:off x="365760" y="2456688"/>
-          <a:ext cx="8412479" cy="959103"/>
-        </p:xfrm>
-        <a:graphic>
-          <a:graphicData uri="http://schemas.openxmlformats.org/drawingml/2006/table">
-            <a:tbl>
-              <a:tblPr firstRow="1" bandRow="1">
-                <a:tableStyleId>{5C22544A-7EE6-4342-B048-85BDC9FD1C3A}</a:tableStyleId>
-              </a:tblPr>
-              <a:tblGrid>
-                <a:gridCol w="2271369"/>
-                <a:gridCol w="6141110"/>
-              </a:tblGrid>
-              <a:tr h="959103">
-                <a:tc>
-                  <a:txBody>
-                    <a:bodyPr wrap="none"/>
-                    <a:lstStyle/>
-                    <a:p>
-                      <a:pPr>
-                        <a:lnSpc>
-                          <a:spcPts val="1600"/>
-                        </a:lnSpc>
-                        <a:spcAft>
-                          <a:spcPts val="0"/>
-                        </a:spcAft>
-                        <a:defRPr sz="1200" b="0">
-                          <a:solidFill>
-                            <a:srgbClr val="21243A"/>
-                          </a:solidFill>
-                          <a:latin typeface="Arial"/>
-                        </a:defRPr>
-                      </a:pPr>
-                      <a:r>
-                        <a:t>Ingestion note 4</a:t>
-                      </a:r>
-                    </a:p>
-                  </a:txBody>
-                  <a:tcPr marL="82296" marR="82296" marT="64008" marB="64008">
-                    <a:solidFill>
-                      <a:srgbClr val="FFFFFF"/>
-                    </a:solidFill>
-                  </a:tcPr>
-                </a:tc>
-                <a:tc>
-                  <a:txBody>
-                    <a:bodyPr wrap="none"/>
-                    <a:lstStyle/>
-                    <a:p>
-                      <a:pPr>
-                        <a:lnSpc>
-                          <a:spcPts val="1600"/>
-                        </a:lnSpc>
-                        <a:spcAft>
-                          <a:spcPts val="0"/>
-                        </a:spcAft>
-                        <a:defRPr sz="1200" b="0">
-                          <a:solidFill>
-                            <a:srgbClr val="21243A"/>
-                          </a:solidFill>
-                          <a:latin typeface="Arial"/>
-                        </a:defRPr>
-                      </a:pPr>
-                      <a:r>
-                        <a:t>Presentation copy of saved report d5854304-5dab-4b76-945b-d844e5fe7c44. The</a:t>
-                      </a:r>
-                    </a:p>
-                    <a:p>
-                      <a:pPr>
-                        <a:lnSpc>
-                          <a:spcPts val="1600"/>
-                        </a:lnSpc>
-                        <a:spcAft>
-                          <a:spcPts val="0"/>
-                        </a:spcAft>
-                        <a:defRPr sz="1200" b="0">
-                          <a:solidFill>
-                            <a:srgbClr val="21243A"/>
-                          </a:solidFill>
-                          <a:latin typeface="Arial"/>
-                        </a:defRPr>
-                      </a:pPr>
-                      <a:r>
-                        <a:t>descriptive filename replaces the earlier example ID for navigation. Original</a:t>
-                      </a:r>
-                    </a:p>
-                    <a:p>
-                      <a:pPr>
-                        <a:lnSpc>
-                          <a:spcPts val="1600"/>
-                        </a:lnSpc>
-                        <a:spcAft>
-                          <a:spcPts val="0"/>
-                        </a:spcAft>
-                        <a:defRPr sz="1200" b="0">
-                          <a:solidFill>
-                            <a:srgbClr val="21243A"/>
-                          </a:solidFill>
-                          <a:latin typeface="Arial"/>
-                        </a:defRPr>
-                      </a:pPr>
-                      <a:r>
-                        <a:t>analysis dates, provider replies, scores and acquisition context are retained; no</a:t>
-                      </a:r>
-                    </a:p>
-                    <a:p>
-                      <a:pPr>
-                        <a:lnSpc>
-                          <a:spcPts val="1600"/>
-                        </a:lnSpc>
-                        <a:spcAft>
-                          <a:spcPts val="0"/>
-                        </a:spcAft>
-                        <a:defRPr sz="1200" b="0">
-                          <a:solidFill>
-                            <a:srgbClr val="21243A"/>
-                          </a:solidFill>
-                          <a:latin typeface="Arial"/>
-                        </a:defRPr>
-                      </a:pPr>
-                      <a:r>
-                        <a:t>new model analysis.</a:t>
-                      </a:r>
-                    </a:p>
-                  </a:txBody>
-                  <a:tcPr marL="82296" marR="82296" marT="64008" marB="64008">
-                    <a:solidFill>
-                      <a:srgbClr val="FFFFFF"/>
                     </a:solidFill>
                   </a:tcPr>
                 </a:tc>
@@ -17376,7 +16839,7 @@
                         </a:defRPr>
                       </a:pPr>
                       <a:r>
-                        <a:t>inconclusive</a:t>
+                        <a:t>synthetic likely</a:t>
                       </a:r>
                     </a:p>
                   </a:txBody>
@@ -17406,7 +16869,7 @@
                         </a:defRPr>
                       </a:pPr>
                       <a:r>
-                        <a:t>58/100</a:t>
+                        <a:t>60/100</a:t>
                       </a:r>
                     </a:p>
                   </a:txBody>
@@ -17556,7 +17019,7 @@
                         </a:defRPr>
                       </a:pPr>
                       <a:r>
-                        <a:t>15/100</a:t>
+                        <a:t>20/100</a:t>
                       </a:r>
                     </a:p>
                   </a:txBody>
@@ -18632,7 +18095,7 @@
                         </a:defRPr>
                       </a:pPr>
                       <a:r>
-                        <a:t>inconclusive</a:t>
+                        <a:t>synthetic likely</a:t>
                       </a:r>
                     </a:p>
                   </a:txBody>
@@ -18833,7 +18296,7 @@
         </p:nvGraphicFramePr>
         <p:xfrm>
           <a:off x="365760" y="3797808"/>
-          <a:ext cx="8412479" cy="1568704"/>
+          <a:ext cx="8412479" cy="1365503"/>
         </p:xfrm>
         <a:graphic>
           <a:graphicData uri="http://schemas.openxmlformats.org/drawingml/2006/table">
@@ -18845,7 +18308,7 @@
                 <a:gridCol w="2271369"/>
                 <a:gridCol w="6141110"/>
               </a:tblGrid>
-              <a:tr h="1568704">
+              <a:tr h="1365503">
                 <a:tc>
                   <a:txBody>
                     <a:bodyPr wrap="none"/>
@@ -18896,121 +18359,102 @@
                         </a:defRPr>
                       </a:pPr>
                       <a:r>
-                        <a:t>Worst of 4 frames (slide 1): synthetic likelihood 58/100; tells: network diagram</a:t>
-                      </a:r>
-                    </a:p>
-                    <a:p>
-                      <a:pPr>
-                        <a:lnSpc>
-                          <a:spcPts val="1600"/>
-                        </a:lnSpc>
-                        <a:spcAft>
-                          <a:spcPts val="0"/>
-                        </a:spcAft>
-                        <a:defRPr sz="1200" b="0">
-                          <a:solidFill>
-                            <a:srgbClr val="21243A"/>
-                          </a:solidFill>
-                          <a:latin typeface="Arial"/>
-                        </a:defRPr>
-                      </a:pPr>
-                      <a:r>
-                        <a:t>geometry is approximately but not mathematically regular: uneven node spacing</a:t>
-                      </a:r>
-                    </a:p>
-                    <a:p>
-                      <a:pPr>
-                        <a:lnSpc>
-                          <a:spcPts val="1600"/>
-                        </a:lnSpc>
-                        <a:spcAft>
-                          <a:spcPts val="0"/>
-                        </a:spcAft>
-                        <a:defRPr sz="1200" b="0">
-                          <a:solidFill>
-                            <a:srgbClr val="21243A"/>
-                          </a:solidFill>
-                          <a:latin typeface="Arial"/>
-                        </a:defRPr>
-                      </a:pPr>
-                      <a:r>
-                        <a:t>and edge endpoints that do not always terminate cleanly on nodes, some edges</a:t>
-                      </a:r>
-                    </a:p>
-                    <a:p>
-                      <a:pPr>
-                        <a:lnSpc>
-                          <a:spcPts val="1600"/>
-                        </a:lnSpc>
-                        <a:spcAft>
-                          <a:spcPts val="0"/>
-                        </a:spcAft>
-                        <a:defRPr sz="1200" b="0">
-                          <a:solidFill>
-                            <a:srgbClr val="21243A"/>
-                          </a:solidFill>
-                          <a:latin typeface="Arial"/>
-                        </a:defRPr>
-                      </a:pPr>
-                      <a:r>
-                        <a:t>appear semi-transparent or softly blurred in an inconsistent way, unlike typical</a:t>
-                      </a:r>
-                    </a:p>
-                    <a:p>
-                      <a:pPr>
-                        <a:lnSpc>
-                          <a:spcPts val="1600"/>
-                        </a:lnSpc>
-                        <a:spcAft>
-                          <a:spcPts val="0"/>
-                        </a:spcAft>
-                        <a:defRPr sz="1200" b="0">
-                          <a:solidFill>
-                            <a:srgbClr val="21243A"/>
-                          </a:solidFill>
-                          <a:latin typeface="Arial"/>
-                        </a:defRPr>
-                      </a:pPr>
-                      <a:r>
-                        <a:t>crisp vector rendering, teal-to-orange colour transition across nodes is painterly</a:t>
-                      </a:r>
-                    </a:p>
-                    <a:p>
-                      <a:pPr>
-                        <a:lnSpc>
-                          <a:spcPts val="1600"/>
-                        </a:lnSpc>
-                        <a:spcAft>
-                          <a:spcPts val="0"/>
-                        </a:spcAft>
-                        <a:defRPr sz="1200" b="0">
-                          <a:solidFill>
-                            <a:srgbClr val="21243A"/>
-                          </a:solidFill>
-                          <a:latin typeface="Arial"/>
-                        </a:defRPr>
-                      </a:pPr>
-                      <a:r>
-                        <a:t>rather than rule-based, faint background polygon mesh with irregular, fading line</a:t>
-                      </a:r>
-                    </a:p>
-                    <a:p>
-                      <a:pPr>
-                        <a:lnSpc>
-                          <a:spcPts val="1600"/>
-                        </a:lnSpc>
-                        <a:spcAft>
-                          <a:spcPts val="0"/>
-                        </a:spcAft>
-                        <a:defRPr sz="1200" b="0">
-                          <a:solidFill>
-                            <a:srgbClr val="21243A"/>
-                          </a:solidFill>
-                          <a:latin typeface="Arial"/>
-                        </a:defRPr>
-                      </a:pPr>
-                      <a:r>
-                        <a:t>segments</a:t>
+                        <a:t>Worst of 4 frames (slide 1): synthetic likelihood 60/100; tells: network diagram is</a:t>
+                      </a:r>
+                    </a:p>
+                    <a:p>
+                      <a:pPr>
+                        <a:lnSpc>
+                          <a:spcPts val="1600"/>
+                        </a:lnSpc>
+                        <a:spcAft>
+                          <a:spcPts val="0"/>
+                        </a:spcAft>
+                        <a:defRPr sz="1200" b="0">
+                          <a:solidFill>
+                            <a:srgbClr val="21243A"/>
+                          </a:solidFill>
+                          <a:latin typeface="Arial"/>
+                        </a:defRPr>
+                      </a:pPr>
+                      <a:r>
+                        <a:t>decorative and roughly symmetric rather than a data-driven force-directed layout,</a:t>
+                      </a:r>
+                    </a:p>
+                    <a:p>
+                      <a:pPr>
+                        <a:lnSpc>
+                          <a:spcPts val="1600"/>
+                        </a:lnSpc>
+                        <a:spcAft>
+                          <a:spcPts val="0"/>
+                        </a:spcAft>
+                        <a:defRPr sz="1200" b="0">
+                          <a:solidFill>
+                            <a:srgbClr val="21243A"/>
+                          </a:solidFill>
+                          <a:latin typeface="Arial"/>
+                        </a:defRPr>
+                      </a:pPr>
+                      <a:r>
+                        <a:t>inconsistent node sizes and some edges ending without clear nodes,</a:t>
+                      </a:r>
+                    </a:p>
+                    <a:p>
+                      <a:pPr>
+                        <a:lnSpc>
+                          <a:spcPts val="1600"/>
+                        </a:lnSpc>
+                        <a:spcAft>
+                          <a:spcPts val="0"/>
+                        </a:spcAft>
+                        <a:defRPr sz="1200" b="0">
+                          <a:solidFill>
+                            <a:srgbClr val="21243A"/>
+                          </a:solidFill>
+                          <a:latin typeface="Arial"/>
+                        </a:defRPr>
+                      </a:pPr>
+                      <a:r>
+                        <a:t>semi-transparent, softly blurred overlapping edge layers with painterly</a:t>
+                      </a:r>
+                    </a:p>
+                    <a:p>
+                      <a:pPr>
+                        <a:lnSpc>
+                          <a:spcPts val="1600"/>
+                        </a:lnSpc>
+                        <a:spcAft>
+                          <a:spcPts val="0"/>
+                        </a:spcAft>
+                        <a:defRPr sz="1200" b="0">
+                          <a:solidFill>
+                            <a:srgbClr val="21243A"/>
+                          </a:solidFill>
+                          <a:latin typeface="Arial"/>
+                        </a:defRPr>
+                      </a:pPr>
+                      <a:r>
+                        <a:t>anti-aliasing, smooth teal-to-orange color gradient across the graph unrelated to</a:t>
+                      </a:r>
+                    </a:p>
+                    <a:p>
+                      <a:pPr>
+                        <a:lnSpc>
+                          <a:spcPts val="1600"/>
+                        </a:lnSpc>
+                        <a:spcAft>
+                          <a:spcPts val="0"/>
+                        </a:spcAft>
+                        <a:defRPr sz="1200" b="0">
+                          <a:solidFill>
+                            <a:srgbClr val="21243A"/>
+                          </a:solidFill>
+                          <a:latin typeface="Arial"/>
+                        </a:defRPr>
+                      </a:pPr>
+                      <a:r>
+                        <a:t>any legend</a:t>
                       </a:r>
                     </a:p>
                   </a:txBody>
@@ -19034,7 +18478,7 @@
           <p:nvPr/>
         </p:nvGraphicFramePr>
         <p:xfrm>
-          <a:off x="365760" y="5366512"/>
+          <a:off x="365760" y="5163312"/>
           <a:ext cx="8412479" cy="349504"/>
         </p:xfrm>
         <a:graphic>
@@ -19098,13 +18542,101 @@
                         </a:defRPr>
                       </a:pPr>
                       <a:r>
-                        <a:t>Frame slide 1: 58/100</a:t>
+                        <a:t>Frame slide 1: 60/100</a:t>
                       </a:r>
                     </a:p>
                   </a:txBody>
                   <a:tcPr marL="82296" marR="82296" marT="64008" marB="64008">
                     <a:solidFill>
                       <a:srgbClr val="FFFFFF"/>
+                    </a:solidFill>
+                  </a:tcPr>
+                </a:tc>
+              </a:tr>
+            </a:tbl>
+          </a:graphicData>
+        </a:graphic>
+      </p:graphicFrame>
+      <p:graphicFrame>
+        <p:nvGraphicFramePr>
+          <p:cNvPr id="15" name="Table 14"/>
+          <p:cNvGraphicFramePr>
+            <a:graphicFrameLocks noGrp="1"/>
+          </p:cNvGraphicFramePr>
+          <p:nvPr/>
+        </p:nvGraphicFramePr>
+        <p:xfrm>
+          <a:off x="365760" y="5512816"/>
+          <a:ext cx="8412479" cy="349504"/>
+        </p:xfrm>
+        <a:graphic>
+          <a:graphicData uri="http://schemas.openxmlformats.org/drawingml/2006/table">
+            <a:tbl>
+              <a:tblPr firstRow="1" bandRow="1">
+                <a:tableStyleId>{5C22544A-7EE6-4342-B048-85BDC9FD1C3A}</a:tableStyleId>
+              </a:tblPr>
+              <a:tblGrid>
+                <a:gridCol w="2271369"/>
+                <a:gridCol w="6141110"/>
+              </a:tblGrid>
+              <a:tr h="349504">
+                <a:tc>
+                  <a:txBody>
+                    <a:bodyPr wrap="none"/>
+                    <a:lstStyle/>
+                    <a:p>
+                      <a:pPr>
+                        <a:lnSpc>
+                          <a:spcPts val="1600"/>
+                        </a:lnSpc>
+                        <a:spcAft>
+                          <a:spcPts val="0"/>
+                        </a:spcAft>
+                        <a:defRPr sz="1200" b="0">
+                          <a:solidFill>
+                            <a:srgbClr val="21243A"/>
+                          </a:solidFill>
+                          <a:latin typeface="Arial"/>
+                        </a:defRPr>
+                      </a:pPr>
+                      <a:r>
+                        <a:t>Evidence 2</a:t>
+                      </a:r>
+                    </a:p>
+                  </a:txBody>
+                  <a:tcPr marL="82296" marR="82296" marT="64008" marB="64008">
+                    <a:solidFill>
+                      <a:srgbClr val="F1F7F7"/>
+                    </a:solidFill>
+                  </a:tcPr>
+                </a:tc>
+                <a:tc>
+                  <a:txBody>
+                    <a:bodyPr wrap="none"/>
+                    <a:lstStyle/>
+                    <a:p>
+                      <a:pPr>
+                        <a:lnSpc>
+                          <a:spcPts val="1600"/>
+                        </a:lnSpc>
+                        <a:spcAft>
+                          <a:spcPts val="0"/>
+                        </a:spcAft>
+                        <a:defRPr sz="1200" b="0">
+                          <a:solidFill>
+                            <a:srgbClr val="21243A"/>
+                          </a:solidFill>
+                          <a:latin typeface="Arial"/>
+                        </a:defRPr>
+                      </a:pPr>
+                      <a:r>
+                        <a:t>Frame slide 5: 55/100</a:t>
+                      </a:r>
+                    </a:p>
+                  </a:txBody>
+                  <a:tcPr marL="82296" marR="82296" marT="64008" marB="64008">
+                    <a:solidFill>
+                      <a:srgbClr val="F1F7F7"/>
                     </a:solidFill>
                   </a:tcPr>
                 </a:tc>
@@ -19430,43 +18962,43 @@
                         </a:defRPr>
                       </a:pPr>
                       <a:r>
-                        <a:t>Evidence 2</a:t>
-                      </a:r>
-                    </a:p>
-                  </a:txBody>
-                  <a:tcPr marL="82296" marR="82296" marT="64008" marB="64008">
-                    <a:solidFill>
-                      <a:srgbClr val="F1F7F7"/>
-                    </a:solidFill>
-                  </a:tcPr>
-                </a:tc>
-                <a:tc>
-                  <a:txBody>
-                    <a:bodyPr wrap="none"/>
-                    <a:lstStyle/>
-                    <a:p>
-                      <a:pPr>
-                        <a:lnSpc>
-                          <a:spcPts val="1600"/>
-                        </a:lnSpc>
-                        <a:spcAft>
-                          <a:spcPts val="0"/>
-                        </a:spcAft>
-                        <a:defRPr sz="1200" b="0">
-                          <a:solidFill>
-                            <a:srgbClr val="21243A"/>
-                          </a:solidFill>
-                          <a:latin typeface="Arial"/>
-                        </a:defRPr>
-                      </a:pPr>
-                      <a:r>
-                        <a:t>Frame slide 5: 58/100</a:t>
-                      </a:r>
-                    </a:p>
-                  </a:txBody>
-                  <a:tcPr marL="82296" marR="82296" marT="64008" marB="64008">
-                    <a:solidFill>
-                      <a:srgbClr val="F1F7F7"/>
+                        <a:t>Evidence 3</a:t>
+                      </a:r>
+                    </a:p>
+                  </a:txBody>
+                  <a:tcPr marL="82296" marR="82296" marT="64008" marB="64008">
+                    <a:solidFill>
+                      <a:srgbClr val="FFFFFF"/>
+                    </a:solidFill>
+                  </a:tcPr>
+                </a:tc>
+                <a:tc>
+                  <a:txBody>
+                    <a:bodyPr wrap="none"/>
+                    <a:lstStyle/>
+                    <a:p>
+                      <a:pPr>
+                        <a:lnSpc>
+                          <a:spcPts val="1600"/>
+                        </a:lnSpc>
+                        <a:spcAft>
+                          <a:spcPts val="0"/>
+                        </a:spcAft>
+                        <a:defRPr sz="1200" b="0">
+                          <a:solidFill>
+                            <a:srgbClr val="21243A"/>
+                          </a:solidFill>
+                          <a:latin typeface="Arial"/>
+                        </a:defRPr>
+                      </a:pPr>
+                      <a:r>
+                        <a:t>Frame slide 10: 58/100</a:t>
+                      </a:r>
+                    </a:p>
+                  </a:txBody>
+                  <a:tcPr marL="82296" marR="82296" marT="64008" marB="64008">
+                    <a:solidFill>
+                      <a:srgbClr val="FFFFFF"/>
                     </a:solidFill>
                   </a:tcPr>
                 </a:tc>
@@ -19518,43 +19050,43 @@
                         </a:defRPr>
                       </a:pPr>
                       <a:r>
-                        <a:t>Evidence 3</a:t>
-                      </a:r>
-                    </a:p>
-                  </a:txBody>
-                  <a:tcPr marL="82296" marR="82296" marT="64008" marB="64008">
-                    <a:solidFill>
-                      <a:srgbClr val="FFFFFF"/>
-                    </a:solidFill>
-                  </a:tcPr>
-                </a:tc>
-                <a:tc>
-                  <a:txBody>
-                    <a:bodyPr wrap="none"/>
-                    <a:lstStyle/>
-                    <a:p>
-                      <a:pPr>
-                        <a:lnSpc>
-                          <a:spcPts val="1600"/>
-                        </a:lnSpc>
-                        <a:spcAft>
-                          <a:spcPts val="0"/>
-                        </a:spcAft>
-                        <a:defRPr sz="1200" b="0">
-                          <a:solidFill>
-                            <a:srgbClr val="21243A"/>
-                          </a:solidFill>
-                          <a:latin typeface="Arial"/>
-                        </a:defRPr>
-                      </a:pPr>
-                      <a:r>
-                        <a:t>Frame slide 10: 55/100</a:t>
-                      </a:r>
-                    </a:p>
-                  </a:txBody>
-                  <a:tcPr marL="82296" marR="82296" marT="64008" marB="64008">
-                    <a:solidFill>
-                      <a:srgbClr val="FFFFFF"/>
+                        <a:t>Evidence 4</a:t>
+                      </a:r>
+                    </a:p>
+                  </a:txBody>
+                  <a:tcPr marL="82296" marR="82296" marT="64008" marB="64008">
+                    <a:solidFill>
+                      <a:srgbClr val="F1F7F7"/>
+                    </a:solidFill>
+                  </a:tcPr>
+                </a:tc>
+                <a:tc>
+                  <a:txBody>
+                    <a:bodyPr wrap="none"/>
+                    <a:lstStyle/>
+                    <a:p>
+                      <a:pPr>
+                        <a:lnSpc>
+                          <a:spcPts val="1600"/>
+                        </a:lnSpc>
+                        <a:spcAft>
+                          <a:spcPts val="0"/>
+                        </a:spcAft>
+                        <a:defRPr sz="1200" b="0">
+                          <a:solidFill>
+                            <a:srgbClr val="21243A"/>
+                          </a:solidFill>
+                          <a:latin typeface="Arial"/>
+                        </a:defRPr>
+                      </a:pPr>
+                      <a:r>
+                        <a:t>Frame slide 14: 40/100</a:t>
+                      </a:r>
+                    </a:p>
+                  </a:txBody>
+                  <a:tcPr marL="82296" marR="82296" marT="64008" marB="64008">
+                    <a:solidFill>
+                      <a:srgbClr val="F1F7F7"/>
                     </a:solidFill>
                   </a:tcPr>
                 </a:tc>
@@ -19573,7 +19105,7 @@
         </p:nvGraphicFramePr>
         <p:xfrm>
           <a:off x="365760" y="2399792"/>
-          <a:ext cx="8412479" cy="349504"/>
+          <a:ext cx="8412479" cy="552704"/>
         </p:xfrm>
         <a:graphic>
           <a:graphicData uri="http://schemas.openxmlformats.org/drawingml/2006/table">
@@ -19585,64 +19117,83 @@
                 <a:gridCol w="2271369"/>
                 <a:gridCol w="6141110"/>
               </a:tblGrid>
-              <a:tr h="349504">
-                <a:tc>
-                  <a:txBody>
-                    <a:bodyPr wrap="none"/>
-                    <a:lstStyle/>
-                    <a:p>
-                      <a:pPr>
-                        <a:lnSpc>
-                          <a:spcPts val="1600"/>
-                        </a:lnSpc>
-                        <a:spcAft>
-                          <a:spcPts val="0"/>
-                        </a:spcAft>
-                        <a:defRPr sz="1200" b="0">
-                          <a:solidFill>
-                            <a:srgbClr val="21243A"/>
-                          </a:solidFill>
-                          <a:latin typeface="Arial"/>
-                        </a:defRPr>
-                      </a:pPr>
-                      <a:r>
-                        <a:t>Evidence 4</a:t>
-                      </a:r>
-                    </a:p>
-                  </a:txBody>
-                  <a:tcPr marL="82296" marR="82296" marT="64008" marB="64008">
-                    <a:solidFill>
-                      <a:srgbClr val="F1F7F7"/>
-                    </a:solidFill>
-                  </a:tcPr>
-                </a:tc>
-                <a:tc>
-                  <a:txBody>
-                    <a:bodyPr wrap="none"/>
-                    <a:lstStyle/>
-                    <a:p>
-                      <a:pPr>
-                        <a:lnSpc>
-                          <a:spcPts val="1600"/>
-                        </a:lnSpc>
-                        <a:spcAft>
-                          <a:spcPts val="0"/>
-                        </a:spcAft>
-                        <a:defRPr sz="1200" b="0">
-                          <a:solidFill>
-                            <a:srgbClr val="21243A"/>
-                          </a:solidFill>
-                          <a:latin typeface="Arial"/>
-                        </a:defRPr>
-                      </a:pPr>
-                      <a:r>
-                        <a:t>Frame slide 14: 55/100</a:t>
-                      </a:r>
-                    </a:p>
-                  </a:txBody>
-                  <a:tcPr marL="82296" marR="82296" marT="64008" marB="64008">
-                    <a:solidFill>
-                      <a:srgbClr val="F1F7F7"/>
+              <a:tr h="552704">
+                <a:tc>
+                  <a:txBody>
+                    <a:bodyPr wrap="none"/>
+                    <a:lstStyle/>
+                    <a:p>
+                      <a:pPr>
+                        <a:lnSpc>
+                          <a:spcPts val="1600"/>
+                        </a:lnSpc>
+                        <a:spcAft>
+                          <a:spcPts val="0"/>
+                        </a:spcAft>
+                        <a:defRPr sz="1200" b="0">
+                          <a:solidFill>
+                            <a:srgbClr val="21243A"/>
+                          </a:solidFill>
+                          <a:latin typeface="Arial"/>
+                        </a:defRPr>
+                      </a:pPr>
+                      <a:r>
+                        <a:t>Evidence 5</a:t>
+                      </a:r>
+                    </a:p>
+                  </a:txBody>
+                  <a:tcPr marL="82296" marR="82296" marT="64008" marB="64008">
+                    <a:solidFill>
+                      <a:srgbClr val="FFFFFF"/>
+                    </a:solidFill>
+                  </a:tcPr>
+                </a:tc>
+                <a:tc>
+                  <a:txBody>
+                    <a:bodyPr wrap="none"/>
+                    <a:lstStyle/>
+                    <a:p>
+                      <a:pPr>
+                        <a:lnSpc>
+                          <a:spcPts val="1600"/>
+                        </a:lnSpc>
+                        <a:spcAft>
+                          <a:spcPts val="0"/>
+                        </a:spcAft>
+                        <a:defRPr sz="1200" b="0">
+                          <a:solidFill>
+                            <a:srgbClr val="21243A"/>
+                          </a:solidFill>
+                          <a:latin typeface="Arial"/>
+                        </a:defRPr>
+                      </a:pPr>
+                      <a:r>
+                        <a:t>Network diagram is decorative and roughly symmetric rather than a data-driven</a:t>
+                      </a:r>
+                    </a:p>
+                    <a:p>
+                      <a:pPr>
+                        <a:lnSpc>
+                          <a:spcPts val="1600"/>
+                        </a:lnSpc>
+                        <a:spcAft>
+                          <a:spcPts val="0"/>
+                        </a:spcAft>
+                        <a:defRPr sz="1200" b="0">
+                          <a:solidFill>
+                            <a:srgbClr val="21243A"/>
+                          </a:solidFill>
+                          <a:latin typeface="Arial"/>
+                        </a:defRPr>
+                      </a:pPr>
+                      <a:r>
+                        <a:t>force-directed layout</a:t>
+                      </a:r>
+                    </a:p>
+                  </a:txBody>
+                  <a:tcPr marL="82296" marR="82296" marT="64008" marB="64008">
+                    <a:solidFill>
+                      <a:srgbClr val="FFFFFF"/>
                     </a:solidFill>
                   </a:tcPr>
                 </a:tc>
@@ -19660,8 +19211,8 @@
           <p:nvPr/>
         </p:nvGraphicFramePr>
         <p:xfrm>
-          <a:off x="365760" y="2749296"/>
-          <a:ext cx="8412479" cy="755904"/>
+          <a:off x="365760" y="2952496"/>
+          <a:ext cx="8412479" cy="349504"/>
         </p:xfrm>
         <a:graphic>
           <a:graphicData uri="http://schemas.openxmlformats.org/drawingml/2006/table">
@@ -19673,102 +19224,64 @@
                 <a:gridCol w="2271369"/>
                 <a:gridCol w="6141110"/>
               </a:tblGrid>
-              <a:tr h="755904">
-                <a:tc>
-                  <a:txBody>
-                    <a:bodyPr wrap="none"/>
-                    <a:lstStyle/>
-                    <a:p>
-                      <a:pPr>
-                        <a:lnSpc>
-                          <a:spcPts val="1600"/>
-                        </a:lnSpc>
-                        <a:spcAft>
-                          <a:spcPts val="0"/>
-                        </a:spcAft>
-                        <a:defRPr sz="1200" b="0">
-                          <a:solidFill>
-                            <a:srgbClr val="21243A"/>
-                          </a:solidFill>
-                          <a:latin typeface="Arial"/>
-                        </a:defRPr>
-                      </a:pPr>
-                      <a:r>
-                        <a:t>Evidence 5</a:t>
-                      </a:r>
-                    </a:p>
-                  </a:txBody>
-                  <a:tcPr marL="82296" marR="82296" marT="64008" marB="64008">
-                    <a:solidFill>
-                      <a:srgbClr val="FFFFFF"/>
-                    </a:solidFill>
-                  </a:tcPr>
-                </a:tc>
-                <a:tc>
-                  <a:txBody>
-                    <a:bodyPr wrap="none"/>
-                    <a:lstStyle/>
-                    <a:p>
-                      <a:pPr>
-                        <a:lnSpc>
-                          <a:spcPts val="1600"/>
-                        </a:lnSpc>
-                        <a:spcAft>
-                          <a:spcPts val="0"/>
-                        </a:spcAft>
-                        <a:defRPr sz="1200" b="0">
-                          <a:solidFill>
-                            <a:srgbClr val="21243A"/>
-                          </a:solidFill>
-                          <a:latin typeface="Arial"/>
-                        </a:defRPr>
-                      </a:pPr>
-                      <a:r>
-                        <a:t>Network diagram geometry is approximately but not mathematically regular:</a:t>
-                      </a:r>
-                    </a:p>
-                    <a:p>
-                      <a:pPr>
-                        <a:lnSpc>
-                          <a:spcPts val="1600"/>
-                        </a:lnSpc>
-                        <a:spcAft>
-                          <a:spcPts val="0"/>
-                        </a:spcAft>
-                        <a:defRPr sz="1200" b="0">
-                          <a:solidFill>
-                            <a:srgbClr val="21243A"/>
-                          </a:solidFill>
-                          <a:latin typeface="Arial"/>
-                        </a:defRPr>
-                      </a:pPr>
-                      <a:r>
-                        <a:t>uneven node spacing and edge endpoints that do not always terminate cleanly on</a:t>
-                      </a:r>
-                    </a:p>
-                    <a:p>
-                      <a:pPr>
-                        <a:lnSpc>
-                          <a:spcPts val="1600"/>
-                        </a:lnSpc>
-                        <a:spcAft>
-                          <a:spcPts val="0"/>
-                        </a:spcAft>
-                        <a:defRPr sz="1200" b="0">
-                          <a:solidFill>
-                            <a:srgbClr val="21243A"/>
-                          </a:solidFill>
-                          <a:latin typeface="Arial"/>
-                        </a:defRPr>
-                      </a:pPr>
-                      <a:r>
-                        <a:t>nodes</a:t>
-                      </a:r>
-                    </a:p>
-                  </a:txBody>
-                  <a:tcPr marL="82296" marR="82296" marT="64008" marB="64008">
-                    <a:solidFill>
-                      <a:srgbClr val="FFFFFF"/>
+              <a:tr h="349504">
+                <a:tc>
+                  <a:txBody>
+                    <a:bodyPr wrap="none"/>
+                    <a:lstStyle/>
+                    <a:p>
+                      <a:pPr>
+                        <a:lnSpc>
+                          <a:spcPts val="1600"/>
+                        </a:lnSpc>
+                        <a:spcAft>
+                          <a:spcPts val="0"/>
+                        </a:spcAft>
+                        <a:defRPr sz="1200" b="0">
+                          <a:solidFill>
+                            <a:srgbClr val="21243A"/>
+                          </a:solidFill>
+                          <a:latin typeface="Arial"/>
+                        </a:defRPr>
+                      </a:pPr>
+                      <a:r>
+                        <a:t>Evidence 6</a:t>
+                      </a:r>
+                    </a:p>
+                  </a:txBody>
+                  <a:tcPr marL="82296" marR="82296" marT="64008" marB="64008">
+                    <a:solidFill>
+                      <a:srgbClr val="F1F7F7"/>
+                    </a:solidFill>
+                  </a:tcPr>
+                </a:tc>
+                <a:tc>
+                  <a:txBody>
+                    <a:bodyPr wrap="none"/>
+                    <a:lstStyle/>
+                    <a:p>
+                      <a:pPr>
+                        <a:lnSpc>
+                          <a:spcPts val="1600"/>
+                        </a:lnSpc>
+                        <a:spcAft>
+                          <a:spcPts val="0"/>
+                        </a:spcAft>
+                        <a:defRPr sz="1200" b="0">
+                          <a:solidFill>
+                            <a:srgbClr val="21243A"/>
+                          </a:solidFill>
+                          <a:latin typeface="Arial"/>
+                        </a:defRPr>
+                      </a:pPr>
+                      <a:r>
+                        <a:t>Inconsistent node sizes and some edges ending without clear nodes</a:t>
+                      </a:r>
+                    </a:p>
+                  </a:txBody>
+                  <a:tcPr marL="82296" marR="82296" marT="64008" marB="64008">
+                    <a:solidFill>
+                      <a:srgbClr val="F1F7F7"/>
                     </a:solidFill>
                   </a:tcPr>
                 </a:tc>
@@ -19786,7 +19299,7 @@
           <p:nvPr/>
         </p:nvGraphicFramePr>
         <p:xfrm>
-          <a:off x="365760" y="3505200"/>
+          <a:off x="365760" y="3301999"/>
           <a:ext cx="8412479" cy="552704"/>
         </p:xfrm>
         <a:graphic>
@@ -19820,62 +19333,62 @@
                         </a:defRPr>
                       </a:pPr>
                       <a:r>
-                        <a:t>Evidence 6</a:t>
-                      </a:r>
-                    </a:p>
-                  </a:txBody>
-                  <a:tcPr marL="82296" marR="82296" marT="64008" marB="64008">
-                    <a:solidFill>
-                      <a:srgbClr val="F1F7F7"/>
-                    </a:solidFill>
-                  </a:tcPr>
-                </a:tc>
-                <a:tc>
-                  <a:txBody>
-                    <a:bodyPr wrap="none"/>
-                    <a:lstStyle/>
-                    <a:p>
-                      <a:pPr>
-                        <a:lnSpc>
-                          <a:spcPts val="1600"/>
-                        </a:lnSpc>
-                        <a:spcAft>
-                          <a:spcPts val="0"/>
-                        </a:spcAft>
-                        <a:defRPr sz="1200" b="0">
-                          <a:solidFill>
-                            <a:srgbClr val="21243A"/>
-                          </a:solidFill>
-                          <a:latin typeface="Arial"/>
-                        </a:defRPr>
-                      </a:pPr>
-                      <a:r>
-                        <a:t>Some edges appear semi-transparent or softly blurred in an inconsistent way,</a:t>
-                      </a:r>
-                    </a:p>
-                    <a:p>
-                      <a:pPr>
-                        <a:lnSpc>
-                          <a:spcPts val="1600"/>
-                        </a:lnSpc>
-                        <a:spcAft>
-                          <a:spcPts val="0"/>
-                        </a:spcAft>
-                        <a:defRPr sz="1200" b="0">
-                          <a:solidFill>
-                            <a:srgbClr val="21243A"/>
-                          </a:solidFill>
-                          <a:latin typeface="Arial"/>
-                        </a:defRPr>
-                      </a:pPr>
-                      <a:r>
-                        <a:t>unlike typical crisp vector rendering</a:t>
-                      </a:r>
-                    </a:p>
-                  </a:txBody>
-                  <a:tcPr marL="82296" marR="82296" marT="64008" marB="64008">
-                    <a:solidFill>
-                      <a:srgbClr val="F1F7F7"/>
+                        <a:t>Evidence 7</a:t>
+                      </a:r>
+                    </a:p>
+                  </a:txBody>
+                  <a:tcPr marL="82296" marR="82296" marT="64008" marB="64008">
+                    <a:solidFill>
+                      <a:srgbClr val="FFFFFF"/>
+                    </a:solidFill>
+                  </a:tcPr>
+                </a:tc>
+                <a:tc>
+                  <a:txBody>
+                    <a:bodyPr wrap="none"/>
+                    <a:lstStyle/>
+                    <a:p>
+                      <a:pPr>
+                        <a:lnSpc>
+                          <a:spcPts val="1600"/>
+                        </a:lnSpc>
+                        <a:spcAft>
+                          <a:spcPts val="0"/>
+                        </a:spcAft>
+                        <a:defRPr sz="1200" b="0">
+                          <a:solidFill>
+                            <a:srgbClr val="21243A"/>
+                          </a:solidFill>
+                          <a:latin typeface="Arial"/>
+                        </a:defRPr>
+                      </a:pPr>
+                      <a:r>
+                        <a:t>Semi-transparent, softly blurred overlapping edge layers with painterly</a:t>
+                      </a:r>
+                    </a:p>
+                    <a:p>
+                      <a:pPr>
+                        <a:lnSpc>
+                          <a:spcPts val="1600"/>
+                        </a:lnSpc>
+                        <a:spcAft>
+                          <a:spcPts val="0"/>
+                        </a:spcAft>
+                        <a:defRPr sz="1200" b="0">
+                          <a:solidFill>
+                            <a:srgbClr val="21243A"/>
+                          </a:solidFill>
+                          <a:latin typeface="Arial"/>
+                        </a:defRPr>
+                      </a:pPr>
+                      <a:r>
+                        <a:t>anti-aliasing</a:t>
+                      </a:r>
+                    </a:p>
+                  </a:txBody>
+                  <a:tcPr marL="82296" marR="82296" marT="64008" marB="64008">
+                    <a:solidFill>
+                      <a:srgbClr val="FFFFFF"/>
                     </a:solidFill>
                   </a:tcPr>
                 </a:tc>
@@ -19893,7 +19406,7 @@
           <p:nvPr/>
         </p:nvGraphicFramePr>
         <p:xfrm>
-          <a:off x="365760" y="4057904"/>
+          <a:off x="365760" y="3854704"/>
           <a:ext cx="8412479" cy="349504"/>
         </p:xfrm>
         <a:graphic>
@@ -19927,43 +19440,43 @@
                         </a:defRPr>
                       </a:pPr>
                       <a:r>
-                        <a:t>Evidence 7</a:t>
-                      </a:r>
-                    </a:p>
-                  </a:txBody>
-                  <a:tcPr marL="82296" marR="82296" marT="64008" marB="64008">
-                    <a:solidFill>
-                      <a:srgbClr val="FFFFFF"/>
-                    </a:solidFill>
-                  </a:tcPr>
-                </a:tc>
-                <a:tc>
-                  <a:txBody>
-                    <a:bodyPr wrap="none"/>
-                    <a:lstStyle/>
-                    <a:p>
-                      <a:pPr>
-                        <a:lnSpc>
-                          <a:spcPts val="1600"/>
-                        </a:lnSpc>
-                        <a:spcAft>
-                          <a:spcPts val="0"/>
-                        </a:spcAft>
-                        <a:defRPr sz="1200" b="0">
-                          <a:solidFill>
-                            <a:srgbClr val="21243A"/>
-                          </a:solidFill>
-                          <a:latin typeface="Arial"/>
-                        </a:defRPr>
-                      </a:pPr>
-                      <a:r>
-                        <a:t>Teal-to-orange colour transition across nodes is painterly rather than rule-based</a:t>
-                      </a:r>
-                    </a:p>
-                  </a:txBody>
-                  <a:tcPr marL="82296" marR="82296" marT="64008" marB="64008">
-                    <a:solidFill>
-                      <a:srgbClr val="FFFFFF"/>
+                        <a:t>Evidence 8</a:t>
+                      </a:r>
+                    </a:p>
+                  </a:txBody>
+                  <a:tcPr marL="82296" marR="82296" marT="64008" marB="64008">
+                    <a:solidFill>
+                      <a:srgbClr val="F1F7F7"/>
+                    </a:solidFill>
+                  </a:tcPr>
+                </a:tc>
+                <a:tc>
+                  <a:txBody>
+                    <a:bodyPr wrap="none"/>
+                    <a:lstStyle/>
+                    <a:p>
+                      <a:pPr>
+                        <a:lnSpc>
+                          <a:spcPts val="1600"/>
+                        </a:lnSpc>
+                        <a:spcAft>
+                          <a:spcPts val="0"/>
+                        </a:spcAft>
+                        <a:defRPr sz="1200" b="0">
+                          <a:solidFill>
+                            <a:srgbClr val="21243A"/>
+                          </a:solidFill>
+                          <a:latin typeface="Arial"/>
+                        </a:defRPr>
+                      </a:pPr>
+                      <a:r>
+                        <a:t>Smooth teal-to-orange color gradient across the graph unrelated to any legend</a:t>
+                      </a:r>
+                    </a:p>
+                  </a:txBody>
+                  <a:tcPr marL="82296" marR="82296" marT="64008" marB="64008">
+                    <a:solidFill>
+                      <a:srgbClr val="F1F7F7"/>
                     </a:solidFill>
                   </a:tcPr>
                 </a:tc>
@@ -19981,7 +19494,7 @@
           <p:nvPr/>
         </p:nvGraphicFramePr>
         <p:xfrm>
-          <a:off x="365760" y="4407408"/>
+          <a:off x="365760" y="4204208"/>
           <a:ext cx="8412479" cy="349504"/>
         </p:xfrm>
         <a:graphic>
@@ -20015,43 +19528,43 @@
                         </a:defRPr>
                       </a:pPr>
                       <a:r>
-                        <a:t>Evidence 8</a:t>
-                      </a:r>
-                    </a:p>
-                  </a:txBody>
-                  <a:tcPr marL="82296" marR="82296" marT="64008" marB="64008">
-                    <a:solidFill>
-                      <a:srgbClr val="F1F7F7"/>
-                    </a:solidFill>
-                  </a:tcPr>
-                </a:tc>
-                <a:tc>
-                  <a:txBody>
-                    <a:bodyPr wrap="none"/>
-                    <a:lstStyle/>
-                    <a:p>
-                      <a:pPr>
-                        <a:lnSpc>
-                          <a:spcPts val="1600"/>
-                        </a:lnSpc>
-                        <a:spcAft>
-                          <a:spcPts val="0"/>
-                        </a:spcAft>
-                        <a:defRPr sz="1200" b="0">
-                          <a:solidFill>
-                            <a:srgbClr val="21243A"/>
-                          </a:solidFill>
-                          <a:latin typeface="Arial"/>
-                        </a:defRPr>
-                      </a:pPr>
-                      <a:r>
-                        <a:t>Faint background polygon mesh with irregular, fading line segments</a:t>
-                      </a:r>
-                    </a:p>
-                  </a:txBody>
-                  <a:tcPr marL="82296" marR="82296" marT="64008" marB="64008">
-                    <a:solidFill>
-                      <a:srgbClr val="F1F7F7"/>
+                        <a:t>Evidence 9</a:t>
+                      </a:r>
+                    </a:p>
+                  </a:txBody>
+                  <a:tcPr marL="82296" marR="82296" marT="64008" marB="64008">
+                    <a:solidFill>
+                      <a:srgbClr val="FFFFFF"/>
+                    </a:solidFill>
+                  </a:tcPr>
+                </a:tc>
+                <a:tc>
+                  <a:txBody>
+                    <a:bodyPr wrap="none"/>
+                    <a:lstStyle/>
+                    <a:p>
+                      <a:pPr>
+                        <a:lnSpc>
+                          <a:spcPts val="1600"/>
+                        </a:lnSpc>
+                        <a:spcAft>
+                          <a:spcPts val="0"/>
+                        </a:spcAft>
+                        <a:defRPr sz="1200" b="0">
+                          <a:solidFill>
+                            <a:srgbClr val="21243A"/>
+                          </a:solidFill>
+                          <a:latin typeface="Arial"/>
+                        </a:defRPr>
+                      </a:pPr>
+                      <a:r>
+                        <a:t>Faint low-poly mesh background typical of generated slide art</a:t>
+                      </a:r>
+                    </a:p>
+                  </a:txBody>
+                  <a:tcPr marL="82296" marR="82296" marT="64008" marB="64008">
+                    <a:solidFill>
+                      <a:srgbClr val="FFFFFF"/>
                     </a:solidFill>
                   </a:tcPr>
                 </a:tc>
@@ -20069,7 +19582,7 @@
           <p:nvPr/>
         </p:nvGraphicFramePr>
         <p:xfrm>
-          <a:off x="365760" y="4756912"/>
+          <a:off x="365760" y="4553712"/>
           <a:ext cx="8412479" cy="552704"/>
         </p:xfrm>
         <a:graphic>
@@ -20103,62 +19616,62 @@
                         </a:defRPr>
                       </a:pPr>
                       <a:r>
-                        <a:t>Evidence 9</a:t>
-                      </a:r>
-                    </a:p>
-                  </a:txBody>
-                  <a:tcPr marL="82296" marR="82296" marT="64008" marB="64008">
-                    <a:solidFill>
-                      <a:srgbClr val="FFFFFF"/>
-                    </a:solidFill>
-                  </a:tcPr>
-                </a:tc>
-                <a:tc>
-                  <a:txBody>
-                    <a:bodyPr wrap="none"/>
-                    <a:lstStyle/>
-                    <a:p>
-                      <a:pPr>
-                        <a:lnSpc>
-                          <a:spcPts val="1600"/>
-                        </a:lnSpc>
-                        <a:spcAft>
-                          <a:spcPts val="0"/>
-                        </a:spcAft>
-                        <a:defRPr sz="1200" b="0">
-                          <a:solidFill>
-                            <a:srgbClr val="21243A"/>
-                          </a:solidFill>
-                          <a:latin typeface="Arial"/>
-                        </a:defRPr>
-                      </a:pPr>
-                      <a:r>
-                        <a:t>Typography is clean, correctly spelled and consistently kerned, which fits either</a:t>
-                      </a:r>
-                    </a:p>
-                    <a:p>
-                      <a:pPr>
-                        <a:lnSpc>
-                          <a:spcPts val="1600"/>
-                        </a:lnSpc>
-                        <a:spcAft>
-                          <a:spcPts val="0"/>
-                        </a:spcAft>
-                        <a:defRPr sz="1200" b="0">
-                          <a:solidFill>
-                            <a:srgbClr val="21243A"/>
-                          </a:solidFill>
-                          <a:latin typeface="Arial"/>
-                        </a:defRPr>
-                      </a:pPr>
-                      <a:r>
-                        <a:t>conventional slide software or a modern text-capable image generator</a:t>
-                      </a:r>
-                    </a:p>
-                  </a:txBody>
-                  <a:tcPr marL="82296" marR="82296" marT="64008" marB="64008">
-                    <a:solidFill>
-                      <a:srgbClr val="FFFFFF"/>
+                        <a:t>Evidence 10</a:t>
+                      </a:r>
+                    </a:p>
+                  </a:txBody>
+                  <a:tcPr marL="82296" marR="82296" marT="64008" marB="64008">
+                    <a:solidFill>
+                      <a:srgbClr val="F1F7F7"/>
+                    </a:solidFill>
+                  </a:tcPr>
+                </a:tc>
+                <a:tc>
+                  <a:txBody>
+                    <a:bodyPr wrap="none"/>
+                    <a:lstStyle/>
+                    <a:p>
+                      <a:pPr>
+                        <a:lnSpc>
+                          <a:spcPts val="1600"/>
+                        </a:lnSpc>
+                        <a:spcAft>
+                          <a:spcPts val="0"/>
+                        </a:spcAft>
+                        <a:defRPr sz="1200" b="0">
+                          <a:solidFill>
+                            <a:srgbClr val="21243A"/>
+                          </a:solidFill>
+                          <a:latin typeface="Arial"/>
+                        </a:defRPr>
+                      </a:pPr>
+                      <a:r>
+                        <a:t>Text is crisply and correctly rendered, consistent with either a design tool or a</a:t>
+                      </a:r>
+                    </a:p>
+                    <a:p>
+                      <a:pPr>
+                        <a:lnSpc>
+                          <a:spcPts val="1600"/>
+                        </a:lnSpc>
+                        <a:spcAft>
+                          <a:spcPts val="0"/>
+                        </a:spcAft>
+                        <a:defRPr sz="1200" b="0">
+                          <a:solidFill>
+                            <a:srgbClr val="21243A"/>
+                          </a:solidFill>
+                          <a:latin typeface="Arial"/>
+                        </a:defRPr>
+                      </a:pPr>
+                      <a:r>
+                        <a:t>modern text-capable generator</a:t>
+                      </a:r>
+                    </a:p>
+                  </a:txBody>
+                  <a:tcPr marL="82296" marR="82296" marT="64008" marB="64008">
+                    <a:solidFill>
+                      <a:srgbClr val="F1F7F7"/>
                     </a:solidFill>
                   </a:tcPr>
                 </a:tc>
@@ -20176,7 +19689,7 @@
           <p:nvPr/>
         </p:nvGraphicFramePr>
         <p:xfrm>
-          <a:off x="365760" y="5309616"/>
+          <a:off x="365760" y="5106416"/>
           <a:ext cx="8412479" cy="552704"/>
         </p:xfrm>
         <a:graphic>
@@ -20210,62 +19723,62 @@
                         </a:defRPr>
                       </a:pPr>
                       <a:r>
-                        <a:t>Evidence 10</a:t>
-                      </a:r>
-                    </a:p>
-                  </a:txBody>
-                  <a:tcPr marL="82296" marR="82296" marT="64008" marB="64008">
-                    <a:solidFill>
-                      <a:srgbClr val="F1F7F7"/>
-                    </a:solidFill>
-                  </a:tcPr>
-                </a:tc>
-                <a:tc>
-                  <a:txBody>
-                    <a:bodyPr wrap="none"/>
-                    <a:lstStyle/>
-                    <a:p>
-                      <a:pPr>
-                        <a:lnSpc>
-                          <a:spcPts val="1600"/>
-                        </a:lnSpc>
-                        <a:spcAft>
-                          <a:spcPts val="0"/>
-                        </a:spcAft>
-                        <a:defRPr sz="1200" b="0">
-                          <a:solidFill>
-                            <a:srgbClr val="21243A"/>
-                          </a:solidFill>
-                          <a:latin typeface="Arial"/>
-                        </a:defRPr>
-                      </a:pPr>
-                      <a:r>
-                        <a:t>No camera signals (no sensor noise, lens blur or perspective) because this is a flat</a:t>
-                      </a:r>
-                    </a:p>
-                    <a:p>
-                      <a:pPr>
-                        <a:lnSpc>
-                          <a:spcPts val="1600"/>
-                        </a:lnSpc>
-                        <a:spcAft>
-                          <a:spcPts val="0"/>
-                        </a:spcAft>
-                        <a:defRPr sz="1200" b="0">
-                          <a:solidFill>
-                            <a:srgbClr val="21243A"/>
-                          </a:solidFill>
-                          <a:latin typeface="Arial"/>
-                        </a:defRPr>
-                      </a:pPr>
-                      <a:r>
-                        <a:t>digital graphic, so photographic forensics do not apply</a:t>
-                      </a:r>
-                    </a:p>
-                  </a:txBody>
-                  <a:tcPr marL="82296" marR="82296" marT="64008" marB="64008">
-                    <a:solidFill>
-                      <a:srgbClr val="F1F7F7"/>
+                        <a:t>Evidence 11</a:t>
+                      </a:r>
+                    </a:p>
+                  </a:txBody>
+                  <a:tcPr marL="82296" marR="82296" marT="64008" marB="64008">
+                    <a:solidFill>
+                      <a:srgbClr val="FFFFFF"/>
+                    </a:solidFill>
+                  </a:tcPr>
+                </a:tc>
+                <a:tc>
+                  <a:txBody>
+                    <a:bodyPr wrap="none"/>
+                    <a:lstStyle/>
+                    <a:p>
+                      <a:pPr>
+                        <a:lnSpc>
+                          <a:spcPts val="1600"/>
+                        </a:lnSpc>
+                        <a:spcAft>
+                          <a:spcPts val="0"/>
+                        </a:spcAft>
+                        <a:defRPr sz="1200" b="0">
+                          <a:solidFill>
+                            <a:srgbClr val="21243A"/>
+                          </a:solidFill>
+                          <a:latin typeface="Arial"/>
+                        </a:defRPr>
+                      </a:pPr>
+                      <a:r>
+                        <a:t>No camera-origin signals (vector-style graphic, no sensor noise or lens</a:t>
+                      </a:r>
+                    </a:p>
+                    <a:p>
+                      <a:pPr>
+                        <a:lnSpc>
+                          <a:spcPts val="1600"/>
+                        </a:lnSpc>
+                        <a:spcAft>
+                          <a:spcPts val="0"/>
+                        </a:spcAft>
+                        <a:defRPr sz="1200" b="0">
+                          <a:solidFill>
+                            <a:srgbClr val="21243A"/>
+                          </a:solidFill>
+                          <a:latin typeface="Arial"/>
+                        </a:defRPr>
+                      </a:pPr>
+                      <a:r>
+                        <a:t>characteristics)</a:t>
+                      </a:r>
+                    </a:p>
+                  </a:txBody>
+                  <a:tcPr marL="82296" marR="82296" marT="64008" marB="64008">
+                    <a:solidFill>
+                      <a:srgbClr val="FFFFFF"/>
                     </a:solidFill>
                   </a:tcPr>
                 </a:tc>
@@ -20558,7 +20071,7 @@
         </p:nvGraphicFramePr>
         <p:xfrm>
           <a:off x="365760" y="1700784"/>
-          <a:ext cx="8412479" cy="552704"/>
+          <a:ext cx="8412479" cy="959103"/>
         </p:xfrm>
         <a:graphic>
           <a:graphicData uri="http://schemas.openxmlformats.org/drawingml/2006/table">
@@ -20570,114 +20083,7 @@
                 <a:gridCol w="2271369"/>
                 <a:gridCol w="6141110"/>
               </a:tblGrid>
-              <a:tr h="552704">
-                <a:tc>
-                  <a:txBody>
-                    <a:bodyPr wrap="none"/>
-                    <a:lstStyle/>
-                    <a:p>
-                      <a:pPr>
-                        <a:lnSpc>
-                          <a:spcPts val="1600"/>
-                        </a:lnSpc>
-                        <a:spcAft>
-                          <a:spcPts val="0"/>
-                        </a:spcAft>
-                        <a:defRPr sz="1200" b="0">
-                          <a:solidFill>
-                            <a:srgbClr val="21243A"/>
-                          </a:solidFill>
-                          <a:latin typeface="Arial"/>
-                        </a:defRPr>
-                      </a:pPr>
-                      <a:r>
-                        <a:t>Evidence 11</a:t>
-                      </a:r>
-                    </a:p>
-                  </a:txBody>
-                  <a:tcPr marL="82296" marR="82296" marT="64008" marB="64008">
-                    <a:solidFill>
-                      <a:srgbClr val="FFFFFF"/>
-                    </a:solidFill>
-                  </a:tcPr>
-                </a:tc>
-                <a:tc>
-                  <a:txBody>
-                    <a:bodyPr wrap="none"/>
-                    <a:lstStyle/>
-                    <a:p>
-                      <a:pPr>
-                        <a:lnSpc>
-                          <a:spcPts val="1600"/>
-                        </a:lnSpc>
-                        <a:spcAft>
-                          <a:spcPts val="0"/>
-                        </a:spcAft>
-                        <a:defRPr sz="1200" b="0">
-                          <a:solidFill>
-                            <a:srgbClr val="21243A"/>
-                          </a:solidFill>
-                          <a:latin typeface="Arial"/>
-                        </a:defRPr>
-                      </a:pPr>
-                      <a:r>
-                        <a:t>Filename indicates a PowerPoint slide export, a plausible conventional design</a:t>
-                      </a:r>
-                    </a:p>
-                    <a:p>
-                      <a:pPr>
-                        <a:lnSpc>
-                          <a:spcPts val="1600"/>
-                        </a:lnSpc>
-                        <a:spcAft>
-                          <a:spcPts val="0"/>
-                        </a:spcAft>
-                        <a:defRPr sz="1200" b="0">
-                          <a:solidFill>
-                            <a:srgbClr val="21243A"/>
-                          </a:solidFill>
-                          <a:latin typeface="Arial"/>
-                        </a:defRPr>
-                      </a:pPr>
-                      <a:r>
-                        <a:t>origin</a:t>
-                      </a:r>
-                    </a:p>
-                  </a:txBody>
-                  <a:tcPr marL="82296" marR="82296" marT="64008" marB="64008">
-                    <a:solidFill>
-                      <a:srgbClr val="FFFFFF"/>
-                    </a:solidFill>
-                  </a:tcPr>
-                </a:tc>
-              </a:tr>
-            </a:tbl>
-          </a:graphicData>
-        </a:graphic>
-      </p:graphicFrame>
-      <p:graphicFrame>
-        <p:nvGraphicFramePr>
-          <p:cNvPr id="8" name="Table 7"/>
-          <p:cNvGraphicFramePr>
-            <a:graphicFrameLocks noGrp="1"/>
-          </p:cNvGraphicFramePr>
-          <p:nvPr/>
-        </p:nvGraphicFramePr>
-        <p:xfrm>
-          <a:off x="365760" y="2253488"/>
-          <a:ext cx="8412479" cy="1162304"/>
-        </p:xfrm>
-        <a:graphic>
-          <a:graphicData uri="http://schemas.openxmlformats.org/drawingml/2006/table">
-            <a:tbl>
-              <a:tblPr firstRow="1" bandRow="1">
-                <a:tableStyleId>{5C22544A-7EE6-4342-B048-85BDC9FD1C3A}</a:tableStyleId>
-              </a:tblPr>
-              <a:tblGrid>
-                <a:gridCol w="2271369"/>
-                <a:gridCol w="6141110"/>
-              </a:tblGrid>
-              <a:tr h="1162304">
+              <a:tr h="959103">
                 <a:tc>
                   <a:txBody>
                     <a:bodyPr wrap="none"/>
@@ -20728,83 +20134,64 @@
                         </a:defRPr>
                       </a:pPr>
                       <a:r>
-                        <a:t>Caveat: This is a flat designed graphic, so camera-based forensic cues are absent.</a:t>
-                      </a:r>
-                    </a:p>
-                    <a:p>
-                      <a:pPr>
-                        <a:lnSpc>
-                          <a:spcPts val="1600"/>
-                        </a:lnSpc>
-                        <a:spcAft>
-                          <a:spcPts val="0"/>
-                        </a:spcAft>
-                        <a:defRPr sz="1200" b="0">
-                          <a:solidFill>
-                            <a:srgbClr val="21243A"/>
-                          </a:solidFill>
-                          <a:latin typeface="Arial"/>
-                        </a:defRPr>
-                      </a:pPr>
-                      <a:r>
-                        <a:t>The irregular network rendering suggests an AI image generator but could also</a:t>
-                      </a:r>
-                    </a:p>
-                    <a:p>
-                      <a:pPr>
-                        <a:lnSpc>
-                          <a:spcPts val="1600"/>
-                        </a:lnSpc>
-                        <a:spcAft>
-                          <a:spcPts val="0"/>
-                        </a:spcAft>
-                        <a:defRPr sz="1200" b="0">
-                          <a:solidFill>
-                            <a:srgbClr val="21243A"/>
-                          </a:solidFill>
-                          <a:latin typeface="Arial"/>
-                        </a:defRPr>
-                      </a:pPr>
-                      <a:r>
-                        <a:t>come from design or graph-visualisation software. Checking the source .pptx file,</a:t>
-                      </a:r>
-                    </a:p>
-                    <a:p>
-                      <a:pPr>
-                        <a:lnSpc>
-                          <a:spcPts val="1600"/>
-                        </a:lnSpc>
-                        <a:spcAft>
-                          <a:spcPts val="0"/>
-                        </a:spcAft>
-                        <a:defRPr sz="1200" b="0">
-                          <a:solidFill>
-                            <a:srgbClr val="21243A"/>
-                          </a:solidFill>
-                          <a:latin typeface="Arial"/>
-                        </a:defRPr>
-                      </a:pPr>
-                      <a:r>
-                        <a:t>its metadata and the authoring tool history would be more decisive than visual</a:t>
-                      </a:r>
-                    </a:p>
-                    <a:p>
-                      <a:pPr>
-                        <a:lnSpc>
-                          <a:spcPts val="1600"/>
-                        </a:lnSpc>
-                        <a:spcAft>
-                          <a:spcPts val="0"/>
-                        </a:spcAft>
-                        <a:defRPr sz="1200" b="0">
-                          <a:solidFill>
-                            <a:srgbClr val="21243A"/>
-                          </a:solidFill>
-                          <a:latin typeface="Arial"/>
-                        </a:defRPr>
-                      </a:pPr>
-                      <a:r>
-                        <a:t>inspection.</a:t>
+                        <a:t>Caveat: This is a graphic, not a photo, so camera-authenticity cues do not apply.</a:t>
+                      </a:r>
+                    </a:p>
+                    <a:p>
+                      <a:pPr>
+                        <a:lnSpc>
+                          <a:spcPts val="1600"/>
+                        </a:lnSpc>
+                        <a:spcAft>
+                          <a:spcPts val="0"/>
+                        </a:spcAft>
+                        <a:defRPr sz="1200" b="0">
+                          <a:solidFill>
+                            <a:srgbClr val="21243A"/>
+                          </a:solidFill>
+                          <a:latin typeface="Arial"/>
+                        </a:defRPr>
+                      </a:pPr>
+                      <a:r>
+                        <a:t>The slide could equally come from ordinary slide or data-visualization software</a:t>
+                      </a:r>
+                    </a:p>
+                    <a:p>
+                      <a:pPr>
+                        <a:lnSpc>
+                          <a:spcPts val="1600"/>
+                        </a:lnSpc>
+                        <a:spcAft>
+                          <a:spcPts val="0"/>
+                        </a:spcAft>
+                        <a:defRPr sz="1200" b="0">
+                          <a:solidFill>
+                            <a:srgbClr val="21243A"/>
+                          </a:solidFill>
+                          <a:latin typeface="Arial"/>
+                        </a:defRPr>
+                      </a:pPr>
+                      <a:r>
+                        <a:t>(the filename suggests a PowerPoint export). Checking the source file, the author</a:t>
+                      </a:r>
+                    </a:p>
+                    <a:p>
+                      <a:pPr>
+                        <a:lnSpc>
+                          <a:spcPts val="1600"/>
+                        </a:lnSpc>
+                        <a:spcAft>
+                          <a:spcPts val="0"/>
+                        </a:spcAft>
+                        <a:defRPr sz="1200" b="0">
+                          <a:solidFill>
+                            <a:srgbClr val="21243A"/>
+                          </a:solidFill>
+                          <a:latin typeface="Arial"/>
+                        </a:defRPr>
+                      </a:pPr>
+                      <a:r>
+                        <a:t>and the claimed study would resolve its origin better than visual inspection.</a:t>
                       </a:r>
                     </a:p>
                   </a:txBody>
@@ -21518,7 +20905,7 @@
                         </a:defRPr>
                       </a:pPr>
                       <a:r>
-                        <a:t>medium</a:t>
+                        <a:t>low</a:t>
                       </a:r>
                     </a:p>
                   </a:txBody>
@@ -21694,83 +21081,83 @@
                         </a:defRPr>
                       </a:pPr>
                       <a:r>
-                        <a:t>Worst of 4 frames (slide 1): synthetic likelihood 15/100; tells: Presentation-slide</a:t>
-                      </a:r>
-                    </a:p>
-                    <a:p>
-                      <a:pPr>
-                        <a:lnSpc>
-                          <a:spcPts val="1600"/>
-                        </a:lnSpc>
-                        <a:spcAft>
-                          <a:spcPts val="0"/>
-                        </a:spcAft>
-                        <a:defRPr sz="1200" b="0">
-                          <a:solidFill>
-                            <a:srgbClr val="21243A"/>
-                          </a:solidFill>
-                          <a:latin typeface="Arial"/>
-                        </a:defRPr>
-                      </a:pPr>
-                      <a:r>
-                        <a:t>layout rather than a camera photograph, Legible typography with consistent</a:t>
-                      </a:r>
-                    </a:p>
-                    <a:p>
-                      <a:pPr>
-                        <a:lnSpc>
-                          <a:spcPts val="1600"/>
-                        </a:lnSpc>
-                        <a:spcAft>
-                          <a:spcPts val="0"/>
-                        </a:spcAft>
-                        <a:defRPr sz="1200" b="0">
-                          <a:solidFill>
-                            <a:srgbClr val="21243A"/>
-                          </a:solidFill>
-                          <a:latin typeface="Arial"/>
-                        </a:defRPr>
-                      </a:pPr>
-                      <a:r>
-                        <a:t>letterforms and alignment, Network illustration uses clean straight edges and</a:t>
-                      </a:r>
-                    </a:p>
-                    <a:p>
-                      <a:pPr>
-                        <a:lnSpc>
-                          <a:spcPts val="1600"/>
-                        </a:lnSpc>
-                        <a:spcAft>
-                          <a:spcPts val="0"/>
-                        </a:spcAft>
-                        <a:defRPr sz="1200" b="0">
-                          <a:solidFill>
-                            <a:srgbClr val="21243A"/>
-                          </a:solidFill>
-                          <a:latin typeface="Arial"/>
-                        </a:defRPr>
-                      </a:pPr>
-                      <a:r>
-                        <a:t>regularly placed circular nodes, No obvious generative distortions; conventional</a:t>
-                      </a:r>
-                    </a:p>
-                    <a:p>
-                      <a:pPr>
-                        <a:lnSpc>
-                          <a:spcPts val="1600"/>
-                        </a:lnSpc>
-                        <a:spcAft>
-                          <a:spcPts val="0"/>
-                        </a:spcAft>
-                        <a:defRPr sz="1200" b="0">
-                          <a:solidFill>
-                            <a:srgbClr val="21243A"/>
-                          </a:solidFill>
-                          <a:latin typeface="Arial"/>
-                        </a:defRPr>
-                      </a:pPr>
-                      <a:r>
-                        <a:t>vector graphics could explain the design</a:t>
+                        <a:t>Worst of 4 frames (slide 5): synthetic likelihood 20/100; tells: Consistently legible</a:t>
+                      </a:r>
+                    </a:p>
+                    <a:p>
+                      <a:pPr>
+                        <a:lnSpc>
+                          <a:spcPts val="1600"/>
+                        </a:lnSpc>
+                        <a:spcAft>
+                          <a:spcPts val="0"/>
+                        </a:spcAft>
+                        <a:defRPr sz="1200" b="0">
+                          <a:solidFill>
+                            <a:srgbClr val="21243A"/>
+                          </a:solidFill>
+                          <a:latin typeface="Arial"/>
+                        </a:defRPr>
+                      </a:pPr>
+                      <a:r>
+                        <a:t>text with coherent letterforms and regular spacing, Four circular nodes with</a:t>
+                      </a:r>
+                    </a:p>
+                    <a:p>
+                      <a:pPr>
+                        <a:lnSpc>
+                          <a:spcPts val="1600"/>
+                        </a:lnSpc>
+                        <a:spcAft>
+                          <a:spcPts val="0"/>
+                        </a:spcAft>
+                        <a:defRPr sz="1200" b="0">
+                          <a:solidFill>
+                            <a:srgbClr val="21243A"/>
+                          </a:solidFill>
+                          <a:latin typeface="Arial"/>
+                        </a:defRPr>
+                      </a:pPr>
+                      <a:r>
+                        <a:t>uniform glow effects and thin connecting lines, Aligned text blocks and repeated</a:t>
+                      </a:r>
+                    </a:p>
+                    <a:p>
+                      <a:pPr>
+                        <a:lnSpc>
+                          <a:spcPts val="1600"/>
+                        </a:lnSpc>
+                        <a:spcAft>
+                          <a:spcPts val="0"/>
+                        </a:spcAft>
+                        <a:defRPr sz="1200" b="0">
+                          <a:solidFill>
+                            <a:srgbClr val="21243A"/>
+                          </a:solidFill>
+                          <a:latin typeface="Arial"/>
+                        </a:defRPr>
+                      </a:pPr>
+                      <a:r>
+                        <a:t>geometric network decorations typical of presentation graphics, No photographic</a:t>
+                      </a:r>
+                    </a:p>
+                    <a:p>
+                      <a:pPr>
+                        <a:lnSpc>
+                          <a:spcPts val="1600"/>
+                        </a:lnSpc>
+                        <a:spcAft>
+                          <a:spcPts val="0"/>
+                        </a:spcAft>
+                        <a:defRPr sz="1200" b="0">
+                          <a:solidFill>
+                            <a:srgbClr val="21243A"/>
+                          </a:solidFill>
+                          <a:latin typeface="Arial"/>
+                        </a:defRPr>
+                      </a:pPr>
+                      <a:r>
+                        <a:t>subjects or camera texture available for assessment</a:t>
                       </a:r>
                     </a:p>
                   </a:txBody>
@@ -21946,7 +21333,7 @@
                         </a:defRPr>
                       </a:pPr>
                       <a:r>
-                        <a:t>Frame slide 5: 15/100</a:t>
+                        <a:t>Frame slide 5: 20/100</a:t>
                       </a:r>
                     </a:p>
                   </a:txBody>
@@ -22308,7 +21695,7 @@
                         </a:defRPr>
                       </a:pPr>
                       <a:r>
-                        <a:t>Frame slide 10: 12/100</a:t>
+                        <a:t>Frame slide 10: 15/100</a:t>
                       </a:r>
                     </a:p>
                   </a:txBody>
@@ -22396,7 +21783,7 @@
                         </a:defRPr>
                       </a:pPr>
                       <a:r>
-                        <a:t>Frame slide 14: 10/100</a:t>
+                        <a:t>Frame slide 14: 15/100</a:t>
                       </a:r>
                     </a:p>
                   </a:txBody>
@@ -22484,7 +21871,7 @@
                         </a:defRPr>
                       </a:pPr>
                       <a:r>
-                        <a:t>Presentation-slide layout rather than a camera photograph</a:t>
+                        <a:t>Consistently legible text with coherent letterforms and regular spacing</a:t>
                       </a:r>
                     </a:p>
                   </a:txBody>
@@ -22572,7 +21959,7 @@
                         </a:defRPr>
                       </a:pPr>
                       <a:r>
-                        <a:t>Legible typography with consistent letterforms and alignment</a:t>
+                        <a:t>Four circular nodes with uniform glow effects and thin connecting lines</a:t>
                       </a:r>
                     </a:p>
                   </a:txBody>
@@ -22597,7 +21984,7 @@
         </p:nvGraphicFramePr>
         <p:xfrm>
           <a:off x="365760" y="3098800"/>
-          <a:ext cx="8412479" cy="349504"/>
+          <a:ext cx="8412479" cy="552704"/>
         </p:xfrm>
         <a:graphic>
           <a:graphicData uri="http://schemas.openxmlformats.org/drawingml/2006/table">
@@ -22609,7 +21996,7 @@
                 <a:gridCol w="2271369"/>
                 <a:gridCol w="6141110"/>
               </a:tblGrid>
-              <a:tr h="349504">
+              <a:tr h="552704">
                 <a:tc>
                   <a:txBody>
                     <a:bodyPr wrap="none"/>
@@ -22660,7 +22047,26 @@
                         </a:defRPr>
                       </a:pPr>
                       <a:r>
-                        <a:t>Network illustration uses clean straight edges and regularly placed circular nodes</a:t>
+                        <a:t>Aligned text blocks and repeated geometric network decorations typical of</a:t>
+                      </a:r>
+                    </a:p>
+                    <a:p>
+                      <a:pPr>
+                        <a:lnSpc>
+                          <a:spcPts val="1600"/>
+                        </a:lnSpc>
+                        <a:spcAft>
+                          <a:spcPts val="0"/>
+                        </a:spcAft>
+                        <a:defRPr sz="1200" b="0">
+                          <a:solidFill>
+                            <a:srgbClr val="21243A"/>
+                          </a:solidFill>
+                          <a:latin typeface="Arial"/>
+                        </a:defRPr>
+                      </a:pPr>
+                      <a:r>
+                        <a:t>presentation graphics</a:t>
                       </a:r>
                     </a:p>
                   </a:txBody>
@@ -22684,8 +22090,8 @@
           <p:nvPr/>
         </p:nvGraphicFramePr>
         <p:xfrm>
-          <a:off x="365760" y="3448304"/>
-          <a:ext cx="8412479" cy="552704"/>
+          <a:off x="365760" y="3651504"/>
+          <a:ext cx="8412479" cy="349504"/>
         </p:xfrm>
         <a:graphic>
           <a:graphicData uri="http://schemas.openxmlformats.org/drawingml/2006/table">
@@ -22697,7 +22103,7 @@
                 <a:gridCol w="2271369"/>
                 <a:gridCol w="6141110"/>
               </a:tblGrid>
-              <a:tr h="552704">
+              <a:tr h="349504">
                 <a:tc>
                   <a:txBody>
                     <a:bodyPr wrap="none"/>
@@ -22748,26 +22154,7 @@
                         </a:defRPr>
                       </a:pPr>
                       <a:r>
-                        <a:t>No obvious generative distortions; conventional vector graphics could explain the</a:t>
-                      </a:r>
-                    </a:p>
-                    <a:p>
-                      <a:pPr>
-                        <a:lnSpc>
-                          <a:spcPts val="1600"/>
-                        </a:lnSpc>
-                        <a:spcAft>
-                          <a:spcPts val="0"/>
-                        </a:spcAft>
-                        <a:defRPr sz="1200" b="0">
-                          <a:solidFill>
-                            <a:srgbClr val="21243A"/>
-                          </a:solidFill>
-                          <a:latin typeface="Arial"/>
-                        </a:defRPr>
-                      </a:pPr>
-                      <a:r>
-                        <a:t>design</a:t>
+                        <a:t>No photographic subjects or camera texture available for assessment</a:t>
                       </a:r>
                     </a:p>
                   </a:txBody>
@@ -22792,7 +22179,7 @@
         </p:nvGraphicFramePr>
         <p:xfrm>
           <a:off x="365760" y="4001008"/>
-          <a:ext cx="8412479" cy="755904"/>
+          <a:ext cx="8412479" cy="552704"/>
         </p:xfrm>
         <a:graphic>
           <a:graphicData uri="http://schemas.openxmlformats.org/drawingml/2006/table">
@@ -22804,7 +22191,7 @@
                 <a:gridCol w="2271369"/>
                 <a:gridCol w="6141110"/>
               </a:tblGrid>
-              <a:tr h="755904">
+              <a:tr h="552704">
                 <a:tc>
                   <a:txBody>
                     <a:bodyPr wrap="none"/>
@@ -22855,45 +22242,26 @@
                         </a:defRPr>
                       </a:pPr>
                       <a:r>
-                        <a:t>Caveat: A digitally designed slide is not itself evidence of AI generation; source</a:t>
-                      </a:r>
-                    </a:p>
-                    <a:p>
-                      <a:pPr>
-                        <a:lnSpc>
-                          <a:spcPts val="1600"/>
-                        </a:lnSpc>
-                        <a:spcAft>
-                          <a:spcPts val="0"/>
-                        </a:spcAft>
-                        <a:defRPr sz="1200" b="0">
-                          <a:solidFill>
-                            <a:srgbClr val="21243A"/>
-                          </a:solidFill>
-                          <a:latin typeface="Arial"/>
-                        </a:defRPr>
-                      </a:pPr>
-                      <a:r>
-                        <a:t>files or provenance records are needed to distinguish conventional design from AI</a:t>
-                      </a:r>
-                    </a:p>
-                    <a:p>
-                      <a:pPr>
-                        <a:lnSpc>
-                          <a:spcPts val="1600"/>
-                        </a:lnSpc>
-                        <a:spcAft>
-                          <a:spcPts val="0"/>
-                        </a:spcAft>
-                        <a:defRPr sz="1200" b="0">
-                          <a:solidFill>
-                            <a:srgbClr val="21243A"/>
-                          </a:solidFill>
-                          <a:latin typeface="Arial"/>
-                        </a:defRPr>
-                      </a:pPr>
-                      <a:r>
-                        <a:t>assistance.</a:t>
+                        <a:t>Caveat: This is a presentation graphic, not a camera photo; appearance alone</a:t>
+                      </a:r>
+                    </a:p>
+                    <a:p>
+                      <a:pPr>
+                        <a:lnSpc>
+                          <a:spcPts val="1600"/>
+                        </a:lnSpc>
+                        <a:spcAft>
+                          <a:spcPts val="0"/>
+                        </a:spcAft>
+                        <a:defRPr sz="1200" b="0">
+                          <a:solidFill>
+                            <a:srgbClr val="21243A"/>
+                          </a:solidFill>
+                          <a:latin typeface="Arial"/>
+                        </a:defRPr>
+                      </a:pPr>
+                      <a:r>
+                        <a:t>cannot distinguish conventional slide design from AI-assisted production.</a:t>
                       </a:r>
                     </a:p>
                   </a:txBody>
@@ -23783,45 +23151,45 @@
                         </a:defRPr>
                       </a:pPr>
                       <a:r>
-                        <a:t>Worst of 4 frames (slide 5): synthetic likelihood 28/100; tells: sharp vector-style</a:t>
-                      </a:r>
-                    </a:p>
-                    <a:p>
-                      <a:pPr>
-                        <a:lnSpc>
-                          <a:spcPts val="1600"/>
-                        </a:lnSpc>
-                        <a:spcAft>
-                          <a:spcPts val="0"/>
-                        </a:spcAft>
-                        <a:defRPr sz="1200" b="0">
-                          <a:solidFill>
-                            <a:srgbClr val="21243A"/>
-                          </a:solidFill>
-                          <a:latin typeface="Arial"/>
-                        </a:defRPr>
-                      </a:pPr>
-                      <a:r>
-                        <a:t>typography, clean standard digital design elements, absence of generative</a:t>
-                      </a:r>
-                    </a:p>
-                    <a:p>
-                      <a:pPr>
-                        <a:lnSpc>
-                          <a:spcPts val="1600"/>
-                        </a:lnSpc>
-                        <a:spcAft>
-                          <a:spcPts val="0"/>
-                        </a:spcAft>
-                        <a:defRPr sz="1200" b="0">
-                          <a:solidFill>
-                            <a:srgbClr val="21243A"/>
-                          </a:solidFill>
-                          <a:latin typeface="Arial"/>
-                        </a:defRPr>
-                      </a:pPr>
-                      <a:r>
-                        <a:t>diffusion artifacts, structured geometric layout</a:t>
+                        <a:t>Worst of 4 frames (slide 1): synthetic likelihood 28/100; tells: clean vector</a:t>
+                      </a:r>
+                    </a:p>
+                    <a:p>
+                      <a:pPr>
+                        <a:lnSpc>
+                          <a:spcPts val="1600"/>
+                        </a:lnSpc>
+                        <a:spcAft>
+                          <a:spcPts val="0"/>
+                        </a:spcAft>
+                        <a:defRPr sz="1200" b="0">
+                          <a:solidFill>
+                            <a:srgbClr val="21243A"/>
+                          </a:solidFill>
+                          <a:latin typeface="Arial"/>
+                        </a:defRPr>
+                      </a:pPr>
+                      <a:r>
+                        <a:t>geometry, standard digital typography, consistent presentation graphic layout,</a:t>
+                      </a:r>
+                    </a:p>
+                    <a:p>
+                      <a:pPr>
+                        <a:lnSpc>
+                          <a:spcPts val="1600"/>
+                        </a:lnSpc>
+                        <a:spcAft>
+                          <a:spcPts val="0"/>
+                        </a:spcAft>
+                        <a:defRPr sz="1200" b="0">
+                          <a:solidFill>
+                            <a:srgbClr val="21243A"/>
+                          </a:solidFill>
+                          <a:latin typeface="Arial"/>
+                        </a:defRPr>
+                      </a:pPr>
+                      <a:r>
+                        <a:t>absence of generative diffusion artifacts</a:t>
                       </a:r>
                     </a:p>
                   </a:txBody>
@@ -23909,7 +23277,7 @@
                         </a:defRPr>
                       </a:pPr>
                       <a:r>
-                        <a:t>Frame slide 1: 25/100</a:t>
+                        <a:t>Frame slide 1: 28/100</a:t>
                       </a:r>
                     </a:p>
                   </a:txBody>

--- a/site/showcase/exports/presentation.pptx
+++ b/site/showcase/exports/presentation.pptx
@@ -26,6 +26,7 @@
     <p:sldId id="274" r:id="rId26"/>
     <p:sldId id="275" r:id="rId27"/>
     <p:sldId id="276" r:id="rId28"/>
+    <p:sldId id="277" r:id="rId29"/>
   </p:sldIdLst>
   <p:sldSz cx="9144000" cy="6858000" type="screen4x3"/>
   <p:notesSz cx="6858000" cy="9144000"/>
@@ -1872,62 +1873,27 @@
           </a:p>
           <a:p>
             <a:r>
-              <a:t>File and analysis record</a:t>
-            </a:r>
-          </a:p>
-          <a:p>
-            <a:r>
-              <a:t>File | presentation.pptx</a:t>
-            </a:r>
-          </a:p>
-          <a:p>
-            <a:r>
-              <a:t>Analysis ID | 250bad8f-c5c8-49fb-8c8c-10a2b68368b0</a:t>
-            </a:r>
-          </a:p>
-          <a:p>
-            <a:r>
-              <a:t>Generated | 2026-09-26T22:31:28+00:00</a:t>
-            </a:r>
-          </a:p>
-          <a:p>
-            <a:r>
-              <a:t>Tool | SDA Vision 0.1.0</a:t>
-            </a:r>
-          </a:p>
-          <a:p>
-            <a:r>
-              <a:t>Models | claude-opus-5-5, gemini-3.8-flash, gpt-6-astra</a:t>
-            </a:r>
-          </a:p>
-          <a:p>
-            <a:r>
-              <a:t>Method version | pdf-preparation-2026-09-26.1</a:t>
-            </a:r>
-          </a:p>
-          <a:p>
-            <a:r>
-              <a:t>Analysis lens | general</a:t>
-            </a:r>
-          </a:p>
-          <a:p>
-            <a:r>
-              <a:t>Original SHA-256 | d0ec89da564078611922195fca82364f2f8e63d253d02a6d9bb672a8265c5f15</a:t>
-            </a:r>
-          </a:p>
-          <a:p>
-            <a:r>
-              <a:t>Ingestion note 1 | 14 slides; sampled 4 of 14 embedded slide image(s).</a:t>
-            </a:r>
-          </a:p>
-          <a:p>
-            <a:r>
-              <a:t>Ingestion note 2 | Fresh provider replies acquired for eleven-examples-refresh-20260926-r1; report assembled locally from the saved responses without further API calls.</a:t>
-            </a:r>
-          </a:p>
-          <a:p>
-            <a:r>
-              <a:t>Ingestion note 3 | Provider latency values are restored from the acquisition receipts (maximum sampled-frame latency per provider); raw replies and assessment results are unchanged by this bookkeeping step.</a:t>
+              <a:t>Cite this analysis</a:t>
+            </a:r>
+          </a:p>
+          <a:p>
+            <a:r>
+              <a:t>Software (Harvard) | Martin, S. (2026) SDA Vision: Synthetic-media Discourse Analysis (version 0.1.0) [Computer software]. Manchester Metropolitan University. Available at: https://sdavision.io/</a:t>
+            </a:r>
+          </a:p>
+          <a:p>
+            <a:r>
+              <a:t>Software creator | Dr Sam Martin, Smart Data Research UK (UKRI) Fellow, Manchester Metropolitan University (MMU). ORCID: https://orcid.org/0000-0002-4466-8374.</a:t>
+            </a:r>
+          </a:p>
+          <a:p>
+            <a:r>
+              <a:t>Funding acknowledgement | This work was supported by Smart Data Research UK, a UKRI investment; Grant number UKRI4010.</a:t>
+            </a:r>
+          </a:p>
+          <a:p>
+            <a:r>
+              <a:t>Analysis record | File: presentation.pptx; media type: pptx; recorded at: 2026-09-26T22:31:28+00:00; models: claude-opus-5-5, gemini-3.8-flash, gpt-6-astra.</a:t>
             </a:r>
           </a:p>
         </p:txBody>
@@ -1953,6 +1919,136 @@
 </file>
 
 <file path=ppt/notesSlides/notesSlide21.xml><?xml version="1.0" encoding="utf-8"?>
+<p:notes xmlns:a="http://schemas.openxmlformats.org/drawingml/2006/main" xmlns:p="http://schemas.openxmlformats.org/presentationml/2006/main" xmlns:r="http://schemas.openxmlformats.org/officeDocument/2006/relationships">
+  <p:cSld>
+    <p:spTree>
+      <p:nvGrpSpPr>
+        <p:cNvPr id="1" name=""/>
+        <p:cNvGrpSpPr/>
+        <p:nvPr/>
+      </p:nvGrpSpPr>
+      <p:grpSpPr>
+        <a:xfrm>
+          <a:off x="0" y="0"/>
+          <a:ext cx="0" cy="0"/>
+          <a:chOff x="0" y="0"/>
+          <a:chExt cx="0" cy="0"/>
+        </a:xfrm>
+      </p:grpSpPr>
+      <p:sp>
+        <p:nvSpPr>
+          <p:cNvPr id="2" name="Slide Image Placeholder 1"/>
+          <p:cNvSpPr>
+            <a:spLocks noGrp="1"/>
+          </p:cNvSpPr>
+          <p:nvPr>
+            <p:ph type="sldImg" idx="2"/>
+          </p:nvPr>
+        </p:nvSpPr>
+        <p:spPr/>
+      </p:sp>
+      <p:sp>
+        <p:nvSpPr>
+          <p:cNvPr id="3" name="Notes Placeholder 2"/>
+          <p:cNvSpPr>
+            <a:spLocks noGrp="1"/>
+          </p:cNvSpPr>
+          <p:nvPr>
+            <p:ph type="body" idx="3" sz="quarter"/>
+          </p:nvPr>
+        </p:nvSpPr>
+        <p:spPr/>
+        <p:txBody>
+          <a:bodyPr/>
+          <a:lstStyle/>
+          <a:p>
+            <a:r>
+              <a:t>presentation.pptx</a:t>
+            </a:r>
+          </a:p>
+          <a:p>
+            <a:r>
+              <a:t>File and analysis record</a:t>
+            </a:r>
+          </a:p>
+          <a:p>
+            <a:r>
+              <a:t>File | presentation.pptx</a:t>
+            </a:r>
+          </a:p>
+          <a:p>
+            <a:r>
+              <a:t>Analysis ID | 250bad8f-c5c8-49fb-8c8c-10a2b68368b0</a:t>
+            </a:r>
+          </a:p>
+          <a:p>
+            <a:r>
+              <a:t>Generated | 2026-09-26T22:31:28+00:00</a:t>
+            </a:r>
+          </a:p>
+          <a:p>
+            <a:r>
+              <a:t>Tool | SDA Vision 0.1.0</a:t>
+            </a:r>
+          </a:p>
+          <a:p>
+            <a:r>
+              <a:t>Models | claude-opus-5-5, gemini-3.8-flash, gpt-6-astra</a:t>
+            </a:r>
+          </a:p>
+          <a:p>
+            <a:r>
+              <a:t>Method version | pdf-preparation-2026-09-26.1</a:t>
+            </a:r>
+          </a:p>
+          <a:p>
+            <a:r>
+              <a:t>Analysis lens | general</a:t>
+            </a:r>
+          </a:p>
+          <a:p>
+            <a:r>
+              <a:t>Original SHA-256 | d0ec89da564078611922195fca82364f2f8e63d253d02a6d9bb672a8265c5f15</a:t>
+            </a:r>
+          </a:p>
+          <a:p>
+            <a:r>
+              <a:t>Ingestion note 1 | 14 slides; sampled 4 of 14 embedded slide image(s).</a:t>
+            </a:r>
+          </a:p>
+          <a:p>
+            <a:r>
+              <a:t>Ingestion note 2 | Fresh provider replies acquired for eleven-examples-refresh-20260926-r1; report assembled locally from the saved responses without further API calls.</a:t>
+            </a:r>
+          </a:p>
+          <a:p>
+            <a:r>
+              <a:t>Ingestion note 3 | Provider latency values are restored from the acquisition receipts (maximum sampled-frame latency per provider); raw replies and assessment results are unchanged by this bookkeeping step.</a:t>
+            </a:r>
+          </a:p>
+        </p:txBody>
+      </p:sp>
+      <p:sp>
+        <p:nvSpPr>
+          <p:cNvPr id="4" name="Slide Number Placeholder 3"/>
+          <p:cNvSpPr>
+            <a:spLocks noGrp="1"/>
+          </p:cNvSpPr>
+          <p:nvPr>
+            <p:ph type="sldNum" idx="5" sz="quarter"/>
+          </p:nvPr>
+        </p:nvSpPr>
+        <p:spPr/>
+      </p:sp>
+    </p:spTree>
+  </p:cSld>
+  <p:clrMapOvr>
+    <a:masterClrMapping/>
+  </p:clrMapOvr>
+</p:notes>
+</file>
+
+<file path=ppt/notesSlides/notesSlide22.xml><?xml version="1.0" encoding="utf-8"?>
 <p:notes xmlns:a="http://schemas.openxmlformats.org/drawingml/2006/main" xmlns:p="http://schemas.openxmlformats.org/presentationml/2006/main" xmlns:r="http://schemas.openxmlformats.org/officeDocument/2006/relationships">
   <p:cSld>
     <p:spTree>
@@ -14853,7 +14949,7 @@
               </a:defRPr>
             </a:pPr>
             <a:r>
-              <a:t>File and analysis record</a:t>
+              <a:t>Cite this analysis</a:t>
             </a:r>
           </a:p>
         </p:txBody>
@@ -15040,7 +15136,7 @@
         </p:nvGraphicFramePr>
         <p:xfrm>
           <a:off x="365760" y="1700784"/>
-          <a:ext cx="8412479" cy="349504"/>
+          <a:ext cx="8412479" cy="755904"/>
         </p:xfrm>
         <a:graphic>
           <a:graphicData uri="http://schemas.openxmlformats.org/drawingml/2006/table">
@@ -15052,28 +15148,28 @@
                 <a:gridCol w="2271369"/>
                 <a:gridCol w="6141110"/>
               </a:tblGrid>
-              <a:tr h="349504">
-                <a:tc>
-                  <a:txBody>
-                    <a:bodyPr wrap="none"/>
-                    <a:lstStyle/>
-                    <a:p>
-                      <a:pPr>
-                        <a:lnSpc>
-                          <a:spcPts val="1600"/>
-                        </a:lnSpc>
-                        <a:spcAft>
-                          <a:spcPts val="0"/>
-                        </a:spcAft>
-                        <a:defRPr sz="1200" b="0">
-                          <a:solidFill>
-                            <a:srgbClr val="21243A"/>
-                          </a:solidFill>
-                          <a:latin typeface="Arial"/>
-                        </a:defRPr>
-                      </a:pPr>
-                      <a:r>
-                        <a:t>File</a:t>
+              <a:tr h="755904">
+                <a:tc>
+                  <a:txBody>
+                    <a:bodyPr wrap="none"/>
+                    <a:lstStyle/>
+                    <a:p>
+                      <a:pPr>
+                        <a:lnSpc>
+                          <a:spcPts val="1600"/>
+                        </a:lnSpc>
+                        <a:spcAft>
+                          <a:spcPts val="0"/>
+                        </a:spcAft>
+                        <a:defRPr sz="1200" b="0">
+                          <a:solidFill>
+                            <a:srgbClr val="21243A"/>
+                          </a:solidFill>
+                          <a:latin typeface="Arial"/>
+                        </a:defRPr>
+                      </a:pPr>
+                      <a:r>
+                        <a:t>Software (Harvard)</a:t>
                       </a:r>
                     </a:p>
                   </a:txBody>
@@ -15103,7 +15199,45 @@
                         </a:defRPr>
                       </a:pPr>
                       <a:r>
-                        <a:t>presentation.pptx</a:t>
+                        <a:t>Martin, S. (2026) SDA Vision: Synthetic-media Discourse Analysis (version 0.1.0)</a:t>
+                      </a:r>
+                    </a:p>
+                    <a:p>
+                      <a:pPr>
+                        <a:lnSpc>
+                          <a:spcPts val="1600"/>
+                        </a:lnSpc>
+                        <a:spcAft>
+                          <a:spcPts val="0"/>
+                        </a:spcAft>
+                        <a:defRPr sz="1200" b="0">
+                          <a:solidFill>
+                            <a:srgbClr val="21243A"/>
+                          </a:solidFill>
+                          <a:latin typeface="Arial"/>
+                        </a:defRPr>
+                      </a:pPr>
+                      <a:r>
+                        <a:t>[Computer software]. Manchester Metropolitan University. Available at:</a:t>
+                      </a:r>
+                    </a:p>
+                    <a:p>
+                      <a:pPr>
+                        <a:lnSpc>
+                          <a:spcPts val="1600"/>
+                        </a:lnSpc>
+                        <a:spcAft>
+                          <a:spcPts val="0"/>
+                        </a:spcAft>
+                        <a:defRPr sz="1200" b="0">
+                          <a:solidFill>
+                            <a:srgbClr val="21243A"/>
+                          </a:solidFill>
+                          <a:latin typeface="Arial"/>
+                        </a:defRPr>
+                      </a:pPr>
+                      <a:r>
+                        <a:t>https://sdavision.io/</a:t>
                       </a:r>
                     </a:p>
                   </a:txBody>
@@ -15127,8 +15261,8 @@
           <p:nvPr/>
         </p:nvGraphicFramePr>
         <p:xfrm>
-          <a:off x="365760" y="2050288"/>
-          <a:ext cx="8412479" cy="349504"/>
+          <a:off x="365760" y="2456688"/>
+          <a:ext cx="8412479" cy="552704"/>
         </p:xfrm>
         <a:graphic>
           <a:graphicData uri="http://schemas.openxmlformats.org/drawingml/2006/table">
@@ -15140,28 +15274,28 @@
                 <a:gridCol w="2271369"/>
                 <a:gridCol w="6141110"/>
               </a:tblGrid>
-              <a:tr h="349504">
-                <a:tc>
-                  <a:txBody>
-                    <a:bodyPr wrap="none"/>
-                    <a:lstStyle/>
-                    <a:p>
-                      <a:pPr>
-                        <a:lnSpc>
-                          <a:spcPts val="1600"/>
-                        </a:lnSpc>
-                        <a:spcAft>
-                          <a:spcPts val="0"/>
-                        </a:spcAft>
-                        <a:defRPr sz="1200" b="0">
-                          <a:solidFill>
-                            <a:srgbClr val="21243A"/>
-                          </a:solidFill>
-                          <a:latin typeface="Arial"/>
-                        </a:defRPr>
-                      </a:pPr>
-                      <a:r>
-                        <a:t>Analysis ID</a:t>
+              <a:tr h="552704">
+                <a:tc>
+                  <a:txBody>
+                    <a:bodyPr wrap="none"/>
+                    <a:lstStyle/>
+                    <a:p>
+                      <a:pPr>
+                        <a:lnSpc>
+                          <a:spcPts val="1600"/>
+                        </a:lnSpc>
+                        <a:spcAft>
+                          <a:spcPts val="0"/>
+                        </a:spcAft>
+                        <a:defRPr sz="1200" b="0">
+                          <a:solidFill>
+                            <a:srgbClr val="21243A"/>
+                          </a:solidFill>
+                          <a:latin typeface="Arial"/>
+                        </a:defRPr>
+                      </a:pPr>
+                      <a:r>
+                        <a:t>Software creator</a:t>
                       </a:r>
                     </a:p>
                   </a:txBody>
@@ -15191,7 +15325,26 @@
                         </a:defRPr>
                       </a:pPr>
                       <a:r>
-                        <a:t>250bad8f-c5c8-49fb-8c8c-10a2b68368b0</a:t>
+                        <a:t>Dr Sam Martin, Smart Data Research UK (UKRI) Fellow, Manchester Metropolitan</a:t>
+                      </a:r>
+                    </a:p>
+                    <a:p>
+                      <a:pPr>
+                        <a:lnSpc>
+                          <a:spcPts val="1600"/>
+                        </a:lnSpc>
+                        <a:spcAft>
+                          <a:spcPts val="0"/>
+                        </a:spcAft>
+                        <a:defRPr sz="1200" b="0">
+                          <a:solidFill>
+                            <a:srgbClr val="21243A"/>
+                          </a:solidFill>
+                          <a:latin typeface="Arial"/>
+                        </a:defRPr>
+                      </a:pPr>
+                      <a:r>
+                        <a:t>University (MMU). ORCID: https://orcid.org/0000-0002-4466-8374.</a:t>
                       </a:r>
                     </a:p>
                   </a:txBody>
@@ -15215,8 +15368,8 @@
           <p:nvPr/>
         </p:nvGraphicFramePr>
         <p:xfrm>
-          <a:off x="365760" y="2399792"/>
-          <a:ext cx="8412479" cy="349504"/>
+          <a:off x="365760" y="3009392"/>
+          <a:ext cx="8412479" cy="552704"/>
         </p:xfrm>
         <a:graphic>
           <a:graphicData uri="http://schemas.openxmlformats.org/drawingml/2006/table">
@@ -15228,28 +15381,28 @@
                 <a:gridCol w="2271369"/>
                 <a:gridCol w="6141110"/>
               </a:tblGrid>
-              <a:tr h="349504">
-                <a:tc>
-                  <a:txBody>
-                    <a:bodyPr wrap="none"/>
-                    <a:lstStyle/>
-                    <a:p>
-                      <a:pPr>
-                        <a:lnSpc>
-                          <a:spcPts val="1600"/>
-                        </a:lnSpc>
-                        <a:spcAft>
-                          <a:spcPts val="0"/>
-                        </a:spcAft>
-                        <a:defRPr sz="1200" b="0">
-                          <a:solidFill>
-                            <a:srgbClr val="21243A"/>
-                          </a:solidFill>
-                          <a:latin typeface="Arial"/>
-                        </a:defRPr>
-                      </a:pPr>
-                      <a:r>
-                        <a:t>Generated</a:t>
+              <a:tr h="552704">
+                <a:tc>
+                  <a:txBody>
+                    <a:bodyPr wrap="none"/>
+                    <a:lstStyle/>
+                    <a:p>
+                      <a:pPr>
+                        <a:lnSpc>
+                          <a:spcPts val="1600"/>
+                        </a:lnSpc>
+                        <a:spcAft>
+                          <a:spcPts val="0"/>
+                        </a:spcAft>
+                        <a:defRPr sz="1200" b="0">
+                          <a:solidFill>
+                            <a:srgbClr val="21243A"/>
+                          </a:solidFill>
+                          <a:latin typeface="Arial"/>
+                        </a:defRPr>
+                      </a:pPr>
+                      <a:r>
+                        <a:t>Funding acknowledgement</a:t>
                       </a:r>
                     </a:p>
                   </a:txBody>
@@ -15279,7 +15432,26 @@
                         </a:defRPr>
                       </a:pPr>
                       <a:r>
-                        <a:t>2026-09-26T22:31:28+00:00</a:t>
+                        <a:t>This work was supported by Smart Data Research UK, a UKRI investment; Grant</a:t>
+                      </a:r>
+                    </a:p>
+                    <a:p>
+                      <a:pPr>
+                        <a:lnSpc>
+                          <a:spcPts val="1600"/>
+                        </a:lnSpc>
+                        <a:spcAft>
+                          <a:spcPts val="0"/>
+                        </a:spcAft>
+                        <a:defRPr sz="1200" b="0">
+                          <a:solidFill>
+                            <a:srgbClr val="21243A"/>
+                          </a:solidFill>
+                          <a:latin typeface="Arial"/>
+                        </a:defRPr>
+                      </a:pPr>
+                      <a:r>
+                        <a:t>number UKRI4010.</a:t>
                       </a:r>
                     </a:p>
                   </a:txBody>
@@ -15303,535 +15475,7 @@
           <p:nvPr/>
         </p:nvGraphicFramePr>
         <p:xfrm>
-          <a:off x="365760" y="2749296"/>
-          <a:ext cx="8412479" cy="349504"/>
-        </p:xfrm>
-        <a:graphic>
-          <a:graphicData uri="http://schemas.openxmlformats.org/drawingml/2006/table">
-            <a:tbl>
-              <a:tblPr firstRow="1" bandRow="1">
-                <a:tableStyleId>{5C22544A-7EE6-4342-B048-85BDC9FD1C3A}</a:tableStyleId>
-              </a:tblPr>
-              <a:tblGrid>
-                <a:gridCol w="2271369"/>
-                <a:gridCol w="6141110"/>
-              </a:tblGrid>
-              <a:tr h="349504">
-                <a:tc>
-                  <a:txBody>
-                    <a:bodyPr wrap="none"/>
-                    <a:lstStyle/>
-                    <a:p>
-                      <a:pPr>
-                        <a:lnSpc>
-                          <a:spcPts val="1600"/>
-                        </a:lnSpc>
-                        <a:spcAft>
-                          <a:spcPts val="0"/>
-                        </a:spcAft>
-                        <a:defRPr sz="1200" b="0">
-                          <a:solidFill>
-                            <a:srgbClr val="21243A"/>
-                          </a:solidFill>
-                          <a:latin typeface="Arial"/>
-                        </a:defRPr>
-                      </a:pPr>
-                      <a:r>
-                        <a:t>Tool</a:t>
-                      </a:r>
-                    </a:p>
-                  </a:txBody>
-                  <a:tcPr marL="82296" marR="82296" marT="64008" marB="64008">
-                    <a:solidFill>
-                      <a:srgbClr val="FFFFFF"/>
-                    </a:solidFill>
-                  </a:tcPr>
-                </a:tc>
-                <a:tc>
-                  <a:txBody>
-                    <a:bodyPr wrap="none"/>
-                    <a:lstStyle/>
-                    <a:p>
-                      <a:pPr>
-                        <a:lnSpc>
-                          <a:spcPts val="1600"/>
-                        </a:lnSpc>
-                        <a:spcAft>
-                          <a:spcPts val="0"/>
-                        </a:spcAft>
-                        <a:defRPr sz="1200" b="0">
-                          <a:solidFill>
-                            <a:srgbClr val="21243A"/>
-                          </a:solidFill>
-                          <a:latin typeface="Arial"/>
-                        </a:defRPr>
-                      </a:pPr>
-                      <a:r>
-                        <a:t>SDA Vision 0.1.0</a:t>
-                      </a:r>
-                    </a:p>
-                  </a:txBody>
-                  <a:tcPr marL="82296" marR="82296" marT="64008" marB="64008">
-                    <a:solidFill>
-                      <a:srgbClr val="FFFFFF"/>
-                    </a:solidFill>
-                  </a:tcPr>
-                </a:tc>
-              </a:tr>
-            </a:tbl>
-          </a:graphicData>
-        </a:graphic>
-      </p:graphicFrame>
-      <p:graphicFrame>
-        <p:nvGraphicFramePr>
-          <p:cNvPr id="11" name="Table 10"/>
-          <p:cNvGraphicFramePr>
-            <a:graphicFrameLocks noGrp="1"/>
-          </p:cNvGraphicFramePr>
-          <p:nvPr/>
-        </p:nvGraphicFramePr>
-        <p:xfrm>
-          <a:off x="365760" y="3098800"/>
-          <a:ext cx="8412479" cy="349504"/>
-        </p:xfrm>
-        <a:graphic>
-          <a:graphicData uri="http://schemas.openxmlformats.org/drawingml/2006/table">
-            <a:tbl>
-              <a:tblPr firstRow="1" bandRow="1">
-                <a:tableStyleId>{5C22544A-7EE6-4342-B048-85BDC9FD1C3A}</a:tableStyleId>
-              </a:tblPr>
-              <a:tblGrid>
-                <a:gridCol w="2271369"/>
-                <a:gridCol w="6141110"/>
-              </a:tblGrid>
-              <a:tr h="349504">
-                <a:tc>
-                  <a:txBody>
-                    <a:bodyPr wrap="none"/>
-                    <a:lstStyle/>
-                    <a:p>
-                      <a:pPr>
-                        <a:lnSpc>
-                          <a:spcPts val="1600"/>
-                        </a:lnSpc>
-                        <a:spcAft>
-                          <a:spcPts val="0"/>
-                        </a:spcAft>
-                        <a:defRPr sz="1200" b="0">
-                          <a:solidFill>
-                            <a:srgbClr val="21243A"/>
-                          </a:solidFill>
-                          <a:latin typeface="Arial"/>
-                        </a:defRPr>
-                      </a:pPr>
-                      <a:r>
-                        <a:t>Models</a:t>
-                      </a:r>
-                    </a:p>
-                  </a:txBody>
-                  <a:tcPr marL="82296" marR="82296" marT="64008" marB="64008">
-                    <a:solidFill>
-                      <a:srgbClr val="F1F7F7"/>
-                    </a:solidFill>
-                  </a:tcPr>
-                </a:tc>
-                <a:tc>
-                  <a:txBody>
-                    <a:bodyPr wrap="none"/>
-                    <a:lstStyle/>
-                    <a:p>
-                      <a:pPr>
-                        <a:lnSpc>
-                          <a:spcPts val="1600"/>
-                        </a:lnSpc>
-                        <a:spcAft>
-                          <a:spcPts val="0"/>
-                        </a:spcAft>
-                        <a:defRPr sz="1200" b="0">
-                          <a:solidFill>
-                            <a:srgbClr val="21243A"/>
-                          </a:solidFill>
-                          <a:latin typeface="Arial"/>
-                        </a:defRPr>
-                      </a:pPr>
-                      <a:r>
-                        <a:t>claude-opus-5-5, gemini-3.8-flash, gpt-6-astra</a:t>
-                      </a:r>
-                    </a:p>
-                  </a:txBody>
-                  <a:tcPr marL="82296" marR="82296" marT="64008" marB="64008">
-                    <a:solidFill>
-                      <a:srgbClr val="F1F7F7"/>
-                    </a:solidFill>
-                  </a:tcPr>
-                </a:tc>
-              </a:tr>
-            </a:tbl>
-          </a:graphicData>
-        </a:graphic>
-      </p:graphicFrame>
-      <p:graphicFrame>
-        <p:nvGraphicFramePr>
-          <p:cNvPr id="12" name="Table 11"/>
-          <p:cNvGraphicFramePr>
-            <a:graphicFrameLocks noGrp="1"/>
-          </p:cNvGraphicFramePr>
-          <p:nvPr/>
-        </p:nvGraphicFramePr>
-        <p:xfrm>
-          <a:off x="365760" y="3448304"/>
-          <a:ext cx="8412479" cy="349504"/>
-        </p:xfrm>
-        <a:graphic>
-          <a:graphicData uri="http://schemas.openxmlformats.org/drawingml/2006/table">
-            <a:tbl>
-              <a:tblPr firstRow="1" bandRow="1">
-                <a:tableStyleId>{5C22544A-7EE6-4342-B048-85BDC9FD1C3A}</a:tableStyleId>
-              </a:tblPr>
-              <a:tblGrid>
-                <a:gridCol w="2271369"/>
-                <a:gridCol w="6141110"/>
-              </a:tblGrid>
-              <a:tr h="349504">
-                <a:tc>
-                  <a:txBody>
-                    <a:bodyPr wrap="none"/>
-                    <a:lstStyle/>
-                    <a:p>
-                      <a:pPr>
-                        <a:lnSpc>
-                          <a:spcPts val="1600"/>
-                        </a:lnSpc>
-                        <a:spcAft>
-                          <a:spcPts val="0"/>
-                        </a:spcAft>
-                        <a:defRPr sz="1200" b="0">
-                          <a:solidFill>
-                            <a:srgbClr val="21243A"/>
-                          </a:solidFill>
-                          <a:latin typeface="Arial"/>
-                        </a:defRPr>
-                      </a:pPr>
-                      <a:r>
-                        <a:t>Method version</a:t>
-                      </a:r>
-                    </a:p>
-                  </a:txBody>
-                  <a:tcPr marL="82296" marR="82296" marT="64008" marB="64008">
-                    <a:solidFill>
-                      <a:srgbClr val="FFFFFF"/>
-                    </a:solidFill>
-                  </a:tcPr>
-                </a:tc>
-                <a:tc>
-                  <a:txBody>
-                    <a:bodyPr wrap="none"/>
-                    <a:lstStyle/>
-                    <a:p>
-                      <a:pPr>
-                        <a:lnSpc>
-                          <a:spcPts val="1600"/>
-                        </a:lnSpc>
-                        <a:spcAft>
-                          <a:spcPts val="0"/>
-                        </a:spcAft>
-                        <a:defRPr sz="1200" b="0">
-                          <a:solidFill>
-                            <a:srgbClr val="21243A"/>
-                          </a:solidFill>
-                          <a:latin typeface="Arial"/>
-                        </a:defRPr>
-                      </a:pPr>
-                      <a:r>
-                        <a:t>pdf-preparation-2026-09-26.1</a:t>
-                      </a:r>
-                    </a:p>
-                  </a:txBody>
-                  <a:tcPr marL="82296" marR="82296" marT="64008" marB="64008">
-                    <a:solidFill>
-                      <a:srgbClr val="FFFFFF"/>
-                    </a:solidFill>
-                  </a:tcPr>
-                </a:tc>
-              </a:tr>
-            </a:tbl>
-          </a:graphicData>
-        </a:graphic>
-      </p:graphicFrame>
-      <p:graphicFrame>
-        <p:nvGraphicFramePr>
-          <p:cNvPr id="13" name="Table 12"/>
-          <p:cNvGraphicFramePr>
-            <a:graphicFrameLocks noGrp="1"/>
-          </p:cNvGraphicFramePr>
-          <p:nvPr/>
-        </p:nvGraphicFramePr>
-        <p:xfrm>
-          <a:off x="365760" y="3797808"/>
-          <a:ext cx="8412479" cy="349504"/>
-        </p:xfrm>
-        <a:graphic>
-          <a:graphicData uri="http://schemas.openxmlformats.org/drawingml/2006/table">
-            <a:tbl>
-              <a:tblPr firstRow="1" bandRow="1">
-                <a:tableStyleId>{5C22544A-7EE6-4342-B048-85BDC9FD1C3A}</a:tableStyleId>
-              </a:tblPr>
-              <a:tblGrid>
-                <a:gridCol w="2271369"/>
-                <a:gridCol w="6141110"/>
-              </a:tblGrid>
-              <a:tr h="349504">
-                <a:tc>
-                  <a:txBody>
-                    <a:bodyPr wrap="none"/>
-                    <a:lstStyle/>
-                    <a:p>
-                      <a:pPr>
-                        <a:lnSpc>
-                          <a:spcPts val="1600"/>
-                        </a:lnSpc>
-                        <a:spcAft>
-                          <a:spcPts val="0"/>
-                        </a:spcAft>
-                        <a:defRPr sz="1200" b="0">
-                          <a:solidFill>
-                            <a:srgbClr val="21243A"/>
-                          </a:solidFill>
-                          <a:latin typeface="Arial"/>
-                        </a:defRPr>
-                      </a:pPr>
-                      <a:r>
-                        <a:t>Analysis lens</a:t>
-                      </a:r>
-                    </a:p>
-                  </a:txBody>
-                  <a:tcPr marL="82296" marR="82296" marT="64008" marB="64008">
-                    <a:solidFill>
-                      <a:srgbClr val="F1F7F7"/>
-                    </a:solidFill>
-                  </a:tcPr>
-                </a:tc>
-                <a:tc>
-                  <a:txBody>
-                    <a:bodyPr wrap="none"/>
-                    <a:lstStyle/>
-                    <a:p>
-                      <a:pPr>
-                        <a:lnSpc>
-                          <a:spcPts val="1600"/>
-                        </a:lnSpc>
-                        <a:spcAft>
-                          <a:spcPts val="0"/>
-                        </a:spcAft>
-                        <a:defRPr sz="1200" b="0">
-                          <a:solidFill>
-                            <a:srgbClr val="21243A"/>
-                          </a:solidFill>
-                          <a:latin typeface="Arial"/>
-                        </a:defRPr>
-                      </a:pPr>
-                      <a:r>
-                        <a:t>general</a:t>
-                      </a:r>
-                    </a:p>
-                  </a:txBody>
-                  <a:tcPr marL="82296" marR="82296" marT="64008" marB="64008">
-                    <a:solidFill>
-                      <a:srgbClr val="F1F7F7"/>
-                    </a:solidFill>
-                  </a:tcPr>
-                </a:tc>
-              </a:tr>
-            </a:tbl>
-          </a:graphicData>
-        </a:graphic>
-      </p:graphicFrame>
-      <p:graphicFrame>
-        <p:nvGraphicFramePr>
-          <p:cNvPr id="14" name="Table 13"/>
-          <p:cNvGraphicFramePr>
-            <a:graphicFrameLocks noGrp="1"/>
-          </p:cNvGraphicFramePr>
-          <p:nvPr/>
-        </p:nvGraphicFramePr>
-        <p:xfrm>
-          <a:off x="365760" y="4147312"/>
-          <a:ext cx="8412479" cy="349504"/>
-        </p:xfrm>
-        <a:graphic>
-          <a:graphicData uri="http://schemas.openxmlformats.org/drawingml/2006/table">
-            <a:tbl>
-              <a:tblPr firstRow="1" bandRow="1">
-                <a:tableStyleId>{5C22544A-7EE6-4342-B048-85BDC9FD1C3A}</a:tableStyleId>
-              </a:tblPr>
-              <a:tblGrid>
-                <a:gridCol w="2271369"/>
-                <a:gridCol w="6141110"/>
-              </a:tblGrid>
-              <a:tr h="349504">
-                <a:tc>
-                  <a:txBody>
-                    <a:bodyPr wrap="none"/>
-                    <a:lstStyle/>
-                    <a:p>
-                      <a:pPr>
-                        <a:lnSpc>
-                          <a:spcPts val="1600"/>
-                        </a:lnSpc>
-                        <a:spcAft>
-                          <a:spcPts val="0"/>
-                        </a:spcAft>
-                        <a:defRPr sz="1200" b="0">
-                          <a:solidFill>
-                            <a:srgbClr val="21243A"/>
-                          </a:solidFill>
-                          <a:latin typeface="Arial"/>
-                        </a:defRPr>
-                      </a:pPr>
-                      <a:r>
-                        <a:t>Original SHA-256</a:t>
-                      </a:r>
-                    </a:p>
-                  </a:txBody>
-                  <a:tcPr marL="82296" marR="82296" marT="64008" marB="64008">
-                    <a:solidFill>
-                      <a:srgbClr val="FFFFFF"/>
-                    </a:solidFill>
-                  </a:tcPr>
-                </a:tc>
-                <a:tc>
-                  <a:txBody>
-                    <a:bodyPr wrap="none"/>
-                    <a:lstStyle/>
-                    <a:p>
-                      <a:pPr>
-                        <a:lnSpc>
-                          <a:spcPts val="1600"/>
-                        </a:lnSpc>
-                        <a:spcAft>
-                          <a:spcPts val="0"/>
-                        </a:spcAft>
-                        <a:defRPr sz="1200" b="0">
-                          <a:solidFill>
-                            <a:srgbClr val="21243A"/>
-                          </a:solidFill>
-                          <a:latin typeface="Arial"/>
-                        </a:defRPr>
-                      </a:pPr>
-                      <a:r>
-                        <a:t>d0ec89da564078611922195fca82364f2f8e63d253d02a6d9bb672a8265c5f15</a:t>
-                      </a:r>
-                    </a:p>
-                  </a:txBody>
-                  <a:tcPr marL="82296" marR="82296" marT="64008" marB="64008">
-                    <a:solidFill>
-                      <a:srgbClr val="FFFFFF"/>
-                    </a:solidFill>
-                  </a:tcPr>
-                </a:tc>
-              </a:tr>
-            </a:tbl>
-          </a:graphicData>
-        </a:graphic>
-      </p:graphicFrame>
-      <p:graphicFrame>
-        <p:nvGraphicFramePr>
-          <p:cNvPr id="15" name="Table 14"/>
-          <p:cNvGraphicFramePr>
-            <a:graphicFrameLocks noGrp="1"/>
-          </p:cNvGraphicFramePr>
-          <p:nvPr/>
-        </p:nvGraphicFramePr>
-        <p:xfrm>
-          <a:off x="365760" y="4496816"/>
-          <a:ext cx="8412479" cy="349504"/>
-        </p:xfrm>
-        <a:graphic>
-          <a:graphicData uri="http://schemas.openxmlformats.org/drawingml/2006/table">
-            <a:tbl>
-              <a:tblPr firstRow="1" bandRow="1">
-                <a:tableStyleId>{5C22544A-7EE6-4342-B048-85BDC9FD1C3A}</a:tableStyleId>
-              </a:tblPr>
-              <a:tblGrid>
-                <a:gridCol w="2271369"/>
-                <a:gridCol w="6141110"/>
-              </a:tblGrid>
-              <a:tr h="349504">
-                <a:tc>
-                  <a:txBody>
-                    <a:bodyPr wrap="none"/>
-                    <a:lstStyle/>
-                    <a:p>
-                      <a:pPr>
-                        <a:lnSpc>
-                          <a:spcPts val="1600"/>
-                        </a:lnSpc>
-                        <a:spcAft>
-                          <a:spcPts val="0"/>
-                        </a:spcAft>
-                        <a:defRPr sz="1200" b="0">
-                          <a:solidFill>
-                            <a:srgbClr val="21243A"/>
-                          </a:solidFill>
-                          <a:latin typeface="Arial"/>
-                        </a:defRPr>
-                      </a:pPr>
-                      <a:r>
-                        <a:t>Ingestion note 1</a:t>
-                      </a:r>
-                    </a:p>
-                  </a:txBody>
-                  <a:tcPr marL="82296" marR="82296" marT="64008" marB="64008">
-                    <a:solidFill>
-                      <a:srgbClr val="F1F7F7"/>
-                    </a:solidFill>
-                  </a:tcPr>
-                </a:tc>
-                <a:tc>
-                  <a:txBody>
-                    <a:bodyPr wrap="none"/>
-                    <a:lstStyle/>
-                    <a:p>
-                      <a:pPr>
-                        <a:lnSpc>
-                          <a:spcPts val="1600"/>
-                        </a:lnSpc>
-                        <a:spcAft>
-                          <a:spcPts val="0"/>
-                        </a:spcAft>
-                        <a:defRPr sz="1200" b="0">
-                          <a:solidFill>
-                            <a:srgbClr val="21243A"/>
-                          </a:solidFill>
-                          <a:latin typeface="Arial"/>
-                        </a:defRPr>
-                      </a:pPr>
-                      <a:r>
-                        <a:t>14 slides; sampled 4 of 14 embedded slide image(s).</a:t>
-                      </a:r>
-                    </a:p>
-                  </a:txBody>
-                  <a:tcPr marL="82296" marR="82296" marT="64008" marB="64008">
-                    <a:solidFill>
-                      <a:srgbClr val="F1F7F7"/>
-                    </a:solidFill>
-                  </a:tcPr>
-                </a:tc>
-              </a:tr>
-            </a:tbl>
-          </a:graphicData>
-        </a:graphic>
-      </p:graphicFrame>
-      <p:graphicFrame>
-        <p:nvGraphicFramePr>
-          <p:cNvPr id="16" name="Table 15"/>
-          <p:cNvGraphicFramePr>
-            <a:graphicFrameLocks noGrp="1"/>
-          </p:cNvGraphicFramePr>
-          <p:nvPr/>
-        </p:nvGraphicFramePr>
-        <p:xfrm>
-          <a:off x="365760" y="4846320"/>
+          <a:off x="365760" y="3562095"/>
           <a:ext cx="8412479" cy="552704"/>
         </p:xfrm>
         <a:graphic>
@@ -15865,7 +15509,7 @@
                         </a:defRPr>
                       </a:pPr>
                       <a:r>
-                        <a:t>Ingestion note 2</a:t>
+                        <a:t>Analysis record</a:t>
                       </a:r>
                     </a:p>
                   </a:txBody>
@@ -15895,139 +15539,32 @@
                         </a:defRPr>
                       </a:pPr>
                       <a:r>
-                        <a:t>Fresh provider replies acquired for eleven-examples-refresh-20260926-r1; report</a:t>
-                      </a:r>
-                    </a:p>
-                    <a:p>
-                      <a:pPr>
-                        <a:lnSpc>
-                          <a:spcPts val="1600"/>
-                        </a:lnSpc>
-                        <a:spcAft>
-                          <a:spcPts val="0"/>
-                        </a:spcAft>
-                        <a:defRPr sz="1200" b="0">
-                          <a:solidFill>
-                            <a:srgbClr val="21243A"/>
-                          </a:solidFill>
-                          <a:latin typeface="Arial"/>
-                        </a:defRPr>
-                      </a:pPr>
-                      <a:r>
-                        <a:t>assembled locally from the saved responses without further API calls.</a:t>
+                        <a:t>File: presentation.pptx; media type: pptx; recorded at: 2026-09-26T22:31:28+00:00;</a:t>
+                      </a:r>
+                    </a:p>
+                    <a:p>
+                      <a:pPr>
+                        <a:lnSpc>
+                          <a:spcPts val="1600"/>
+                        </a:lnSpc>
+                        <a:spcAft>
+                          <a:spcPts val="0"/>
+                        </a:spcAft>
+                        <a:defRPr sz="1200" b="0">
+                          <a:solidFill>
+                            <a:srgbClr val="21243A"/>
+                          </a:solidFill>
+                          <a:latin typeface="Arial"/>
+                        </a:defRPr>
+                      </a:pPr>
+                      <a:r>
+                        <a:t>models: claude-opus-5-5, gemini-3.8-flash, gpt-6-astra.</a:t>
                       </a:r>
                     </a:p>
                   </a:txBody>
                   <a:tcPr marL="82296" marR="82296" marT="64008" marB="64008">
                     <a:solidFill>
                       <a:srgbClr val="FFFFFF"/>
-                    </a:solidFill>
-                  </a:tcPr>
-                </a:tc>
-              </a:tr>
-            </a:tbl>
-          </a:graphicData>
-        </a:graphic>
-      </p:graphicFrame>
-      <p:graphicFrame>
-        <p:nvGraphicFramePr>
-          <p:cNvPr id="17" name="Table 16"/>
-          <p:cNvGraphicFramePr>
-            <a:graphicFrameLocks noGrp="1"/>
-          </p:cNvGraphicFramePr>
-          <p:nvPr/>
-        </p:nvGraphicFramePr>
-        <p:xfrm>
-          <a:off x="365760" y="5399024"/>
-          <a:ext cx="8412479" cy="552704"/>
-        </p:xfrm>
-        <a:graphic>
-          <a:graphicData uri="http://schemas.openxmlformats.org/drawingml/2006/table">
-            <a:tbl>
-              <a:tblPr firstRow="1" bandRow="1">
-                <a:tableStyleId>{5C22544A-7EE6-4342-B048-85BDC9FD1C3A}</a:tableStyleId>
-              </a:tblPr>
-              <a:tblGrid>
-                <a:gridCol w="2271369"/>
-                <a:gridCol w="6141110"/>
-              </a:tblGrid>
-              <a:tr h="552704">
-                <a:tc>
-                  <a:txBody>
-                    <a:bodyPr wrap="none"/>
-                    <a:lstStyle/>
-                    <a:p>
-                      <a:pPr>
-                        <a:lnSpc>
-                          <a:spcPts val="1600"/>
-                        </a:lnSpc>
-                        <a:spcAft>
-                          <a:spcPts val="0"/>
-                        </a:spcAft>
-                        <a:defRPr sz="1200" b="0">
-                          <a:solidFill>
-                            <a:srgbClr val="21243A"/>
-                          </a:solidFill>
-                          <a:latin typeface="Arial"/>
-                        </a:defRPr>
-                      </a:pPr>
-                      <a:r>
-                        <a:t>Ingestion note 3</a:t>
-                      </a:r>
-                    </a:p>
-                  </a:txBody>
-                  <a:tcPr marL="82296" marR="82296" marT="64008" marB="64008">
-                    <a:solidFill>
-                      <a:srgbClr val="F1F7F7"/>
-                    </a:solidFill>
-                  </a:tcPr>
-                </a:tc>
-                <a:tc>
-                  <a:txBody>
-                    <a:bodyPr wrap="none"/>
-                    <a:lstStyle/>
-                    <a:p>
-                      <a:pPr>
-                        <a:lnSpc>
-                          <a:spcPts val="1600"/>
-                        </a:lnSpc>
-                        <a:spcAft>
-                          <a:spcPts val="0"/>
-                        </a:spcAft>
-                        <a:defRPr sz="1200" b="0">
-                          <a:solidFill>
-                            <a:srgbClr val="21243A"/>
-                          </a:solidFill>
-                          <a:latin typeface="Arial"/>
-                        </a:defRPr>
-                      </a:pPr>
-                      <a:r>
-                        <a:t>Provider latency values are restored from the acquisition receipts (maximum</a:t>
-                      </a:r>
-                    </a:p>
-                    <a:p>
-                      <a:pPr>
-                        <a:lnSpc>
-                          <a:spcPts val="1600"/>
-                        </a:lnSpc>
-                        <a:spcAft>
-                          <a:spcPts val="0"/>
-                        </a:spcAft>
-                        <a:defRPr sz="1200" b="0">
-                          <a:solidFill>
-                            <a:srgbClr val="21243A"/>
-                          </a:solidFill>
-                          <a:latin typeface="Arial"/>
-                        </a:defRPr>
-                      </a:pPr>
-                      <a:r>
-                        <a:t>sampled-frame latency per provider); raw replies and assessment results are</a:t>
-                      </a:r>
-                    </a:p>
-                  </a:txBody>
-                  <a:tcPr marL="82296" marR="82296" marT="64008" marB="64008">
-                    <a:solidFill>
-                      <a:srgbClr val="F1F7F7"/>
                     </a:solidFill>
                   </a:tcPr>
                 </a:tc>
@@ -16133,7 +15670,7 @@
               </a:defRPr>
             </a:pPr>
             <a:r>
-              <a:t>File and analysis record (continued)</a:t>
+              <a:t>File and analysis record</a:t>
             </a:r>
           </a:p>
         </p:txBody>
@@ -16218,6 +15755,1286 @@
             </a:pPr>
             <a:r>
               <a:t>21</a:t>
+            </a:r>
+          </a:p>
+        </p:txBody>
+      </p:sp>
+      <p:graphicFrame>
+        <p:nvGraphicFramePr>
+          <p:cNvPr id="6" name="Table 5"/>
+          <p:cNvGraphicFramePr>
+            <a:graphicFrameLocks noGrp="1"/>
+          </p:cNvGraphicFramePr>
+          <p:nvPr/>
+        </p:nvGraphicFramePr>
+        <p:xfrm>
+          <a:off x="365760" y="1353312"/>
+          <a:ext cx="8412479" cy="347472"/>
+        </p:xfrm>
+        <a:graphic>
+          <a:graphicData uri="http://schemas.openxmlformats.org/drawingml/2006/table">
+            <a:tbl>
+              <a:tblPr firstRow="1" bandRow="1">
+                <a:tableStyleId>{5C22544A-7EE6-4342-B048-85BDC9FD1C3A}</a:tableStyleId>
+              </a:tblPr>
+              <a:tblGrid>
+                <a:gridCol w="2271369"/>
+                <a:gridCol w="6141110"/>
+              </a:tblGrid>
+              <a:tr h="347472">
+                <a:tc>
+                  <a:txBody>
+                    <a:bodyPr wrap="none"/>
+                    <a:lstStyle/>
+                    <a:p>
+                      <a:pPr>
+                        <a:lnSpc>
+                          <a:spcPts val="1600"/>
+                        </a:lnSpc>
+                        <a:spcAft>
+                          <a:spcPts val="0"/>
+                        </a:spcAft>
+                        <a:defRPr sz="1200" b="1">
+                          <a:solidFill>
+                            <a:srgbClr val="FFFFFF"/>
+                          </a:solidFill>
+                          <a:latin typeface="Arial"/>
+                        </a:defRPr>
+                      </a:pPr>
+                      <a:r>
+                        <a:t>Field</a:t>
+                      </a:r>
+                    </a:p>
+                  </a:txBody>
+                  <a:tcPr marL="82296" marR="82296" marT="64008" marB="64008">
+                    <a:solidFill>
+                      <a:srgbClr val="16787C"/>
+                    </a:solidFill>
+                  </a:tcPr>
+                </a:tc>
+                <a:tc>
+                  <a:txBody>
+                    <a:bodyPr wrap="none"/>
+                    <a:lstStyle/>
+                    <a:p>
+                      <a:pPr>
+                        <a:lnSpc>
+                          <a:spcPts val="1600"/>
+                        </a:lnSpc>
+                        <a:spcAft>
+                          <a:spcPts val="0"/>
+                        </a:spcAft>
+                        <a:defRPr sz="1200" b="1">
+                          <a:solidFill>
+                            <a:srgbClr val="FFFFFF"/>
+                          </a:solidFill>
+                          <a:latin typeface="Arial"/>
+                        </a:defRPr>
+                      </a:pPr>
+                      <a:r>
+                        <a:t>Recorded detail</a:t>
+                      </a:r>
+                    </a:p>
+                  </a:txBody>
+                  <a:tcPr marL="82296" marR="82296" marT="64008" marB="64008">
+                    <a:solidFill>
+                      <a:srgbClr val="16787C"/>
+                    </a:solidFill>
+                  </a:tcPr>
+                </a:tc>
+              </a:tr>
+            </a:tbl>
+          </a:graphicData>
+        </a:graphic>
+      </p:graphicFrame>
+      <p:graphicFrame>
+        <p:nvGraphicFramePr>
+          <p:cNvPr id="7" name="Table 6"/>
+          <p:cNvGraphicFramePr>
+            <a:graphicFrameLocks noGrp="1"/>
+          </p:cNvGraphicFramePr>
+          <p:nvPr/>
+        </p:nvGraphicFramePr>
+        <p:xfrm>
+          <a:off x="365760" y="1700784"/>
+          <a:ext cx="8412479" cy="349504"/>
+        </p:xfrm>
+        <a:graphic>
+          <a:graphicData uri="http://schemas.openxmlformats.org/drawingml/2006/table">
+            <a:tbl>
+              <a:tblPr firstRow="1" bandRow="1">
+                <a:tableStyleId>{5C22544A-7EE6-4342-B048-85BDC9FD1C3A}</a:tableStyleId>
+              </a:tblPr>
+              <a:tblGrid>
+                <a:gridCol w="2271369"/>
+                <a:gridCol w="6141110"/>
+              </a:tblGrid>
+              <a:tr h="349504">
+                <a:tc>
+                  <a:txBody>
+                    <a:bodyPr wrap="none"/>
+                    <a:lstStyle/>
+                    <a:p>
+                      <a:pPr>
+                        <a:lnSpc>
+                          <a:spcPts val="1600"/>
+                        </a:lnSpc>
+                        <a:spcAft>
+                          <a:spcPts val="0"/>
+                        </a:spcAft>
+                        <a:defRPr sz="1200" b="0">
+                          <a:solidFill>
+                            <a:srgbClr val="21243A"/>
+                          </a:solidFill>
+                          <a:latin typeface="Arial"/>
+                        </a:defRPr>
+                      </a:pPr>
+                      <a:r>
+                        <a:t>File</a:t>
+                      </a:r>
+                    </a:p>
+                  </a:txBody>
+                  <a:tcPr marL="82296" marR="82296" marT="64008" marB="64008">
+                    <a:solidFill>
+                      <a:srgbClr val="F1F7F7"/>
+                    </a:solidFill>
+                  </a:tcPr>
+                </a:tc>
+                <a:tc>
+                  <a:txBody>
+                    <a:bodyPr wrap="none"/>
+                    <a:lstStyle/>
+                    <a:p>
+                      <a:pPr>
+                        <a:lnSpc>
+                          <a:spcPts val="1600"/>
+                        </a:lnSpc>
+                        <a:spcAft>
+                          <a:spcPts val="0"/>
+                        </a:spcAft>
+                        <a:defRPr sz="1200" b="0">
+                          <a:solidFill>
+                            <a:srgbClr val="21243A"/>
+                          </a:solidFill>
+                          <a:latin typeface="Arial"/>
+                        </a:defRPr>
+                      </a:pPr>
+                      <a:r>
+                        <a:t>presentation.pptx</a:t>
+                      </a:r>
+                    </a:p>
+                  </a:txBody>
+                  <a:tcPr marL="82296" marR="82296" marT="64008" marB="64008">
+                    <a:solidFill>
+                      <a:srgbClr val="F1F7F7"/>
+                    </a:solidFill>
+                  </a:tcPr>
+                </a:tc>
+              </a:tr>
+            </a:tbl>
+          </a:graphicData>
+        </a:graphic>
+      </p:graphicFrame>
+      <p:graphicFrame>
+        <p:nvGraphicFramePr>
+          <p:cNvPr id="8" name="Table 7"/>
+          <p:cNvGraphicFramePr>
+            <a:graphicFrameLocks noGrp="1"/>
+          </p:cNvGraphicFramePr>
+          <p:nvPr/>
+        </p:nvGraphicFramePr>
+        <p:xfrm>
+          <a:off x="365760" y="2050288"/>
+          <a:ext cx="8412479" cy="349504"/>
+        </p:xfrm>
+        <a:graphic>
+          <a:graphicData uri="http://schemas.openxmlformats.org/drawingml/2006/table">
+            <a:tbl>
+              <a:tblPr firstRow="1" bandRow="1">
+                <a:tableStyleId>{5C22544A-7EE6-4342-B048-85BDC9FD1C3A}</a:tableStyleId>
+              </a:tblPr>
+              <a:tblGrid>
+                <a:gridCol w="2271369"/>
+                <a:gridCol w="6141110"/>
+              </a:tblGrid>
+              <a:tr h="349504">
+                <a:tc>
+                  <a:txBody>
+                    <a:bodyPr wrap="none"/>
+                    <a:lstStyle/>
+                    <a:p>
+                      <a:pPr>
+                        <a:lnSpc>
+                          <a:spcPts val="1600"/>
+                        </a:lnSpc>
+                        <a:spcAft>
+                          <a:spcPts val="0"/>
+                        </a:spcAft>
+                        <a:defRPr sz="1200" b="0">
+                          <a:solidFill>
+                            <a:srgbClr val="21243A"/>
+                          </a:solidFill>
+                          <a:latin typeface="Arial"/>
+                        </a:defRPr>
+                      </a:pPr>
+                      <a:r>
+                        <a:t>Analysis ID</a:t>
+                      </a:r>
+                    </a:p>
+                  </a:txBody>
+                  <a:tcPr marL="82296" marR="82296" marT="64008" marB="64008">
+                    <a:solidFill>
+                      <a:srgbClr val="FFFFFF"/>
+                    </a:solidFill>
+                  </a:tcPr>
+                </a:tc>
+                <a:tc>
+                  <a:txBody>
+                    <a:bodyPr wrap="none"/>
+                    <a:lstStyle/>
+                    <a:p>
+                      <a:pPr>
+                        <a:lnSpc>
+                          <a:spcPts val="1600"/>
+                        </a:lnSpc>
+                        <a:spcAft>
+                          <a:spcPts val="0"/>
+                        </a:spcAft>
+                        <a:defRPr sz="1200" b="0">
+                          <a:solidFill>
+                            <a:srgbClr val="21243A"/>
+                          </a:solidFill>
+                          <a:latin typeface="Arial"/>
+                        </a:defRPr>
+                      </a:pPr>
+                      <a:r>
+                        <a:t>250bad8f-c5c8-49fb-8c8c-10a2b68368b0</a:t>
+                      </a:r>
+                    </a:p>
+                  </a:txBody>
+                  <a:tcPr marL="82296" marR="82296" marT="64008" marB="64008">
+                    <a:solidFill>
+                      <a:srgbClr val="FFFFFF"/>
+                    </a:solidFill>
+                  </a:tcPr>
+                </a:tc>
+              </a:tr>
+            </a:tbl>
+          </a:graphicData>
+        </a:graphic>
+      </p:graphicFrame>
+      <p:graphicFrame>
+        <p:nvGraphicFramePr>
+          <p:cNvPr id="9" name="Table 8"/>
+          <p:cNvGraphicFramePr>
+            <a:graphicFrameLocks noGrp="1"/>
+          </p:cNvGraphicFramePr>
+          <p:nvPr/>
+        </p:nvGraphicFramePr>
+        <p:xfrm>
+          <a:off x="365760" y="2399792"/>
+          <a:ext cx="8412479" cy="349504"/>
+        </p:xfrm>
+        <a:graphic>
+          <a:graphicData uri="http://schemas.openxmlformats.org/drawingml/2006/table">
+            <a:tbl>
+              <a:tblPr firstRow="1" bandRow="1">
+                <a:tableStyleId>{5C22544A-7EE6-4342-B048-85BDC9FD1C3A}</a:tableStyleId>
+              </a:tblPr>
+              <a:tblGrid>
+                <a:gridCol w="2271369"/>
+                <a:gridCol w="6141110"/>
+              </a:tblGrid>
+              <a:tr h="349504">
+                <a:tc>
+                  <a:txBody>
+                    <a:bodyPr wrap="none"/>
+                    <a:lstStyle/>
+                    <a:p>
+                      <a:pPr>
+                        <a:lnSpc>
+                          <a:spcPts val="1600"/>
+                        </a:lnSpc>
+                        <a:spcAft>
+                          <a:spcPts val="0"/>
+                        </a:spcAft>
+                        <a:defRPr sz="1200" b="0">
+                          <a:solidFill>
+                            <a:srgbClr val="21243A"/>
+                          </a:solidFill>
+                          <a:latin typeface="Arial"/>
+                        </a:defRPr>
+                      </a:pPr>
+                      <a:r>
+                        <a:t>Generated</a:t>
+                      </a:r>
+                    </a:p>
+                  </a:txBody>
+                  <a:tcPr marL="82296" marR="82296" marT="64008" marB="64008">
+                    <a:solidFill>
+                      <a:srgbClr val="F1F7F7"/>
+                    </a:solidFill>
+                  </a:tcPr>
+                </a:tc>
+                <a:tc>
+                  <a:txBody>
+                    <a:bodyPr wrap="none"/>
+                    <a:lstStyle/>
+                    <a:p>
+                      <a:pPr>
+                        <a:lnSpc>
+                          <a:spcPts val="1600"/>
+                        </a:lnSpc>
+                        <a:spcAft>
+                          <a:spcPts val="0"/>
+                        </a:spcAft>
+                        <a:defRPr sz="1200" b="0">
+                          <a:solidFill>
+                            <a:srgbClr val="21243A"/>
+                          </a:solidFill>
+                          <a:latin typeface="Arial"/>
+                        </a:defRPr>
+                      </a:pPr>
+                      <a:r>
+                        <a:t>2026-09-26T22:31:28+00:00</a:t>
+                      </a:r>
+                    </a:p>
+                  </a:txBody>
+                  <a:tcPr marL="82296" marR="82296" marT="64008" marB="64008">
+                    <a:solidFill>
+                      <a:srgbClr val="F1F7F7"/>
+                    </a:solidFill>
+                  </a:tcPr>
+                </a:tc>
+              </a:tr>
+            </a:tbl>
+          </a:graphicData>
+        </a:graphic>
+      </p:graphicFrame>
+      <p:graphicFrame>
+        <p:nvGraphicFramePr>
+          <p:cNvPr id="10" name="Table 9"/>
+          <p:cNvGraphicFramePr>
+            <a:graphicFrameLocks noGrp="1"/>
+          </p:cNvGraphicFramePr>
+          <p:nvPr/>
+        </p:nvGraphicFramePr>
+        <p:xfrm>
+          <a:off x="365760" y="2749296"/>
+          <a:ext cx="8412479" cy="349504"/>
+        </p:xfrm>
+        <a:graphic>
+          <a:graphicData uri="http://schemas.openxmlformats.org/drawingml/2006/table">
+            <a:tbl>
+              <a:tblPr firstRow="1" bandRow="1">
+                <a:tableStyleId>{5C22544A-7EE6-4342-B048-85BDC9FD1C3A}</a:tableStyleId>
+              </a:tblPr>
+              <a:tblGrid>
+                <a:gridCol w="2271369"/>
+                <a:gridCol w="6141110"/>
+              </a:tblGrid>
+              <a:tr h="349504">
+                <a:tc>
+                  <a:txBody>
+                    <a:bodyPr wrap="none"/>
+                    <a:lstStyle/>
+                    <a:p>
+                      <a:pPr>
+                        <a:lnSpc>
+                          <a:spcPts val="1600"/>
+                        </a:lnSpc>
+                        <a:spcAft>
+                          <a:spcPts val="0"/>
+                        </a:spcAft>
+                        <a:defRPr sz="1200" b="0">
+                          <a:solidFill>
+                            <a:srgbClr val="21243A"/>
+                          </a:solidFill>
+                          <a:latin typeface="Arial"/>
+                        </a:defRPr>
+                      </a:pPr>
+                      <a:r>
+                        <a:t>Tool</a:t>
+                      </a:r>
+                    </a:p>
+                  </a:txBody>
+                  <a:tcPr marL="82296" marR="82296" marT="64008" marB="64008">
+                    <a:solidFill>
+                      <a:srgbClr val="FFFFFF"/>
+                    </a:solidFill>
+                  </a:tcPr>
+                </a:tc>
+                <a:tc>
+                  <a:txBody>
+                    <a:bodyPr wrap="none"/>
+                    <a:lstStyle/>
+                    <a:p>
+                      <a:pPr>
+                        <a:lnSpc>
+                          <a:spcPts val="1600"/>
+                        </a:lnSpc>
+                        <a:spcAft>
+                          <a:spcPts val="0"/>
+                        </a:spcAft>
+                        <a:defRPr sz="1200" b="0">
+                          <a:solidFill>
+                            <a:srgbClr val="21243A"/>
+                          </a:solidFill>
+                          <a:latin typeface="Arial"/>
+                        </a:defRPr>
+                      </a:pPr>
+                      <a:r>
+                        <a:t>SDA Vision 0.1.0</a:t>
+                      </a:r>
+                    </a:p>
+                  </a:txBody>
+                  <a:tcPr marL="82296" marR="82296" marT="64008" marB="64008">
+                    <a:solidFill>
+                      <a:srgbClr val="FFFFFF"/>
+                    </a:solidFill>
+                  </a:tcPr>
+                </a:tc>
+              </a:tr>
+            </a:tbl>
+          </a:graphicData>
+        </a:graphic>
+      </p:graphicFrame>
+      <p:graphicFrame>
+        <p:nvGraphicFramePr>
+          <p:cNvPr id="11" name="Table 10"/>
+          <p:cNvGraphicFramePr>
+            <a:graphicFrameLocks noGrp="1"/>
+          </p:cNvGraphicFramePr>
+          <p:nvPr/>
+        </p:nvGraphicFramePr>
+        <p:xfrm>
+          <a:off x="365760" y="3098800"/>
+          <a:ext cx="8412479" cy="349504"/>
+        </p:xfrm>
+        <a:graphic>
+          <a:graphicData uri="http://schemas.openxmlformats.org/drawingml/2006/table">
+            <a:tbl>
+              <a:tblPr firstRow="1" bandRow="1">
+                <a:tableStyleId>{5C22544A-7EE6-4342-B048-85BDC9FD1C3A}</a:tableStyleId>
+              </a:tblPr>
+              <a:tblGrid>
+                <a:gridCol w="2271369"/>
+                <a:gridCol w="6141110"/>
+              </a:tblGrid>
+              <a:tr h="349504">
+                <a:tc>
+                  <a:txBody>
+                    <a:bodyPr wrap="none"/>
+                    <a:lstStyle/>
+                    <a:p>
+                      <a:pPr>
+                        <a:lnSpc>
+                          <a:spcPts val="1600"/>
+                        </a:lnSpc>
+                        <a:spcAft>
+                          <a:spcPts val="0"/>
+                        </a:spcAft>
+                        <a:defRPr sz="1200" b="0">
+                          <a:solidFill>
+                            <a:srgbClr val="21243A"/>
+                          </a:solidFill>
+                          <a:latin typeface="Arial"/>
+                        </a:defRPr>
+                      </a:pPr>
+                      <a:r>
+                        <a:t>Models</a:t>
+                      </a:r>
+                    </a:p>
+                  </a:txBody>
+                  <a:tcPr marL="82296" marR="82296" marT="64008" marB="64008">
+                    <a:solidFill>
+                      <a:srgbClr val="F1F7F7"/>
+                    </a:solidFill>
+                  </a:tcPr>
+                </a:tc>
+                <a:tc>
+                  <a:txBody>
+                    <a:bodyPr wrap="none"/>
+                    <a:lstStyle/>
+                    <a:p>
+                      <a:pPr>
+                        <a:lnSpc>
+                          <a:spcPts val="1600"/>
+                        </a:lnSpc>
+                        <a:spcAft>
+                          <a:spcPts val="0"/>
+                        </a:spcAft>
+                        <a:defRPr sz="1200" b="0">
+                          <a:solidFill>
+                            <a:srgbClr val="21243A"/>
+                          </a:solidFill>
+                          <a:latin typeface="Arial"/>
+                        </a:defRPr>
+                      </a:pPr>
+                      <a:r>
+                        <a:t>claude-opus-5-5, gemini-3.8-flash, gpt-6-astra</a:t>
+                      </a:r>
+                    </a:p>
+                  </a:txBody>
+                  <a:tcPr marL="82296" marR="82296" marT="64008" marB="64008">
+                    <a:solidFill>
+                      <a:srgbClr val="F1F7F7"/>
+                    </a:solidFill>
+                  </a:tcPr>
+                </a:tc>
+              </a:tr>
+            </a:tbl>
+          </a:graphicData>
+        </a:graphic>
+      </p:graphicFrame>
+      <p:graphicFrame>
+        <p:nvGraphicFramePr>
+          <p:cNvPr id="12" name="Table 11"/>
+          <p:cNvGraphicFramePr>
+            <a:graphicFrameLocks noGrp="1"/>
+          </p:cNvGraphicFramePr>
+          <p:nvPr/>
+        </p:nvGraphicFramePr>
+        <p:xfrm>
+          <a:off x="365760" y="3448304"/>
+          <a:ext cx="8412479" cy="349504"/>
+        </p:xfrm>
+        <a:graphic>
+          <a:graphicData uri="http://schemas.openxmlformats.org/drawingml/2006/table">
+            <a:tbl>
+              <a:tblPr firstRow="1" bandRow="1">
+                <a:tableStyleId>{5C22544A-7EE6-4342-B048-85BDC9FD1C3A}</a:tableStyleId>
+              </a:tblPr>
+              <a:tblGrid>
+                <a:gridCol w="2271369"/>
+                <a:gridCol w="6141110"/>
+              </a:tblGrid>
+              <a:tr h="349504">
+                <a:tc>
+                  <a:txBody>
+                    <a:bodyPr wrap="none"/>
+                    <a:lstStyle/>
+                    <a:p>
+                      <a:pPr>
+                        <a:lnSpc>
+                          <a:spcPts val="1600"/>
+                        </a:lnSpc>
+                        <a:spcAft>
+                          <a:spcPts val="0"/>
+                        </a:spcAft>
+                        <a:defRPr sz="1200" b="0">
+                          <a:solidFill>
+                            <a:srgbClr val="21243A"/>
+                          </a:solidFill>
+                          <a:latin typeface="Arial"/>
+                        </a:defRPr>
+                      </a:pPr>
+                      <a:r>
+                        <a:t>Method version</a:t>
+                      </a:r>
+                    </a:p>
+                  </a:txBody>
+                  <a:tcPr marL="82296" marR="82296" marT="64008" marB="64008">
+                    <a:solidFill>
+                      <a:srgbClr val="FFFFFF"/>
+                    </a:solidFill>
+                  </a:tcPr>
+                </a:tc>
+                <a:tc>
+                  <a:txBody>
+                    <a:bodyPr wrap="none"/>
+                    <a:lstStyle/>
+                    <a:p>
+                      <a:pPr>
+                        <a:lnSpc>
+                          <a:spcPts val="1600"/>
+                        </a:lnSpc>
+                        <a:spcAft>
+                          <a:spcPts val="0"/>
+                        </a:spcAft>
+                        <a:defRPr sz="1200" b="0">
+                          <a:solidFill>
+                            <a:srgbClr val="21243A"/>
+                          </a:solidFill>
+                          <a:latin typeface="Arial"/>
+                        </a:defRPr>
+                      </a:pPr>
+                      <a:r>
+                        <a:t>pdf-preparation-2026-09-26.1</a:t>
+                      </a:r>
+                    </a:p>
+                  </a:txBody>
+                  <a:tcPr marL="82296" marR="82296" marT="64008" marB="64008">
+                    <a:solidFill>
+                      <a:srgbClr val="FFFFFF"/>
+                    </a:solidFill>
+                  </a:tcPr>
+                </a:tc>
+              </a:tr>
+            </a:tbl>
+          </a:graphicData>
+        </a:graphic>
+      </p:graphicFrame>
+      <p:graphicFrame>
+        <p:nvGraphicFramePr>
+          <p:cNvPr id="13" name="Table 12"/>
+          <p:cNvGraphicFramePr>
+            <a:graphicFrameLocks noGrp="1"/>
+          </p:cNvGraphicFramePr>
+          <p:nvPr/>
+        </p:nvGraphicFramePr>
+        <p:xfrm>
+          <a:off x="365760" y="3797808"/>
+          <a:ext cx="8412479" cy="349504"/>
+        </p:xfrm>
+        <a:graphic>
+          <a:graphicData uri="http://schemas.openxmlformats.org/drawingml/2006/table">
+            <a:tbl>
+              <a:tblPr firstRow="1" bandRow="1">
+                <a:tableStyleId>{5C22544A-7EE6-4342-B048-85BDC9FD1C3A}</a:tableStyleId>
+              </a:tblPr>
+              <a:tblGrid>
+                <a:gridCol w="2271369"/>
+                <a:gridCol w="6141110"/>
+              </a:tblGrid>
+              <a:tr h="349504">
+                <a:tc>
+                  <a:txBody>
+                    <a:bodyPr wrap="none"/>
+                    <a:lstStyle/>
+                    <a:p>
+                      <a:pPr>
+                        <a:lnSpc>
+                          <a:spcPts val="1600"/>
+                        </a:lnSpc>
+                        <a:spcAft>
+                          <a:spcPts val="0"/>
+                        </a:spcAft>
+                        <a:defRPr sz="1200" b="0">
+                          <a:solidFill>
+                            <a:srgbClr val="21243A"/>
+                          </a:solidFill>
+                          <a:latin typeface="Arial"/>
+                        </a:defRPr>
+                      </a:pPr>
+                      <a:r>
+                        <a:t>Analysis lens</a:t>
+                      </a:r>
+                    </a:p>
+                  </a:txBody>
+                  <a:tcPr marL="82296" marR="82296" marT="64008" marB="64008">
+                    <a:solidFill>
+                      <a:srgbClr val="F1F7F7"/>
+                    </a:solidFill>
+                  </a:tcPr>
+                </a:tc>
+                <a:tc>
+                  <a:txBody>
+                    <a:bodyPr wrap="none"/>
+                    <a:lstStyle/>
+                    <a:p>
+                      <a:pPr>
+                        <a:lnSpc>
+                          <a:spcPts val="1600"/>
+                        </a:lnSpc>
+                        <a:spcAft>
+                          <a:spcPts val="0"/>
+                        </a:spcAft>
+                        <a:defRPr sz="1200" b="0">
+                          <a:solidFill>
+                            <a:srgbClr val="21243A"/>
+                          </a:solidFill>
+                          <a:latin typeface="Arial"/>
+                        </a:defRPr>
+                      </a:pPr>
+                      <a:r>
+                        <a:t>general</a:t>
+                      </a:r>
+                    </a:p>
+                  </a:txBody>
+                  <a:tcPr marL="82296" marR="82296" marT="64008" marB="64008">
+                    <a:solidFill>
+                      <a:srgbClr val="F1F7F7"/>
+                    </a:solidFill>
+                  </a:tcPr>
+                </a:tc>
+              </a:tr>
+            </a:tbl>
+          </a:graphicData>
+        </a:graphic>
+      </p:graphicFrame>
+      <p:graphicFrame>
+        <p:nvGraphicFramePr>
+          <p:cNvPr id="14" name="Table 13"/>
+          <p:cNvGraphicFramePr>
+            <a:graphicFrameLocks noGrp="1"/>
+          </p:cNvGraphicFramePr>
+          <p:nvPr/>
+        </p:nvGraphicFramePr>
+        <p:xfrm>
+          <a:off x="365760" y="4147312"/>
+          <a:ext cx="8412479" cy="349504"/>
+        </p:xfrm>
+        <a:graphic>
+          <a:graphicData uri="http://schemas.openxmlformats.org/drawingml/2006/table">
+            <a:tbl>
+              <a:tblPr firstRow="1" bandRow="1">
+                <a:tableStyleId>{5C22544A-7EE6-4342-B048-85BDC9FD1C3A}</a:tableStyleId>
+              </a:tblPr>
+              <a:tblGrid>
+                <a:gridCol w="2271369"/>
+                <a:gridCol w="6141110"/>
+              </a:tblGrid>
+              <a:tr h="349504">
+                <a:tc>
+                  <a:txBody>
+                    <a:bodyPr wrap="none"/>
+                    <a:lstStyle/>
+                    <a:p>
+                      <a:pPr>
+                        <a:lnSpc>
+                          <a:spcPts val="1600"/>
+                        </a:lnSpc>
+                        <a:spcAft>
+                          <a:spcPts val="0"/>
+                        </a:spcAft>
+                        <a:defRPr sz="1200" b="0">
+                          <a:solidFill>
+                            <a:srgbClr val="21243A"/>
+                          </a:solidFill>
+                          <a:latin typeface="Arial"/>
+                        </a:defRPr>
+                      </a:pPr>
+                      <a:r>
+                        <a:t>Original SHA-256</a:t>
+                      </a:r>
+                    </a:p>
+                  </a:txBody>
+                  <a:tcPr marL="82296" marR="82296" marT="64008" marB="64008">
+                    <a:solidFill>
+                      <a:srgbClr val="FFFFFF"/>
+                    </a:solidFill>
+                  </a:tcPr>
+                </a:tc>
+                <a:tc>
+                  <a:txBody>
+                    <a:bodyPr wrap="none"/>
+                    <a:lstStyle/>
+                    <a:p>
+                      <a:pPr>
+                        <a:lnSpc>
+                          <a:spcPts val="1600"/>
+                        </a:lnSpc>
+                        <a:spcAft>
+                          <a:spcPts val="0"/>
+                        </a:spcAft>
+                        <a:defRPr sz="1200" b="0">
+                          <a:solidFill>
+                            <a:srgbClr val="21243A"/>
+                          </a:solidFill>
+                          <a:latin typeface="Arial"/>
+                        </a:defRPr>
+                      </a:pPr>
+                      <a:r>
+                        <a:t>d0ec89da564078611922195fca82364f2f8e63d253d02a6d9bb672a8265c5f15</a:t>
+                      </a:r>
+                    </a:p>
+                  </a:txBody>
+                  <a:tcPr marL="82296" marR="82296" marT="64008" marB="64008">
+                    <a:solidFill>
+                      <a:srgbClr val="FFFFFF"/>
+                    </a:solidFill>
+                  </a:tcPr>
+                </a:tc>
+              </a:tr>
+            </a:tbl>
+          </a:graphicData>
+        </a:graphic>
+      </p:graphicFrame>
+      <p:graphicFrame>
+        <p:nvGraphicFramePr>
+          <p:cNvPr id="15" name="Table 14"/>
+          <p:cNvGraphicFramePr>
+            <a:graphicFrameLocks noGrp="1"/>
+          </p:cNvGraphicFramePr>
+          <p:nvPr/>
+        </p:nvGraphicFramePr>
+        <p:xfrm>
+          <a:off x="365760" y="4496816"/>
+          <a:ext cx="8412479" cy="349504"/>
+        </p:xfrm>
+        <a:graphic>
+          <a:graphicData uri="http://schemas.openxmlformats.org/drawingml/2006/table">
+            <a:tbl>
+              <a:tblPr firstRow="1" bandRow="1">
+                <a:tableStyleId>{5C22544A-7EE6-4342-B048-85BDC9FD1C3A}</a:tableStyleId>
+              </a:tblPr>
+              <a:tblGrid>
+                <a:gridCol w="2271369"/>
+                <a:gridCol w="6141110"/>
+              </a:tblGrid>
+              <a:tr h="349504">
+                <a:tc>
+                  <a:txBody>
+                    <a:bodyPr wrap="none"/>
+                    <a:lstStyle/>
+                    <a:p>
+                      <a:pPr>
+                        <a:lnSpc>
+                          <a:spcPts val="1600"/>
+                        </a:lnSpc>
+                        <a:spcAft>
+                          <a:spcPts val="0"/>
+                        </a:spcAft>
+                        <a:defRPr sz="1200" b="0">
+                          <a:solidFill>
+                            <a:srgbClr val="21243A"/>
+                          </a:solidFill>
+                          <a:latin typeface="Arial"/>
+                        </a:defRPr>
+                      </a:pPr>
+                      <a:r>
+                        <a:t>Ingestion note 1</a:t>
+                      </a:r>
+                    </a:p>
+                  </a:txBody>
+                  <a:tcPr marL="82296" marR="82296" marT="64008" marB="64008">
+                    <a:solidFill>
+                      <a:srgbClr val="F1F7F7"/>
+                    </a:solidFill>
+                  </a:tcPr>
+                </a:tc>
+                <a:tc>
+                  <a:txBody>
+                    <a:bodyPr wrap="none"/>
+                    <a:lstStyle/>
+                    <a:p>
+                      <a:pPr>
+                        <a:lnSpc>
+                          <a:spcPts val="1600"/>
+                        </a:lnSpc>
+                        <a:spcAft>
+                          <a:spcPts val="0"/>
+                        </a:spcAft>
+                        <a:defRPr sz="1200" b="0">
+                          <a:solidFill>
+                            <a:srgbClr val="21243A"/>
+                          </a:solidFill>
+                          <a:latin typeface="Arial"/>
+                        </a:defRPr>
+                      </a:pPr>
+                      <a:r>
+                        <a:t>14 slides; sampled 4 of 14 embedded slide image(s).</a:t>
+                      </a:r>
+                    </a:p>
+                  </a:txBody>
+                  <a:tcPr marL="82296" marR="82296" marT="64008" marB="64008">
+                    <a:solidFill>
+                      <a:srgbClr val="F1F7F7"/>
+                    </a:solidFill>
+                  </a:tcPr>
+                </a:tc>
+              </a:tr>
+            </a:tbl>
+          </a:graphicData>
+        </a:graphic>
+      </p:graphicFrame>
+      <p:graphicFrame>
+        <p:nvGraphicFramePr>
+          <p:cNvPr id="16" name="Table 15"/>
+          <p:cNvGraphicFramePr>
+            <a:graphicFrameLocks noGrp="1"/>
+          </p:cNvGraphicFramePr>
+          <p:nvPr/>
+        </p:nvGraphicFramePr>
+        <p:xfrm>
+          <a:off x="365760" y="4846320"/>
+          <a:ext cx="8412479" cy="552704"/>
+        </p:xfrm>
+        <a:graphic>
+          <a:graphicData uri="http://schemas.openxmlformats.org/drawingml/2006/table">
+            <a:tbl>
+              <a:tblPr firstRow="1" bandRow="1">
+                <a:tableStyleId>{5C22544A-7EE6-4342-B048-85BDC9FD1C3A}</a:tableStyleId>
+              </a:tblPr>
+              <a:tblGrid>
+                <a:gridCol w="2271369"/>
+                <a:gridCol w="6141110"/>
+              </a:tblGrid>
+              <a:tr h="552704">
+                <a:tc>
+                  <a:txBody>
+                    <a:bodyPr wrap="none"/>
+                    <a:lstStyle/>
+                    <a:p>
+                      <a:pPr>
+                        <a:lnSpc>
+                          <a:spcPts val="1600"/>
+                        </a:lnSpc>
+                        <a:spcAft>
+                          <a:spcPts val="0"/>
+                        </a:spcAft>
+                        <a:defRPr sz="1200" b="0">
+                          <a:solidFill>
+                            <a:srgbClr val="21243A"/>
+                          </a:solidFill>
+                          <a:latin typeface="Arial"/>
+                        </a:defRPr>
+                      </a:pPr>
+                      <a:r>
+                        <a:t>Ingestion note 2</a:t>
+                      </a:r>
+                    </a:p>
+                  </a:txBody>
+                  <a:tcPr marL="82296" marR="82296" marT="64008" marB="64008">
+                    <a:solidFill>
+                      <a:srgbClr val="FFFFFF"/>
+                    </a:solidFill>
+                  </a:tcPr>
+                </a:tc>
+                <a:tc>
+                  <a:txBody>
+                    <a:bodyPr wrap="none"/>
+                    <a:lstStyle/>
+                    <a:p>
+                      <a:pPr>
+                        <a:lnSpc>
+                          <a:spcPts val="1600"/>
+                        </a:lnSpc>
+                        <a:spcAft>
+                          <a:spcPts val="0"/>
+                        </a:spcAft>
+                        <a:defRPr sz="1200" b="0">
+                          <a:solidFill>
+                            <a:srgbClr val="21243A"/>
+                          </a:solidFill>
+                          <a:latin typeface="Arial"/>
+                        </a:defRPr>
+                      </a:pPr>
+                      <a:r>
+                        <a:t>Fresh provider replies acquired for eleven-examples-refresh-20260926-r1; report</a:t>
+                      </a:r>
+                    </a:p>
+                    <a:p>
+                      <a:pPr>
+                        <a:lnSpc>
+                          <a:spcPts val="1600"/>
+                        </a:lnSpc>
+                        <a:spcAft>
+                          <a:spcPts val="0"/>
+                        </a:spcAft>
+                        <a:defRPr sz="1200" b="0">
+                          <a:solidFill>
+                            <a:srgbClr val="21243A"/>
+                          </a:solidFill>
+                          <a:latin typeface="Arial"/>
+                        </a:defRPr>
+                      </a:pPr>
+                      <a:r>
+                        <a:t>assembled locally from the saved responses without further API calls.</a:t>
+                      </a:r>
+                    </a:p>
+                  </a:txBody>
+                  <a:tcPr marL="82296" marR="82296" marT="64008" marB="64008">
+                    <a:solidFill>
+                      <a:srgbClr val="FFFFFF"/>
+                    </a:solidFill>
+                  </a:tcPr>
+                </a:tc>
+              </a:tr>
+            </a:tbl>
+          </a:graphicData>
+        </a:graphic>
+      </p:graphicFrame>
+      <p:graphicFrame>
+        <p:nvGraphicFramePr>
+          <p:cNvPr id="17" name="Table 16"/>
+          <p:cNvGraphicFramePr>
+            <a:graphicFrameLocks noGrp="1"/>
+          </p:cNvGraphicFramePr>
+          <p:nvPr/>
+        </p:nvGraphicFramePr>
+        <p:xfrm>
+          <a:off x="365760" y="5399024"/>
+          <a:ext cx="8412479" cy="552704"/>
+        </p:xfrm>
+        <a:graphic>
+          <a:graphicData uri="http://schemas.openxmlformats.org/drawingml/2006/table">
+            <a:tbl>
+              <a:tblPr firstRow="1" bandRow="1">
+                <a:tableStyleId>{5C22544A-7EE6-4342-B048-85BDC9FD1C3A}</a:tableStyleId>
+              </a:tblPr>
+              <a:tblGrid>
+                <a:gridCol w="2271369"/>
+                <a:gridCol w="6141110"/>
+              </a:tblGrid>
+              <a:tr h="552704">
+                <a:tc>
+                  <a:txBody>
+                    <a:bodyPr wrap="none"/>
+                    <a:lstStyle/>
+                    <a:p>
+                      <a:pPr>
+                        <a:lnSpc>
+                          <a:spcPts val="1600"/>
+                        </a:lnSpc>
+                        <a:spcAft>
+                          <a:spcPts val="0"/>
+                        </a:spcAft>
+                        <a:defRPr sz="1200" b="0">
+                          <a:solidFill>
+                            <a:srgbClr val="21243A"/>
+                          </a:solidFill>
+                          <a:latin typeface="Arial"/>
+                        </a:defRPr>
+                      </a:pPr>
+                      <a:r>
+                        <a:t>Ingestion note 3</a:t>
+                      </a:r>
+                    </a:p>
+                  </a:txBody>
+                  <a:tcPr marL="82296" marR="82296" marT="64008" marB="64008">
+                    <a:solidFill>
+                      <a:srgbClr val="F1F7F7"/>
+                    </a:solidFill>
+                  </a:tcPr>
+                </a:tc>
+                <a:tc>
+                  <a:txBody>
+                    <a:bodyPr wrap="none"/>
+                    <a:lstStyle/>
+                    <a:p>
+                      <a:pPr>
+                        <a:lnSpc>
+                          <a:spcPts val="1600"/>
+                        </a:lnSpc>
+                        <a:spcAft>
+                          <a:spcPts val="0"/>
+                        </a:spcAft>
+                        <a:defRPr sz="1200" b="0">
+                          <a:solidFill>
+                            <a:srgbClr val="21243A"/>
+                          </a:solidFill>
+                          <a:latin typeface="Arial"/>
+                        </a:defRPr>
+                      </a:pPr>
+                      <a:r>
+                        <a:t>Provider latency values are restored from the acquisition receipts (maximum</a:t>
+                      </a:r>
+                    </a:p>
+                    <a:p>
+                      <a:pPr>
+                        <a:lnSpc>
+                          <a:spcPts val="1600"/>
+                        </a:lnSpc>
+                        <a:spcAft>
+                          <a:spcPts val="0"/>
+                        </a:spcAft>
+                        <a:defRPr sz="1200" b="0">
+                          <a:solidFill>
+                            <a:srgbClr val="21243A"/>
+                          </a:solidFill>
+                          <a:latin typeface="Arial"/>
+                        </a:defRPr>
+                      </a:pPr>
+                      <a:r>
+                        <a:t>sampled-frame latency per provider); raw replies and assessment results are</a:t>
+                      </a:r>
+                    </a:p>
+                  </a:txBody>
+                  <a:tcPr marL="82296" marR="82296" marT="64008" marB="64008">
+                    <a:solidFill>
+                      <a:srgbClr val="F1F7F7"/>
+                    </a:solidFill>
+                  </a:tcPr>
+                </a:tc>
+              </a:tr>
+            </a:tbl>
+          </a:graphicData>
+        </a:graphic>
+      </p:graphicFrame>
+    </p:spTree>
+  </p:cSld>
+  <p:clrMapOvr>
+    <a:masterClrMapping/>
+  </p:clrMapOvr>
+</p:sld>
+</file>
+
+<file path=ppt/slides/slide22.xml><?xml version="1.0" encoding="utf-8"?>
+<p:sld xmlns:a="http://schemas.openxmlformats.org/drawingml/2006/main" xmlns:p="http://schemas.openxmlformats.org/presentationml/2006/main" xmlns:r="http://schemas.openxmlformats.org/officeDocument/2006/relationships">
+  <p:cSld>
+    <p:spTree>
+      <p:nvGrpSpPr>
+        <p:cNvPr id="1" name=""/>
+        <p:cNvGrpSpPr/>
+        <p:nvPr/>
+      </p:nvGrpSpPr>
+      <p:grpSpPr/>
+      <p:sp>
+        <p:nvSpPr>
+          <p:cNvPr id="2" name="TextBox 1"/>
+          <p:cNvSpPr txBox="1"/>
+          <p:nvPr/>
+        </p:nvSpPr>
+        <p:spPr>
+          <a:xfrm>
+            <a:off x="365760" y="219456"/>
+            <a:ext cx="8412480" cy="228600"/>
+          </a:xfrm>
+          <a:prstGeom prst="rect">
+            <a:avLst/>
+          </a:prstGeom>
+          <a:noFill/>
+        </p:spPr>
+        <p:txBody>
+          <a:bodyPr wrap="square" lIns="0" rIns="0" tIns="0" bIns="0">
+            <a:spAutoFit/>
+          </a:bodyPr>
+          <a:lstStyle/>
+          <a:p>
+            <a:pPr>
+              <a:lnSpc>
+                <a:spcPct val="115000"/>
+              </a:lnSpc>
+              <a:spcAft>
+                <a:spcPts val="0"/>
+              </a:spcAft>
+              <a:defRPr sz="1100" b="1">
+                <a:solidFill>
+                  <a:srgbClr val="C5006A"/>
+                </a:solidFill>
+                <a:latin typeface="Arial"/>
+              </a:defRPr>
+            </a:pPr>
+            <a:r>
+              <a:t>SDA VISION / RESEARCH REPORT</a:t>
+            </a:r>
+          </a:p>
+        </p:txBody>
+      </p:sp>
+      <p:sp>
+        <p:nvSpPr>
+          <p:cNvPr id="3" name="TextBox 2"/>
+          <p:cNvSpPr txBox="1"/>
+          <p:nvPr/>
+        </p:nvSpPr>
+        <p:spPr>
+          <a:xfrm>
+            <a:off x="365760" y="658368"/>
+            <a:ext cx="8412480" cy="612648"/>
+          </a:xfrm>
+          <a:prstGeom prst="rect">
+            <a:avLst/>
+          </a:prstGeom>
+          <a:noFill/>
+        </p:spPr>
+        <p:txBody>
+          <a:bodyPr wrap="square" lIns="0" rIns="0" tIns="0" bIns="0">
+            <a:spAutoFit/>
+          </a:bodyPr>
+          <a:lstStyle/>
+          <a:p>
+            <a:pPr>
+              <a:lnSpc>
+                <a:spcPct val="115000"/>
+              </a:lnSpc>
+              <a:spcAft>
+                <a:spcPts val="0"/>
+              </a:spcAft>
+              <a:defRPr sz="2200" b="1">
+                <a:solidFill>
+                  <a:srgbClr val="21243A"/>
+                </a:solidFill>
+                <a:latin typeface="Arial"/>
+              </a:defRPr>
+            </a:pPr>
+            <a:r>
+              <a:t>File and analysis record (continued)</a:t>
+            </a:r>
+          </a:p>
+        </p:txBody>
+      </p:sp>
+      <p:sp>
+        <p:nvSpPr>
+          <p:cNvPr id="4" name="TextBox 3"/>
+          <p:cNvSpPr txBox="1"/>
+          <p:nvPr/>
+        </p:nvSpPr>
+        <p:spPr>
+          <a:xfrm>
+            <a:off x="365760" y="6291072"/>
+            <a:ext cx="8001000" cy="365760"/>
+          </a:xfrm>
+          <a:prstGeom prst="rect">
+            <a:avLst/>
+          </a:prstGeom>
+          <a:noFill/>
+        </p:spPr>
+        <p:txBody>
+          <a:bodyPr wrap="square" lIns="0" rIns="0" tIns="0" bIns="0">
+            <a:spAutoFit/>
+          </a:bodyPr>
+          <a:lstStyle/>
+          <a:p>
+            <a:pPr>
+              <a:lnSpc>
+                <a:spcPct val="115000"/>
+              </a:lnSpc>
+              <a:spcAft>
+                <a:spcPts val="0"/>
+              </a:spcAft>
+              <a:defRPr sz="800" b="0">
+                <a:solidFill>
+                  <a:srgbClr val="545B6D"/>
+                </a:solidFill>
+                <a:latin typeface="Arial"/>
+              </a:defRPr>
+            </a:pPr>
+            <a:r>
+              <a:t>Research assessment. Ratings are not calibrated probabilities.</a:t>
+            </a:r>
+          </a:p>
+        </p:txBody>
+      </p:sp>
+      <p:sp>
+        <p:nvSpPr>
+          <p:cNvPr id="5" name="TextBox 4"/>
+          <p:cNvSpPr txBox="1"/>
+          <p:nvPr/>
+        </p:nvSpPr>
+        <p:spPr>
+          <a:xfrm>
+            <a:off x="8394192" y="6318504"/>
+            <a:ext cx="365760" cy="228600"/>
+          </a:xfrm>
+          <a:prstGeom prst="rect">
+            <a:avLst/>
+          </a:prstGeom>
+          <a:noFill/>
+        </p:spPr>
+        <p:txBody>
+          <a:bodyPr wrap="square" lIns="0" rIns="0" tIns="0" bIns="0">
+            <a:spAutoFit/>
+          </a:bodyPr>
+          <a:lstStyle/>
+          <a:p>
+            <a:pPr>
+              <a:lnSpc>
+                <a:spcPct val="115000"/>
+              </a:lnSpc>
+              <a:spcAft>
+                <a:spcPts val="0"/>
+              </a:spcAft>
+              <a:defRPr sz="900" b="0">
+                <a:solidFill>
+                  <a:srgbClr val="545B6D"/>
+                </a:solidFill>
+                <a:latin typeface="Arial"/>
+              </a:defRPr>
+            </a:pPr>
+            <a:r>
+              <a:t>22</a:t>
             </a:r>
           </a:p>
         </p:txBody>

--- a/site/showcase/exports/presentation.pptx
+++ b/site/showcase/exports/presentation.pptx
@@ -1878,7 +1878,7 @@
           </a:p>
           <a:p>
             <a:r>
-              <a:t>Software (Harvard) | Martin, S. (2026) SDA Vision: Synthetic-media Discourse Analysis (version 0.1.0) [Computer software]. Manchester Metropolitan University. Available at: https://sdavision.io/</a:t>
+              <a:t>Software citation | Martin, S. (2026) SDA Vision: Synthetic-media Discourse Analysis (version 0.1.0) [Computer software]. Manchester Metropolitan University. Available at: https://sdavision.io/</a:t>
             </a:r>
           </a:p>
           <a:p>
@@ -15169,7 +15169,7 @@
                         </a:defRPr>
                       </a:pPr>
                       <a:r>
-                        <a:t>Software (Harvard)</a:t>
+                        <a:t>Software citation</a:t>
                       </a:r>
                     </a:p>
                   </a:txBody>

--- a/site/showcase/exports/presentation.pptx
+++ b/site/showcase/exports/presentation.pptx
@@ -26,7 +26,6 @@
     <p:sldId id="274" r:id="rId26"/>
     <p:sldId id="275" r:id="rId27"/>
     <p:sldId id="276" r:id="rId28"/>
-    <p:sldId id="277" r:id="rId29"/>
   </p:sldIdLst>
   <p:sldSz cx="9144000" cy="6858000" type="screen4x3"/>
   <p:notesSz cx="6858000" cy="9144000"/>
@@ -1873,27 +1872,62 @@
           </a:p>
           <a:p>
             <a:r>
-              <a:t>Cite this analysis</a:t>
-            </a:r>
-          </a:p>
-          <a:p>
-            <a:r>
-              <a:t>Software citation | Martin, S. (2026) SDA Vision: Synthetic-media Discourse Analysis (version 0.1.0) [Computer software]. Manchester Metropolitan University. Available at: https://sdavision.io/</a:t>
-            </a:r>
-          </a:p>
-          <a:p>
-            <a:r>
-              <a:t>Software creator | Dr Sam Martin, Smart Data Research UK (UKRI) Fellow, Manchester Metropolitan University (MMU). ORCID: https://orcid.org/0000-0002-4466-8374.</a:t>
-            </a:r>
-          </a:p>
-          <a:p>
-            <a:r>
-              <a:t>Funding acknowledgement | This work was supported by Smart Data Research UK, a UKRI investment; Grant number UKRI4010.</a:t>
-            </a:r>
-          </a:p>
-          <a:p>
-            <a:r>
-              <a:t>Analysis record | File: presentation.pptx; media type: pptx; recorded at: 2026-09-26T22:31:28+00:00; models: claude-opus-5-5, gemini-3.8-flash, gpt-6-astra.</a:t>
+              <a:t>File and analysis record</a:t>
+            </a:r>
+          </a:p>
+          <a:p>
+            <a:r>
+              <a:t>File | presentation.pptx</a:t>
+            </a:r>
+          </a:p>
+          <a:p>
+            <a:r>
+              <a:t>Analysis ID | 250bad8f-c5c8-49fb-8c8c-10a2b68368b0</a:t>
+            </a:r>
+          </a:p>
+          <a:p>
+            <a:r>
+              <a:t>Generated | 2026-09-26T22:31:28+00:00</a:t>
+            </a:r>
+          </a:p>
+          <a:p>
+            <a:r>
+              <a:t>Tool | SDA Vision 0.1.0</a:t>
+            </a:r>
+          </a:p>
+          <a:p>
+            <a:r>
+              <a:t>Models | claude-opus-5-5, gemini-3.8-flash, gpt-6-astra</a:t>
+            </a:r>
+          </a:p>
+          <a:p>
+            <a:r>
+              <a:t>Method version | pdf-preparation-2026-09-26.1</a:t>
+            </a:r>
+          </a:p>
+          <a:p>
+            <a:r>
+              <a:t>Analysis lens | general</a:t>
+            </a:r>
+          </a:p>
+          <a:p>
+            <a:r>
+              <a:t>Original SHA-256 | d0ec89da564078611922195fca82364f2f8e63d253d02a6d9bb672a8265c5f15</a:t>
+            </a:r>
+          </a:p>
+          <a:p>
+            <a:r>
+              <a:t>Ingestion note 1 | 14 slides; sampled 4 of 14 embedded slide image(s).</a:t>
+            </a:r>
+          </a:p>
+          <a:p>
+            <a:r>
+              <a:t>Ingestion note 2 | Fresh provider replies acquired for eleven-examples-refresh-20260926-r1; report assembled locally from the saved responses without further API calls.</a:t>
+            </a:r>
+          </a:p>
+          <a:p>
+            <a:r>
+              <a:t>Ingestion note 3 | Provider latency values are restored from the acquisition receipts (maximum sampled-frame latency per provider); raw replies and assessment results are unchanged by this bookkeeping step.</a:t>
             </a:r>
           </a:p>
         </p:txBody>
@@ -1919,136 +1953,6 @@
 </file>
 
 <file path=ppt/notesSlides/notesSlide21.xml><?xml version="1.0" encoding="utf-8"?>
-<p:notes xmlns:a="http://schemas.openxmlformats.org/drawingml/2006/main" xmlns:p="http://schemas.openxmlformats.org/presentationml/2006/main" xmlns:r="http://schemas.openxmlformats.org/officeDocument/2006/relationships">
-  <p:cSld>
-    <p:spTree>
-      <p:nvGrpSpPr>
-        <p:cNvPr id="1" name=""/>
-        <p:cNvGrpSpPr/>
-        <p:nvPr/>
-      </p:nvGrpSpPr>
-      <p:grpSpPr>
-        <a:xfrm>
-          <a:off x="0" y="0"/>
-          <a:ext cx="0" cy="0"/>
-          <a:chOff x="0" y="0"/>
-          <a:chExt cx="0" cy="0"/>
-        </a:xfrm>
-      </p:grpSpPr>
-      <p:sp>
-        <p:nvSpPr>
-          <p:cNvPr id="2" name="Slide Image Placeholder 1"/>
-          <p:cNvSpPr>
-            <a:spLocks noGrp="1"/>
-          </p:cNvSpPr>
-          <p:nvPr>
-            <p:ph type="sldImg" idx="2"/>
-          </p:nvPr>
-        </p:nvSpPr>
-        <p:spPr/>
-      </p:sp>
-      <p:sp>
-        <p:nvSpPr>
-          <p:cNvPr id="3" name="Notes Placeholder 2"/>
-          <p:cNvSpPr>
-            <a:spLocks noGrp="1"/>
-          </p:cNvSpPr>
-          <p:nvPr>
-            <p:ph type="body" idx="3" sz="quarter"/>
-          </p:nvPr>
-        </p:nvSpPr>
-        <p:spPr/>
-        <p:txBody>
-          <a:bodyPr/>
-          <a:lstStyle/>
-          <a:p>
-            <a:r>
-              <a:t>presentation.pptx</a:t>
-            </a:r>
-          </a:p>
-          <a:p>
-            <a:r>
-              <a:t>File and analysis record</a:t>
-            </a:r>
-          </a:p>
-          <a:p>
-            <a:r>
-              <a:t>File | presentation.pptx</a:t>
-            </a:r>
-          </a:p>
-          <a:p>
-            <a:r>
-              <a:t>Analysis ID | 250bad8f-c5c8-49fb-8c8c-10a2b68368b0</a:t>
-            </a:r>
-          </a:p>
-          <a:p>
-            <a:r>
-              <a:t>Generated | 2026-09-26T22:31:28+00:00</a:t>
-            </a:r>
-          </a:p>
-          <a:p>
-            <a:r>
-              <a:t>Tool | SDA Vision 0.1.0</a:t>
-            </a:r>
-          </a:p>
-          <a:p>
-            <a:r>
-              <a:t>Models | claude-opus-5-5, gemini-3.8-flash, gpt-6-astra</a:t>
-            </a:r>
-          </a:p>
-          <a:p>
-            <a:r>
-              <a:t>Method version | pdf-preparation-2026-09-26.1</a:t>
-            </a:r>
-          </a:p>
-          <a:p>
-            <a:r>
-              <a:t>Analysis lens | general</a:t>
-            </a:r>
-          </a:p>
-          <a:p>
-            <a:r>
-              <a:t>Original SHA-256 | d0ec89da564078611922195fca82364f2f8e63d253d02a6d9bb672a8265c5f15</a:t>
-            </a:r>
-          </a:p>
-          <a:p>
-            <a:r>
-              <a:t>Ingestion note 1 | 14 slides; sampled 4 of 14 embedded slide image(s).</a:t>
-            </a:r>
-          </a:p>
-          <a:p>
-            <a:r>
-              <a:t>Ingestion note 2 | Fresh provider replies acquired for eleven-examples-refresh-20260926-r1; report assembled locally from the saved responses without further API calls.</a:t>
-            </a:r>
-          </a:p>
-          <a:p>
-            <a:r>
-              <a:t>Ingestion note 3 | Provider latency values are restored from the acquisition receipts (maximum sampled-frame latency per provider); raw replies and assessment results are unchanged by this bookkeeping step.</a:t>
-            </a:r>
-          </a:p>
-        </p:txBody>
-      </p:sp>
-      <p:sp>
-        <p:nvSpPr>
-          <p:cNvPr id="4" name="Slide Number Placeholder 3"/>
-          <p:cNvSpPr>
-            <a:spLocks noGrp="1"/>
-          </p:cNvSpPr>
-          <p:nvPr>
-            <p:ph type="sldNum" idx="5" sz="quarter"/>
-          </p:nvPr>
-        </p:nvSpPr>
-        <p:spPr/>
-      </p:sp>
-    </p:spTree>
-  </p:cSld>
-  <p:clrMapOvr>
-    <a:masterClrMapping/>
-  </p:clrMapOvr>
-</p:notes>
-</file>
-
-<file path=ppt/notesSlides/notesSlide22.xml><?xml version="1.0" encoding="utf-8"?>
 <p:notes xmlns:a="http://schemas.openxmlformats.org/drawingml/2006/main" xmlns:p="http://schemas.openxmlformats.org/presentationml/2006/main" xmlns:r="http://schemas.openxmlformats.org/officeDocument/2006/relationships">
   <p:cSld>
     <p:spTree>
@@ -14949,7 +14853,7 @@
               </a:defRPr>
             </a:pPr>
             <a:r>
-              <a:t>Cite this analysis</a:t>
+              <a:t>File and analysis record</a:t>
             </a:r>
           </a:p>
         </p:txBody>
@@ -15136,7 +15040,7 @@
         </p:nvGraphicFramePr>
         <p:xfrm>
           <a:off x="365760" y="1700784"/>
-          <a:ext cx="8412479" cy="755904"/>
+          <a:ext cx="8412479" cy="349504"/>
         </p:xfrm>
         <a:graphic>
           <a:graphicData uri="http://schemas.openxmlformats.org/drawingml/2006/table">
@@ -15148,28 +15052,28 @@
                 <a:gridCol w="2271369"/>
                 <a:gridCol w="6141110"/>
               </a:tblGrid>
-              <a:tr h="755904">
-                <a:tc>
-                  <a:txBody>
-                    <a:bodyPr wrap="none"/>
-                    <a:lstStyle/>
-                    <a:p>
-                      <a:pPr>
-                        <a:lnSpc>
-                          <a:spcPts val="1600"/>
-                        </a:lnSpc>
-                        <a:spcAft>
-                          <a:spcPts val="0"/>
-                        </a:spcAft>
-                        <a:defRPr sz="1200" b="0">
-                          <a:solidFill>
-                            <a:srgbClr val="21243A"/>
-                          </a:solidFill>
-                          <a:latin typeface="Arial"/>
-                        </a:defRPr>
-                      </a:pPr>
-                      <a:r>
-                        <a:t>Software citation</a:t>
+              <a:tr h="349504">
+                <a:tc>
+                  <a:txBody>
+                    <a:bodyPr wrap="none"/>
+                    <a:lstStyle/>
+                    <a:p>
+                      <a:pPr>
+                        <a:lnSpc>
+                          <a:spcPts val="1600"/>
+                        </a:lnSpc>
+                        <a:spcAft>
+                          <a:spcPts val="0"/>
+                        </a:spcAft>
+                        <a:defRPr sz="1200" b="0">
+                          <a:solidFill>
+                            <a:srgbClr val="21243A"/>
+                          </a:solidFill>
+                          <a:latin typeface="Arial"/>
+                        </a:defRPr>
+                      </a:pPr>
+                      <a:r>
+                        <a:t>File</a:t>
                       </a:r>
                     </a:p>
                   </a:txBody>
@@ -15199,45 +15103,7 @@
                         </a:defRPr>
                       </a:pPr>
                       <a:r>
-                        <a:t>Martin, S. (2026) SDA Vision: Synthetic-media Discourse Analysis (version 0.1.0)</a:t>
-                      </a:r>
-                    </a:p>
-                    <a:p>
-                      <a:pPr>
-                        <a:lnSpc>
-                          <a:spcPts val="1600"/>
-                        </a:lnSpc>
-                        <a:spcAft>
-                          <a:spcPts val="0"/>
-                        </a:spcAft>
-                        <a:defRPr sz="1200" b="0">
-                          <a:solidFill>
-                            <a:srgbClr val="21243A"/>
-                          </a:solidFill>
-                          <a:latin typeface="Arial"/>
-                        </a:defRPr>
-                      </a:pPr>
-                      <a:r>
-                        <a:t>[Computer software]. Manchester Metropolitan University. Available at:</a:t>
-                      </a:r>
-                    </a:p>
-                    <a:p>
-                      <a:pPr>
-                        <a:lnSpc>
-                          <a:spcPts val="1600"/>
-                        </a:lnSpc>
-                        <a:spcAft>
-                          <a:spcPts val="0"/>
-                        </a:spcAft>
-                        <a:defRPr sz="1200" b="0">
-                          <a:solidFill>
-                            <a:srgbClr val="21243A"/>
-                          </a:solidFill>
-                          <a:latin typeface="Arial"/>
-                        </a:defRPr>
-                      </a:pPr>
-                      <a:r>
-                        <a:t>https://sdavision.io/</a:t>
+                        <a:t>presentation.pptx</a:t>
                       </a:r>
                     </a:p>
                   </a:txBody>
@@ -15261,8 +15127,8 @@
           <p:nvPr/>
         </p:nvGraphicFramePr>
         <p:xfrm>
-          <a:off x="365760" y="2456688"/>
-          <a:ext cx="8412479" cy="552704"/>
+          <a:off x="365760" y="2050288"/>
+          <a:ext cx="8412479" cy="349504"/>
         </p:xfrm>
         <a:graphic>
           <a:graphicData uri="http://schemas.openxmlformats.org/drawingml/2006/table">
@@ -15274,28 +15140,28 @@
                 <a:gridCol w="2271369"/>
                 <a:gridCol w="6141110"/>
               </a:tblGrid>
-              <a:tr h="552704">
-                <a:tc>
-                  <a:txBody>
-                    <a:bodyPr wrap="none"/>
-                    <a:lstStyle/>
-                    <a:p>
-                      <a:pPr>
-                        <a:lnSpc>
-                          <a:spcPts val="1600"/>
-                        </a:lnSpc>
-                        <a:spcAft>
-                          <a:spcPts val="0"/>
-                        </a:spcAft>
-                        <a:defRPr sz="1200" b="0">
-                          <a:solidFill>
-                            <a:srgbClr val="21243A"/>
-                          </a:solidFill>
-                          <a:latin typeface="Arial"/>
-                        </a:defRPr>
-                      </a:pPr>
-                      <a:r>
-                        <a:t>Software creator</a:t>
+              <a:tr h="349504">
+                <a:tc>
+                  <a:txBody>
+                    <a:bodyPr wrap="none"/>
+                    <a:lstStyle/>
+                    <a:p>
+                      <a:pPr>
+                        <a:lnSpc>
+                          <a:spcPts val="1600"/>
+                        </a:lnSpc>
+                        <a:spcAft>
+                          <a:spcPts val="0"/>
+                        </a:spcAft>
+                        <a:defRPr sz="1200" b="0">
+                          <a:solidFill>
+                            <a:srgbClr val="21243A"/>
+                          </a:solidFill>
+                          <a:latin typeface="Arial"/>
+                        </a:defRPr>
+                      </a:pPr>
+                      <a:r>
+                        <a:t>Analysis ID</a:t>
                       </a:r>
                     </a:p>
                   </a:txBody>
@@ -15325,26 +15191,7 @@
                         </a:defRPr>
                       </a:pPr>
                       <a:r>
-                        <a:t>Dr Sam Martin, Smart Data Research UK (UKRI) Fellow, Manchester Metropolitan</a:t>
-                      </a:r>
-                    </a:p>
-                    <a:p>
-                      <a:pPr>
-                        <a:lnSpc>
-                          <a:spcPts val="1600"/>
-                        </a:lnSpc>
-                        <a:spcAft>
-                          <a:spcPts val="0"/>
-                        </a:spcAft>
-                        <a:defRPr sz="1200" b="0">
-                          <a:solidFill>
-                            <a:srgbClr val="21243A"/>
-                          </a:solidFill>
-                          <a:latin typeface="Arial"/>
-                        </a:defRPr>
-                      </a:pPr>
-                      <a:r>
-                        <a:t>University (MMU). ORCID: https://orcid.org/0000-0002-4466-8374.</a:t>
+                        <a:t>250bad8f-c5c8-49fb-8c8c-10a2b68368b0</a:t>
                       </a:r>
                     </a:p>
                   </a:txBody>
@@ -15368,8 +15215,8 @@
           <p:nvPr/>
         </p:nvGraphicFramePr>
         <p:xfrm>
-          <a:off x="365760" y="3009392"/>
-          <a:ext cx="8412479" cy="552704"/>
+          <a:off x="365760" y="2399792"/>
+          <a:ext cx="8412479" cy="349504"/>
         </p:xfrm>
         <a:graphic>
           <a:graphicData uri="http://schemas.openxmlformats.org/drawingml/2006/table">
@@ -15381,28 +15228,28 @@
                 <a:gridCol w="2271369"/>
                 <a:gridCol w="6141110"/>
               </a:tblGrid>
-              <a:tr h="552704">
-                <a:tc>
-                  <a:txBody>
-                    <a:bodyPr wrap="none"/>
-                    <a:lstStyle/>
-                    <a:p>
-                      <a:pPr>
-                        <a:lnSpc>
-                          <a:spcPts val="1600"/>
-                        </a:lnSpc>
-                        <a:spcAft>
-                          <a:spcPts val="0"/>
-                        </a:spcAft>
-                        <a:defRPr sz="1200" b="0">
-                          <a:solidFill>
-                            <a:srgbClr val="21243A"/>
-                          </a:solidFill>
-                          <a:latin typeface="Arial"/>
-                        </a:defRPr>
-                      </a:pPr>
-                      <a:r>
-                        <a:t>Funding acknowledgement</a:t>
+              <a:tr h="349504">
+                <a:tc>
+                  <a:txBody>
+                    <a:bodyPr wrap="none"/>
+                    <a:lstStyle/>
+                    <a:p>
+                      <a:pPr>
+                        <a:lnSpc>
+                          <a:spcPts val="1600"/>
+                        </a:lnSpc>
+                        <a:spcAft>
+                          <a:spcPts val="0"/>
+                        </a:spcAft>
+                        <a:defRPr sz="1200" b="0">
+                          <a:solidFill>
+                            <a:srgbClr val="21243A"/>
+                          </a:solidFill>
+                          <a:latin typeface="Arial"/>
+                        </a:defRPr>
+                      </a:pPr>
+                      <a:r>
+                        <a:t>Generated</a:t>
                       </a:r>
                     </a:p>
                   </a:txBody>
@@ -15432,26 +15279,7 @@
                         </a:defRPr>
                       </a:pPr>
                       <a:r>
-                        <a:t>This work was supported by Smart Data Research UK, a UKRI investment; Grant</a:t>
-                      </a:r>
-                    </a:p>
-                    <a:p>
-                      <a:pPr>
-                        <a:lnSpc>
-                          <a:spcPts val="1600"/>
-                        </a:lnSpc>
-                        <a:spcAft>
-                          <a:spcPts val="0"/>
-                        </a:spcAft>
-                        <a:defRPr sz="1200" b="0">
-                          <a:solidFill>
-                            <a:srgbClr val="21243A"/>
-                          </a:solidFill>
-                          <a:latin typeface="Arial"/>
-                        </a:defRPr>
-                      </a:pPr>
-                      <a:r>
-                        <a:t>number UKRI4010.</a:t>
+                        <a:t>2026-09-26T22:31:28+00:00</a:t>
                       </a:r>
                     </a:p>
                   </a:txBody>
@@ -15475,7 +15303,535 @@
           <p:nvPr/>
         </p:nvGraphicFramePr>
         <p:xfrm>
-          <a:off x="365760" y="3562095"/>
+          <a:off x="365760" y="2749296"/>
+          <a:ext cx="8412479" cy="349504"/>
+        </p:xfrm>
+        <a:graphic>
+          <a:graphicData uri="http://schemas.openxmlformats.org/drawingml/2006/table">
+            <a:tbl>
+              <a:tblPr firstRow="1" bandRow="1">
+                <a:tableStyleId>{5C22544A-7EE6-4342-B048-85BDC9FD1C3A}</a:tableStyleId>
+              </a:tblPr>
+              <a:tblGrid>
+                <a:gridCol w="2271369"/>
+                <a:gridCol w="6141110"/>
+              </a:tblGrid>
+              <a:tr h="349504">
+                <a:tc>
+                  <a:txBody>
+                    <a:bodyPr wrap="none"/>
+                    <a:lstStyle/>
+                    <a:p>
+                      <a:pPr>
+                        <a:lnSpc>
+                          <a:spcPts val="1600"/>
+                        </a:lnSpc>
+                        <a:spcAft>
+                          <a:spcPts val="0"/>
+                        </a:spcAft>
+                        <a:defRPr sz="1200" b="0">
+                          <a:solidFill>
+                            <a:srgbClr val="21243A"/>
+                          </a:solidFill>
+                          <a:latin typeface="Arial"/>
+                        </a:defRPr>
+                      </a:pPr>
+                      <a:r>
+                        <a:t>Tool</a:t>
+                      </a:r>
+                    </a:p>
+                  </a:txBody>
+                  <a:tcPr marL="82296" marR="82296" marT="64008" marB="64008">
+                    <a:solidFill>
+                      <a:srgbClr val="FFFFFF"/>
+                    </a:solidFill>
+                  </a:tcPr>
+                </a:tc>
+                <a:tc>
+                  <a:txBody>
+                    <a:bodyPr wrap="none"/>
+                    <a:lstStyle/>
+                    <a:p>
+                      <a:pPr>
+                        <a:lnSpc>
+                          <a:spcPts val="1600"/>
+                        </a:lnSpc>
+                        <a:spcAft>
+                          <a:spcPts val="0"/>
+                        </a:spcAft>
+                        <a:defRPr sz="1200" b="0">
+                          <a:solidFill>
+                            <a:srgbClr val="21243A"/>
+                          </a:solidFill>
+                          <a:latin typeface="Arial"/>
+                        </a:defRPr>
+                      </a:pPr>
+                      <a:r>
+                        <a:t>SDA Vision 0.1.0</a:t>
+                      </a:r>
+                    </a:p>
+                  </a:txBody>
+                  <a:tcPr marL="82296" marR="82296" marT="64008" marB="64008">
+                    <a:solidFill>
+                      <a:srgbClr val="FFFFFF"/>
+                    </a:solidFill>
+                  </a:tcPr>
+                </a:tc>
+              </a:tr>
+            </a:tbl>
+          </a:graphicData>
+        </a:graphic>
+      </p:graphicFrame>
+      <p:graphicFrame>
+        <p:nvGraphicFramePr>
+          <p:cNvPr id="11" name="Table 10"/>
+          <p:cNvGraphicFramePr>
+            <a:graphicFrameLocks noGrp="1"/>
+          </p:cNvGraphicFramePr>
+          <p:nvPr/>
+        </p:nvGraphicFramePr>
+        <p:xfrm>
+          <a:off x="365760" y="3098800"/>
+          <a:ext cx="8412479" cy="349504"/>
+        </p:xfrm>
+        <a:graphic>
+          <a:graphicData uri="http://schemas.openxmlformats.org/drawingml/2006/table">
+            <a:tbl>
+              <a:tblPr firstRow="1" bandRow="1">
+                <a:tableStyleId>{5C22544A-7EE6-4342-B048-85BDC9FD1C3A}</a:tableStyleId>
+              </a:tblPr>
+              <a:tblGrid>
+                <a:gridCol w="2271369"/>
+                <a:gridCol w="6141110"/>
+              </a:tblGrid>
+              <a:tr h="349504">
+                <a:tc>
+                  <a:txBody>
+                    <a:bodyPr wrap="none"/>
+                    <a:lstStyle/>
+                    <a:p>
+                      <a:pPr>
+                        <a:lnSpc>
+                          <a:spcPts val="1600"/>
+                        </a:lnSpc>
+                        <a:spcAft>
+                          <a:spcPts val="0"/>
+                        </a:spcAft>
+                        <a:defRPr sz="1200" b="0">
+                          <a:solidFill>
+                            <a:srgbClr val="21243A"/>
+                          </a:solidFill>
+                          <a:latin typeface="Arial"/>
+                        </a:defRPr>
+                      </a:pPr>
+                      <a:r>
+                        <a:t>Models</a:t>
+                      </a:r>
+                    </a:p>
+                  </a:txBody>
+                  <a:tcPr marL="82296" marR="82296" marT="64008" marB="64008">
+                    <a:solidFill>
+                      <a:srgbClr val="F1F7F7"/>
+                    </a:solidFill>
+                  </a:tcPr>
+                </a:tc>
+                <a:tc>
+                  <a:txBody>
+                    <a:bodyPr wrap="none"/>
+                    <a:lstStyle/>
+                    <a:p>
+                      <a:pPr>
+                        <a:lnSpc>
+                          <a:spcPts val="1600"/>
+                        </a:lnSpc>
+                        <a:spcAft>
+                          <a:spcPts val="0"/>
+                        </a:spcAft>
+                        <a:defRPr sz="1200" b="0">
+                          <a:solidFill>
+                            <a:srgbClr val="21243A"/>
+                          </a:solidFill>
+                          <a:latin typeface="Arial"/>
+                        </a:defRPr>
+                      </a:pPr>
+                      <a:r>
+                        <a:t>claude-opus-5-5, gemini-3.8-flash, gpt-6-astra</a:t>
+                      </a:r>
+                    </a:p>
+                  </a:txBody>
+                  <a:tcPr marL="82296" marR="82296" marT="64008" marB="64008">
+                    <a:solidFill>
+                      <a:srgbClr val="F1F7F7"/>
+                    </a:solidFill>
+                  </a:tcPr>
+                </a:tc>
+              </a:tr>
+            </a:tbl>
+          </a:graphicData>
+        </a:graphic>
+      </p:graphicFrame>
+      <p:graphicFrame>
+        <p:nvGraphicFramePr>
+          <p:cNvPr id="12" name="Table 11"/>
+          <p:cNvGraphicFramePr>
+            <a:graphicFrameLocks noGrp="1"/>
+          </p:cNvGraphicFramePr>
+          <p:nvPr/>
+        </p:nvGraphicFramePr>
+        <p:xfrm>
+          <a:off x="365760" y="3448304"/>
+          <a:ext cx="8412479" cy="349504"/>
+        </p:xfrm>
+        <a:graphic>
+          <a:graphicData uri="http://schemas.openxmlformats.org/drawingml/2006/table">
+            <a:tbl>
+              <a:tblPr firstRow="1" bandRow="1">
+                <a:tableStyleId>{5C22544A-7EE6-4342-B048-85BDC9FD1C3A}</a:tableStyleId>
+              </a:tblPr>
+              <a:tblGrid>
+                <a:gridCol w="2271369"/>
+                <a:gridCol w="6141110"/>
+              </a:tblGrid>
+              <a:tr h="349504">
+                <a:tc>
+                  <a:txBody>
+                    <a:bodyPr wrap="none"/>
+                    <a:lstStyle/>
+                    <a:p>
+                      <a:pPr>
+                        <a:lnSpc>
+                          <a:spcPts val="1600"/>
+                        </a:lnSpc>
+                        <a:spcAft>
+                          <a:spcPts val="0"/>
+                        </a:spcAft>
+                        <a:defRPr sz="1200" b="0">
+                          <a:solidFill>
+                            <a:srgbClr val="21243A"/>
+                          </a:solidFill>
+                          <a:latin typeface="Arial"/>
+                        </a:defRPr>
+                      </a:pPr>
+                      <a:r>
+                        <a:t>Method version</a:t>
+                      </a:r>
+                    </a:p>
+                  </a:txBody>
+                  <a:tcPr marL="82296" marR="82296" marT="64008" marB="64008">
+                    <a:solidFill>
+                      <a:srgbClr val="FFFFFF"/>
+                    </a:solidFill>
+                  </a:tcPr>
+                </a:tc>
+                <a:tc>
+                  <a:txBody>
+                    <a:bodyPr wrap="none"/>
+                    <a:lstStyle/>
+                    <a:p>
+                      <a:pPr>
+                        <a:lnSpc>
+                          <a:spcPts val="1600"/>
+                        </a:lnSpc>
+                        <a:spcAft>
+                          <a:spcPts val="0"/>
+                        </a:spcAft>
+                        <a:defRPr sz="1200" b="0">
+                          <a:solidFill>
+                            <a:srgbClr val="21243A"/>
+                          </a:solidFill>
+                          <a:latin typeface="Arial"/>
+                        </a:defRPr>
+                      </a:pPr>
+                      <a:r>
+                        <a:t>pdf-preparation-2026-09-26.1</a:t>
+                      </a:r>
+                    </a:p>
+                  </a:txBody>
+                  <a:tcPr marL="82296" marR="82296" marT="64008" marB="64008">
+                    <a:solidFill>
+                      <a:srgbClr val="FFFFFF"/>
+                    </a:solidFill>
+                  </a:tcPr>
+                </a:tc>
+              </a:tr>
+            </a:tbl>
+          </a:graphicData>
+        </a:graphic>
+      </p:graphicFrame>
+      <p:graphicFrame>
+        <p:nvGraphicFramePr>
+          <p:cNvPr id="13" name="Table 12"/>
+          <p:cNvGraphicFramePr>
+            <a:graphicFrameLocks noGrp="1"/>
+          </p:cNvGraphicFramePr>
+          <p:nvPr/>
+        </p:nvGraphicFramePr>
+        <p:xfrm>
+          <a:off x="365760" y="3797808"/>
+          <a:ext cx="8412479" cy="349504"/>
+        </p:xfrm>
+        <a:graphic>
+          <a:graphicData uri="http://schemas.openxmlformats.org/drawingml/2006/table">
+            <a:tbl>
+              <a:tblPr firstRow="1" bandRow="1">
+                <a:tableStyleId>{5C22544A-7EE6-4342-B048-85BDC9FD1C3A}</a:tableStyleId>
+              </a:tblPr>
+              <a:tblGrid>
+                <a:gridCol w="2271369"/>
+                <a:gridCol w="6141110"/>
+              </a:tblGrid>
+              <a:tr h="349504">
+                <a:tc>
+                  <a:txBody>
+                    <a:bodyPr wrap="none"/>
+                    <a:lstStyle/>
+                    <a:p>
+                      <a:pPr>
+                        <a:lnSpc>
+                          <a:spcPts val="1600"/>
+                        </a:lnSpc>
+                        <a:spcAft>
+                          <a:spcPts val="0"/>
+                        </a:spcAft>
+                        <a:defRPr sz="1200" b="0">
+                          <a:solidFill>
+                            <a:srgbClr val="21243A"/>
+                          </a:solidFill>
+                          <a:latin typeface="Arial"/>
+                        </a:defRPr>
+                      </a:pPr>
+                      <a:r>
+                        <a:t>Analysis lens</a:t>
+                      </a:r>
+                    </a:p>
+                  </a:txBody>
+                  <a:tcPr marL="82296" marR="82296" marT="64008" marB="64008">
+                    <a:solidFill>
+                      <a:srgbClr val="F1F7F7"/>
+                    </a:solidFill>
+                  </a:tcPr>
+                </a:tc>
+                <a:tc>
+                  <a:txBody>
+                    <a:bodyPr wrap="none"/>
+                    <a:lstStyle/>
+                    <a:p>
+                      <a:pPr>
+                        <a:lnSpc>
+                          <a:spcPts val="1600"/>
+                        </a:lnSpc>
+                        <a:spcAft>
+                          <a:spcPts val="0"/>
+                        </a:spcAft>
+                        <a:defRPr sz="1200" b="0">
+                          <a:solidFill>
+                            <a:srgbClr val="21243A"/>
+                          </a:solidFill>
+                          <a:latin typeface="Arial"/>
+                        </a:defRPr>
+                      </a:pPr>
+                      <a:r>
+                        <a:t>general</a:t>
+                      </a:r>
+                    </a:p>
+                  </a:txBody>
+                  <a:tcPr marL="82296" marR="82296" marT="64008" marB="64008">
+                    <a:solidFill>
+                      <a:srgbClr val="F1F7F7"/>
+                    </a:solidFill>
+                  </a:tcPr>
+                </a:tc>
+              </a:tr>
+            </a:tbl>
+          </a:graphicData>
+        </a:graphic>
+      </p:graphicFrame>
+      <p:graphicFrame>
+        <p:nvGraphicFramePr>
+          <p:cNvPr id="14" name="Table 13"/>
+          <p:cNvGraphicFramePr>
+            <a:graphicFrameLocks noGrp="1"/>
+          </p:cNvGraphicFramePr>
+          <p:nvPr/>
+        </p:nvGraphicFramePr>
+        <p:xfrm>
+          <a:off x="365760" y="4147312"/>
+          <a:ext cx="8412479" cy="349504"/>
+        </p:xfrm>
+        <a:graphic>
+          <a:graphicData uri="http://schemas.openxmlformats.org/drawingml/2006/table">
+            <a:tbl>
+              <a:tblPr firstRow="1" bandRow="1">
+                <a:tableStyleId>{5C22544A-7EE6-4342-B048-85BDC9FD1C3A}</a:tableStyleId>
+              </a:tblPr>
+              <a:tblGrid>
+                <a:gridCol w="2271369"/>
+                <a:gridCol w="6141110"/>
+              </a:tblGrid>
+              <a:tr h="349504">
+                <a:tc>
+                  <a:txBody>
+                    <a:bodyPr wrap="none"/>
+                    <a:lstStyle/>
+                    <a:p>
+                      <a:pPr>
+                        <a:lnSpc>
+                          <a:spcPts val="1600"/>
+                        </a:lnSpc>
+                        <a:spcAft>
+                          <a:spcPts val="0"/>
+                        </a:spcAft>
+                        <a:defRPr sz="1200" b="0">
+                          <a:solidFill>
+                            <a:srgbClr val="21243A"/>
+                          </a:solidFill>
+                          <a:latin typeface="Arial"/>
+                        </a:defRPr>
+                      </a:pPr>
+                      <a:r>
+                        <a:t>Original SHA-256</a:t>
+                      </a:r>
+                    </a:p>
+                  </a:txBody>
+                  <a:tcPr marL="82296" marR="82296" marT="64008" marB="64008">
+                    <a:solidFill>
+                      <a:srgbClr val="FFFFFF"/>
+                    </a:solidFill>
+                  </a:tcPr>
+                </a:tc>
+                <a:tc>
+                  <a:txBody>
+                    <a:bodyPr wrap="none"/>
+                    <a:lstStyle/>
+                    <a:p>
+                      <a:pPr>
+                        <a:lnSpc>
+                          <a:spcPts val="1600"/>
+                        </a:lnSpc>
+                        <a:spcAft>
+                          <a:spcPts val="0"/>
+                        </a:spcAft>
+                        <a:defRPr sz="1200" b="0">
+                          <a:solidFill>
+                            <a:srgbClr val="21243A"/>
+                          </a:solidFill>
+                          <a:latin typeface="Arial"/>
+                        </a:defRPr>
+                      </a:pPr>
+                      <a:r>
+                        <a:t>d0ec89da564078611922195fca82364f2f8e63d253d02a6d9bb672a8265c5f15</a:t>
+                      </a:r>
+                    </a:p>
+                  </a:txBody>
+                  <a:tcPr marL="82296" marR="82296" marT="64008" marB="64008">
+                    <a:solidFill>
+                      <a:srgbClr val="FFFFFF"/>
+                    </a:solidFill>
+                  </a:tcPr>
+                </a:tc>
+              </a:tr>
+            </a:tbl>
+          </a:graphicData>
+        </a:graphic>
+      </p:graphicFrame>
+      <p:graphicFrame>
+        <p:nvGraphicFramePr>
+          <p:cNvPr id="15" name="Table 14"/>
+          <p:cNvGraphicFramePr>
+            <a:graphicFrameLocks noGrp="1"/>
+          </p:cNvGraphicFramePr>
+          <p:nvPr/>
+        </p:nvGraphicFramePr>
+        <p:xfrm>
+          <a:off x="365760" y="4496816"/>
+          <a:ext cx="8412479" cy="349504"/>
+        </p:xfrm>
+        <a:graphic>
+          <a:graphicData uri="http://schemas.openxmlformats.org/drawingml/2006/table">
+            <a:tbl>
+              <a:tblPr firstRow="1" bandRow="1">
+                <a:tableStyleId>{5C22544A-7EE6-4342-B048-85BDC9FD1C3A}</a:tableStyleId>
+              </a:tblPr>
+              <a:tblGrid>
+                <a:gridCol w="2271369"/>
+                <a:gridCol w="6141110"/>
+              </a:tblGrid>
+              <a:tr h="349504">
+                <a:tc>
+                  <a:txBody>
+                    <a:bodyPr wrap="none"/>
+                    <a:lstStyle/>
+                    <a:p>
+                      <a:pPr>
+                        <a:lnSpc>
+                          <a:spcPts val="1600"/>
+                        </a:lnSpc>
+                        <a:spcAft>
+                          <a:spcPts val="0"/>
+                        </a:spcAft>
+                        <a:defRPr sz="1200" b="0">
+                          <a:solidFill>
+                            <a:srgbClr val="21243A"/>
+                          </a:solidFill>
+                          <a:latin typeface="Arial"/>
+                        </a:defRPr>
+                      </a:pPr>
+                      <a:r>
+                        <a:t>Ingestion note 1</a:t>
+                      </a:r>
+                    </a:p>
+                  </a:txBody>
+                  <a:tcPr marL="82296" marR="82296" marT="64008" marB="64008">
+                    <a:solidFill>
+                      <a:srgbClr val="F1F7F7"/>
+                    </a:solidFill>
+                  </a:tcPr>
+                </a:tc>
+                <a:tc>
+                  <a:txBody>
+                    <a:bodyPr wrap="none"/>
+                    <a:lstStyle/>
+                    <a:p>
+                      <a:pPr>
+                        <a:lnSpc>
+                          <a:spcPts val="1600"/>
+                        </a:lnSpc>
+                        <a:spcAft>
+                          <a:spcPts val="0"/>
+                        </a:spcAft>
+                        <a:defRPr sz="1200" b="0">
+                          <a:solidFill>
+                            <a:srgbClr val="21243A"/>
+                          </a:solidFill>
+                          <a:latin typeface="Arial"/>
+                        </a:defRPr>
+                      </a:pPr>
+                      <a:r>
+                        <a:t>14 slides; sampled 4 of 14 embedded slide image(s).</a:t>
+                      </a:r>
+                    </a:p>
+                  </a:txBody>
+                  <a:tcPr marL="82296" marR="82296" marT="64008" marB="64008">
+                    <a:solidFill>
+                      <a:srgbClr val="F1F7F7"/>
+                    </a:solidFill>
+                  </a:tcPr>
+                </a:tc>
+              </a:tr>
+            </a:tbl>
+          </a:graphicData>
+        </a:graphic>
+      </p:graphicFrame>
+      <p:graphicFrame>
+        <p:nvGraphicFramePr>
+          <p:cNvPr id="16" name="Table 15"/>
+          <p:cNvGraphicFramePr>
+            <a:graphicFrameLocks noGrp="1"/>
+          </p:cNvGraphicFramePr>
+          <p:nvPr/>
+        </p:nvGraphicFramePr>
+        <p:xfrm>
+          <a:off x="365760" y="4846320"/>
           <a:ext cx="8412479" cy="552704"/>
         </p:xfrm>
         <a:graphic>
@@ -15509,7 +15865,7 @@
                         </a:defRPr>
                       </a:pPr>
                       <a:r>
-                        <a:t>Analysis record</a:t>
+                        <a:t>Ingestion note 2</a:t>
                       </a:r>
                     </a:p>
                   </a:txBody>
@@ -15539,32 +15895,139 @@
                         </a:defRPr>
                       </a:pPr>
                       <a:r>
-                        <a:t>File: presentation.pptx; media type: pptx; recorded at: 2026-09-26T22:31:28+00:00;</a:t>
-                      </a:r>
-                    </a:p>
-                    <a:p>
-                      <a:pPr>
-                        <a:lnSpc>
-                          <a:spcPts val="1600"/>
-                        </a:lnSpc>
-                        <a:spcAft>
-                          <a:spcPts val="0"/>
-                        </a:spcAft>
-                        <a:defRPr sz="1200" b="0">
-                          <a:solidFill>
-                            <a:srgbClr val="21243A"/>
-                          </a:solidFill>
-                          <a:latin typeface="Arial"/>
-                        </a:defRPr>
-                      </a:pPr>
-                      <a:r>
-                        <a:t>models: claude-opus-5-5, gemini-3.8-flash, gpt-6-astra.</a:t>
+                        <a:t>Fresh provider replies acquired for eleven-examples-refresh-20260926-r1; report</a:t>
+                      </a:r>
+                    </a:p>
+                    <a:p>
+                      <a:pPr>
+                        <a:lnSpc>
+                          <a:spcPts val="1600"/>
+                        </a:lnSpc>
+                        <a:spcAft>
+                          <a:spcPts val="0"/>
+                        </a:spcAft>
+                        <a:defRPr sz="1200" b="0">
+                          <a:solidFill>
+                            <a:srgbClr val="21243A"/>
+                          </a:solidFill>
+                          <a:latin typeface="Arial"/>
+                        </a:defRPr>
+                      </a:pPr>
+                      <a:r>
+                        <a:t>assembled locally from the saved responses without further API calls.</a:t>
                       </a:r>
                     </a:p>
                   </a:txBody>
                   <a:tcPr marL="82296" marR="82296" marT="64008" marB="64008">
                     <a:solidFill>
                       <a:srgbClr val="FFFFFF"/>
+                    </a:solidFill>
+                  </a:tcPr>
+                </a:tc>
+              </a:tr>
+            </a:tbl>
+          </a:graphicData>
+        </a:graphic>
+      </p:graphicFrame>
+      <p:graphicFrame>
+        <p:nvGraphicFramePr>
+          <p:cNvPr id="17" name="Table 16"/>
+          <p:cNvGraphicFramePr>
+            <a:graphicFrameLocks noGrp="1"/>
+          </p:cNvGraphicFramePr>
+          <p:nvPr/>
+        </p:nvGraphicFramePr>
+        <p:xfrm>
+          <a:off x="365760" y="5399024"/>
+          <a:ext cx="8412479" cy="552704"/>
+        </p:xfrm>
+        <a:graphic>
+          <a:graphicData uri="http://schemas.openxmlformats.org/drawingml/2006/table">
+            <a:tbl>
+              <a:tblPr firstRow="1" bandRow="1">
+                <a:tableStyleId>{5C22544A-7EE6-4342-B048-85BDC9FD1C3A}</a:tableStyleId>
+              </a:tblPr>
+              <a:tblGrid>
+                <a:gridCol w="2271369"/>
+                <a:gridCol w="6141110"/>
+              </a:tblGrid>
+              <a:tr h="552704">
+                <a:tc>
+                  <a:txBody>
+                    <a:bodyPr wrap="none"/>
+                    <a:lstStyle/>
+                    <a:p>
+                      <a:pPr>
+                        <a:lnSpc>
+                          <a:spcPts val="1600"/>
+                        </a:lnSpc>
+                        <a:spcAft>
+                          <a:spcPts val="0"/>
+                        </a:spcAft>
+                        <a:defRPr sz="1200" b="0">
+                          <a:solidFill>
+                            <a:srgbClr val="21243A"/>
+                          </a:solidFill>
+                          <a:latin typeface="Arial"/>
+                        </a:defRPr>
+                      </a:pPr>
+                      <a:r>
+                        <a:t>Ingestion note 3</a:t>
+                      </a:r>
+                    </a:p>
+                  </a:txBody>
+                  <a:tcPr marL="82296" marR="82296" marT="64008" marB="64008">
+                    <a:solidFill>
+                      <a:srgbClr val="F1F7F7"/>
+                    </a:solidFill>
+                  </a:tcPr>
+                </a:tc>
+                <a:tc>
+                  <a:txBody>
+                    <a:bodyPr wrap="none"/>
+                    <a:lstStyle/>
+                    <a:p>
+                      <a:pPr>
+                        <a:lnSpc>
+                          <a:spcPts val="1600"/>
+                        </a:lnSpc>
+                        <a:spcAft>
+                          <a:spcPts val="0"/>
+                        </a:spcAft>
+                        <a:defRPr sz="1200" b="0">
+                          <a:solidFill>
+                            <a:srgbClr val="21243A"/>
+                          </a:solidFill>
+                          <a:latin typeface="Arial"/>
+                        </a:defRPr>
+                      </a:pPr>
+                      <a:r>
+                        <a:t>Provider latency values are restored from the acquisition receipts (maximum</a:t>
+                      </a:r>
+                    </a:p>
+                    <a:p>
+                      <a:pPr>
+                        <a:lnSpc>
+                          <a:spcPts val="1600"/>
+                        </a:lnSpc>
+                        <a:spcAft>
+                          <a:spcPts val="0"/>
+                        </a:spcAft>
+                        <a:defRPr sz="1200" b="0">
+                          <a:solidFill>
+                            <a:srgbClr val="21243A"/>
+                          </a:solidFill>
+                          <a:latin typeface="Arial"/>
+                        </a:defRPr>
+                      </a:pPr>
+                      <a:r>
+                        <a:t>sampled-frame latency per provider); raw replies and assessment results are</a:t>
+                      </a:r>
+                    </a:p>
+                  </a:txBody>
+                  <a:tcPr marL="82296" marR="82296" marT="64008" marB="64008">
+                    <a:solidFill>
+                      <a:srgbClr val="F1F7F7"/>
                     </a:solidFill>
                   </a:tcPr>
                 </a:tc>
@@ -15670,7 +16133,7 @@
               </a:defRPr>
             </a:pPr>
             <a:r>
-              <a:t>File and analysis record</a:t>
+              <a:t>File and analysis record (continued)</a:t>
             </a:r>
           </a:p>
         </p:txBody>
@@ -15755,1286 +16218,6 @@
             </a:pPr>
             <a:r>
               <a:t>21</a:t>
-            </a:r>
-          </a:p>
-        </p:txBody>
-      </p:sp>
-      <p:graphicFrame>
-        <p:nvGraphicFramePr>
-          <p:cNvPr id="6" name="Table 5"/>
-          <p:cNvGraphicFramePr>
-            <a:graphicFrameLocks noGrp="1"/>
-          </p:cNvGraphicFramePr>
-          <p:nvPr/>
-        </p:nvGraphicFramePr>
-        <p:xfrm>
-          <a:off x="365760" y="1353312"/>
-          <a:ext cx="8412479" cy="347472"/>
-        </p:xfrm>
-        <a:graphic>
-          <a:graphicData uri="http://schemas.openxmlformats.org/drawingml/2006/table">
-            <a:tbl>
-              <a:tblPr firstRow="1" bandRow="1">
-                <a:tableStyleId>{5C22544A-7EE6-4342-B048-85BDC9FD1C3A}</a:tableStyleId>
-              </a:tblPr>
-              <a:tblGrid>
-                <a:gridCol w="2271369"/>
-                <a:gridCol w="6141110"/>
-              </a:tblGrid>
-              <a:tr h="347472">
-                <a:tc>
-                  <a:txBody>
-                    <a:bodyPr wrap="none"/>
-                    <a:lstStyle/>
-                    <a:p>
-                      <a:pPr>
-                        <a:lnSpc>
-                          <a:spcPts val="1600"/>
-                        </a:lnSpc>
-                        <a:spcAft>
-                          <a:spcPts val="0"/>
-                        </a:spcAft>
-                        <a:defRPr sz="1200" b="1">
-                          <a:solidFill>
-                            <a:srgbClr val="FFFFFF"/>
-                          </a:solidFill>
-                          <a:latin typeface="Arial"/>
-                        </a:defRPr>
-                      </a:pPr>
-                      <a:r>
-                        <a:t>Field</a:t>
-                      </a:r>
-                    </a:p>
-                  </a:txBody>
-                  <a:tcPr marL="82296" marR="82296" marT="64008" marB="64008">
-                    <a:solidFill>
-                      <a:srgbClr val="16787C"/>
-                    </a:solidFill>
-                  </a:tcPr>
-                </a:tc>
-                <a:tc>
-                  <a:txBody>
-                    <a:bodyPr wrap="none"/>
-                    <a:lstStyle/>
-                    <a:p>
-                      <a:pPr>
-                        <a:lnSpc>
-                          <a:spcPts val="1600"/>
-                        </a:lnSpc>
-                        <a:spcAft>
-                          <a:spcPts val="0"/>
-                        </a:spcAft>
-                        <a:defRPr sz="1200" b="1">
-                          <a:solidFill>
-                            <a:srgbClr val="FFFFFF"/>
-                          </a:solidFill>
-                          <a:latin typeface="Arial"/>
-                        </a:defRPr>
-                      </a:pPr>
-                      <a:r>
-                        <a:t>Recorded detail</a:t>
-                      </a:r>
-                    </a:p>
-                  </a:txBody>
-                  <a:tcPr marL="82296" marR="82296" marT="64008" marB="64008">
-                    <a:solidFill>
-                      <a:srgbClr val="16787C"/>
-                    </a:solidFill>
-                  </a:tcPr>
-                </a:tc>
-              </a:tr>
-            </a:tbl>
-          </a:graphicData>
-        </a:graphic>
-      </p:graphicFrame>
-      <p:graphicFrame>
-        <p:nvGraphicFramePr>
-          <p:cNvPr id="7" name="Table 6"/>
-          <p:cNvGraphicFramePr>
-            <a:graphicFrameLocks noGrp="1"/>
-          </p:cNvGraphicFramePr>
-          <p:nvPr/>
-        </p:nvGraphicFramePr>
-        <p:xfrm>
-          <a:off x="365760" y="1700784"/>
-          <a:ext cx="8412479" cy="349504"/>
-        </p:xfrm>
-        <a:graphic>
-          <a:graphicData uri="http://schemas.openxmlformats.org/drawingml/2006/table">
-            <a:tbl>
-              <a:tblPr firstRow="1" bandRow="1">
-                <a:tableStyleId>{5C22544A-7EE6-4342-B048-85BDC9FD1C3A}</a:tableStyleId>
-              </a:tblPr>
-              <a:tblGrid>
-                <a:gridCol w="2271369"/>
-                <a:gridCol w="6141110"/>
-              </a:tblGrid>
-              <a:tr h="349504">
-                <a:tc>
-                  <a:txBody>
-                    <a:bodyPr wrap="none"/>
-                    <a:lstStyle/>
-                    <a:p>
-                      <a:pPr>
-                        <a:lnSpc>
-                          <a:spcPts val="1600"/>
-                        </a:lnSpc>
-                        <a:spcAft>
-                          <a:spcPts val="0"/>
-                        </a:spcAft>
-                        <a:defRPr sz="1200" b="0">
-                          <a:solidFill>
-                            <a:srgbClr val="21243A"/>
-                          </a:solidFill>
-                          <a:latin typeface="Arial"/>
-                        </a:defRPr>
-                      </a:pPr>
-                      <a:r>
-                        <a:t>File</a:t>
-                      </a:r>
-                    </a:p>
-                  </a:txBody>
-                  <a:tcPr marL="82296" marR="82296" marT="64008" marB="64008">
-                    <a:solidFill>
-                      <a:srgbClr val="F1F7F7"/>
-                    </a:solidFill>
-                  </a:tcPr>
-                </a:tc>
-                <a:tc>
-                  <a:txBody>
-                    <a:bodyPr wrap="none"/>
-                    <a:lstStyle/>
-                    <a:p>
-                      <a:pPr>
-                        <a:lnSpc>
-                          <a:spcPts val="1600"/>
-                        </a:lnSpc>
-                        <a:spcAft>
-                          <a:spcPts val="0"/>
-                        </a:spcAft>
-                        <a:defRPr sz="1200" b="0">
-                          <a:solidFill>
-                            <a:srgbClr val="21243A"/>
-                          </a:solidFill>
-                          <a:latin typeface="Arial"/>
-                        </a:defRPr>
-                      </a:pPr>
-                      <a:r>
-                        <a:t>presentation.pptx</a:t>
-                      </a:r>
-                    </a:p>
-                  </a:txBody>
-                  <a:tcPr marL="82296" marR="82296" marT="64008" marB="64008">
-                    <a:solidFill>
-                      <a:srgbClr val="F1F7F7"/>
-                    </a:solidFill>
-                  </a:tcPr>
-                </a:tc>
-              </a:tr>
-            </a:tbl>
-          </a:graphicData>
-        </a:graphic>
-      </p:graphicFrame>
-      <p:graphicFrame>
-        <p:nvGraphicFramePr>
-          <p:cNvPr id="8" name="Table 7"/>
-          <p:cNvGraphicFramePr>
-            <a:graphicFrameLocks noGrp="1"/>
-          </p:cNvGraphicFramePr>
-          <p:nvPr/>
-        </p:nvGraphicFramePr>
-        <p:xfrm>
-          <a:off x="365760" y="2050288"/>
-          <a:ext cx="8412479" cy="349504"/>
-        </p:xfrm>
-        <a:graphic>
-          <a:graphicData uri="http://schemas.openxmlformats.org/drawingml/2006/table">
-            <a:tbl>
-              <a:tblPr firstRow="1" bandRow="1">
-                <a:tableStyleId>{5C22544A-7EE6-4342-B048-85BDC9FD1C3A}</a:tableStyleId>
-              </a:tblPr>
-              <a:tblGrid>
-                <a:gridCol w="2271369"/>
-                <a:gridCol w="6141110"/>
-              </a:tblGrid>
-              <a:tr h="349504">
-                <a:tc>
-                  <a:txBody>
-                    <a:bodyPr wrap="none"/>
-                    <a:lstStyle/>
-                    <a:p>
-                      <a:pPr>
-                        <a:lnSpc>
-                          <a:spcPts val="1600"/>
-                        </a:lnSpc>
-                        <a:spcAft>
-                          <a:spcPts val="0"/>
-                        </a:spcAft>
-                        <a:defRPr sz="1200" b="0">
-                          <a:solidFill>
-                            <a:srgbClr val="21243A"/>
-                          </a:solidFill>
-                          <a:latin typeface="Arial"/>
-                        </a:defRPr>
-                      </a:pPr>
-                      <a:r>
-                        <a:t>Analysis ID</a:t>
-                      </a:r>
-                    </a:p>
-                  </a:txBody>
-                  <a:tcPr marL="82296" marR="82296" marT="64008" marB="64008">
-                    <a:solidFill>
-                      <a:srgbClr val="FFFFFF"/>
-                    </a:solidFill>
-                  </a:tcPr>
-                </a:tc>
-                <a:tc>
-                  <a:txBody>
-                    <a:bodyPr wrap="none"/>
-                    <a:lstStyle/>
-                    <a:p>
-                      <a:pPr>
-                        <a:lnSpc>
-                          <a:spcPts val="1600"/>
-                        </a:lnSpc>
-                        <a:spcAft>
-                          <a:spcPts val="0"/>
-                        </a:spcAft>
-                        <a:defRPr sz="1200" b="0">
-                          <a:solidFill>
-                            <a:srgbClr val="21243A"/>
-                          </a:solidFill>
-                          <a:latin typeface="Arial"/>
-                        </a:defRPr>
-                      </a:pPr>
-                      <a:r>
-                        <a:t>250bad8f-c5c8-49fb-8c8c-10a2b68368b0</a:t>
-                      </a:r>
-                    </a:p>
-                  </a:txBody>
-                  <a:tcPr marL="82296" marR="82296" marT="64008" marB="64008">
-                    <a:solidFill>
-                      <a:srgbClr val="FFFFFF"/>
-                    </a:solidFill>
-                  </a:tcPr>
-                </a:tc>
-              </a:tr>
-            </a:tbl>
-          </a:graphicData>
-        </a:graphic>
-      </p:graphicFrame>
-      <p:graphicFrame>
-        <p:nvGraphicFramePr>
-          <p:cNvPr id="9" name="Table 8"/>
-          <p:cNvGraphicFramePr>
-            <a:graphicFrameLocks noGrp="1"/>
-          </p:cNvGraphicFramePr>
-          <p:nvPr/>
-        </p:nvGraphicFramePr>
-        <p:xfrm>
-          <a:off x="365760" y="2399792"/>
-          <a:ext cx="8412479" cy="349504"/>
-        </p:xfrm>
-        <a:graphic>
-          <a:graphicData uri="http://schemas.openxmlformats.org/drawingml/2006/table">
-            <a:tbl>
-              <a:tblPr firstRow="1" bandRow="1">
-                <a:tableStyleId>{5C22544A-7EE6-4342-B048-85BDC9FD1C3A}</a:tableStyleId>
-              </a:tblPr>
-              <a:tblGrid>
-                <a:gridCol w="2271369"/>
-                <a:gridCol w="6141110"/>
-              </a:tblGrid>
-              <a:tr h="349504">
-                <a:tc>
-                  <a:txBody>
-                    <a:bodyPr wrap="none"/>
-                    <a:lstStyle/>
-                    <a:p>
-                      <a:pPr>
-                        <a:lnSpc>
-                          <a:spcPts val="1600"/>
-                        </a:lnSpc>
-                        <a:spcAft>
-                          <a:spcPts val="0"/>
-                        </a:spcAft>
-                        <a:defRPr sz="1200" b="0">
-                          <a:solidFill>
-                            <a:srgbClr val="21243A"/>
-                          </a:solidFill>
-                          <a:latin typeface="Arial"/>
-                        </a:defRPr>
-                      </a:pPr>
-                      <a:r>
-                        <a:t>Generated</a:t>
-                      </a:r>
-                    </a:p>
-                  </a:txBody>
-                  <a:tcPr marL="82296" marR="82296" marT="64008" marB="64008">
-                    <a:solidFill>
-                      <a:srgbClr val="F1F7F7"/>
-                    </a:solidFill>
-                  </a:tcPr>
-                </a:tc>
-                <a:tc>
-                  <a:txBody>
-                    <a:bodyPr wrap="none"/>
-                    <a:lstStyle/>
-                    <a:p>
-                      <a:pPr>
-                        <a:lnSpc>
-                          <a:spcPts val="1600"/>
-                        </a:lnSpc>
-                        <a:spcAft>
-                          <a:spcPts val="0"/>
-                        </a:spcAft>
-                        <a:defRPr sz="1200" b="0">
-                          <a:solidFill>
-                            <a:srgbClr val="21243A"/>
-                          </a:solidFill>
-                          <a:latin typeface="Arial"/>
-                        </a:defRPr>
-                      </a:pPr>
-                      <a:r>
-                        <a:t>2026-09-26T22:31:28+00:00</a:t>
-                      </a:r>
-                    </a:p>
-                  </a:txBody>
-                  <a:tcPr marL="82296" marR="82296" marT="64008" marB="64008">
-                    <a:solidFill>
-                      <a:srgbClr val="F1F7F7"/>
-                    </a:solidFill>
-                  </a:tcPr>
-                </a:tc>
-              </a:tr>
-            </a:tbl>
-          </a:graphicData>
-        </a:graphic>
-      </p:graphicFrame>
-      <p:graphicFrame>
-        <p:nvGraphicFramePr>
-          <p:cNvPr id="10" name="Table 9"/>
-          <p:cNvGraphicFramePr>
-            <a:graphicFrameLocks noGrp="1"/>
-          </p:cNvGraphicFramePr>
-          <p:nvPr/>
-        </p:nvGraphicFramePr>
-        <p:xfrm>
-          <a:off x="365760" y="2749296"/>
-          <a:ext cx="8412479" cy="349504"/>
-        </p:xfrm>
-        <a:graphic>
-          <a:graphicData uri="http://schemas.openxmlformats.org/drawingml/2006/table">
-            <a:tbl>
-              <a:tblPr firstRow="1" bandRow="1">
-                <a:tableStyleId>{5C22544A-7EE6-4342-B048-85BDC9FD1C3A}</a:tableStyleId>
-              </a:tblPr>
-              <a:tblGrid>
-                <a:gridCol w="2271369"/>
-                <a:gridCol w="6141110"/>
-              </a:tblGrid>
-              <a:tr h="349504">
-                <a:tc>
-                  <a:txBody>
-                    <a:bodyPr wrap="none"/>
-                    <a:lstStyle/>
-                    <a:p>
-                      <a:pPr>
-                        <a:lnSpc>
-                          <a:spcPts val="1600"/>
-                        </a:lnSpc>
-                        <a:spcAft>
-                          <a:spcPts val="0"/>
-                        </a:spcAft>
-                        <a:defRPr sz="1200" b="0">
-                          <a:solidFill>
-                            <a:srgbClr val="21243A"/>
-                          </a:solidFill>
-                          <a:latin typeface="Arial"/>
-                        </a:defRPr>
-                      </a:pPr>
-                      <a:r>
-                        <a:t>Tool</a:t>
-                      </a:r>
-                    </a:p>
-                  </a:txBody>
-                  <a:tcPr marL="82296" marR="82296" marT="64008" marB="64008">
-                    <a:solidFill>
-                      <a:srgbClr val="FFFFFF"/>
-                    </a:solidFill>
-                  </a:tcPr>
-                </a:tc>
-                <a:tc>
-                  <a:txBody>
-                    <a:bodyPr wrap="none"/>
-                    <a:lstStyle/>
-                    <a:p>
-                      <a:pPr>
-                        <a:lnSpc>
-                          <a:spcPts val="1600"/>
-                        </a:lnSpc>
-                        <a:spcAft>
-                          <a:spcPts val="0"/>
-                        </a:spcAft>
-                        <a:defRPr sz="1200" b="0">
-                          <a:solidFill>
-                            <a:srgbClr val="21243A"/>
-                          </a:solidFill>
-                          <a:latin typeface="Arial"/>
-                        </a:defRPr>
-                      </a:pPr>
-                      <a:r>
-                        <a:t>SDA Vision 0.1.0</a:t>
-                      </a:r>
-                    </a:p>
-                  </a:txBody>
-                  <a:tcPr marL="82296" marR="82296" marT="64008" marB="64008">
-                    <a:solidFill>
-                      <a:srgbClr val="FFFFFF"/>
-                    </a:solidFill>
-                  </a:tcPr>
-                </a:tc>
-              </a:tr>
-            </a:tbl>
-          </a:graphicData>
-        </a:graphic>
-      </p:graphicFrame>
-      <p:graphicFrame>
-        <p:nvGraphicFramePr>
-          <p:cNvPr id="11" name="Table 10"/>
-          <p:cNvGraphicFramePr>
-            <a:graphicFrameLocks noGrp="1"/>
-          </p:cNvGraphicFramePr>
-          <p:nvPr/>
-        </p:nvGraphicFramePr>
-        <p:xfrm>
-          <a:off x="365760" y="3098800"/>
-          <a:ext cx="8412479" cy="349504"/>
-        </p:xfrm>
-        <a:graphic>
-          <a:graphicData uri="http://schemas.openxmlformats.org/drawingml/2006/table">
-            <a:tbl>
-              <a:tblPr firstRow="1" bandRow="1">
-                <a:tableStyleId>{5C22544A-7EE6-4342-B048-85BDC9FD1C3A}</a:tableStyleId>
-              </a:tblPr>
-              <a:tblGrid>
-                <a:gridCol w="2271369"/>
-                <a:gridCol w="6141110"/>
-              </a:tblGrid>
-              <a:tr h="349504">
-                <a:tc>
-                  <a:txBody>
-                    <a:bodyPr wrap="none"/>
-                    <a:lstStyle/>
-                    <a:p>
-                      <a:pPr>
-                        <a:lnSpc>
-                          <a:spcPts val="1600"/>
-                        </a:lnSpc>
-                        <a:spcAft>
-                          <a:spcPts val="0"/>
-                        </a:spcAft>
-                        <a:defRPr sz="1200" b="0">
-                          <a:solidFill>
-                            <a:srgbClr val="21243A"/>
-                          </a:solidFill>
-                          <a:latin typeface="Arial"/>
-                        </a:defRPr>
-                      </a:pPr>
-                      <a:r>
-                        <a:t>Models</a:t>
-                      </a:r>
-                    </a:p>
-                  </a:txBody>
-                  <a:tcPr marL="82296" marR="82296" marT="64008" marB="64008">
-                    <a:solidFill>
-                      <a:srgbClr val="F1F7F7"/>
-                    </a:solidFill>
-                  </a:tcPr>
-                </a:tc>
-                <a:tc>
-                  <a:txBody>
-                    <a:bodyPr wrap="none"/>
-                    <a:lstStyle/>
-                    <a:p>
-                      <a:pPr>
-                        <a:lnSpc>
-                          <a:spcPts val="1600"/>
-                        </a:lnSpc>
-                        <a:spcAft>
-                          <a:spcPts val="0"/>
-                        </a:spcAft>
-                        <a:defRPr sz="1200" b="0">
-                          <a:solidFill>
-                            <a:srgbClr val="21243A"/>
-                          </a:solidFill>
-                          <a:latin typeface="Arial"/>
-                        </a:defRPr>
-                      </a:pPr>
-                      <a:r>
-                        <a:t>claude-opus-5-5, gemini-3.8-flash, gpt-6-astra</a:t>
-                      </a:r>
-                    </a:p>
-                  </a:txBody>
-                  <a:tcPr marL="82296" marR="82296" marT="64008" marB="64008">
-                    <a:solidFill>
-                      <a:srgbClr val="F1F7F7"/>
-                    </a:solidFill>
-                  </a:tcPr>
-                </a:tc>
-              </a:tr>
-            </a:tbl>
-          </a:graphicData>
-        </a:graphic>
-      </p:graphicFrame>
-      <p:graphicFrame>
-        <p:nvGraphicFramePr>
-          <p:cNvPr id="12" name="Table 11"/>
-          <p:cNvGraphicFramePr>
-            <a:graphicFrameLocks noGrp="1"/>
-          </p:cNvGraphicFramePr>
-          <p:nvPr/>
-        </p:nvGraphicFramePr>
-        <p:xfrm>
-          <a:off x="365760" y="3448304"/>
-          <a:ext cx="8412479" cy="349504"/>
-        </p:xfrm>
-        <a:graphic>
-          <a:graphicData uri="http://schemas.openxmlformats.org/drawingml/2006/table">
-            <a:tbl>
-              <a:tblPr firstRow="1" bandRow="1">
-                <a:tableStyleId>{5C22544A-7EE6-4342-B048-85BDC9FD1C3A}</a:tableStyleId>
-              </a:tblPr>
-              <a:tblGrid>
-                <a:gridCol w="2271369"/>
-                <a:gridCol w="6141110"/>
-              </a:tblGrid>
-              <a:tr h="349504">
-                <a:tc>
-                  <a:txBody>
-                    <a:bodyPr wrap="none"/>
-                    <a:lstStyle/>
-                    <a:p>
-                      <a:pPr>
-                        <a:lnSpc>
-                          <a:spcPts val="1600"/>
-                        </a:lnSpc>
-                        <a:spcAft>
-                          <a:spcPts val="0"/>
-                        </a:spcAft>
-                        <a:defRPr sz="1200" b="0">
-                          <a:solidFill>
-                            <a:srgbClr val="21243A"/>
-                          </a:solidFill>
-                          <a:latin typeface="Arial"/>
-                        </a:defRPr>
-                      </a:pPr>
-                      <a:r>
-                        <a:t>Method version</a:t>
-                      </a:r>
-                    </a:p>
-                  </a:txBody>
-                  <a:tcPr marL="82296" marR="82296" marT="64008" marB="64008">
-                    <a:solidFill>
-                      <a:srgbClr val="FFFFFF"/>
-                    </a:solidFill>
-                  </a:tcPr>
-                </a:tc>
-                <a:tc>
-                  <a:txBody>
-                    <a:bodyPr wrap="none"/>
-                    <a:lstStyle/>
-                    <a:p>
-                      <a:pPr>
-                        <a:lnSpc>
-                          <a:spcPts val="1600"/>
-                        </a:lnSpc>
-                        <a:spcAft>
-                          <a:spcPts val="0"/>
-                        </a:spcAft>
-                        <a:defRPr sz="1200" b="0">
-                          <a:solidFill>
-                            <a:srgbClr val="21243A"/>
-                          </a:solidFill>
-                          <a:latin typeface="Arial"/>
-                        </a:defRPr>
-                      </a:pPr>
-                      <a:r>
-                        <a:t>pdf-preparation-2026-09-26.1</a:t>
-                      </a:r>
-                    </a:p>
-                  </a:txBody>
-                  <a:tcPr marL="82296" marR="82296" marT="64008" marB="64008">
-                    <a:solidFill>
-                      <a:srgbClr val="FFFFFF"/>
-                    </a:solidFill>
-                  </a:tcPr>
-                </a:tc>
-              </a:tr>
-            </a:tbl>
-          </a:graphicData>
-        </a:graphic>
-      </p:graphicFrame>
-      <p:graphicFrame>
-        <p:nvGraphicFramePr>
-          <p:cNvPr id="13" name="Table 12"/>
-          <p:cNvGraphicFramePr>
-            <a:graphicFrameLocks noGrp="1"/>
-          </p:cNvGraphicFramePr>
-          <p:nvPr/>
-        </p:nvGraphicFramePr>
-        <p:xfrm>
-          <a:off x="365760" y="3797808"/>
-          <a:ext cx="8412479" cy="349504"/>
-        </p:xfrm>
-        <a:graphic>
-          <a:graphicData uri="http://schemas.openxmlformats.org/drawingml/2006/table">
-            <a:tbl>
-              <a:tblPr firstRow="1" bandRow="1">
-                <a:tableStyleId>{5C22544A-7EE6-4342-B048-85BDC9FD1C3A}</a:tableStyleId>
-              </a:tblPr>
-              <a:tblGrid>
-                <a:gridCol w="2271369"/>
-                <a:gridCol w="6141110"/>
-              </a:tblGrid>
-              <a:tr h="349504">
-                <a:tc>
-                  <a:txBody>
-                    <a:bodyPr wrap="none"/>
-                    <a:lstStyle/>
-                    <a:p>
-                      <a:pPr>
-                        <a:lnSpc>
-                          <a:spcPts val="1600"/>
-                        </a:lnSpc>
-                        <a:spcAft>
-                          <a:spcPts val="0"/>
-                        </a:spcAft>
-                        <a:defRPr sz="1200" b="0">
-                          <a:solidFill>
-                            <a:srgbClr val="21243A"/>
-                          </a:solidFill>
-                          <a:latin typeface="Arial"/>
-                        </a:defRPr>
-                      </a:pPr>
-                      <a:r>
-                        <a:t>Analysis lens</a:t>
-                      </a:r>
-                    </a:p>
-                  </a:txBody>
-                  <a:tcPr marL="82296" marR="82296" marT="64008" marB="64008">
-                    <a:solidFill>
-                      <a:srgbClr val="F1F7F7"/>
-                    </a:solidFill>
-                  </a:tcPr>
-                </a:tc>
-                <a:tc>
-                  <a:txBody>
-                    <a:bodyPr wrap="none"/>
-                    <a:lstStyle/>
-                    <a:p>
-                      <a:pPr>
-                        <a:lnSpc>
-                          <a:spcPts val="1600"/>
-                        </a:lnSpc>
-                        <a:spcAft>
-                          <a:spcPts val="0"/>
-                        </a:spcAft>
-                        <a:defRPr sz="1200" b="0">
-                          <a:solidFill>
-                            <a:srgbClr val="21243A"/>
-                          </a:solidFill>
-                          <a:latin typeface="Arial"/>
-                        </a:defRPr>
-                      </a:pPr>
-                      <a:r>
-                        <a:t>general</a:t>
-                      </a:r>
-                    </a:p>
-                  </a:txBody>
-                  <a:tcPr marL="82296" marR="82296" marT="64008" marB="64008">
-                    <a:solidFill>
-                      <a:srgbClr val="F1F7F7"/>
-                    </a:solidFill>
-                  </a:tcPr>
-                </a:tc>
-              </a:tr>
-            </a:tbl>
-          </a:graphicData>
-        </a:graphic>
-      </p:graphicFrame>
-      <p:graphicFrame>
-        <p:nvGraphicFramePr>
-          <p:cNvPr id="14" name="Table 13"/>
-          <p:cNvGraphicFramePr>
-            <a:graphicFrameLocks noGrp="1"/>
-          </p:cNvGraphicFramePr>
-          <p:nvPr/>
-        </p:nvGraphicFramePr>
-        <p:xfrm>
-          <a:off x="365760" y="4147312"/>
-          <a:ext cx="8412479" cy="349504"/>
-        </p:xfrm>
-        <a:graphic>
-          <a:graphicData uri="http://schemas.openxmlformats.org/drawingml/2006/table">
-            <a:tbl>
-              <a:tblPr firstRow="1" bandRow="1">
-                <a:tableStyleId>{5C22544A-7EE6-4342-B048-85BDC9FD1C3A}</a:tableStyleId>
-              </a:tblPr>
-              <a:tblGrid>
-                <a:gridCol w="2271369"/>
-                <a:gridCol w="6141110"/>
-              </a:tblGrid>
-              <a:tr h="349504">
-                <a:tc>
-                  <a:txBody>
-                    <a:bodyPr wrap="none"/>
-                    <a:lstStyle/>
-                    <a:p>
-                      <a:pPr>
-                        <a:lnSpc>
-                          <a:spcPts val="1600"/>
-                        </a:lnSpc>
-                        <a:spcAft>
-                          <a:spcPts val="0"/>
-                        </a:spcAft>
-                        <a:defRPr sz="1200" b="0">
-                          <a:solidFill>
-                            <a:srgbClr val="21243A"/>
-                          </a:solidFill>
-                          <a:latin typeface="Arial"/>
-                        </a:defRPr>
-                      </a:pPr>
-                      <a:r>
-                        <a:t>Original SHA-256</a:t>
-                      </a:r>
-                    </a:p>
-                  </a:txBody>
-                  <a:tcPr marL="82296" marR="82296" marT="64008" marB="64008">
-                    <a:solidFill>
-                      <a:srgbClr val="FFFFFF"/>
-                    </a:solidFill>
-                  </a:tcPr>
-                </a:tc>
-                <a:tc>
-                  <a:txBody>
-                    <a:bodyPr wrap="none"/>
-                    <a:lstStyle/>
-                    <a:p>
-                      <a:pPr>
-                        <a:lnSpc>
-                          <a:spcPts val="1600"/>
-                        </a:lnSpc>
-                        <a:spcAft>
-                          <a:spcPts val="0"/>
-                        </a:spcAft>
-                        <a:defRPr sz="1200" b="0">
-                          <a:solidFill>
-                            <a:srgbClr val="21243A"/>
-                          </a:solidFill>
-                          <a:latin typeface="Arial"/>
-                        </a:defRPr>
-                      </a:pPr>
-                      <a:r>
-                        <a:t>d0ec89da564078611922195fca82364f2f8e63d253d02a6d9bb672a8265c5f15</a:t>
-                      </a:r>
-                    </a:p>
-                  </a:txBody>
-                  <a:tcPr marL="82296" marR="82296" marT="64008" marB="64008">
-                    <a:solidFill>
-                      <a:srgbClr val="FFFFFF"/>
-                    </a:solidFill>
-                  </a:tcPr>
-                </a:tc>
-              </a:tr>
-            </a:tbl>
-          </a:graphicData>
-        </a:graphic>
-      </p:graphicFrame>
-      <p:graphicFrame>
-        <p:nvGraphicFramePr>
-          <p:cNvPr id="15" name="Table 14"/>
-          <p:cNvGraphicFramePr>
-            <a:graphicFrameLocks noGrp="1"/>
-          </p:cNvGraphicFramePr>
-          <p:nvPr/>
-        </p:nvGraphicFramePr>
-        <p:xfrm>
-          <a:off x="365760" y="4496816"/>
-          <a:ext cx="8412479" cy="349504"/>
-        </p:xfrm>
-        <a:graphic>
-          <a:graphicData uri="http://schemas.openxmlformats.org/drawingml/2006/table">
-            <a:tbl>
-              <a:tblPr firstRow="1" bandRow="1">
-                <a:tableStyleId>{5C22544A-7EE6-4342-B048-85BDC9FD1C3A}</a:tableStyleId>
-              </a:tblPr>
-              <a:tblGrid>
-                <a:gridCol w="2271369"/>
-                <a:gridCol w="6141110"/>
-              </a:tblGrid>
-              <a:tr h="349504">
-                <a:tc>
-                  <a:txBody>
-                    <a:bodyPr wrap="none"/>
-                    <a:lstStyle/>
-                    <a:p>
-                      <a:pPr>
-                        <a:lnSpc>
-                          <a:spcPts val="1600"/>
-                        </a:lnSpc>
-                        <a:spcAft>
-                          <a:spcPts val="0"/>
-                        </a:spcAft>
-                        <a:defRPr sz="1200" b="0">
-                          <a:solidFill>
-                            <a:srgbClr val="21243A"/>
-                          </a:solidFill>
-                          <a:latin typeface="Arial"/>
-                        </a:defRPr>
-                      </a:pPr>
-                      <a:r>
-                        <a:t>Ingestion note 1</a:t>
-                      </a:r>
-                    </a:p>
-                  </a:txBody>
-                  <a:tcPr marL="82296" marR="82296" marT="64008" marB="64008">
-                    <a:solidFill>
-                      <a:srgbClr val="F1F7F7"/>
-                    </a:solidFill>
-                  </a:tcPr>
-                </a:tc>
-                <a:tc>
-                  <a:txBody>
-                    <a:bodyPr wrap="none"/>
-                    <a:lstStyle/>
-                    <a:p>
-                      <a:pPr>
-                        <a:lnSpc>
-                          <a:spcPts val="1600"/>
-                        </a:lnSpc>
-                        <a:spcAft>
-                          <a:spcPts val="0"/>
-                        </a:spcAft>
-                        <a:defRPr sz="1200" b="0">
-                          <a:solidFill>
-                            <a:srgbClr val="21243A"/>
-                          </a:solidFill>
-                          <a:latin typeface="Arial"/>
-                        </a:defRPr>
-                      </a:pPr>
-                      <a:r>
-                        <a:t>14 slides; sampled 4 of 14 embedded slide image(s).</a:t>
-                      </a:r>
-                    </a:p>
-                  </a:txBody>
-                  <a:tcPr marL="82296" marR="82296" marT="64008" marB="64008">
-                    <a:solidFill>
-                      <a:srgbClr val="F1F7F7"/>
-                    </a:solidFill>
-                  </a:tcPr>
-                </a:tc>
-              </a:tr>
-            </a:tbl>
-          </a:graphicData>
-        </a:graphic>
-      </p:graphicFrame>
-      <p:graphicFrame>
-        <p:nvGraphicFramePr>
-          <p:cNvPr id="16" name="Table 15"/>
-          <p:cNvGraphicFramePr>
-            <a:graphicFrameLocks noGrp="1"/>
-          </p:cNvGraphicFramePr>
-          <p:nvPr/>
-        </p:nvGraphicFramePr>
-        <p:xfrm>
-          <a:off x="365760" y="4846320"/>
-          <a:ext cx="8412479" cy="552704"/>
-        </p:xfrm>
-        <a:graphic>
-          <a:graphicData uri="http://schemas.openxmlformats.org/drawingml/2006/table">
-            <a:tbl>
-              <a:tblPr firstRow="1" bandRow="1">
-                <a:tableStyleId>{5C22544A-7EE6-4342-B048-85BDC9FD1C3A}</a:tableStyleId>
-              </a:tblPr>
-              <a:tblGrid>
-                <a:gridCol w="2271369"/>
-                <a:gridCol w="6141110"/>
-              </a:tblGrid>
-              <a:tr h="552704">
-                <a:tc>
-                  <a:txBody>
-                    <a:bodyPr wrap="none"/>
-                    <a:lstStyle/>
-                    <a:p>
-                      <a:pPr>
-                        <a:lnSpc>
-                          <a:spcPts val="1600"/>
-                        </a:lnSpc>
-                        <a:spcAft>
-                          <a:spcPts val="0"/>
-                        </a:spcAft>
-                        <a:defRPr sz="1200" b="0">
-                          <a:solidFill>
-                            <a:srgbClr val="21243A"/>
-                          </a:solidFill>
-                          <a:latin typeface="Arial"/>
-                        </a:defRPr>
-                      </a:pPr>
-                      <a:r>
-                        <a:t>Ingestion note 2</a:t>
-                      </a:r>
-                    </a:p>
-                  </a:txBody>
-                  <a:tcPr marL="82296" marR="82296" marT="64008" marB="64008">
-                    <a:solidFill>
-                      <a:srgbClr val="FFFFFF"/>
-                    </a:solidFill>
-                  </a:tcPr>
-                </a:tc>
-                <a:tc>
-                  <a:txBody>
-                    <a:bodyPr wrap="none"/>
-                    <a:lstStyle/>
-                    <a:p>
-                      <a:pPr>
-                        <a:lnSpc>
-                          <a:spcPts val="1600"/>
-                        </a:lnSpc>
-                        <a:spcAft>
-                          <a:spcPts val="0"/>
-                        </a:spcAft>
-                        <a:defRPr sz="1200" b="0">
-                          <a:solidFill>
-                            <a:srgbClr val="21243A"/>
-                          </a:solidFill>
-                          <a:latin typeface="Arial"/>
-                        </a:defRPr>
-                      </a:pPr>
-                      <a:r>
-                        <a:t>Fresh provider replies acquired for eleven-examples-refresh-20260926-r1; report</a:t>
-                      </a:r>
-                    </a:p>
-                    <a:p>
-                      <a:pPr>
-                        <a:lnSpc>
-                          <a:spcPts val="1600"/>
-                        </a:lnSpc>
-                        <a:spcAft>
-                          <a:spcPts val="0"/>
-                        </a:spcAft>
-                        <a:defRPr sz="1200" b="0">
-                          <a:solidFill>
-                            <a:srgbClr val="21243A"/>
-                          </a:solidFill>
-                          <a:latin typeface="Arial"/>
-                        </a:defRPr>
-                      </a:pPr>
-                      <a:r>
-                        <a:t>assembled locally from the saved responses without further API calls.</a:t>
-                      </a:r>
-                    </a:p>
-                  </a:txBody>
-                  <a:tcPr marL="82296" marR="82296" marT="64008" marB="64008">
-                    <a:solidFill>
-                      <a:srgbClr val="FFFFFF"/>
-                    </a:solidFill>
-                  </a:tcPr>
-                </a:tc>
-              </a:tr>
-            </a:tbl>
-          </a:graphicData>
-        </a:graphic>
-      </p:graphicFrame>
-      <p:graphicFrame>
-        <p:nvGraphicFramePr>
-          <p:cNvPr id="17" name="Table 16"/>
-          <p:cNvGraphicFramePr>
-            <a:graphicFrameLocks noGrp="1"/>
-          </p:cNvGraphicFramePr>
-          <p:nvPr/>
-        </p:nvGraphicFramePr>
-        <p:xfrm>
-          <a:off x="365760" y="5399024"/>
-          <a:ext cx="8412479" cy="552704"/>
-        </p:xfrm>
-        <a:graphic>
-          <a:graphicData uri="http://schemas.openxmlformats.org/drawingml/2006/table">
-            <a:tbl>
-              <a:tblPr firstRow="1" bandRow="1">
-                <a:tableStyleId>{5C22544A-7EE6-4342-B048-85BDC9FD1C3A}</a:tableStyleId>
-              </a:tblPr>
-              <a:tblGrid>
-                <a:gridCol w="2271369"/>
-                <a:gridCol w="6141110"/>
-              </a:tblGrid>
-              <a:tr h="552704">
-                <a:tc>
-                  <a:txBody>
-                    <a:bodyPr wrap="none"/>
-                    <a:lstStyle/>
-                    <a:p>
-                      <a:pPr>
-                        <a:lnSpc>
-                          <a:spcPts val="1600"/>
-                        </a:lnSpc>
-                        <a:spcAft>
-                          <a:spcPts val="0"/>
-                        </a:spcAft>
-                        <a:defRPr sz="1200" b="0">
-                          <a:solidFill>
-                            <a:srgbClr val="21243A"/>
-                          </a:solidFill>
-                          <a:latin typeface="Arial"/>
-                        </a:defRPr>
-                      </a:pPr>
-                      <a:r>
-                        <a:t>Ingestion note 3</a:t>
-                      </a:r>
-                    </a:p>
-                  </a:txBody>
-                  <a:tcPr marL="82296" marR="82296" marT="64008" marB="64008">
-                    <a:solidFill>
-                      <a:srgbClr val="F1F7F7"/>
-                    </a:solidFill>
-                  </a:tcPr>
-                </a:tc>
-                <a:tc>
-                  <a:txBody>
-                    <a:bodyPr wrap="none"/>
-                    <a:lstStyle/>
-                    <a:p>
-                      <a:pPr>
-                        <a:lnSpc>
-                          <a:spcPts val="1600"/>
-                        </a:lnSpc>
-                        <a:spcAft>
-                          <a:spcPts val="0"/>
-                        </a:spcAft>
-                        <a:defRPr sz="1200" b="0">
-                          <a:solidFill>
-                            <a:srgbClr val="21243A"/>
-                          </a:solidFill>
-                          <a:latin typeface="Arial"/>
-                        </a:defRPr>
-                      </a:pPr>
-                      <a:r>
-                        <a:t>Provider latency values are restored from the acquisition receipts (maximum</a:t>
-                      </a:r>
-                    </a:p>
-                    <a:p>
-                      <a:pPr>
-                        <a:lnSpc>
-                          <a:spcPts val="1600"/>
-                        </a:lnSpc>
-                        <a:spcAft>
-                          <a:spcPts val="0"/>
-                        </a:spcAft>
-                        <a:defRPr sz="1200" b="0">
-                          <a:solidFill>
-                            <a:srgbClr val="21243A"/>
-                          </a:solidFill>
-                          <a:latin typeface="Arial"/>
-                        </a:defRPr>
-                      </a:pPr>
-                      <a:r>
-                        <a:t>sampled-frame latency per provider); raw replies and assessment results are</a:t>
-                      </a:r>
-                    </a:p>
-                  </a:txBody>
-                  <a:tcPr marL="82296" marR="82296" marT="64008" marB="64008">
-                    <a:solidFill>
-                      <a:srgbClr val="F1F7F7"/>
-                    </a:solidFill>
-                  </a:tcPr>
-                </a:tc>
-              </a:tr>
-            </a:tbl>
-          </a:graphicData>
-        </a:graphic>
-      </p:graphicFrame>
-    </p:spTree>
-  </p:cSld>
-  <p:clrMapOvr>
-    <a:masterClrMapping/>
-  </p:clrMapOvr>
-</p:sld>
-</file>
-
-<file path=ppt/slides/slide22.xml><?xml version="1.0" encoding="utf-8"?>
-<p:sld xmlns:a="http://schemas.openxmlformats.org/drawingml/2006/main" xmlns:p="http://schemas.openxmlformats.org/presentationml/2006/main" xmlns:r="http://schemas.openxmlformats.org/officeDocument/2006/relationships">
-  <p:cSld>
-    <p:spTree>
-      <p:nvGrpSpPr>
-        <p:cNvPr id="1" name=""/>
-        <p:cNvGrpSpPr/>
-        <p:nvPr/>
-      </p:nvGrpSpPr>
-      <p:grpSpPr/>
-      <p:sp>
-        <p:nvSpPr>
-          <p:cNvPr id="2" name="TextBox 1"/>
-          <p:cNvSpPr txBox="1"/>
-          <p:nvPr/>
-        </p:nvSpPr>
-        <p:spPr>
-          <a:xfrm>
-            <a:off x="365760" y="219456"/>
-            <a:ext cx="8412480" cy="228600"/>
-          </a:xfrm>
-          <a:prstGeom prst="rect">
-            <a:avLst/>
-          </a:prstGeom>
-          <a:noFill/>
-        </p:spPr>
-        <p:txBody>
-          <a:bodyPr wrap="square" lIns="0" rIns="0" tIns="0" bIns="0">
-            <a:spAutoFit/>
-          </a:bodyPr>
-          <a:lstStyle/>
-          <a:p>
-            <a:pPr>
-              <a:lnSpc>
-                <a:spcPct val="115000"/>
-              </a:lnSpc>
-              <a:spcAft>
-                <a:spcPts val="0"/>
-              </a:spcAft>
-              <a:defRPr sz="1100" b="1">
-                <a:solidFill>
-                  <a:srgbClr val="C5006A"/>
-                </a:solidFill>
-                <a:latin typeface="Arial"/>
-              </a:defRPr>
-            </a:pPr>
-            <a:r>
-              <a:t>SDA VISION / RESEARCH REPORT</a:t>
-            </a:r>
-          </a:p>
-        </p:txBody>
-      </p:sp>
-      <p:sp>
-        <p:nvSpPr>
-          <p:cNvPr id="3" name="TextBox 2"/>
-          <p:cNvSpPr txBox="1"/>
-          <p:nvPr/>
-        </p:nvSpPr>
-        <p:spPr>
-          <a:xfrm>
-            <a:off x="365760" y="658368"/>
-            <a:ext cx="8412480" cy="612648"/>
-          </a:xfrm>
-          <a:prstGeom prst="rect">
-            <a:avLst/>
-          </a:prstGeom>
-          <a:noFill/>
-        </p:spPr>
-        <p:txBody>
-          <a:bodyPr wrap="square" lIns="0" rIns="0" tIns="0" bIns="0">
-            <a:spAutoFit/>
-          </a:bodyPr>
-          <a:lstStyle/>
-          <a:p>
-            <a:pPr>
-              <a:lnSpc>
-                <a:spcPct val="115000"/>
-              </a:lnSpc>
-              <a:spcAft>
-                <a:spcPts val="0"/>
-              </a:spcAft>
-              <a:defRPr sz="2200" b="1">
-                <a:solidFill>
-                  <a:srgbClr val="21243A"/>
-                </a:solidFill>
-                <a:latin typeface="Arial"/>
-              </a:defRPr>
-            </a:pPr>
-            <a:r>
-              <a:t>File and analysis record (continued)</a:t>
-            </a:r>
-          </a:p>
-        </p:txBody>
-      </p:sp>
-      <p:sp>
-        <p:nvSpPr>
-          <p:cNvPr id="4" name="TextBox 3"/>
-          <p:cNvSpPr txBox="1"/>
-          <p:nvPr/>
-        </p:nvSpPr>
-        <p:spPr>
-          <a:xfrm>
-            <a:off x="365760" y="6291072"/>
-            <a:ext cx="8001000" cy="365760"/>
-          </a:xfrm>
-          <a:prstGeom prst="rect">
-            <a:avLst/>
-          </a:prstGeom>
-          <a:noFill/>
-        </p:spPr>
-        <p:txBody>
-          <a:bodyPr wrap="square" lIns="0" rIns="0" tIns="0" bIns="0">
-            <a:spAutoFit/>
-          </a:bodyPr>
-          <a:lstStyle/>
-          <a:p>
-            <a:pPr>
-              <a:lnSpc>
-                <a:spcPct val="115000"/>
-              </a:lnSpc>
-              <a:spcAft>
-                <a:spcPts val="0"/>
-              </a:spcAft>
-              <a:defRPr sz="800" b="0">
-                <a:solidFill>
-                  <a:srgbClr val="545B6D"/>
-                </a:solidFill>
-                <a:latin typeface="Arial"/>
-              </a:defRPr>
-            </a:pPr>
-            <a:r>
-              <a:t>Research assessment. Ratings are not calibrated probabilities.</a:t>
-            </a:r>
-          </a:p>
-        </p:txBody>
-      </p:sp>
-      <p:sp>
-        <p:nvSpPr>
-          <p:cNvPr id="5" name="TextBox 4"/>
-          <p:cNvSpPr txBox="1"/>
-          <p:nvPr/>
-        </p:nvSpPr>
-        <p:spPr>
-          <a:xfrm>
-            <a:off x="8394192" y="6318504"/>
-            <a:ext cx="365760" cy="228600"/>
-          </a:xfrm>
-          <a:prstGeom prst="rect">
-            <a:avLst/>
-          </a:prstGeom>
-          <a:noFill/>
-        </p:spPr>
-        <p:txBody>
-          <a:bodyPr wrap="square" lIns="0" rIns="0" tIns="0" bIns="0">
-            <a:spAutoFit/>
-          </a:bodyPr>
-          <a:lstStyle/>
-          <a:p>
-            <a:pPr>
-              <a:lnSpc>
-                <a:spcPct val="115000"/>
-              </a:lnSpc>
-              <a:spcAft>
-                <a:spcPts val="0"/>
-              </a:spcAft>
-              <a:defRPr sz="900" b="0">
-                <a:solidFill>
-                  <a:srgbClr val="545B6D"/>
-                </a:solidFill>
-                <a:latin typeface="Arial"/>
-              </a:defRPr>
-            </a:pPr>
-            <a:r>
-              <a:t>22</a:t>
             </a:r>
           </a:p>
         </p:txBody>
